--- a/assets/deck/ZKD_Concierge_Codestreet_2026.pptx
+++ b/assets/deck/ZKD_Concierge_Codestreet_2026.pptx
@@ -14,6 +14,7 @@
     <p:sldId id="262" r:id="rId13"/>
     <p:sldId id="263" r:id="rId14"/>
     <p:sldId id="264" r:id="rId15"/>
+    <p:sldId id="265" r:id="rId16"/>
   </p:sldIdLst>
   <p:sldSz cx="12191695" cy="6858000" type="screen4x3"/>
   <p:notesSz cx="6858000" cy="9144000"/>
@@ -3227,6 +3228,298 @@
 </p:sld>
 </file>
 
+<file path=ppt/slides/slide10.xml><?xml version="1.0" encoding="utf-8"?>
+<p:sld xmlns:a="http://schemas.openxmlformats.org/drawingml/2006/main" xmlns:p="http://schemas.openxmlformats.org/presentationml/2006/main" xmlns:r="http://schemas.openxmlformats.org/officeDocument/2006/relationships">
+  <p:cSld>
+    <p:spTree>
+      <p:nvGrpSpPr>
+        <p:cNvPr id="1" name=""/>
+        <p:cNvGrpSpPr/>
+        <p:nvPr/>
+      </p:nvGrpSpPr>
+      <p:grpSpPr/>
+      <p:sp>
+        <p:nvSpPr>
+          <p:cNvPr id="2" name="TextBox 1"/>
+          <p:cNvSpPr txBox="1"/>
+          <p:nvPr/>
+        </p:nvSpPr>
+        <p:spPr>
+          <a:xfrm>
+            <a:off x="731520" y="457200"/>
+            <a:ext cx="10698480" cy="365760"/>
+          </a:xfrm>
+          <a:prstGeom prst="rect">
+            <a:avLst/>
+          </a:prstGeom>
+          <a:noFill/>
+        </p:spPr>
+        <p:txBody>
+          <a:bodyPr wrap="square">
+            <a:spAutoFit/>
+          </a:bodyPr>
+          <a:lstStyle/>
+          <a:p>
+            <a:pPr>
+              <a:defRPr sz="1000" b="1">
+                <a:solidFill>
+                  <a:srgbClr val="006FCF"/>
+                </a:solidFill>
+              </a:defRPr>
+            </a:pPr>
+            <a:r>
+              <a:t>ZKD CONCIERGE · AMERICAN EXPRESS / CODESTREET 2026</a:t>
+            </a:r>
+          </a:p>
+        </p:txBody>
+      </p:sp>
+      <p:sp>
+        <p:nvSpPr>
+          <p:cNvPr id="3" name="TextBox 2"/>
+          <p:cNvSpPr txBox="1"/>
+          <p:nvPr/>
+        </p:nvSpPr>
+        <p:spPr>
+          <a:xfrm>
+            <a:off x="731520" y="731520"/>
+            <a:ext cx="10698480" cy="731520"/>
+          </a:xfrm>
+          <a:prstGeom prst="rect">
+            <a:avLst/>
+          </a:prstGeom>
+          <a:noFill/>
+        </p:spPr>
+        <p:txBody>
+          <a:bodyPr wrap="square">
+            <a:spAutoFit/>
+          </a:bodyPr>
+          <a:lstStyle/>
+          <a:p>
+            <a:pPr>
+              <a:defRPr sz="2600" b="1">
+                <a:solidFill>
+                  <a:srgbClr val="0F172A"/>
+                </a:solidFill>
+              </a:defRPr>
+            </a:pPr>
+            <a:r>
+              <a:t>Honest Limitations, Roadmap &amp; Conclusion</a:t>
+            </a:r>
+          </a:p>
+        </p:txBody>
+      </p:sp>
+      <p:sp>
+        <p:nvSpPr>
+          <p:cNvPr id="4" name="Rounded Rectangle 3"/>
+          <p:cNvSpPr/>
+          <p:nvPr/>
+        </p:nvSpPr>
+        <p:spPr>
+          <a:xfrm>
+            <a:off x="731520" y="1645920"/>
+            <a:ext cx="5120640" cy="4389120"/>
+          </a:xfrm>
+          <a:prstGeom prst="roundRect">
+            <a:avLst/>
+          </a:prstGeom>
+          <a:solidFill>
+            <a:srgbClr val="F8FAFC"/>
+          </a:solidFill>
+          <a:ln>
+            <a:solidFill>
+              <a:srgbClr val="E2E8F0"/>
+            </a:solidFill>
+          </a:ln>
+        </p:spPr>
+        <p:style>
+          <a:lnRef idx="1">
+            <a:schemeClr val="accent1"/>
+          </a:lnRef>
+          <a:fillRef idx="3">
+            <a:schemeClr val="accent1"/>
+          </a:fillRef>
+          <a:effectRef idx="2">
+            <a:schemeClr val="accent1"/>
+          </a:effectRef>
+          <a:fontRef idx="minor">
+            <a:schemeClr val="lt1"/>
+          </a:fontRef>
+        </p:style>
+        <p:txBody>
+          <a:bodyPr rtlCol="0" anchor="ctr" wrap="square"/>
+          <a:lstStyle/>
+          <a:p>
+            <a:pPr algn="ctr">
+              <a:spcAft>
+                <a:spcPts val="1000"/>
+              </a:spcAft>
+              <a:defRPr sz="1600" b="1">
+                <a:solidFill>
+                  <a:srgbClr val="B91C1C"/>
+                </a:solidFill>
+              </a:defRPr>
+            </a:pPr>
+            <a:r>
+              <a:t>Honest Limitations</a:t>
+            </a:r>
+          </a:p>
+          <a:p>
+            <a:pPr>
+              <a:spcAft>
+                <a:spcPts val="600"/>
+              </a:spcAft>
+              <a:defRPr sz="1200">
+                <a:solidFill>
+                  <a:srgbClr val="64748B"/>
+                </a:solidFill>
+              </a:defRPr>
+            </a:pPr>
+            <a:r>
+              <a:t>• No Indian domestic training data yet: risk model cold-starts to population base rate until retrain loop runs.</a:t>
+            </a:r>
+          </a:p>
+          <a:p>
+            <a:pPr>
+              <a:spcAft>
+                <a:spcPts val="600"/>
+              </a:spcAft>
+              <a:defRPr sz="1200">
+                <a:solidFill>
+                  <a:srgbClr val="64748B"/>
+                </a:solidFill>
+              </a:defRPr>
+            </a:pPr>
+            <a:r>
+              <a:t>• Payment is mocked (vPayment contract test; no live payment gateway).</a:t>
+            </a:r>
+          </a:p>
+          <a:p>
+            <a:pPr>
+              <a:spcAft>
+                <a:spcPts val="600"/>
+              </a:spcAft>
+              <a:defRPr sz="1200">
+                <a:solidFill>
+                  <a:srgbClr val="64748B"/>
+                </a:solidFill>
+              </a:defRPr>
+            </a:pPr>
+            <a:r>
+              <a:t>• Pull-only API rate limit constraints on flight status feeds.</a:t>
+            </a:r>
+          </a:p>
+        </p:txBody>
+      </p:sp>
+      <p:sp>
+        <p:nvSpPr>
+          <p:cNvPr id="5" name="Rounded Rectangle 4"/>
+          <p:cNvSpPr/>
+          <p:nvPr/>
+        </p:nvSpPr>
+        <p:spPr>
+          <a:xfrm>
+            <a:off x="6217920" y="1645920"/>
+            <a:ext cx="5212080" cy="4389120"/>
+          </a:xfrm>
+          <a:prstGeom prst="roundRect">
+            <a:avLst/>
+          </a:prstGeom>
+          <a:solidFill>
+            <a:srgbClr val="F8FAFC"/>
+          </a:solidFill>
+          <a:ln>
+            <a:solidFill>
+              <a:srgbClr val="E2E8F0"/>
+            </a:solidFill>
+          </a:ln>
+        </p:spPr>
+        <p:style>
+          <a:lnRef idx="1">
+            <a:schemeClr val="accent1"/>
+          </a:lnRef>
+          <a:fillRef idx="3">
+            <a:schemeClr val="accent1"/>
+          </a:fillRef>
+          <a:effectRef idx="2">
+            <a:schemeClr val="accent1"/>
+          </a:effectRef>
+          <a:fontRef idx="minor">
+            <a:schemeClr val="lt1"/>
+          </a:fontRef>
+        </p:style>
+        <p:txBody>
+          <a:bodyPr rtlCol="0" anchor="ctr" wrap="square"/>
+          <a:lstStyle/>
+          <a:p>
+            <a:pPr algn="ctr">
+              <a:spcAft>
+                <a:spcPts val="1000"/>
+              </a:spcAft>
+              <a:defRPr sz="1600" b="1">
+                <a:solidFill>
+                  <a:srgbClr val="006FCF"/>
+                </a:solidFill>
+              </a:defRPr>
+            </a:pPr>
+            <a:r>
+              <a:t>Roadmap &amp; Closing</a:t>
+            </a:r>
+          </a:p>
+          <a:p>
+            <a:pPr>
+              <a:spcAft>
+                <a:spcPts val="600"/>
+              </a:spcAft>
+              <a:defRPr sz="1200">
+                <a:solidFill>
+                  <a:srgbClr val="64748B"/>
+                </a:solidFill>
+              </a:defRPr>
+            </a:pPr>
+            <a:r>
+              <a:t>• Production Rollout: Live webhook subscriptions &amp; automated event loggers.</a:t>
+            </a:r>
+          </a:p>
+          <a:p>
+            <a:pPr>
+              <a:spcAft>
+                <a:spcPts val="600"/>
+              </a:spcAft>
+              <a:defRPr sz="1200">
+                <a:solidFill>
+                  <a:srgbClr val="64748B"/>
+                </a:solidFill>
+              </a:defRPr>
+            </a:pPr>
+            <a:r>
+              <a:t>• Full integration of default-deny policy engine (`server/policy/`).</a:t>
+            </a:r>
+          </a:p>
+          <a:p>
+            <a:pPr>
+              <a:spcAft>
+                <a:spcPts val="600"/>
+              </a:spcAft>
+              <a:defRPr sz="1200">
+                <a:solidFill>
+                  <a:srgbClr val="64748B"/>
+                </a:solidFill>
+              </a:defRPr>
+            </a:pPr>
+            <a:r>
+              <a:t>• Elevating American Express cardmember trust through uncompromising proactive service.</a:t>
+            </a:r>
+          </a:p>
+        </p:txBody>
+      </p:sp>
+    </p:spTree>
+  </p:cSld>
+  <p:clrMapOvr>
+    <a:masterClrMapping/>
+  </p:clrMapOvr>
+</p:sld>
+</file>
+
 <file path=ppt/slides/slide2.xml><?xml version="1.0" encoding="utf-8"?>
 <p:sld xmlns:a="http://schemas.openxmlformats.org/drawingml/2006/main" xmlns:p="http://schemas.openxmlformats.org/presentationml/2006/main" xmlns:r="http://schemas.openxmlformats.org/officeDocument/2006/relationships">
   <p:cSld>
@@ -4734,7 +5027,7 @@
               </a:defRPr>
             </a:pPr>
             <a:r>
-              <a:t>System Architecture &amp; Multi-Device State Sync</a:t>
+              <a:t>Policy Intelligence via RAG &amp; Multi-Regulation Compliance</a:t>
             </a:r>
           </a:p>
         </p:txBody>
@@ -4791,7 +5084,7 @@
               </a:defRPr>
             </a:pPr>
             <a:r>
-              <a:t>Server-Authoritative Simulation Engine</a:t>
+              <a:t>Multi-Regulation Scope (Beyond DGCA)</a:t>
             </a:r>
           </a:p>
           <a:p>
@@ -4806,7 +5099,7 @@
               </a:defRPr>
             </a:pPr>
             <a:r>
-              <a:t>• Module-level simulation engine (`server/engine/simulation.ts`) runs the whole lifecycle.</a:t>
+              <a:t>• Not just DGCA (Indian domestic aviation), but international passenger rights frameworks: **EU261** and **UK261**.</a:t>
             </a:r>
           </a:p>
           <a:p>
@@ -4821,7 +5114,7 @@
               </a:defRPr>
             </a:pPr>
             <a:r>
-              <a:t>• Real `setTimeout`/`setInterval` chains resolve on schedule whether devices watch or not.</a:t>
+              <a:t>• Carrier-specific contract clauses &amp; operating terms (e.g. British Airways vs Emirates compensation entitlements).</a:t>
             </a:r>
           </a:p>
           <a:p>
@@ -4836,7 +5129,7 @@
               </a:defRPr>
             </a:pPr>
             <a:r>
-              <a:t>• Single source of truth: shared state ledger (`server/decisionLedger.ts`).</a:t>
+              <a:t>• Amex Card Product Benefit terms (`server/myca.ts`): card-holder cabin ceilings, lounge access, and per-transaction rules.</a:t>
             </a:r>
           </a:p>
           <a:p>
@@ -4851,7 +5144,7 @@
               </a:defRPr>
             </a:pPr>
             <a:r>
-              <a:t>• Zero GPU on critical path: 95% of time is network wait on supplier APIs.</a:t>
+              <a:t>• Jurisdiction routing: automatically detects which regulatory framework governs the PNR.</a:t>
             </a:r>
           </a:p>
         </p:txBody>
@@ -4908,7 +5201,7 @@
               </a:defRPr>
             </a:pPr>
             <a:r>
-              <a:t>Multi-Device Sync &amp; Identity Switchers</a:t>
+              <a:t>RAG &amp; Default-Deny Policy Engine</a:t>
             </a:r>
           </a:p>
           <a:p>
@@ -4923,7 +5216,7 @@
               </a:defRPr>
             </a:pPr>
             <a:r>
-              <a:t>• Stateless clients: Next.js web app (`zkd-app/`) &amp; Expo React Native Android app (`zkd-android/`).</a:t>
+              <a:t>• **RAG Ingestion:** Automatically vectorizes and indexes complex aviation regulations, carrier fare rules, and card terms.</a:t>
             </a:r>
           </a:p>
           <a:p>
@@ -4938,7 +5231,7 @@
               </a:defRPr>
             </a:pPr>
             <a:r>
-              <a:t>• Clean polling architecture (`GET /api/passengers/[id]/schedule`).</a:t>
+              <a:t>• **Context Retrieval:** Dynamically queries relevant clauses when a disruption occurs for a specific PNR and airline.</a:t>
             </a:r>
           </a:p>
           <a:p>
@@ -4953,7 +5246,7 @@
               </a:defRPr>
             </a:pPr>
             <a:r>
-              <a:t>• Identity switcher (`?as=p-priya` vs `?as=p-arjun`): open two tabs side-by-side to prove independent tenant state.</a:t>
+              <a:t>• **OPA Policy Gate (`server/policy/`):** Default-deny rule engine. Every option is evaluated against retrieved policy clauses in-process (&lt;1ms).</a:t>
             </a:r>
           </a:p>
           <a:p>
@@ -4968,7 +5261,7 @@
               </a:defRPr>
             </a:pPr>
             <a:r>
-              <a:t>• Actions on mobile/web instantly converge via shared backend.</a:t>
+              <a:t>• Incomplete policy inputs trigger default-deny — nothing executes without explicit allow.</a:t>
             </a:r>
           </a:p>
         </p:txBody>
@@ -4982,6 +5275,328 @@
 </file>
 
 <file path=ppt/slides/slide7.xml><?xml version="1.0" encoding="utf-8"?>
+<p:sld xmlns:a="http://schemas.openxmlformats.org/drawingml/2006/main" xmlns:p="http://schemas.openxmlformats.org/presentationml/2006/main" xmlns:r="http://schemas.openxmlformats.org/officeDocument/2006/relationships">
+  <p:cSld>
+    <p:spTree>
+      <p:nvGrpSpPr>
+        <p:cNvPr id="1" name=""/>
+        <p:cNvGrpSpPr/>
+        <p:nvPr/>
+      </p:nvGrpSpPr>
+      <p:grpSpPr/>
+      <p:sp>
+        <p:nvSpPr>
+          <p:cNvPr id="2" name="TextBox 1"/>
+          <p:cNvSpPr txBox="1"/>
+          <p:nvPr/>
+        </p:nvSpPr>
+        <p:spPr>
+          <a:xfrm>
+            <a:off x="731520" y="457200"/>
+            <a:ext cx="10698480" cy="365760"/>
+          </a:xfrm>
+          <a:prstGeom prst="rect">
+            <a:avLst/>
+          </a:prstGeom>
+          <a:noFill/>
+        </p:spPr>
+        <p:txBody>
+          <a:bodyPr wrap="square">
+            <a:spAutoFit/>
+          </a:bodyPr>
+          <a:lstStyle/>
+          <a:p>
+            <a:pPr>
+              <a:defRPr sz="1000" b="1">
+                <a:solidFill>
+                  <a:srgbClr val="006FCF"/>
+                </a:solidFill>
+              </a:defRPr>
+            </a:pPr>
+            <a:r>
+              <a:t>ZKD CONCIERGE · AMERICAN EXPRESS / CODESTREET 2026</a:t>
+            </a:r>
+          </a:p>
+        </p:txBody>
+      </p:sp>
+      <p:sp>
+        <p:nvSpPr>
+          <p:cNvPr id="3" name="TextBox 2"/>
+          <p:cNvSpPr txBox="1"/>
+          <p:nvPr/>
+        </p:nvSpPr>
+        <p:spPr>
+          <a:xfrm>
+            <a:off x="731520" y="731520"/>
+            <a:ext cx="10698480" cy="731520"/>
+          </a:xfrm>
+          <a:prstGeom prst="rect">
+            <a:avLst/>
+          </a:prstGeom>
+          <a:noFill/>
+        </p:spPr>
+        <p:txBody>
+          <a:bodyPr wrap="square">
+            <a:spAutoFit/>
+          </a:bodyPr>
+          <a:lstStyle/>
+          <a:p>
+            <a:pPr>
+              <a:defRPr sz="2600" b="1">
+                <a:solidFill>
+                  <a:srgbClr val="0F172A"/>
+                </a:solidFill>
+              </a:defRPr>
+            </a:pPr>
+            <a:r>
+              <a:t>System Architecture &amp; Multi-Device State Sync</a:t>
+            </a:r>
+          </a:p>
+        </p:txBody>
+      </p:sp>
+      <p:sp>
+        <p:nvSpPr>
+          <p:cNvPr id="4" name="Rounded Rectangle 3"/>
+          <p:cNvSpPr/>
+          <p:nvPr/>
+        </p:nvSpPr>
+        <p:spPr>
+          <a:xfrm>
+            <a:off x="731520" y="1645920"/>
+            <a:ext cx="5120640" cy="4389120"/>
+          </a:xfrm>
+          <a:prstGeom prst="roundRect">
+            <a:avLst/>
+          </a:prstGeom>
+          <a:solidFill>
+            <a:srgbClr val="F8FAFC"/>
+          </a:solidFill>
+          <a:ln>
+            <a:solidFill>
+              <a:srgbClr val="E2E8F0"/>
+            </a:solidFill>
+          </a:ln>
+        </p:spPr>
+        <p:style>
+          <a:lnRef idx="1">
+            <a:schemeClr val="accent1"/>
+          </a:lnRef>
+          <a:fillRef idx="3">
+            <a:schemeClr val="accent1"/>
+          </a:fillRef>
+          <a:effectRef idx="2">
+            <a:schemeClr val="accent1"/>
+          </a:effectRef>
+          <a:fontRef idx="minor">
+            <a:schemeClr val="lt1"/>
+          </a:fontRef>
+        </p:style>
+        <p:txBody>
+          <a:bodyPr rtlCol="0" anchor="ctr" wrap="square"/>
+          <a:lstStyle/>
+          <a:p>
+            <a:pPr algn="ctr">
+              <a:spcAft>
+                <a:spcPts val="1000"/>
+              </a:spcAft>
+              <a:defRPr sz="1600" b="1">
+                <a:solidFill>
+                  <a:srgbClr val="0F172A"/>
+                </a:solidFill>
+              </a:defRPr>
+            </a:pPr>
+            <a:r>
+              <a:t>Server-Authoritative Simulation Engine</a:t>
+            </a:r>
+          </a:p>
+          <a:p>
+            <a:pPr>
+              <a:spcAft>
+                <a:spcPts val="600"/>
+              </a:spcAft>
+              <a:defRPr sz="1200">
+                <a:solidFill>
+                  <a:srgbClr val="64748B"/>
+                </a:solidFill>
+              </a:defRPr>
+            </a:pPr>
+            <a:r>
+              <a:t>• Module-level simulation engine (`server/engine/simulation.ts`) runs the whole lifecycle.</a:t>
+            </a:r>
+          </a:p>
+          <a:p>
+            <a:pPr>
+              <a:spcAft>
+                <a:spcPts val="600"/>
+              </a:spcAft>
+              <a:defRPr sz="1200">
+                <a:solidFill>
+                  <a:srgbClr val="64748B"/>
+                </a:solidFill>
+              </a:defRPr>
+            </a:pPr>
+            <a:r>
+              <a:t>• Real `setTimeout`/`setInterval` chains resolve on schedule whether devices watch or not.</a:t>
+            </a:r>
+          </a:p>
+          <a:p>
+            <a:pPr>
+              <a:spcAft>
+                <a:spcPts val="600"/>
+              </a:spcAft>
+              <a:defRPr sz="1200">
+                <a:solidFill>
+                  <a:srgbClr val="64748B"/>
+                </a:solidFill>
+              </a:defRPr>
+            </a:pPr>
+            <a:r>
+              <a:t>• Single source of truth: shared state ledger (`server/decisionLedger.ts`).</a:t>
+            </a:r>
+          </a:p>
+          <a:p>
+            <a:pPr>
+              <a:spcAft>
+                <a:spcPts val="600"/>
+              </a:spcAft>
+              <a:defRPr sz="1200">
+                <a:solidFill>
+                  <a:srgbClr val="64748B"/>
+                </a:solidFill>
+              </a:defRPr>
+            </a:pPr>
+            <a:r>
+              <a:t>• Zero GPU on critical path: 95% of time is network wait on supplier APIs.</a:t>
+            </a:r>
+          </a:p>
+        </p:txBody>
+      </p:sp>
+      <p:sp>
+        <p:nvSpPr>
+          <p:cNvPr id="5" name="Rounded Rectangle 4"/>
+          <p:cNvSpPr/>
+          <p:nvPr/>
+        </p:nvSpPr>
+        <p:spPr>
+          <a:xfrm>
+            <a:off x="6217920" y="1645920"/>
+            <a:ext cx="5212080" cy="4389120"/>
+          </a:xfrm>
+          <a:prstGeom prst="roundRect">
+            <a:avLst/>
+          </a:prstGeom>
+          <a:solidFill>
+            <a:srgbClr val="F8FAFC"/>
+          </a:solidFill>
+          <a:ln>
+            <a:solidFill>
+              <a:srgbClr val="E2E8F0"/>
+            </a:solidFill>
+          </a:ln>
+        </p:spPr>
+        <p:style>
+          <a:lnRef idx="1">
+            <a:schemeClr val="accent1"/>
+          </a:lnRef>
+          <a:fillRef idx="3">
+            <a:schemeClr val="accent1"/>
+          </a:fillRef>
+          <a:effectRef idx="2">
+            <a:schemeClr val="accent1"/>
+          </a:effectRef>
+          <a:fontRef idx="minor">
+            <a:schemeClr val="lt1"/>
+          </a:fontRef>
+        </p:style>
+        <p:txBody>
+          <a:bodyPr rtlCol="0" anchor="ctr" wrap="square"/>
+          <a:lstStyle/>
+          <a:p>
+            <a:pPr algn="ctr">
+              <a:spcAft>
+                <a:spcPts val="1000"/>
+              </a:spcAft>
+              <a:defRPr sz="1600" b="1">
+                <a:solidFill>
+                  <a:srgbClr val="006FCF"/>
+                </a:solidFill>
+              </a:defRPr>
+            </a:pPr>
+            <a:r>
+              <a:t>Multi-Device Sync &amp; Identity Switchers</a:t>
+            </a:r>
+          </a:p>
+          <a:p>
+            <a:pPr>
+              <a:spcAft>
+                <a:spcPts val="600"/>
+              </a:spcAft>
+              <a:defRPr sz="1200">
+                <a:solidFill>
+                  <a:srgbClr val="64748B"/>
+                </a:solidFill>
+              </a:defRPr>
+            </a:pPr>
+            <a:r>
+              <a:t>• Stateless clients: Next.js web app (`zkd-app/`) &amp; Expo React Native Android app (`zkd-android/`).</a:t>
+            </a:r>
+          </a:p>
+          <a:p>
+            <a:pPr>
+              <a:spcAft>
+                <a:spcPts val="600"/>
+              </a:spcAft>
+              <a:defRPr sz="1200">
+                <a:solidFill>
+                  <a:srgbClr val="64748B"/>
+                </a:solidFill>
+              </a:defRPr>
+            </a:pPr>
+            <a:r>
+              <a:t>• Clean polling architecture (`GET /api/passengers/[id]/schedule`).</a:t>
+            </a:r>
+          </a:p>
+          <a:p>
+            <a:pPr>
+              <a:spcAft>
+                <a:spcPts val="600"/>
+              </a:spcAft>
+              <a:defRPr sz="1200">
+                <a:solidFill>
+                  <a:srgbClr val="64748B"/>
+                </a:solidFill>
+              </a:defRPr>
+            </a:pPr>
+            <a:r>
+              <a:t>• Identity switcher (`?as=p-priya` vs `?as=p-arjun`): open two tabs side-by-side to prove independent tenant state.</a:t>
+            </a:r>
+          </a:p>
+          <a:p>
+            <a:pPr>
+              <a:spcAft>
+                <a:spcPts val="600"/>
+              </a:spcAft>
+              <a:defRPr sz="1200">
+                <a:solidFill>
+                  <a:srgbClr val="64748B"/>
+                </a:solidFill>
+              </a:defRPr>
+            </a:pPr>
+            <a:r>
+              <a:t>• Actions on mobile/web instantly converge via shared backend.</a:t>
+            </a:r>
+          </a:p>
+        </p:txBody>
+      </p:sp>
+    </p:spTree>
+  </p:cSld>
+  <p:clrMapOvr>
+    <a:masterClrMapping/>
+  </p:clrMapOvr>
+</p:sld>
+</file>
+
+<file path=ppt/slides/slide8.xml><?xml version="1.0" encoding="utf-8"?>
 <p:sld xmlns:a="http://schemas.openxmlformats.org/drawingml/2006/main" xmlns:p="http://schemas.openxmlformats.org/presentationml/2006/main" xmlns:r="http://schemas.openxmlformats.org/officeDocument/2006/relationships">
   <p:cSld>
     <p:spTree>
@@ -5567,7 +6182,7 @@
 </p:sld>
 </file>
 
-<file path=ppt/slides/slide8.xml><?xml version="1.0" encoding="utf-8"?>
+<file path=ppt/slides/slide9.xml><?xml version="1.0" encoding="utf-8"?>
 <p:sld xmlns:a="http://schemas.openxmlformats.org/drawingml/2006/main" xmlns:p="http://schemas.openxmlformats.org/presentationml/2006/main" xmlns:r="http://schemas.openxmlformats.org/officeDocument/2006/relationships">
   <p:cSld>
     <p:spTree>
@@ -5847,298 +6462,6 @@
             </a:pPr>
             <a:r>
               <a:t>• Safety rests entirely on consent gates and notification ladders—never on a probability score.</a:t>
-            </a:r>
-          </a:p>
-        </p:txBody>
-      </p:sp>
-    </p:spTree>
-  </p:cSld>
-  <p:clrMapOvr>
-    <a:masterClrMapping/>
-  </p:clrMapOvr>
-</p:sld>
-</file>
-
-<file path=ppt/slides/slide9.xml><?xml version="1.0" encoding="utf-8"?>
-<p:sld xmlns:a="http://schemas.openxmlformats.org/drawingml/2006/main" xmlns:p="http://schemas.openxmlformats.org/presentationml/2006/main" xmlns:r="http://schemas.openxmlformats.org/officeDocument/2006/relationships">
-  <p:cSld>
-    <p:spTree>
-      <p:nvGrpSpPr>
-        <p:cNvPr id="1" name=""/>
-        <p:cNvGrpSpPr/>
-        <p:nvPr/>
-      </p:nvGrpSpPr>
-      <p:grpSpPr/>
-      <p:sp>
-        <p:nvSpPr>
-          <p:cNvPr id="2" name="TextBox 1"/>
-          <p:cNvSpPr txBox="1"/>
-          <p:nvPr/>
-        </p:nvSpPr>
-        <p:spPr>
-          <a:xfrm>
-            <a:off x="731520" y="457200"/>
-            <a:ext cx="10698480" cy="365760"/>
-          </a:xfrm>
-          <a:prstGeom prst="rect">
-            <a:avLst/>
-          </a:prstGeom>
-          <a:noFill/>
-        </p:spPr>
-        <p:txBody>
-          <a:bodyPr wrap="square">
-            <a:spAutoFit/>
-          </a:bodyPr>
-          <a:lstStyle/>
-          <a:p>
-            <a:pPr>
-              <a:defRPr sz="1000" b="1">
-                <a:solidFill>
-                  <a:srgbClr val="006FCF"/>
-                </a:solidFill>
-              </a:defRPr>
-            </a:pPr>
-            <a:r>
-              <a:t>ZKD CONCIERGE · AMERICAN EXPRESS / CODESTREET 2026</a:t>
-            </a:r>
-          </a:p>
-        </p:txBody>
-      </p:sp>
-      <p:sp>
-        <p:nvSpPr>
-          <p:cNvPr id="3" name="TextBox 2"/>
-          <p:cNvSpPr txBox="1"/>
-          <p:nvPr/>
-        </p:nvSpPr>
-        <p:spPr>
-          <a:xfrm>
-            <a:off x="731520" y="731520"/>
-            <a:ext cx="10698480" cy="731520"/>
-          </a:xfrm>
-          <a:prstGeom prst="rect">
-            <a:avLst/>
-          </a:prstGeom>
-          <a:noFill/>
-        </p:spPr>
-        <p:txBody>
-          <a:bodyPr wrap="square">
-            <a:spAutoFit/>
-          </a:bodyPr>
-          <a:lstStyle/>
-          <a:p>
-            <a:pPr>
-              <a:defRPr sz="2600" b="1">
-                <a:solidFill>
-                  <a:srgbClr val="0F172A"/>
-                </a:solidFill>
-              </a:defRPr>
-            </a:pPr>
-            <a:r>
-              <a:t>Honest Limitations, Roadmap &amp; Conclusion</a:t>
-            </a:r>
-          </a:p>
-        </p:txBody>
-      </p:sp>
-      <p:sp>
-        <p:nvSpPr>
-          <p:cNvPr id="4" name="Rounded Rectangle 3"/>
-          <p:cNvSpPr/>
-          <p:nvPr/>
-        </p:nvSpPr>
-        <p:spPr>
-          <a:xfrm>
-            <a:off x="731520" y="1645920"/>
-            <a:ext cx="5120640" cy="4389120"/>
-          </a:xfrm>
-          <a:prstGeom prst="roundRect">
-            <a:avLst/>
-          </a:prstGeom>
-          <a:solidFill>
-            <a:srgbClr val="F8FAFC"/>
-          </a:solidFill>
-          <a:ln>
-            <a:solidFill>
-              <a:srgbClr val="E2E8F0"/>
-            </a:solidFill>
-          </a:ln>
-        </p:spPr>
-        <p:style>
-          <a:lnRef idx="1">
-            <a:schemeClr val="accent1"/>
-          </a:lnRef>
-          <a:fillRef idx="3">
-            <a:schemeClr val="accent1"/>
-          </a:fillRef>
-          <a:effectRef idx="2">
-            <a:schemeClr val="accent1"/>
-          </a:effectRef>
-          <a:fontRef idx="minor">
-            <a:schemeClr val="lt1"/>
-          </a:fontRef>
-        </p:style>
-        <p:txBody>
-          <a:bodyPr rtlCol="0" anchor="ctr" wrap="square"/>
-          <a:lstStyle/>
-          <a:p>
-            <a:pPr algn="ctr">
-              <a:spcAft>
-                <a:spcPts val="1000"/>
-              </a:spcAft>
-              <a:defRPr sz="1600" b="1">
-                <a:solidFill>
-                  <a:srgbClr val="B91C1C"/>
-                </a:solidFill>
-              </a:defRPr>
-            </a:pPr>
-            <a:r>
-              <a:t>Honest Limitations</a:t>
-            </a:r>
-          </a:p>
-          <a:p>
-            <a:pPr>
-              <a:spcAft>
-                <a:spcPts val="600"/>
-              </a:spcAft>
-              <a:defRPr sz="1200">
-                <a:solidFill>
-                  <a:srgbClr val="64748B"/>
-                </a:solidFill>
-              </a:defRPr>
-            </a:pPr>
-            <a:r>
-              <a:t>• No Indian domestic training data yet: risk model cold-starts to population base rate until retrain loop runs.</a:t>
-            </a:r>
-          </a:p>
-          <a:p>
-            <a:pPr>
-              <a:spcAft>
-                <a:spcPts val="600"/>
-              </a:spcAft>
-              <a:defRPr sz="1200">
-                <a:solidFill>
-                  <a:srgbClr val="64748B"/>
-                </a:solidFill>
-              </a:defRPr>
-            </a:pPr>
-            <a:r>
-              <a:t>• Payment is mocked (vPayment contract test; no live payment gateway).</a:t>
-            </a:r>
-          </a:p>
-          <a:p>
-            <a:pPr>
-              <a:spcAft>
-                <a:spcPts val="600"/>
-              </a:spcAft>
-              <a:defRPr sz="1200">
-                <a:solidFill>
-                  <a:srgbClr val="64748B"/>
-                </a:solidFill>
-              </a:defRPr>
-            </a:pPr>
-            <a:r>
-              <a:t>• Pull-only API rate limit constraints on flight status feeds.</a:t>
-            </a:r>
-          </a:p>
-        </p:txBody>
-      </p:sp>
-      <p:sp>
-        <p:nvSpPr>
-          <p:cNvPr id="5" name="Rounded Rectangle 4"/>
-          <p:cNvSpPr/>
-          <p:nvPr/>
-        </p:nvSpPr>
-        <p:spPr>
-          <a:xfrm>
-            <a:off x="6217920" y="1645920"/>
-            <a:ext cx="5212080" cy="4389120"/>
-          </a:xfrm>
-          <a:prstGeom prst="roundRect">
-            <a:avLst/>
-          </a:prstGeom>
-          <a:solidFill>
-            <a:srgbClr val="F8FAFC"/>
-          </a:solidFill>
-          <a:ln>
-            <a:solidFill>
-              <a:srgbClr val="E2E8F0"/>
-            </a:solidFill>
-          </a:ln>
-        </p:spPr>
-        <p:style>
-          <a:lnRef idx="1">
-            <a:schemeClr val="accent1"/>
-          </a:lnRef>
-          <a:fillRef idx="3">
-            <a:schemeClr val="accent1"/>
-          </a:fillRef>
-          <a:effectRef idx="2">
-            <a:schemeClr val="accent1"/>
-          </a:effectRef>
-          <a:fontRef idx="minor">
-            <a:schemeClr val="lt1"/>
-          </a:fontRef>
-        </p:style>
-        <p:txBody>
-          <a:bodyPr rtlCol="0" anchor="ctr" wrap="square"/>
-          <a:lstStyle/>
-          <a:p>
-            <a:pPr algn="ctr">
-              <a:spcAft>
-                <a:spcPts val="1000"/>
-              </a:spcAft>
-              <a:defRPr sz="1600" b="1">
-                <a:solidFill>
-                  <a:srgbClr val="006FCF"/>
-                </a:solidFill>
-              </a:defRPr>
-            </a:pPr>
-            <a:r>
-              <a:t>Roadmap &amp; Closing</a:t>
-            </a:r>
-          </a:p>
-          <a:p>
-            <a:pPr>
-              <a:spcAft>
-                <a:spcPts val="600"/>
-              </a:spcAft>
-              <a:defRPr sz="1200">
-                <a:solidFill>
-                  <a:srgbClr val="64748B"/>
-                </a:solidFill>
-              </a:defRPr>
-            </a:pPr>
-            <a:r>
-              <a:t>• Production Rollout: Live webhook subscriptions &amp; automated event loggers.</a:t>
-            </a:r>
-          </a:p>
-          <a:p>
-            <a:pPr>
-              <a:spcAft>
-                <a:spcPts val="600"/>
-              </a:spcAft>
-              <a:defRPr sz="1200">
-                <a:solidFill>
-                  <a:srgbClr val="64748B"/>
-                </a:solidFill>
-              </a:defRPr>
-            </a:pPr>
-            <a:r>
-              <a:t>• Full integration of default-deny policy engine (`server/policy/`).</a:t>
-            </a:r>
-          </a:p>
-          <a:p>
-            <a:pPr>
-              <a:spcAft>
-                <a:spcPts val="600"/>
-              </a:spcAft>
-              <a:defRPr sz="1200">
-                <a:solidFill>
-                  <a:srgbClr val="64748B"/>
-                </a:solidFill>
-              </a:defRPr>
-            </a:pPr>
-            <a:r>
-              <a:t>• Elevating American Express cardmember trust through uncompromising proactive service.</a:t>
             </a:r>
           </a:p>
         </p:txBody>

--- a/assets/deck/ZKD_Concierge_Codestreet_2026.pptx
+++ b/assets/deck/ZKD_Concierge_Codestreet_2026.pptx
@@ -3112,11 +3112,12 @@
             <a:avLst/>
           </a:prstGeom>
           <a:solidFill>
-            <a:srgbClr val="0F172A"/>
+            <a:srgbClr val="2A2824"/>
           </a:solidFill>
           <a:ln>
             <a:noFill/>
           </a:ln>
+          <a:effectLst/>
         </p:spPr>
         <p:style>
           <a:lnRef idx="1">
@@ -3142,14 +3143,58 @@
       </p:sp>
       <p:sp>
         <p:nvSpPr>
-          <p:cNvPr id="3" name="TextBox 2"/>
+          <p:cNvPr id="3" name="Oval 2"/>
+          <p:cNvSpPr/>
+          <p:nvPr/>
+        </p:nvSpPr>
+        <p:spPr>
+          <a:xfrm>
+            <a:off x="822960" y="868680"/>
+            <a:ext cx="146304" cy="146304"/>
+          </a:xfrm>
+          <a:prstGeom prst="ellipse">
+            <a:avLst/>
+          </a:prstGeom>
+          <a:solidFill>
+            <a:srgbClr val="D97757"/>
+          </a:solidFill>
+          <a:ln>
+            <a:noFill/>
+          </a:ln>
+          <a:effectLst/>
+        </p:spPr>
+        <p:style>
+          <a:lnRef idx="1">
+            <a:schemeClr val="accent1"/>
+          </a:lnRef>
+          <a:fillRef idx="3">
+            <a:schemeClr val="accent1"/>
+          </a:fillRef>
+          <a:effectRef idx="2">
+            <a:schemeClr val="accent1"/>
+          </a:effectRef>
+          <a:fontRef idx="minor">
+            <a:schemeClr val="lt1"/>
+          </a:fontRef>
+        </p:style>
+        <p:txBody>
+          <a:bodyPr rtlCol="0" anchor="ctr"/>
+          <a:lstStyle/>
+          <a:p>
+            <a:pPr algn="ctr"/>
+          </a:p>
+        </p:txBody>
+      </p:sp>
+      <p:sp>
+        <p:nvSpPr>
+          <p:cNvPr id="4" name="TextBox 3"/>
           <p:cNvSpPr txBox="1"/>
           <p:nvPr/>
         </p:nvSpPr>
         <p:spPr>
           <a:xfrm>
-            <a:off x="914400" y="2011680"/>
-            <a:ext cx="10362895" cy="3200400"/>
+            <a:off x="914400" y="1965960"/>
+            <a:ext cx="10058400" cy="3291840"/>
           </a:xfrm>
           <a:prstGeom prst="rect">
             <a:avLst/>
@@ -3157,34 +3202,36 @@
           <a:noFill/>
         </p:spPr>
         <p:txBody>
-          <a:bodyPr wrap="square">
+          <a:bodyPr wrap="square" lIns="0" rIns="0" tIns="0" bIns="0">
             <a:spAutoFit/>
           </a:bodyPr>
           <a:lstStyle/>
           <a:p>
             <a:pPr>
               <a:spcAft>
-                <a:spcPts val="1200"/>
+                <a:spcPts val="1600"/>
               </a:spcAft>
-              <a:defRPr sz="1400" b="1">
-                <a:solidFill>
-                  <a:srgbClr val="006FCF"/>
-                </a:solidFill>
-              </a:defRPr>
-            </a:pPr>
-            <a:r>
-              <a:t>CODESTREET 2026 / AMERICAN EXPRESS</a:t>
+              <a:defRPr sz="1300" b="1">
+                <a:solidFill>
+                  <a:srgbClr val="D97757"/>
+                </a:solidFill>
+                <a:latin typeface="Avenir Next"/>
+              </a:defRPr>
+            </a:pPr>
+            <a:r>
+              <a:t>CODESTREET 2026  /  AMERICAN EXPRESS</a:t>
             </a:r>
           </a:p>
           <a:p>
             <a:pPr>
               <a:spcAft>
-                <a:spcPts val="800"/>
+                <a:spcPts val="1000"/>
               </a:spcAft>
-              <a:defRPr sz="4800" b="1">
-                <a:solidFill>
-                  <a:srgbClr val="FFFFFF"/>
-                </a:solidFill>
+              <a:defRPr sz="5200" b="0">
+                <a:solidFill>
+                  <a:srgbClr val="F7F5F0"/>
+                </a:solidFill>
+                <a:latin typeface="Georgia"/>
               </a:defRPr>
             </a:pPr>
             <a:r>
@@ -3194,29 +3241,75 @@
           <a:p>
             <a:pPr>
               <a:spcAft>
-                <a:spcPts val="2400"/>
+                <a:spcPts val="2800"/>
               </a:spcAft>
-              <a:defRPr sz="2000">
-                <a:solidFill>
-                  <a:srgbClr val="CBD5E1"/>
-                </a:solidFill>
-              </a:defRPr>
-            </a:pPr>
-            <a:r>
-              <a:t>Autonomous Travel-Disruption Concierge for Indian Domestic Aviation</a:t>
+              <a:defRPr sz="1900">
+                <a:solidFill>
+                  <a:srgbClr val="C9C3B8"/>
+                </a:solidFill>
+                <a:latin typeface="Avenir Next"/>
+              </a:defRPr>
+            </a:pPr>
+            <a:r>
+              <a:t>An autonomous travel-disruption concierge for Indian domestic aviation</a:t>
             </a:r>
           </a:p>
           <a:p>
             <a:pPr>
-              <a:defRPr sz="1300">
-                <a:solidFill>
-                  <a:srgbClr val="64748B"/>
-                </a:solidFill>
-              </a:defRPr>
-            </a:pPr>
-            <a:r>
-              <a:t>Team ZKD · IIT Madras  |  Live MVP Presentation (20 min Pitch + 10 min Q&amp;A)</a:t>
-            </a:r>
+              <a:defRPr sz="1250">
+                <a:solidFill>
+                  <a:srgbClr val="9A948A"/>
+                </a:solidFill>
+                <a:latin typeface="Avenir Next"/>
+              </a:defRPr>
+            </a:pPr>
+            <a:r>
+              <a:t>Team ZKD · IIT Madras   —   Live MVP presentation (20 min pitch + 10 min Q&amp;A)</a:t>
+            </a:r>
+          </a:p>
+        </p:txBody>
+      </p:sp>
+      <p:sp>
+        <p:nvSpPr>
+          <p:cNvPr id="5" name="Rectangle 4"/>
+          <p:cNvSpPr/>
+          <p:nvPr/>
+        </p:nvSpPr>
+        <p:spPr>
+          <a:xfrm>
+            <a:off x="914400" y="1847088"/>
+            <a:ext cx="502920" cy="44450"/>
+          </a:xfrm>
+          <a:prstGeom prst="rect">
+            <a:avLst/>
+          </a:prstGeom>
+          <a:solidFill>
+            <a:srgbClr val="D97757"/>
+          </a:solidFill>
+          <a:ln>
+            <a:noFill/>
+          </a:ln>
+          <a:effectLst/>
+        </p:spPr>
+        <p:style>
+          <a:lnRef idx="1">
+            <a:schemeClr val="accent1"/>
+          </a:lnRef>
+          <a:fillRef idx="3">
+            <a:schemeClr val="accent1"/>
+          </a:fillRef>
+          <a:effectRef idx="2">
+            <a:schemeClr val="accent1"/>
+          </a:effectRef>
+          <a:fontRef idx="minor">
+            <a:schemeClr val="lt1"/>
+          </a:fontRef>
+        </p:style>
+        <p:txBody>
+          <a:bodyPr rtlCol="0" anchor="ctr"/>
+          <a:lstStyle/>
+          <a:p>
+            <a:pPr algn="ctr"/>
           </a:p>
         </p:txBody>
       </p:sp>
@@ -3240,96 +3333,25 @@
       <p:grpSpPr/>
       <p:sp>
         <p:nvSpPr>
-          <p:cNvPr id="2" name="TextBox 1"/>
-          <p:cNvSpPr txBox="1"/>
+          <p:cNvPr id="2" name="Rectangle 1"/>
+          <p:cNvSpPr/>
           <p:nvPr/>
         </p:nvSpPr>
         <p:spPr>
           <a:xfrm>
-            <a:off x="731520" y="457200"/>
-            <a:ext cx="10698480" cy="365760"/>
+            <a:off x="0" y="0"/>
+            <a:ext cx="12191695" cy="6858000"/>
           </a:xfrm>
           <a:prstGeom prst="rect">
             <a:avLst/>
           </a:prstGeom>
-          <a:noFill/>
-        </p:spPr>
-        <p:txBody>
-          <a:bodyPr wrap="square">
-            <a:spAutoFit/>
-          </a:bodyPr>
-          <a:lstStyle/>
-          <a:p>
-            <a:pPr>
-              <a:defRPr sz="1000" b="1">
-                <a:solidFill>
-                  <a:srgbClr val="006FCF"/>
-                </a:solidFill>
-              </a:defRPr>
-            </a:pPr>
-            <a:r>
-              <a:t>ZKD CONCIERGE · AMERICAN EXPRESS / CODESTREET 2026</a:t>
-            </a:r>
-          </a:p>
-        </p:txBody>
-      </p:sp>
-      <p:sp>
-        <p:nvSpPr>
-          <p:cNvPr id="3" name="TextBox 2"/>
-          <p:cNvSpPr txBox="1"/>
-          <p:nvPr/>
-        </p:nvSpPr>
-        <p:spPr>
-          <a:xfrm>
-            <a:off x="731520" y="731520"/>
-            <a:ext cx="10698480" cy="731520"/>
-          </a:xfrm>
-          <a:prstGeom prst="rect">
-            <a:avLst/>
-          </a:prstGeom>
-          <a:noFill/>
-        </p:spPr>
-        <p:txBody>
-          <a:bodyPr wrap="square">
-            <a:spAutoFit/>
-          </a:bodyPr>
-          <a:lstStyle/>
-          <a:p>
-            <a:pPr>
-              <a:defRPr sz="2600" b="1">
-                <a:solidFill>
-                  <a:srgbClr val="0F172A"/>
-                </a:solidFill>
-              </a:defRPr>
-            </a:pPr>
-            <a:r>
-              <a:t>Honest Limitations, Roadmap &amp; Conclusion</a:t>
-            </a:r>
-          </a:p>
-        </p:txBody>
-      </p:sp>
-      <p:sp>
-        <p:nvSpPr>
-          <p:cNvPr id="4" name="Rounded Rectangle 3"/>
-          <p:cNvSpPr/>
-          <p:nvPr/>
-        </p:nvSpPr>
-        <p:spPr>
-          <a:xfrm>
-            <a:off x="731520" y="1645920"/>
-            <a:ext cx="5120640" cy="4389120"/>
-          </a:xfrm>
-          <a:prstGeom prst="roundRect">
-            <a:avLst/>
-          </a:prstGeom>
           <a:solidFill>
-            <a:srgbClr val="F8FAFC"/>
+            <a:srgbClr val="FAF9F5"/>
           </a:solidFill>
           <a:ln>
-            <a:solidFill>
-              <a:srgbClr val="E2E8F0"/>
-            </a:solidFill>
+            <a:noFill/>
           </a:ln>
+          <a:effectLst/>
         </p:spPr>
         <p:style>
           <a:lnRef idx="1">
@@ -3346,92 +3368,106 @@
           </a:fontRef>
         </p:style>
         <p:txBody>
-          <a:bodyPr rtlCol="0" anchor="ctr" wrap="square"/>
-          <a:lstStyle/>
-          <a:p>
-            <a:pPr algn="ctr">
-              <a:spcAft>
-                <a:spcPts val="1000"/>
-              </a:spcAft>
-              <a:defRPr sz="1600" b="1">
-                <a:solidFill>
-                  <a:srgbClr val="B91C1C"/>
-                </a:solidFill>
-              </a:defRPr>
-            </a:pPr>
-            <a:r>
-              <a:t>Honest Limitations</a:t>
-            </a:r>
-          </a:p>
+          <a:bodyPr rtlCol="0" anchor="ctr"/>
+          <a:lstStyle/>
+          <a:p>
+            <a:pPr algn="ctr"/>
+          </a:p>
+        </p:txBody>
+      </p:sp>
+      <p:sp>
+        <p:nvSpPr>
+          <p:cNvPr id="3" name="TextBox 2"/>
+          <p:cNvSpPr txBox="1"/>
+          <p:nvPr/>
+        </p:nvSpPr>
+        <p:spPr>
+          <a:xfrm>
+            <a:off x="731520" y="502920"/>
+            <a:ext cx="10698480" cy="320040"/>
+          </a:xfrm>
+          <a:prstGeom prst="rect">
+            <a:avLst/>
+          </a:prstGeom>
+          <a:noFill/>
+        </p:spPr>
+        <p:txBody>
+          <a:bodyPr wrap="square">
+            <a:spAutoFit/>
+          </a:bodyPr>
+          <a:lstStyle/>
           <a:p>
             <a:pPr>
-              <a:spcAft>
-                <a:spcPts val="600"/>
-              </a:spcAft>
-              <a:defRPr sz="1200">
-                <a:solidFill>
-                  <a:srgbClr val="64748B"/>
-                </a:solidFill>
-              </a:defRPr>
-            </a:pPr>
-            <a:r>
-              <a:t>• No Indian domestic training data yet: risk model cold-starts to population base rate until retrain loop runs.</a:t>
-            </a:r>
-          </a:p>
+              <a:defRPr sz="1050" b="1">
+                <a:solidFill>
+                  <a:srgbClr val="B85C3E"/>
+                </a:solidFill>
+                <a:latin typeface="Avenir Next"/>
+              </a:defRPr>
+            </a:pPr>
+            <a:r>
+              <a:t>ZKD CONCIERGE  ·  AMERICAN EXPRESS  /  CODESTREET 2026</a:t>
+            </a:r>
+          </a:p>
+        </p:txBody>
+      </p:sp>
+      <p:sp>
+        <p:nvSpPr>
+          <p:cNvPr id="4" name="TextBox 3"/>
+          <p:cNvSpPr txBox="1"/>
+          <p:nvPr/>
+        </p:nvSpPr>
+        <p:spPr>
+          <a:xfrm>
+            <a:off x="731520" y="804672"/>
+            <a:ext cx="10058400" cy="777240"/>
+          </a:xfrm>
+          <a:prstGeom prst="rect">
+            <a:avLst/>
+          </a:prstGeom>
+          <a:noFill/>
+        </p:spPr>
+        <p:txBody>
+          <a:bodyPr wrap="square">
+            <a:spAutoFit/>
+          </a:bodyPr>
+          <a:lstStyle/>
           <a:p>
             <a:pPr>
-              <a:spcAft>
-                <a:spcPts val="600"/>
-              </a:spcAft>
-              <a:defRPr sz="1200">
-                <a:solidFill>
-                  <a:srgbClr val="64748B"/>
-                </a:solidFill>
-              </a:defRPr>
-            </a:pPr>
-            <a:r>
-              <a:t>• Payment is mocked (vPayment contract test; no live payment gateway).</a:t>
-            </a:r>
-          </a:p>
-          <a:p>
-            <a:pPr>
-              <a:spcAft>
-                <a:spcPts val="600"/>
-              </a:spcAft>
-              <a:defRPr sz="1200">
-                <a:solidFill>
-                  <a:srgbClr val="64748B"/>
-                </a:solidFill>
-              </a:defRPr>
-            </a:pPr>
-            <a:r>
-              <a:t>• Pull-only API rate limit constraints on flight status feeds.</a:t>
-            </a:r>
-          </a:p>
-        </p:txBody>
-      </p:sp>
-      <p:sp>
-        <p:nvSpPr>
-          <p:cNvPr id="5" name="Rounded Rectangle 4"/>
+              <a:defRPr sz="2700" b="0">
+                <a:solidFill>
+                  <a:srgbClr val="1F1E1C"/>
+                </a:solidFill>
+                <a:latin typeface="Georgia"/>
+              </a:defRPr>
+            </a:pPr>
+            <a:r>
+              <a:t>Honest limitations, roadmap &amp; conclusion</a:t>
+            </a:r>
+          </a:p>
+        </p:txBody>
+      </p:sp>
+      <p:sp>
+        <p:nvSpPr>
+          <p:cNvPr id="5" name="Rectangle 4"/>
           <p:cNvSpPr/>
           <p:nvPr/>
         </p:nvSpPr>
         <p:spPr>
           <a:xfrm>
-            <a:off x="6217920" y="1645920"/>
-            <a:ext cx="5212080" cy="4389120"/>
-          </a:xfrm>
-          <a:prstGeom prst="roundRect">
+            <a:off x="731520" y="1481328"/>
+            <a:ext cx="502920" cy="44450"/>
+          </a:xfrm>
+          <a:prstGeom prst="rect">
             <a:avLst/>
           </a:prstGeom>
           <a:solidFill>
-            <a:srgbClr val="F8FAFC"/>
+            <a:srgbClr val="D97757"/>
           </a:solidFill>
           <a:ln>
-            <a:solidFill>
-              <a:srgbClr val="E2E8F0"/>
-            </a:solidFill>
+            <a:noFill/>
           </a:ln>
+          <a:effectLst/>
         </p:spPr>
         <p:style>
           <a:lnRef idx="1">
@@ -3448,66 +3484,281 @@
           </a:fontRef>
         </p:style>
         <p:txBody>
-          <a:bodyPr rtlCol="0" anchor="ctr" wrap="square"/>
+          <a:bodyPr rtlCol="0" anchor="ctr"/>
+          <a:lstStyle/>
+          <a:p>
+            <a:pPr algn="ctr"/>
+          </a:p>
+        </p:txBody>
+      </p:sp>
+      <p:sp>
+        <p:nvSpPr>
+          <p:cNvPr id="6" name="TextBox 5"/>
+          <p:cNvSpPr txBox="1"/>
+          <p:nvPr/>
+        </p:nvSpPr>
+        <p:spPr>
+          <a:xfrm>
+            <a:off x="11430000" y="6446520"/>
+            <a:ext cx="548640" cy="320040"/>
+          </a:xfrm>
+          <a:prstGeom prst="rect">
+            <a:avLst/>
+          </a:prstGeom>
+          <a:noFill/>
+        </p:spPr>
+        <p:txBody>
+          <a:bodyPr wrap="none">
+            <a:spAutoFit/>
+          </a:bodyPr>
+          <a:lstStyle/>
+          <a:p>
+            <a:pPr algn="r">
+              <a:defRPr sz="1000">
+                <a:solidFill>
+                  <a:srgbClr val="5E5A52"/>
+                </a:solidFill>
+                <a:latin typeface="Avenir Next"/>
+              </a:defRPr>
+            </a:pPr>
+            <a:r>
+              <a:t>10</a:t>
+            </a:r>
+          </a:p>
+        </p:txBody>
+      </p:sp>
+      <p:sp>
+        <p:nvSpPr>
+          <p:cNvPr id="7" name="Rounded Rectangle 6"/>
+          <p:cNvSpPr/>
+          <p:nvPr/>
+        </p:nvSpPr>
+        <p:spPr>
+          <a:xfrm>
+            <a:off x="731520" y="1783080"/>
+            <a:ext cx="5120640" cy="4251960"/>
+          </a:xfrm>
+          <a:prstGeom prst="roundRect">
+            <a:avLst>
+              <a:gd name="adj" fmla="val 6000"/>
+            </a:avLst>
+          </a:prstGeom>
+          <a:solidFill>
+            <a:srgbClr val="F4E4DF"/>
+          </a:solidFill>
+          <a:ln w="9525">
+            <a:solidFill>
+              <a:srgbClr val="E3C3B8"/>
+            </a:solidFill>
+          </a:ln>
+          <a:effectLst/>
+        </p:spPr>
+        <p:style>
+          <a:lnRef idx="1">
+            <a:schemeClr val="accent1"/>
+          </a:lnRef>
+          <a:fillRef idx="3">
+            <a:schemeClr val="accent1"/>
+          </a:fillRef>
+          <a:effectRef idx="2">
+            <a:schemeClr val="accent1"/>
+          </a:effectRef>
+          <a:fontRef idx="minor">
+            <a:schemeClr val="lt1"/>
+          </a:fontRef>
+        </p:style>
+        <p:txBody>
+          <a:bodyPr rtlCol="0" anchor="ctr" lIns="256032" rIns="256032" tIns="256032" bIns="256032" wrap="square"/>
           <a:lstStyle/>
           <a:p>
             <a:pPr algn="ctr">
               <a:spcAft>
-                <a:spcPts val="1000"/>
+                <a:spcPts val="1200"/>
               </a:spcAft>
               <a:defRPr sz="1600" b="1">
                 <a:solidFill>
-                  <a:srgbClr val="006FCF"/>
-                </a:solidFill>
-              </a:defRPr>
-            </a:pPr>
-            <a:r>
-              <a:t>Roadmap &amp; Closing</a:t>
+                  <a:srgbClr val="8A3B2E"/>
+                </a:solidFill>
+                <a:latin typeface="Georgia"/>
+              </a:defRPr>
+            </a:pPr>
+            <a:r>
+              <a:t>Honest limitations</a:t>
             </a:r>
           </a:p>
           <a:p>
             <a:pPr>
+              <a:lnSpc>
+                <a:spcPct val="118000"/>
+              </a:lnSpc>
               <a:spcAft>
-                <a:spcPts val="600"/>
+                <a:spcPts val="800"/>
               </a:spcAft>
-              <a:defRPr sz="1200">
-                <a:solidFill>
-                  <a:srgbClr val="64748B"/>
-                </a:solidFill>
-              </a:defRPr>
-            </a:pPr>
-            <a:r>
-              <a:t>• Production Rollout: Live webhook subscriptions &amp; automated event loggers.</a:t>
+              <a:defRPr sz="1250">
+                <a:solidFill>
+                  <a:srgbClr val="8A3B2E"/>
+                </a:solidFill>
+                <a:latin typeface="Avenir Next"/>
+              </a:defRPr>
+            </a:pPr>
+            <a:r>
+              <a:t>—  No Indian domestic training data yet: the risk model cold-starts to a population base rate until the retrain loop runs.</a:t>
             </a:r>
           </a:p>
           <a:p>
             <a:pPr>
+              <a:lnSpc>
+                <a:spcPct val="118000"/>
+              </a:lnSpc>
               <a:spcAft>
-                <a:spcPts val="600"/>
+                <a:spcPts val="800"/>
               </a:spcAft>
-              <a:defRPr sz="1200">
-                <a:solidFill>
-                  <a:srgbClr val="64748B"/>
-                </a:solidFill>
-              </a:defRPr>
-            </a:pPr>
-            <a:r>
-              <a:t>• Full integration of default-deny policy engine (`server/policy/`).</a:t>
+              <a:defRPr sz="1250">
+                <a:solidFill>
+                  <a:srgbClr val="8A3B2E"/>
+                </a:solidFill>
+                <a:latin typeface="Avenir Next"/>
+              </a:defRPr>
+            </a:pPr>
+            <a:r>
+              <a:t>—  Payment is mocked — a vPayment contract test, no live payment gateway.</a:t>
             </a:r>
           </a:p>
           <a:p>
             <a:pPr>
+              <a:lnSpc>
+                <a:spcPct val="118000"/>
+              </a:lnSpc>
               <a:spcAft>
-                <a:spcPts val="600"/>
+                <a:spcPts val="800"/>
               </a:spcAft>
-              <a:defRPr sz="1200">
-                <a:solidFill>
-                  <a:srgbClr val="64748B"/>
-                </a:solidFill>
-              </a:defRPr>
-            </a:pPr>
-            <a:r>
-              <a:t>• Elevating American Express cardmember trust through uncompromising proactive service.</a:t>
+              <a:defRPr sz="1250">
+                <a:solidFill>
+                  <a:srgbClr val="8A3B2E"/>
+                </a:solidFill>
+                <a:latin typeface="Avenir Next"/>
+              </a:defRPr>
+            </a:pPr>
+            <a:r>
+              <a:t>—  Pull-only API rate-limit constraints on flight status feeds.</a:t>
+            </a:r>
+          </a:p>
+        </p:txBody>
+      </p:sp>
+      <p:sp>
+        <p:nvSpPr>
+          <p:cNvPr id="8" name="Rounded Rectangle 7"/>
+          <p:cNvSpPr/>
+          <p:nvPr/>
+        </p:nvSpPr>
+        <p:spPr>
+          <a:xfrm>
+            <a:off x="6263640" y="1783080"/>
+            <a:ext cx="5166360" cy="4251960"/>
+          </a:xfrm>
+          <a:prstGeom prst="roundRect">
+            <a:avLst>
+              <a:gd name="adj" fmla="val 6000"/>
+            </a:avLst>
+          </a:prstGeom>
+          <a:solidFill>
+            <a:srgbClr val="E7EEE2"/>
+          </a:solidFill>
+          <a:ln w="9525">
+            <a:solidFill>
+              <a:srgbClr val="C9D9C0"/>
+            </a:solidFill>
+          </a:ln>
+          <a:effectLst/>
+        </p:spPr>
+        <p:style>
+          <a:lnRef idx="1">
+            <a:schemeClr val="accent1"/>
+          </a:lnRef>
+          <a:fillRef idx="3">
+            <a:schemeClr val="accent1"/>
+          </a:fillRef>
+          <a:effectRef idx="2">
+            <a:schemeClr val="accent1"/>
+          </a:effectRef>
+          <a:fontRef idx="minor">
+            <a:schemeClr val="lt1"/>
+          </a:fontRef>
+        </p:style>
+        <p:txBody>
+          <a:bodyPr rtlCol="0" anchor="ctr" lIns="256032" rIns="256032" tIns="256032" bIns="256032" wrap="square"/>
+          <a:lstStyle/>
+          <a:p>
+            <a:pPr algn="ctr">
+              <a:spcAft>
+                <a:spcPts val="1200"/>
+              </a:spcAft>
+              <a:defRPr sz="1600" b="1">
+                <a:solidFill>
+                  <a:srgbClr val="3F5D3A"/>
+                </a:solidFill>
+                <a:latin typeface="Georgia"/>
+              </a:defRPr>
+            </a:pPr>
+            <a:r>
+              <a:t>Roadmap &amp; closing</a:t>
+            </a:r>
+          </a:p>
+          <a:p>
+            <a:pPr>
+              <a:lnSpc>
+                <a:spcPct val="118000"/>
+              </a:lnSpc>
+              <a:spcAft>
+                <a:spcPts val="800"/>
+              </a:spcAft>
+              <a:defRPr sz="1250">
+                <a:solidFill>
+                  <a:srgbClr val="3F5D3A"/>
+                </a:solidFill>
+                <a:latin typeface="Avenir Next"/>
+              </a:defRPr>
+            </a:pPr>
+            <a:r>
+              <a:t>—  Production rollout: live webhook subscriptions and automated event loggers.</a:t>
+            </a:r>
+          </a:p>
+          <a:p>
+            <a:pPr>
+              <a:lnSpc>
+                <a:spcPct val="118000"/>
+              </a:lnSpc>
+              <a:spcAft>
+                <a:spcPts val="800"/>
+              </a:spcAft>
+              <a:defRPr sz="1250">
+                <a:solidFill>
+                  <a:srgbClr val="3F5D3A"/>
+                </a:solidFill>
+                <a:latin typeface="Avenir Next"/>
+              </a:defRPr>
+            </a:pPr>
+            <a:r>
+              <a:t>—  Full integration of the default-deny policy engine (server/policy/).</a:t>
+            </a:r>
+          </a:p>
+          <a:p>
+            <a:pPr>
+              <a:lnSpc>
+                <a:spcPct val="118000"/>
+              </a:lnSpc>
+              <a:spcAft>
+                <a:spcPts val="800"/>
+              </a:spcAft>
+              <a:defRPr sz="1250">
+                <a:solidFill>
+                  <a:srgbClr val="3F5D3A"/>
+                </a:solidFill>
+                <a:latin typeface="Avenir Next"/>
+              </a:defRPr>
+            </a:pPr>
+            <a:r>
+              <a:t>—  Elevating American Express cardmember trust through uncompromising proactive service.</a:t>
             </a:r>
           </a:p>
         </p:txBody>
@@ -3532,96 +3783,25 @@
       <p:grpSpPr/>
       <p:sp>
         <p:nvSpPr>
-          <p:cNvPr id="2" name="TextBox 1"/>
-          <p:cNvSpPr txBox="1"/>
+          <p:cNvPr id="2" name="Rectangle 1"/>
+          <p:cNvSpPr/>
           <p:nvPr/>
         </p:nvSpPr>
         <p:spPr>
           <a:xfrm>
-            <a:off x="731520" y="457200"/>
-            <a:ext cx="10698480" cy="365760"/>
+            <a:off x="0" y="0"/>
+            <a:ext cx="12191695" cy="6858000"/>
           </a:xfrm>
           <a:prstGeom prst="rect">
             <a:avLst/>
           </a:prstGeom>
-          <a:noFill/>
-        </p:spPr>
-        <p:txBody>
-          <a:bodyPr wrap="square">
-            <a:spAutoFit/>
-          </a:bodyPr>
-          <a:lstStyle/>
-          <a:p>
-            <a:pPr>
-              <a:defRPr sz="1000" b="1">
-                <a:solidFill>
-                  <a:srgbClr val="006FCF"/>
-                </a:solidFill>
-              </a:defRPr>
-            </a:pPr>
-            <a:r>
-              <a:t>ZKD CONCIERGE · AMERICAN EXPRESS / CODESTREET 2026</a:t>
-            </a:r>
-          </a:p>
-        </p:txBody>
-      </p:sp>
-      <p:sp>
-        <p:nvSpPr>
-          <p:cNvPr id="3" name="TextBox 2"/>
-          <p:cNvSpPr txBox="1"/>
-          <p:nvPr/>
-        </p:nvSpPr>
-        <p:spPr>
-          <a:xfrm>
-            <a:off x="731520" y="731520"/>
-            <a:ext cx="10698480" cy="731520"/>
-          </a:xfrm>
-          <a:prstGeom prst="rect">
-            <a:avLst/>
-          </a:prstGeom>
-          <a:noFill/>
-        </p:spPr>
-        <p:txBody>
-          <a:bodyPr wrap="square">
-            <a:spAutoFit/>
-          </a:bodyPr>
-          <a:lstStyle/>
-          <a:p>
-            <a:pPr>
-              <a:defRPr sz="2600" b="1">
-                <a:solidFill>
-                  <a:srgbClr val="0F172A"/>
-                </a:solidFill>
-              </a:defRPr>
-            </a:pPr>
-            <a:r>
-              <a:t>The Passenger Reality: From Panic to Peace of Mind</a:t>
-            </a:r>
-          </a:p>
-        </p:txBody>
-      </p:sp>
-      <p:sp>
-        <p:nvSpPr>
-          <p:cNvPr id="4" name="Rounded Rectangle 3"/>
-          <p:cNvSpPr/>
-          <p:nvPr/>
-        </p:nvSpPr>
-        <p:spPr>
-          <a:xfrm>
-            <a:off x="731520" y="1645920"/>
-            <a:ext cx="5120640" cy="4389120"/>
-          </a:xfrm>
-          <a:prstGeom prst="roundRect">
-            <a:avLst/>
-          </a:prstGeom>
           <a:solidFill>
-            <a:srgbClr val="FEF2F2"/>
+            <a:srgbClr val="FAF9F5"/>
           </a:solidFill>
           <a:ln>
-            <a:solidFill>
-              <a:srgbClr val="FECACA"/>
-            </a:solidFill>
+            <a:noFill/>
           </a:ln>
+          <a:effectLst/>
         </p:spPr>
         <p:style>
           <a:lnRef idx="1">
@@ -3638,107 +3818,106 @@
           </a:fontRef>
         </p:style>
         <p:txBody>
-          <a:bodyPr rtlCol="0" anchor="ctr" wrap="square"/>
-          <a:lstStyle/>
-          <a:p>
-            <a:pPr algn="ctr">
-              <a:spcAft>
-                <a:spcPts val="1400"/>
-              </a:spcAft>
-              <a:defRPr sz="1600" b="1">
-                <a:solidFill>
-                  <a:srgbClr val="B91C1C"/>
-                </a:solidFill>
-              </a:defRPr>
-            </a:pPr>
-            <a:r>
-              <a:t>TODAY: The Reactive IRROPS Nightmare</a:t>
-            </a:r>
-          </a:p>
+          <a:bodyPr rtlCol="0" anchor="ctr"/>
+          <a:lstStyle/>
+          <a:p>
+            <a:pPr algn="ctr"/>
+          </a:p>
+        </p:txBody>
+      </p:sp>
+      <p:sp>
+        <p:nvSpPr>
+          <p:cNvPr id="3" name="TextBox 2"/>
+          <p:cNvSpPr txBox="1"/>
+          <p:nvPr/>
+        </p:nvSpPr>
+        <p:spPr>
+          <a:xfrm>
+            <a:off x="731520" y="502920"/>
+            <a:ext cx="10698480" cy="320040"/>
+          </a:xfrm>
+          <a:prstGeom prst="rect">
+            <a:avLst/>
+          </a:prstGeom>
+          <a:noFill/>
+        </p:spPr>
+        <p:txBody>
+          <a:bodyPr wrap="square">
+            <a:spAutoFit/>
+          </a:bodyPr>
+          <a:lstStyle/>
           <a:p>
             <a:pPr>
-              <a:spcAft>
-                <a:spcPts val="800"/>
-              </a:spcAft>
-              <a:defRPr sz="1300">
-                <a:solidFill>
-                  <a:srgbClr val="7F1D1D"/>
-                </a:solidFill>
-              </a:defRPr>
-            </a:pPr>
-            <a:r>
-              <a:t>• Discovering cancellation only at the gate or via delayed SMS.</a:t>
-            </a:r>
-          </a:p>
+              <a:defRPr sz="1050" b="1">
+                <a:solidFill>
+                  <a:srgbClr val="B85C3E"/>
+                </a:solidFill>
+                <a:latin typeface="Avenir Next"/>
+              </a:defRPr>
+            </a:pPr>
+            <a:r>
+              <a:t>ZKD CONCIERGE  ·  AMERICAN EXPRESS  /  CODESTREET 2026</a:t>
+            </a:r>
+          </a:p>
+        </p:txBody>
+      </p:sp>
+      <p:sp>
+        <p:nvSpPr>
+          <p:cNvPr id="4" name="TextBox 3"/>
+          <p:cNvSpPr txBox="1"/>
+          <p:nvPr/>
+        </p:nvSpPr>
+        <p:spPr>
+          <a:xfrm>
+            <a:off x="731520" y="804672"/>
+            <a:ext cx="10058400" cy="777240"/>
+          </a:xfrm>
+          <a:prstGeom prst="rect">
+            <a:avLst/>
+          </a:prstGeom>
+          <a:noFill/>
+        </p:spPr>
+        <p:txBody>
+          <a:bodyPr wrap="square">
+            <a:spAutoFit/>
+          </a:bodyPr>
+          <a:lstStyle/>
           <a:p>
             <a:pPr>
-              <a:spcAft>
-                <a:spcPts val="800"/>
-              </a:spcAft>
-              <a:defRPr sz="1300">
-                <a:solidFill>
-                  <a:srgbClr val="7F1D1D"/>
-                </a:solidFill>
-              </a:defRPr>
-            </a:pPr>
-            <a:r>
-              <a:t>• 45+ minute hold times with airline customer care centres.</a:t>
-            </a:r>
-          </a:p>
-          <a:p>
-            <a:pPr>
-              <a:spcAft>
-                <a:spcPts val="800"/>
-              </a:spcAft>
-              <a:defRPr sz="1300">
-                <a:solidFill>
-                  <a:srgbClr val="7F1D1D"/>
-                </a:solidFill>
-              </a:defRPr>
-            </a:pPr>
-            <a:r>
-              <a:t>• Scrambling for overpriced alternate flights &amp; airport hotels.</a:t>
-            </a:r>
-          </a:p>
-          <a:p>
-            <a:pPr>
-              <a:spcAft>
-                <a:spcPts val="800"/>
-              </a:spcAft>
-              <a:defRPr sz="1300">
-                <a:solidFill>
-                  <a:srgbClr val="7F1D1D"/>
-                </a:solidFill>
-              </a:defRPr>
-            </a:pPr>
-            <a:r>
-              <a:t>• Opaque DGCA duty-of-care claims requiring manual paperwork.</a:t>
-            </a:r>
-          </a:p>
-        </p:txBody>
-      </p:sp>
-      <p:sp>
-        <p:nvSpPr>
-          <p:cNvPr id="5" name="Rounded Rectangle 4"/>
+              <a:defRPr sz="2700" b="0">
+                <a:solidFill>
+                  <a:srgbClr val="1F1E1C"/>
+                </a:solidFill>
+                <a:latin typeface="Georgia"/>
+              </a:defRPr>
+            </a:pPr>
+            <a:r>
+              <a:t>The passenger reality: from panic to peace of mind</a:t>
+            </a:r>
+          </a:p>
+        </p:txBody>
+      </p:sp>
+      <p:sp>
+        <p:nvSpPr>
+          <p:cNvPr id="5" name="Rectangle 4"/>
           <p:cNvSpPr/>
           <p:nvPr/>
         </p:nvSpPr>
         <p:spPr>
           <a:xfrm>
-            <a:off x="6217920" y="1645920"/>
-            <a:ext cx="5212080" cy="4389120"/>
-          </a:xfrm>
-          <a:prstGeom prst="roundRect">
+            <a:off x="731520" y="1481328"/>
+            <a:ext cx="502920" cy="44450"/>
+          </a:xfrm>
+          <a:prstGeom prst="rect">
             <a:avLst/>
           </a:prstGeom>
           <a:solidFill>
-            <a:srgbClr val="F0FDF4"/>
+            <a:srgbClr val="D97757"/>
           </a:solidFill>
           <a:ln>
-            <a:solidFill>
-              <a:srgbClr val="BBF7D0"/>
-            </a:solidFill>
+            <a:noFill/>
           </a:ln>
+          <a:effectLst/>
         </p:spPr>
         <p:style>
           <a:lnRef idx="1">
@@ -3755,81 +3934,319 @@
           </a:fontRef>
         </p:style>
         <p:txBody>
-          <a:bodyPr rtlCol="0" anchor="ctr" wrap="square"/>
+          <a:bodyPr rtlCol="0" anchor="ctr"/>
+          <a:lstStyle/>
+          <a:p>
+            <a:pPr algn="ctr"/>
+          </a:p>
+        </p:txBody>
+      </p:sp>
+      <p:sp>
+        <p:nvSpPr>
+          <p:cNvPr id="6" name="TextBox 5"/>
+          <p:cNvSpPr txBox="1"/>
+          <p:nvPr/>
+        </p:nvSpPr>
+        <p:spPr>
+          <a:xfrm>
+            <a:off x="11430000" y="6446520"/>
+            <a:ext cx="548640" cy="320040"/>
+          </a:xfrm>
+          <a:prstGeom prst="rect">
+            <a:avLst/>
+          </a:prstGeom>
+          <a:noFill/>
+        </p:spPr>
+        <p:txBody>
+          <a:bodyPr wrap="none">
+            <a:spAutoFit/>
+          </a:bodyPr>
+          <a:lstStyle/>
+          <a:p>
+            <a:pPr algn="r">
+              <a:defRPr sz="1000">
+                <a:solidFill>
+                  <a:srgbClr val="5E5A52"/>
+                </a:solidFill>
+                <a:latin typeface="Avenir Next"/>
+              </a:defRPr>
+            </a:pPr>
+            <a:r>
+              <a:t>02</a:t>
+            </a:r>
+          </a:p>
+        </p:txBody>
+      </p:sp>
+      <p:sp>
+        <p:nvSpPr>
+          <p:cNvPr id="7" name="Rounded Rectangle 6"/>
+          <p:cNvSpPr/>
+          <p:nvPr/>
+        </p:nvSpPr>
+        <p:spPr>
+          <a:xfrm>
+            <a:off x="731520" y="1783080"/>
+            <a:ext cx="5120640" cy="4251960"/>
+          </a:xfrm>
+          <a:prstGeom prst="roundRect">
+            <a:avLst>
+              <a:gd name="adj" fmla="val 6000"/>
+            </a:avLst>
+          </a:prstGeom>
+          <a:solidFill>
+            <a:srgbClr val="F4E4DF"/>
+          </a:solidFill>
+          <a:ln w="9525">
+            <a:solidFill>
+              <a:srgbClr val="E3C3B8"/>
+            </a:solidFill>
+          </a:ln>
+          <a:effectLst/>
+        </p:spPr>
+        <p:style>
+          <a:lnRef idx="1">
+            <a:schemeClr val="accent1"/>
+          </a:lnRef>
+          <a:fillRef idx="3">
+            <a:schemeClr val="accent1"/>
+          </a:fillRef>
+          <a:effectRef idx="2">
+            <a:schemeClr val="accent1"/>
+          </a:effectRef>
+          <a:fontRef idx="minor">
+            <a:schemeClr val="lt1"/>
+          </a:fontRef>
+        </p:style>
+        <p:txBody>
+          <a:bodyPr rtlCol="0" anchor="ctr" lIns="256032" rIns="256032" tIns="256032" bIns="256032" wrap="square"/>
           <a:lstStyle/>
           <a:p>
             <a:pPr algn="ctr">
               <a:spcAft>
-                <a:spcPts val="1400"/>
+                <a:spcPts val="1200"/>
               </a:spcAft>
               <a:defRPr sz="1600" b="1">
                 <a:solidFill>
-                  <a:srgbClr val="15803D"/>
-                </a:solidFill>
-              </a:defRPr>
-            </a:pPr>
-            <a:r>
-              <a:t>ZKD CONCIERGE: Proactive &amp; Autonomous</a:t>
+                  <a:srgbClr val="8A3B2E"/>
+                </a:solidFill>
+                <a:latin typeface="Georgia"/>
+              </a:defRPr>
+            </a:pPr>
+            <a:r>
+              <a:t>Today — the reactive IRROPS nightmare</a:t>
             </a:r>
           </a:p>
           <a:p>
             <a:pPr>
+              <a:lnSpc>
+                <a:spcPct val="118000"/>
+              </a:lnSpc>
               <a:spcAft>
                 <a:spcPts val="800"/>
               </a:spcAft>
-              <a:defRPr sz="1300">
-                <a:solidFill>
-                  <a:srgbClr val="14532D"/>
-                </a:solidFill>
-              </a:defRPr>
-            </a:pPr>
-            <a:r>
-              <a:t>• Predictive warning 42s before formal airline cancellation.</a:t>
+              <a:defRPr sz="1250">
+                <a:solidFill>
+                  <a:srgbClr val="8A3B2E"/>
+                </a:solidFill>
+                <a:latin typeface="Avenir Next"/>
+              </a:defRPr>
+            </a:pPr>
+            <a:r>
+              <a:t>—  Discovering the cancellation only at the gate or via a delayed SMS.</a:t>
             </a:r>
           </a:p>
           <a:p>
             <a:pPr>
+              <a:lnSpc>
+                <a:spcPct val="118000"/>
+              </a:lnSpc>
               <a:spcAft>
                 <a:spcPts val="800"/>
               </a:spcAft>
-              <a:defRPr sz="1300">
-                <a:solidFill>
-                  <a:srgbClr val="14532D"/>
-                </a:solidFill>
-              </a:defRPr>
-            </a:pPr>
-            <a:r>
-              <a:t>• Instant push notification with pre-cached flight + hotel + ground options.</a:t>
+              <a:defRPr sz="1250">
+                <a:solidFill>
+                  <a:srgbClr val="8A3B2E"/>
+                </a:solidFill>
+                <a:latin typeface="Avenir Next"/>
+              </a:defRPr>
+            </a:pPr>
+            <a:r>
+              <a:t>—  45+ minute hold times with airline customer care centres.</a:t>
             </a:r>
           </a:p>
           <a:p>
             <a:pPr>
+              <a:lnSpc>
+                <a:spcPct val="118000"/>
+              </a:lnSpc>
               <a:spcAft>
                 <a:spcPts val="800"/>
               </a:spcAft>
-              <a:defRPr sz="1300">
-                <a:solidFill>
-                  <a:srgbClr val="14532D"/>
-                </a:solidFill>
-              </a:defRPr>
-            </a:pPr>
-            <a:r>
-              <a:t>• 1-tap pre-authorisation or autopilot protection without phone queues.</a:t>
+              <a:defRPr sz="1250">
+                <a:solidFill>
+                  <a:srgbClr val="8A3B2E"/>
+                </a:solidFill>
+                <a:latin typeface="Avenir Next"/>
+              </a:defRPr>
+            </a:pPr>
+            <a:r>
+              <a:t>—  Scrambling for overpriced alternate flights and airport hotels.</a:t>
             </a:r>
           </a:p>
           <a:p>
             <a:pPr>
+              <a:lnSpc>
+                <a:spcPct val="118000"/>
+              </a:lnSpc>
               <a:spcAft>
                 <a:spcPts val="800"/>
               </a:spcAft>
-              <a:defRPr sz="1300">
-                <a:solidFill>
-                  <a:srgbClr val="14532D"/>
-                </a:solidFill>
-              </a:defRPr>
-            </a:pPr>
-            <a:r>
-              <a:t>• Automatic compensation claims &amp; zero out-of-pocket stress.</a:t>
+              <a:defRPr sz="1250">
+                <a:solidFill>
+                  <a:srgbClr val="8A3B2E"/>
+                </a:solidFill>
+                <a:latin typeface="Avenir Next"/>
+              </a:defRPr>
+            </a:pPr>
+            <a:r>
+              <a:t>—  Opaque DGCA duty-of-care claims requiring manual paperwork.</a:t>
+            </a:r>
+          </a:p>
+        </p:txBody>
+      </p:sp>
+      <p:sp>
+        <p:nvSpPr>
+          <p:cNvPr id="8" name="Rounded Rectangle 7"/>
+          <p:cNvSpPr/>
+          <p:nvPr/>
+        </p:nvSpPr>
+        <p:spPr>
+          <a:xfrm>
+            <a:off x="6263640" y="1783080"/>
+            <a:ext cx="5166360" cy="4251960"/>
+          </a:xfrm>
+          <a:prstGeom prst="roundRect">
+            <a:avLst>
+              <a:gd name="adj" fmla="val 6000"/>
+            </a:avLst>
+          </a:prstGeom>
+          <a:solidFill>
+            <a:srgbClr val="E7EEE2"/>
+          </a:solidFill>
+          <a:ln w="9525">
+            <a:solidFill>
+              <a:srgbClr val="C9D9C0"/>
+            </a:solidFill>
+          </a:ln>
+          <a:effectLst/>
+        </p:spPr>
+        <p:style>
+          <a:lnRef idx="1">
+            <a:schemeClr val="accent1"/>
+          </a:lnRef>
+          <a:fillRef idx="3">
+            <a:schemeClr val="accent1"/>
+          </a:fillRef>
+          <a:effectRef idx="2">
+            <a:schemeClr val="accent1"/>
+          </a:effectRef>
+          <a:fontRef idx="minor">
+            <a:schemeClr val="lt1"/>
+          </a:fontRef>
+        </p:style>
+        <p:txBody>
+          <a:bodyPr rtlCol="0" anchor="ctr" lIns="256032" rIns="256032" tIns="256032" bIns="256032" wrap="square"/>
+          <a:lstStyle/>
+          <a:p>
+            <a:pPr algn="ctr">
+              <a:spcAft>
+                <a:spcPts val="1200"/>
+              </a:spcAft>
+              <a:defRPr sz="1600" b="1">
+                <a:solidFill>
+                  <a:srgbClr val="3F5D3A"/>
+                </a:solidFill>
+                <a:latin typeface="Georgia"/>
+              </a:defRPr>
+            </a:pPr>
+            <a:r>
+              <a:t>ZKD Concierge — proactive and autonomous</a:t>
+            </a:r>
+          </a:p>
+          <a:p>
+            <a:pPr>
+              <a:lnSpc>
+                <a:spcPct val="118000"/>
+              </a:lnSpc>
+              <a:spcAft>
+                <a:spcPts val="800"/>
+              </a:spcAft>
+              <a:defRPr sz="1250">
+                <a:solidFill>
+                  <a:srgbClr val="3F5D3A"/>
+                </a:solidFill>
+                <a:latin typeface="Avenir Next"/>
+              </a:defRPr>
+            </a:pPr>
+            <a:r>
+              <a:t>—  Predictive warning ~42s before the formal airline cancellation.</a:t>
+            </a:r>
+          </a:p>
+          <a:p>
+            <a:pPr>
+              <a:lnSpc>
+                <a:spcPct val="118000"/>
+              </a:lnSpc>
+              <a:spcAft>
+                <a:spcPts val="800"/>
+              </a:spcAft>
+              <a:defRPr sz="1250">
+                <a:solidFill>
+                  <a:srgbClr val="3F5D3A"/>
+                </a:solidFill>
+                <a:latin typeface="Avenir Next"/>
+              </a:defRPr>
+            </a:pPr>
+            <a:r>
+              <a:t>—  Instant push notification with pre-cached flight, hotel and ground options.</a:t>
+            </a:r>
+          </a:p>
+          <a:p>
+            <a:pPr>
+              <a:lnSpc>
+                <a:spcPct val="118000"/>
+              </a:lnSpc>
+              <a:spcAft>
+                <a:spcPts val="800"/>
+              </a:spcAft>
+              <a:defRPr sz="1250">
+                <a:solidFill>
+                  <a:srgbClr val="3F5D3A"/>
+                </a:solidFill>
+                <a:latin typeface="Avenir Next"/>
+              </a:defRPr>
+            </a:pPr>
+            <a:r>
+              <a:t>—  1-tap pre-authorisation, or autopilot protection, with no phone queues.</a:t>
+            </a:r>
+          </a:p>
+          <a:p>
+            <a:pPr>
+              <a:lnSpc>
+                <a:spcPct val="118000"/>
+              </a:lnSpc>
+              <a:spcAft>
+                <a:spcPts val="800"/>
+              </a:spcAft>
+              <a:defRPr sz="1250">
+                <a:solidFill>
+                  <a:srgbClr val="3F5D3A"/>
+                </a:solidFill>
+                <a:latin typeface="Avenir Next"/>
+              </a:defRPr>
+            </a:pPr>
+            <a:r>
+              <a:t>—  Automatic compensation claims and zero out-of-pocket stress.</a:t>
             </a:r>
           </a:p>
         </p:txBody>
@@ -3854,96 +4271,25 @@
       <p:grpSpPr/>
       <p:sp>
         <p:nvSpPr>
-          <p:cNvPr id="2" name="TextBox 1"/>
-          <p:cNvSpPr txBox="1"/>
+          <p:cNvPr id="2" name="Rectangle 1"/>
+          <p:cNvSpPr/>
           <p:nvPr/>
         </p:nvSpPr>
         <p:spPr>
           <a:xfrm>
-            <a:off x="731520" y="457200"/>
-            <a:ext cx="10698480" cy="365760"/>
+            <a:off x="0" y="0"/>
+            <a:ext cx="12191695" cy="6858000"/>
           </a:xfrm>
           <a:prstGeom prst="rect">
             <a:avLst/>
           </a:prstGeom>
-          <a:noFill/>
-        </p:spPr>
-        <p:txBody>
-          <a:bodyPr wrap="square">
-            <a:spAutoFit/>
-          </a:bodyPr>
-          <a:lstStyle/>
-          <a:p>
-            <a:pPr>
-              <a:defRPr sz="1000" b="1">
-                <a:solidFill>
-                  <a:srgbClr val="006FCF"/>
-                </a:solidFill>
-              </a:defRPr>
-            </a:pPr>
-            <a:r>
-              <a:t>ZKD CONCIERGE · AMERICAN EXPRESS / CODESTREET 2026</a:t>
-            </a:r>
-          </a:p>
-        </p:txBody>
-      </p:sp>
-      <p:sp>
-        <p:nvSpPr>
-          <p:cNvPr id="3" name="TextBox 2"/>
-          <p:cNvSpPr txBox="1"/>
-          <p:nvPr/>
-        </p:nvSpPr>
-        <p:spPr>
-          <a:xfrm>
-            <a:off x="731520" y="731520"/>
-            <a:ext cx="10698480" cy="731520"/>
-          </a:xfrm>
-          <a:prstGeom prst="rect">
-            <a:avLst/>
-          </a:prstGeom>
-          <a:noFill/>
-        </p:spPr>
-        <p:txBody>
-          <a:bodyPr wrap="square">
-            <a:spAutoFit/>
-          </a:bodyPr>
-          <a:lstStyle/>
-          <a:p>
-            <a:pPr>
-              <a:defRPr sz="2600" b="1">
-                <a:solidFill>
-                  <a:srgbClr val="0F172A"/>
-                </a:solidFill>
-              </a:defRPr>
-            </a:pPr>
-            <a:r>
-              <a:t>Live MVP Demo Walkthrough (Pre-Tea Break Hero Flow)</a:t>
-            </a:r>
-          </a:p>
-        </p:txBody>
-      </p:sp>
-      <p:sp>
-        <p:nvSpPr>
-          <p:cNvPr id="4" name="Rounded Rectangle 3"/>
-          <p:cNvSpPr/>
-          <p:nvPr/>
-        </p:nvSpPr>
-        <p:spPr>
-          <a:xfrm>
-            <a:off x="731520" y="1645920"/>
-            <a:ext cx="5212080" cy="2011680"/>
-          </a:xfrm>
-          <a:prstGeom prst="roundRect">
-            <a:avLst/>
-          </a:prstGeom>
           <a:solidFill>
-            <a:srgbClr val="F8FAFC"/>
+            <a:srgbClr val="FAF9F5"/>
           </a:solidFill>
           <a:ln>
-            <a:solidFill>
-              <a:srgbClr val="E2E8F0"/>
-            </a:solidFill>
+            <a:noFill/>
           </a:ln>
+          <a:effectLst/>
         </p:spPr>
         <p:style>
           <a:lnRef idx="1">
@@ -3960,59 +4306,106 @@
           </a:fontRef>
         </p:style>
         <p:txBody>
-          <a:bodyPr rtlCol="0" anchor="ctr" wrap="square"/>
-          <a:lstStyle/>
-          <a:p>
-            <a:pPr algn="ctr">
-              <a:spcAft>
-                <a:spcPts val="600"/>
-              </a:spcAft>
-              <a:defRPr sz="1500" b="1">
-                <a:solidFill>
-                  <a:srgbClr val="006FCF"/>
-                </a:solidFill>
-              </a:defRPr>
-            </a:pPr>
-            <a:r>
-              <a:t>1. Operator Console (/ops)</a:t>
-            </a:r>
-          </a:p>
+          <a:bodyPr rtlCol="0" anchor="ctr"/>
+          <a:lstStyle/>
+          <a:p>
+            <a:pPr algn="ctr"/>
+          </a:p>
+        </p:txBody>
+      </p:sp>
+      <p:sp>
+        <p:nvSpPr>
+          <p:cNvPr id="3" name="TextBox 2"/>
+          <p:cNvSpPr txBox="1"/>
+          <p:nvPr/>
+        </p:nvSpPr>
+        <p:spPr>
+          <a:xfrm>
+            <a:off x="731520" y="502920"/>
+            <a:ext cx="10698480" cy="320040"/>
+          </a:xfrm>
+          <a:prstGeom prst="rect">
+            <a:avLst/>
+          </a:prstGeom>
+          <a:noFill/>
+        </p:spPr>
+        <p:txBody>
+          <a:bodyPr wrap="square">
+            <a:spAutoFit/>
+          </a:bodyPr>
+          <a:lstStyle/>
           <a:p>
             <a:pPr>
-              <a:defRPr sz="1300">
-                <a:solidFill>
-                  <a:srgbClr val="64748B"/>
-                </a:solidFill>
-              </a:defRPr>
-            </a:pPr>
-            <a:r>
-              <a:t>Trigger test disruptions locally or hosted; tests webhook and poller simulation channels instantly.</a:t>
-            </a:r>
-          </a:p>
-        </p:txBody>
-      </p:sp>
-      <p:sp>
-        <p:nvSpPr>
-          <p:cNvPr id="5" name="Rounded Rectangle 4"/>
+              <a:defRPr sz="1050" b="1">
+                <a:solidFill>
+                  <a:srgbClr val="B85C3E"/>
+                </a:solidFill>
+                <a:latin typeface="Avenir Next"/>
+              </a:defRPr>
+            </a:pPr>
+            <a:r>
+              <a:t>ZKD CONCIERGE  ·  AMERICAN EXPRESS  /  CODESTREET 2026</a:t>
+            </a:r>
+          </a:p>
+        </p:txBody>
+      </p:sp>
+      <p:sp>
+        <p:nvSpPr>
+          <p:cNvPr id="4" name="TextBox 3"/>
+          <p:cNvSpPr txBox="1"/>
+          <p:nvPr/>
+        </p:nvSpPr>
+        <p:spPr>
+          <a:xfrm>
+            <a:off x="731520" y="804672"/>
+            <a:ext cx="10058400" cy="777240"/>
+          </a:xfrm>
+          <a:prstGeom prst="rect">
+            <a:avLst/>
+          </a:prstGeom>
+          <a:noFill/>
+        </p:spPr>
+        <p:txBody>
+          <a:bodyPr wrap="square">
+            <a:spAutoFit/>
+          </a:bodyPr>
+          <a:lstStyle/>
+          <a:p>
+            <a:pPr>
+              <a:defRPr sz="2700" b="0">
+                <a:solidFill>
+                  <a:srgbClr val="1F1E1C"/>
+                </a:solidFill>
+                <a:latin typeface="Georgia"/>
+              </a:defRPr>
+            </a:pPr>
+            <a:r>
+              <a:t>Live MVP demo walkthrough (pre-tea-break hero flow)</a:t>
+            </a:r>
+          </a:p>
+        </p:txBody>
+      </p:sp>
+      <p:sp>
+        <p:nvSpPr>
+          <p:cNvPr id="5" name="Rectangle 4"/>
           <p:cNvSpPr/>
           <p:nvPr/>
         </p:nvSpPr>
         <p:spPr>
           <a:xfrm>
-            <a:off x="6217920" y="1645920"/>
-            <a:ext cx="5212080" cy="2011680"/>
-          </a:xfrm>
-          <a:prstGeom prst="roundRect">
+            <a:off x="731520" y="1481328"/>
+            <a:ext cx="502920" cy="44450"/>
+          </a:xfrm>
+          <a:prstGeom prst="rect">
             <a:avLst/>
           </a:prstGeom>
           <a:solidFill>
-            <a:srgbClr val="F8FAFC"/>
+            <a:srgbClr val="D97757"/>
           </a:solidFill>
           <a:ln>
-            <a:solidFill>
-              <a:srgbClr val="E2E8F0"/>
-            </a:solidFill>
+            <a:noFill/>
           </a:ln>
+          <a:effectLst/>
         </p:spPr>
         <p:style>
           <a:lnRef idx="1">
@@ -4029,59 +4422,74 @@
           </a:fontRef>
         </p:style>
         <p:txBody>
-          <a:bodyPr rtlCol="0" anchor="ctr" wrap="square"/>
-          <a:lstStyle/>
-          <a:p>
-            <a:pPr algn="ctr">
-              <a:spcAft>
-                <a:spcPts val="600"/>
-              </a:spcAft>
-              <a:defRPr sz="1500" b="1">
-                <a:solidFill>
-                  <a:srgbClr val="006FCF"/>
-                </a:solidFill>
-              </a:defRPr>
-            </a:pPr>
-            <a:r>
-              <a:t>2. Risk &amp; LLM Explanation</a:t>
-            </a:r>
-          </a:p>
-          <a:p>
-            <a:pPr>
-              <a:defRPr sz="1300">
-                <a:solidFill>
-                  <a:srgbClr val="64748B"/>
-                </a:solidFill>
-              </a:defRPr>
-            </a:pPr>
-            <a:r>
-              <a:t>Live risk gauge crossing thresholds with plain-language Gemini LLM explanation of weather/airline risk.</a:t>
-            </a:r>
-          </a:p>
-        </p:txBody>
-      </p:sp>
-      <p:sp>
-        <p:nvSpPr>
-          <p:cNvPr id="6" name="Rounded Rectangle 5"/>
+          <a:bodyPr rtlCol="0" anchor="ctr"/>
+          <a:lstStyle/>
+          <a:p>
+            <a:pPr algn="ctr"/>
+          </a:p>
+        </p:txBody>
+      </p:sp>
+      <p:sp>
+        <p:nvSpPr>
+          <p:cNvPr id="6" name="TextBox 5"/>
+          <p:cNvSpPr txBox="1"/>
+          <p:nvPr/>
+        </p:nvSpPr>
+        <p:spPr>
+          <a:xfrm>
+            <a:off x="11430000" y="6446520"/>
+            <a:ext cx="548640" cy="320040"/>
+          </a:xfrm>
+          <a:prstGeom prst="rect">
+            <a:avLst/>
+          </a:prstGeom>
+          <a:noFill/>
+        </p:spPr>
+        <p:txBody>
+          <a:bodyPr wrap="none">
+            <a:spAutoFit/>
+          </a:bodyPr>
+          <a:lstStyle/>
+          <a:p>
+            <a:pPr algn="r">
+              <a:defRPr sz="1000">
+                <a:solidFill>
+                  <a:srgbClr val="5E5A52"/>
+                </a:solidFill>
+                <a:latin typeface="Avenir Next"/>
+              </a:defRPr>
+            </a:pPr>
+            <a:r>
+              <a:t>03</a:t>
+            </a:r>
+          </a:p>
+        </p:txBody>
+      </p:sp>
+      <p:sp>
+        <p:nvSpPr>
+          <p:cNvPr id="7" name="Rounded Rectangle 6"/>
           <p:cNvSpPr/>
           <p:nvPr/>
         </p:nvSpPr>
         <p:spPr>
           <a:xfrm>
-            <a:off x="731520" y="3931920"/>
-            <a:ext cx="5212080" cy="2011680"/>
+            <a:off x="731520" y="1783080"/>
+            <a:ext cx="5212080" cy="1965960"/>
           </a:xfrm>
           <a:prstGeom prst="roundRect">
-            <a:avLst/>
+            <a:avLst>
+              <a:gd name="adj" fmla="val 6000"/>
+            </a:avLst>
           </a:prstGeom>
           <a:solidFill>
-            <a:srgbClr val="F8FAFC"/>
+            <a:srgbClr val="FFFFFF"/>
           </a:solidFill>
-          <a:ln>
+          <a:ln w="9525">
             <a:solidFill>
-              <a:srgbClr val="E2E8F0"/>
+              <a:srgbClr val="E4E0D6"/>
             </a:solidFill>
           </a:ln>
+          <a:effectLst/>
         </p:spPr>
         <p:style>
           <a:lnRef idx="1">
@@ -4098,59 +4506,67 @@
           </a:fontRef>
         </p:style>
         <p:txBody>
-          <a:bodyPr rtlCol="0" anchor="ctr" wrap="square"/>
+          <a:bodyPr rtlCol="0" anchor="ctr" lIns="256032" rIns="256032" tIns="256032" bIns="256032" wrap="square"/>
           <a:lstStyle/>
           <a:p>
             <a:pPr algn="ctr">
               <a:spcAft>
-                <a:spcPts val="600"/>
+                <a:spcPts val="800"/>
               </a:spcAft>
-              <a:defRPr sz="1500" b="1">
-                <a:solidFill>
-                  <a:srgbClr val="006FCF"/>
-                </a:solidFill>
-              </a:defRPr>
-            </a:pPr>
-            <a:r>
-              <a:t>3. Edge Case: Self-Cancel</a:t>
+              <a:defRPr sz="1550" b="1">
+                <a:solidFill>
+                  <a:srgbClr val="B85C3E"/>
+                </a:solidFill>
+                <a:latin typeface="Georgia"/>
+              </a:defRPr>
+            </a:pPr>
+            <a:r>
+              <a:t>01   Operator console (/ops)</a:t>
             </a:r>
           </a:p>
           <a:p>
             <a:pPr>
-              <a:defRPr sz="1300">
-                <a:solidFill>
-                  <a:srgbClr val="64748B"/>
-                </a:solidFill>
-              </a:defRPr>
-            </a:pPr>
-            <a:r>
-              <a:t>Demonstrates member-initiated changes, clean hand-off (`handed-over`), and zero-friction state sync.</a:t>
-            </a:r>
-          </a:p>
-        </p:txBody>
-      </p:sp>
-      <p:sp>
-        <p:nvSpPr>
-          <p:cNvPr id="7" name="Rounded Rectangle 6"/>
+              <a:lnSpc>
+                <a:spcPct val="120000"/>
+              </a:lnSpc>
+              <a:defRPr sz="1250">
+                <a:solidFill>
+                  <a:srgbClr val="5E5A52"/>
+                </a:solidFill>
+                <a:latin typeface="Avenir Next"/>
+              </a:defRPr>
+            </a:pPr>
+            <a:r>
+              <a:t>Trigger test disruptions locally or hosted; exercises the webhook and poller simulation channels instantly.</a:t>
+            </a:r>
+          </a:p>
+        </p:txBody>
+      </p:sp>
+      <p:sp>
+        <p:nvSpPr>
+          <p:cNvPr id="8" name="Rounded Rectangle 7"/>
           <p:cNvSpPr/>
           <p:nvPr/>
         </p:nvSpPr>
         <p:spPr>
           <a:xfrm>
-            <a:off x="6217920" y="3931920"/>
-            <a:ext cx="5212080" cy="2011680"/>
+            <a:off x="6217920" y="1783080"/>
+            <a:ext cx="5212080" cy="1965960"/>
           </a:xfrm>
           <a:prstGeom prst="roundRect">
-            <a:avLst/>
+            <a:avLst>
+              <a:gd name="adj" fmla="val 6000"/>
+            </a:avLst>
           </a:prstGeom>
           <a:solidFill>
-            <a:srgbClr val="F8FAFC"/>
+            <a:srgbClr val="FFFFFF"/>
           </a:solidFill>
-          <a:ln>
+          <a:ln w="9525">
             <a:solidFill>
-              <a:srgbClr val="E2E8F0"/>
+              <a:srgbClr val="E4E0D6"/>
             </a:solidFill>
           </a:ln>
+          <a:effectLst/>
         </p:spPr>
         <p:style>
           <a:lnRef idx="1">
@@ -4167,29 +4583,188 @@
           </a:fontRef>
         </p:style>
         <p:txBody>
-          <a:bodyPr rtlCol="0" anchor="ctr" wrap="square"/>
+          <a:bodyPr rtlCol="0" anchor="ctr" lIns="256032" rIns="256032" tIns="256032" bIns="256032" wrap="square"/>
           <a:lstStyle/>
           <a:p>
             <a:pPr algn="ctr">
               <a:spcAft>
-                <a:spcPts val="600"/>
+                <a:spcPts val="800"/>
               </a:spcAft>
-              <a:defRPr sz="1500" b="1">
-                <a:solidFill>
-                  <a:srgbClr val="006FCF"/>
-                </a:solidFill>
-              </a:defRPr>
-            </a:pPr>
-            <a:r>
-              <a:t>4. 11-Sec Autonomous Recovery</a:t>
+              <a:defRPr sz="1550" b="1">
+                <a:solidFill>
+                  <a:srgbClr val="B85C3E"/>
+                </a:solidFill>
+                <a:latin typeface="Georgia"/>
+              </a:defRPr>
+            </a:pPr>
+            <a:r>
+              <a:t>02   Risk &amp; LLM explanation</a:t>
             </a:r>
           </a:p>
           <a:p>
             <a:pPr>
-              <a:defRPr sz="1300">
-                <a:solidFill>
-                  <a:srgbClr val="64748B"/>
-                </a:solidFill>
+              <a:lnSpc>
+                <a:spcPct val="120000"/>
+              </a:lnSpc>
+              <a:defRPr sz="1250">
+                <a:solidFill>
+                  <a:srgbClr val="5E5A52"/>
+                </a:solidFill>
+                <a:latin typeface="Avenir Next"/>
+              </a:defRPr>
+            </a:pPr>
+            <a:r>
+              <a:t>Live risk gauge crossing thresholds, with a plain-language Gemini explanation of the weather/airline risk.</a:t>
+            </a:r>
+          </a:p>
+        </p:txBody>
+      </p:sp>
+      <p:sp>
+        <p:nvSpPr>
+          <p:cNvPr id="9" name="Rounded Rectangle 8"/>
+          <p:cNvSpPr/>
+          <p:nvPr/>
+        </p:nvSpPr>
+        <p:spPr>
+          <a:xfrm>
+            <a:off x="731520" y="3995928"/>
+            <a:ext cx="5212080" cy="1965960"/>
+          </a:xfrm>
+          <a:prstGeom prst="roundRect">
+            <a:avLst>
+              <a:gd name="adj" fmla="val 6000"/>
+            </a:avLst>
+          </a:prstGeom>
+          <a:solidFill>
+            <a:srgbClr val="FFFFFF"/>
+          </a:solidFill>
+          <a:ln w="9525">
+            <a:solidFill>
+              <a:srgbClr val="E4E0D6"/>
+            </a:solidFill>
+          </a:ln>
+          <a:effectLst/>
+        </p:spPr>
+        <p:style>
+          <a:lnRef idx="1">
+            <a:schemeClr val="accent1"/>
+          </a:lnRef>
+          <a:fillRef idx="3">
+            <a:schemeClr val="accent1"/>
+          </a:fillRef>
+          <a:effectRef idx="2">
+            <a:schemeClr val="accent1"/>
+          </a:effectRef>
+          <a:fontRef idx="minor">
+            <a:schemeClr val="lt1"/>
+          </a:fontRef>
+        </p:style>
+        <p:txBody>
+          <a:bodyPr rtlCol="0" anchor="ctr" lIns="256032" rIns="256032" tIns="256032" bIns="256032" wrap="square"/>
+          <a:lstStyle/>
+          <a:p>
+            <a:pPr algn="ctr">
+              <a:spcAft>
+                <a:spcPts val="800"/>
+              </a:spcAft>
+              <a:defRPr sz="1550" b="1">
+                <a:solidFill>
+                  <a:srgbClr val="B85C3E"/>
+                </a:solidFill>
+                <a:latin typeface="Georgia"/>
+              </a:defRPr>
+            </a:pPr>
+            <a:r>
+              <a:t>03   Edge case: self-cancel</a:t>
+            </a:r>
+          </a:p>
+          <a:p>
+            <a:pPr>
+              <a:lnSpc>
+                <a:spcPct val="120000"/>
+              </a:lnSpc>
+              <a:defRPr sz="1250">
+                <a:solidFill>
+                  <a:srgbClr val="5E5A52"/>
+                </a:solidFill>
+                <a:latin typeface="Avenir Next"/>
+              </a:defRPr>
+            </a:pPr>
+            <a:r>
+              <a:t>Member-initiated changes, a clean hand-off (`handed-over`), and zero-friction state sync.</a:t>
+            </a:r>
+          </a:p>
+        </p:txBody>
+      </p:sp>
+      <p:sp>
+        <p:nvSpPr>
+          <p:cNvPr id="10" name="Rounded Rectangle 9"/>
+          <p:cNvSpPr/>
+          <p:nvPr/>
+        </p:nvSpPr>
+        <p:spPr>
+          <a:xfrm>
+            <a:off x="6217920" y="3995928"/>
+            <a:ext cx="5212080" cy="1965960"/>
+          </a:xfrm>
+          <a:prstGeom prst="roundRect">
+            <a:avLst>
+              <a:gd name="adj" fmla="val 6000"/>
+            </a:avLst>
+          </a:prstGeom>
+          <a:solidFill>
+            <a:srgbClr val="FFFFFF"/>
+          </a:solidFill>
+          <a:ln w="9525">
+            <a:solidFill>
+              <a:srgbClr val="E4E0D6"/>
+            </a:solidFill>
+          </a:ln>
+          <a:effectLst/>
+        </p:spPr>
+        <p:style>
+          <a:lnRef idx="1">
+            <a:schemeClr val="accent1"/>
+          </a:lnRef>
+          <a:fillRef idx="3">
+            <a:schemeClr val="accent1"/>
+          </a:fillRef>
+          <a:effectRef idx="2">
+            <a:schemeClr val="accent1"/>
+          </a:effectRef>
+          <a:fontRef idx="minor">
+            <a:schemeClr val="lt1"/>
+          </a:fontRef>
+        </p:style>
+        <p:txBody>
+          <a:bodyPr rtlCol="0" anchor="ctr" lIns="256032" rIns="256032" tIns="256032" bIns="256032" wrap="square"/>
+          <a:lstStyle/>
+          <a:p>
+            <a:pPr algn="ctr">
+              <a:spcAft>
+                <a:spcPts val="800"/>
+              </a:spcAft>
+              <a:defRPr sz="1550" b="1">
+                <a:solidFill>
+                  <a:srgbClr val="B85C3E"/>
+                </a:solidFill>
+                <a:latin typeface="Georgia"/>
+              </a:defRPr>
+            </a:pPr>
+            <a:r>
+              <a:t>04   11-second autonomous recovery</a:t>
+            </a:r>
+          </a:p>
+          <a:p>
+            <a:pPr>
+              <a:lnSpc>
+                <a:spcPct val="120000"/>
+              </a:lnSpc>
+              <a:defRPr sz="1250">
+                <a:solidFill>
+                  <a:srgbClr val="5E5A52"/>
+                </a:solidFill>
+                <a:latin typeface="Avenir Next"/>
               </a:defRPr>
             </a:pPr>
             <a:r>
@@ -4218,96 +4793,25 @@
       <p:grpSpPr/>
       <p:sp>
         <p:nvSpPr>
-          <p:cNvPr id="2" name="TextBox 1"/>
-          <p:cNvSpPr txBox="1"/>
+          <p:cNvPr id="2" name="Rectangle 1"/>
+          <p:cNvSpPr/>
           <p:nvPr/>
         </p:nvSpPr>
         <p:spPr>
           <a:xfrm>
-            <a:off x="731520" y="457200"/>
-            <a:ext cx="10698480" cy="365760"/>
+            <a:off x="0" y="0"/>
+            <a:ext cx="12191695" cy="6858000"/>
           </a:xfrm>
           <a:prstGeom prst="rect">
             <a:avLst/>
           </a:prstGeom>
-          <a:noFill/>
-        </p:spPr>
-        <p:txBody>
-          <a:bodyPr wrap="square">
-            <a:spAutoFit/>
-          </a:bodyPr>
-          <a:lstStyle/>
-          <a:p>
-            <a:pPr>
-              <a:defRPr sz="1000" b="1">
-                <a:solidFill>
-                  <a:srgbClr val="006FCF"/>
-                </a:solidFill>
-              </a:defRPr>
-            </a:pPr>
-            <a:r>
-              <a:t>ZKD CONCIERGE · AMERICAN EXPRESS / CODESTREET 2026</a:t>
-            </a:r>
-          </a:p>
-        </p:txBody>
-      </p:sp>
-      <p:sp>
-        <p:nvSpPr>
-          <p:cNvPr id="3" name="TextBox 2"/>
-          <p:cNvSpPr txBox="1"/>
-          <p:nvPr/>
-        </p:nvSpPr>
-        <p:spPr>
-          <a:xfrm>
-            <a:off x="731520" y="731520"/>
-            <a:ext cx="10698480" cy="731520"/>
-          </a:xfrm>
-          <a:prstGeom prst="rect">
-            <a:avLst/>
-          </a:prstGeom>
-          <a:noFill/>
-        </p:spPr>
-        <p:txBody>
-          <a:bodyPr wrap="square">
-            <a:spAutoFit/>
-          </a:bodyPr>
-          <a:lstStyle/>
-          <a:p>
-            <a:pPr>
-              <a:defRPr sz="2600" b="1">
-                <a:solidFill>
-                  <a:srgbClr val="0F172A"/>
-                </a:solidFill>
-              </a:defRPr>
-            </a:pPr>
-            <a:r>
-              <a:t>Predictive ML Model &amp; Personalization (The Spotify Analogy)</a:t>
-            </a:r>
-          </a:p>
-        </p:txBody>
-      </p:sp>
-      <p:sp>
-        <p:nvSpPr>
-          <p:cNvPr id="4" name="Rounded Rectangle 3"/>
-          <p:cNvSpPr/>
-          <p:nvPr/>
-        </p:nvSpPr>
-        <p:spPr>
-          <a:xfrm>
-            <a:off x="731520" y="1645920"/>
-            <a:ext cx="5120640" cy="4389120"/>
-          </a:xfrm>
-          <a:prstGeom prst="roundRect">
-            <a:avLst/>
-          </a:prstGeom>
           <a:solidFill>
-            <a:srgbClr val="F8FAFC"/>
+            <a:srgbClr val="FAF9F5"/>
           </a:solidFill>
           <a:ln>
-            <a:solidFill>
-              <a:srgbClr val="E2E8F0"/>
-            </a:solidFill>
+            <a:noFill/>
           </a:ln>
+          <a:effectLst/>
         </p:spPr>
         <p:style>
           <a:lnRef idx="1">
@@ -4324,107 +4828,106 @@
           </a:fontRef>
         </p:style>
         <p:txBody>
-          <a:bodyPr rtlCol="0" anchor="ctr" wrap="square"/>
-          <a:lstStyle/>
-          <a:p>
-            <a:pPr algn="ctr">
-              <a:spcAft>
-                <a:spcPts val="1000"/>
-              </a:spcAft>
-              <a:defRPr sz="1600" b="1">
-                <a:solidFill>
-                  <a:srgbClr val="0F172A"/>
-                </a:solidFill>
-              </a:defRPr>
-            </a:pPr>
-            <a:r>
-              <a:t>Self-Trained Cancellation Risk Model</a:t>
-            </a:r>
-          </a:p>
+          <a:bodyPr rtlCol="0" anchor="ctr"/>
+          <a:lstStyle/>
+          <a:p>
+            <a:pPr algn="ctr"/>
+          </a:p>
+        </p:txBody>
+      </p:sp>
+      <p:sp>
+        <p:nvSpPr>
+          <p:cNvPr id="3" name="TextBox 2"/>
+          <p:cNvSpPr txBox="1"/>
+          <p:nvPr/>
+        </p:nvSpPr>
+        <p:spPr>
+          <a:xfrm>
+            <a:off x="731520" y="502920"/>
+            <a:ext cx="10698480" cy="320040"/>
+          </a:xfrm>
+          <a:prstGeom prst="rect">
+            <a:avLst/>
+          </a:prstGeom>
+          <a:noFill/>
+        </p:spPr>
+        <p:txBody>
+          <a:bodyPr wrap="square">
+            <a:spAutoFit/>
+          </a:bodyPr>
+          <a:lstStyle/>
           <a:p>
             <a:pPr>
-              <a:spcAft>
-                <a:spcPts val="600"/>
-              </a:spcAft>
-              <a:defRPr sz="1200">
-                <a:solidFill>
-                  <a:srgbClr val="64748B"/>
-                </a:solidFill>
-              </a:defRPr>
-            </a:pPr>
-            <a:r>
-              <a:t>• Built in `zkd-risk-model/`: XGBoost trained on real US DOT/BTS &amp; Brazil ANAC historical data.</a:t>
-            </a:r>
-          </a:p>
+              <a:defRPr sz="1050" b="1">
+                <a:solidFill>
+                  <a:srgbClr val="B85C3E"/>
+                </a:solidFill>
+                <a:latin typeface="Avenir Next"/>
+              </a:defRPr>
+            </a:pPr>
+            <a:r>
+              <a:t>ZKD CONCIERGE  ·  AMERICAN EXPRESS  /  CODESTREET 2026</a:t>
+            </a:r>
+          </a:p>
+        </p:txBody>
+      </p:sp>
+      <p:sp>
+        <p:nvSpPr>
+          <p:cNvPr id="4" name="TextBox 3"/>
+          <p:cNvSpPr txBox="1"/>
+          <p:nvPr/>
+        </p:nvSpPr>
+        <p:spPr>
+          <a:xfrm>
+            <a:off x="731520" y="804672"/>
+            <a:ext cx="10058400" cy="777240"/>
+          </a:xfrm>
+          <a:prstGeom prst="rect">
+            <a:avLst/>
+          </a:prstGeom>
+          <a:noFill/>
+        </p:spPr>
+        <p:txBody>
+          <a:bodyPr wrap="square">
+            <a:spAutoFit/>
+          </a:bodyPr>
+          <a:lstStyle/>
           <a:p>
             <a:pPr>
-              <a:spcAft>
-                <a:spcPts val="600"/>
-              </a:spcAft>
-              <a:defRPr sz="1200">
-                <a:solidFill>
-                  <a:srgbClr val="64748B"/>
-                </a:solidFill>
-              </a:defRPr>
-            </a:pPr>
-            <a:r>
-              <a:t>• Extracts weather, route congestion, and airline rolling delays.</a:t>
-            </a:r>
-          </a:p>
-          <a:p>
-            <a:pPr>
-              <a:spcAft>
-                <a:spcPts val="600"/>
-              </a:spcAft>
-              <a:defRPr sz="1200">
-                <a:solidFill>
-                  <a:srgbClr val="64748B"/>
-                </a:solidFill>
-              </a:defRPr>
-            </a:pPr>
-            <a:r>
-              <a:t>• Outputs continuous probability score with adaptive thresholds (not flat 25/55/80).</a:t>
-            </a:r>
-          </a:p>
-          <a:p>
-            <a:pPr>
-              <a:spcAft>
-                <a:spcPts val="600"/>
-              </a:spcAft>
-              <a:defRPr sz="1200">
-                <a:solidFill>
-                  <a:srgbClr val="64748B"/>
-                </a:solidFill>
-              </a:defRPr>
-            </a:pPr>
-            <a:r>
-              <a:t>• Advisory role: decides when we start preparing, never whether we spend member money.</a:t>
-            </a:r>
-          </a:p>
-        </p:txBody>
-      </p:sp>
-      <p:sp>
-        <p:nvSpPr>
-          <p:cNvPr id="5" name="Rounded Rectangle 4"/>
+              <a:defRPr sz="2700" b="0">
+                <a:solidFill>
+                  <a:srgbClr val="1F1E1C"/>
+                </a:solidFill>
+                <a:latin typeface="Georgia"/>
+              </a:defRPr>
+            </a:pPr>
+            <a:r>
+              <a:t>Predictive ML model &amp; personalization — the Spotify analogy</a:t>
+            </a:r>
+          </a:p>
+        </p:txBody>
+      </p:sp>
+      <p:sp>
+        <p:nvSpPr>
+          <p:cNvPr id="5" name="Rectangle 4"/>
           <p:cNvSpPr/>
           <p:nvPr/>
         </p:nvSpPr>
         <p:spPr>
           <a:xfrm>
-            <a:off x="6217920" y="1645920"/>
-            <a:ext cx="5212080" cy="4389120"/>
-          </a:xfrm>
-          <a:prstGeom prst="roundRect">
+            <a:off x="731520" y="1481328"/>
+            <a:ext cx="502920" cy="44450"/>
+          </a:xfrm>
+          <a:prstGeom prst="rect">
             <a:avLst/>
           </a:prstGeom>
           <a:solidFill>
-            <a:srgbClr val="F8FAFC"/>
+            <a:srgbClr val="D97757"/>
           </a:solidFill>
           <a:ln>
-            <a:solidFill>
-              <a:srgbClr val="E2E8F0"/>
-            </a:solidFill>
+            <a:noFill/>
           </a:ln>
+          <a:effectLst/>
         </p:spPr>
         <p:style>
           <a:lnRef idx="1">
@@ -4441,81 +4944,319 @@
           </a:fontRef>
         </p:style>
         <p:txBody>
-          <a:bodyPr rtlCol="0" anchor="ctr" wrap="square"/>
+          <a:bodyPr rtlCol="0" anchor="ctr"/>
+          <a:lstStyle/>
+          <a:p>
+            <a:pPr algn="ctr"/>
+          </a:p>
+        </p:txBody>
+      </p:sp>
+      <p:sp>
+        <p:nvSpPr>
+          <p:cNvPr id="6" name="TextBox 5"/>
+          <p:cNvSpPr txBox="1"/>
+          <p:nvPr/>
+        </p:nvSpPr>
+        <p:spPr>
+          <a:xfrm>
+            <a:off x="11430000" y="6446520"/>
+            <a:ext cx="548640" cy="320040"/>
+          </a:xfrm>
+          <a:prstGeom prst="rect">
+            <a:avLst/>
+          </a:prstGeom>
+          <a:noFill/>
+        </p:spPr>
+        <p:txBody>
+          <a:bodyPr wrap="none">
+            <a:spAutoFit/>
+          </a:bodyPr>
+          <a:lstStyle/>
+          <a:p>
+            <a:pPr algn="r">
+              <a:defRPr sz="1000">
+                <a:solidFill>
+                  <a:srgbClr val="5E5A52"/>
+                </a:solidFill>
+                <a:latin typeface="Avenir Next"/>
+              </a:defRPr>
+            </a:pPr>
+            <a:r>
+              <a:t>04</a:t>
+            </a:r>
+          </a:p>
+        </p:txBody>
+      </p:sp>
+      <p:sp>
+        <p:nvSpPr>
+          <p:cNvPr id="7" name="Rounded Rectangle 6"/>
+          <p:cNvSpPr/>
+          <p:nvPr/>
+        </p:nvSpPr>
+        <p:spPr>
+          <a:xfrm>
+            <a:off x="731520" y="1783080"/>
+            <a:ext cx="5120640" cy="4251960"/>
+          </a:xfrm>
+          <a:prstGeom prst="roundRect">
+            <a:avLst>
+              <a:gd name="adj" fmla="val 6000"/>
+            </a:avLst>
+          </a:prstGeom>
+          <a:solidFill>
+            <a:srgbClr val="FFFFFF"/>
+          </a:solidFill>
+          <a:ln w="9525">
+            <a:solidFill>
+              <a:srgbClr val="E4E0D6"/>
+            </a:solidFill>
+          </a:ln>
+          <a:effectLst/>
+        </p:spPr>
+        <p:style>
+          <a:lnRef idx="1">
+            <a:schemeClr val="accent1"/>
+          </a:lnRef>
+          <a:fillRef idx="3">
+            <a:schemeClr val="accent1"/>
+          </a:fillRef>
+          <a:effectRef idx="2">
+            <a:schemeClr val="accent1"/>
+          </a:effectRef>
+          <a:fontRef idx="minor">
+            <a:schemeClr val="lt1"/>
+          </a:fontRef>
+        </p:style>
+        <p:txBody>
+          <a:bodyPr rtlCol="0" anchor="ctr" lIns="256032" rIns="256032" tIns="256032" bIns="256032" wrap="square"/>
           <a:lstStyle/>
           <a:p>
             <a:pPr algn="ctr">
               <a:spcAft>
-                <a:spcPts val="1000"/>
+                <a:spcPts val="1200"/>
               </a:spcAft>
               <a:defRPr sz="1600" b="1">
                 <a:solidFill>
-                  <a:srgbClr val="006FCF"/>
-                </a:solidFill>
-              </a:defRPr>
-            </a:pPr>
-            <a:r>
-              <a:t>Personalization: The Spotify / YouTube Analogy</a:t>
+                  <a:srgbClr val="1F1E1C"/>
+                </a:solidFill>
+                <a:latin typeface="Georgia"/>
+              </a:defRPr>
+            </a:pPr>
+            <a:r>
+              <a:t>Self-trained cancellation risk model</a:t>
             </a:r>
           </a:p>
           <a:p>
             <a:pPr>
+              <a:lnSpc>
+                <a:spcPct val="118000"/>
+              </a:lnSpc>
               <a:spcAft>
-                <a:spcPts val="600"/>
+                <a:spcPts val="800"/>
               </a:spcAft>
-              <a:defRPr sz="1200">
-                <a:solidFill>
-                  <a:srgbClr val="64748B"/>
-                </a:solidFill>
-              </a:defRPr>
-            </a:pPr>
-            <a:r>
-              <a:t>• Just like Spotify curates your discover weekly from listening history, ZKD learns cardmember preferences.</a:t>
+              <a:defRPr sz="1250">
+                <a:solidFill>
+                  <a:srgbClr val="5E5A52"/>
+                </a:solidFill>
+                <a:latin typeface="Avenir Next"/>
+              </a:defRPr>
+            </a:pPr>
+            <a:r>
+              <a:t>—  Built in zkd-risk-model/: XGBoost trained on real US DOT/BTS and Brazil ANAC historical data.</a:t>
             </a:r>
           </a:p>
           <a:p>
             <a:pPr>
+              <a:lnSpc>
+                <a:spcPct val="118000"/>
+              </a:lnSpc>
               <a:spcAft>
-                <a:spcPts val="600"/>
+                <a:spcPts val="800"/>
               </a:spcAft>
-              <a:defRPr sz="1200">
-                <a:solidFill>
-                  <a:srgbClr val="64748B"/>
-                </a:solidFill>
-              </a:defRPr>
-            </a:pPr>
-            <a:r>
-              <a:t>• Captures seat preference, cabin entitlement, layover tolerance, and companion rules.</a:t>
+              <a:defRPr sz="1250">
+                <a:solidFill>
+                  <a:srgbClr val="5E5A52"/>
+                </a:solidFill>
+                <a:latin typeface="Avenir Next"/>
+              </a:defRPr>
+            </a:pPr>
+            <a:r>
+              <a:t>—  Extracts weather, route congestion, and airline rolling delays.</a:t>
             </a:r>
           </a:p>
           <a:p>
             <a:pPr>
+              <a:lnSpc>
+                <a:spcPct val="118000"/>
+              </a:lnSpc>
               <a:spcAft>
-                <a:spcPts val="600"/>
+                <a:spcPts val="800"/>
               </a:spcAft>
-              <a:defRPr sz="1200">
-                <a:solidFill>
-                  <a:srgbClr val="64748B"/>
-                </a:solidFill>
-              </a:defRPr>
-            </a:pPr>
-            <a:r>
-              <a:t>• Translates free-text member intent (`zkd-app/server/preferences/intent.ts`) into weighted scoring rules.</a:t>
+              <a:defRPr sz="1250">
+                <a:solidFill>
+                  <a:srgbClr val="5E5A52"/>
+                </a:solidFill>
+                <a:latin typeface="Avenir Next"/>
+              </a:defRPr>
+            </a:pPr>
+            <a:r>
+              <a:t>—  Outputs a continuous probability score with adaptive thresholds — not a flat 25/55/80.</a:t>
             </a:r>
           </a:p>
           <a:p>
             <a:pPr>
+              <a:lnSpc>
+                <a:spcPct val="118000"/>
+              </a:lnSpc>
               <a:spcAft>
-                <a:spcPts val="600"/>
+                <a:spcPts val="800"/>
               </a:spcAft>
-              <a:defRPr sz="1200">
-                <a:solidFill>
-                  <a:srgbClr val="64748B"/>
-                </a:solidFill>
-              </a:defRPr>
-            </a:pPr>
-            <a:r>
-              <a:t>• Dynamic adaptation: refines options based on implicit choices and explicit feedback.</a:t>
+              <a:defRPr sz="1250">
+                <a:solidFill>
+                  <a:srgbClr val="5E5A52"/>
+                </a:solidFill>
+                <a:latin typeface="Avenir Next"/>
+              </a:defRPr>
+            </a:pPr>
+            <a:r>
+              <a:t>—  Advisory role only: decides when we start preparing, never whether we spend member money.</a:t>
+            </a:r>
+          </a:p>
+        </p:txBody>
+      </p:sp>
+      <p:sp>
+        <p:nvSpPr>
+          <p:cNvPr id="8" name="Rounded Rectangle 7"/>
+          <p:cNvSpPr/>
+          <p:nvPr/>
+        </p:nvSpPr>
+        <p:spPr>
+          <a:xfrm>
+            <a:off x="6263640" y="1783080"/>
+            <a:ext cx="5166360" cy="4251960"/>
+          </a:xfrm>
+          <a:prstGeom prst="roundRect">
+            <a:avLst>
+              <a:gd name="adj" fmla="val 6000"/>
+            </a:avLst>
+          </a:prstGeom>
+          <a:solidFill>
+            <a:srgbClr val="F3E3DB"/>
+          </a:solidFill>
+          <a:ln w="9525">
+            <a:solidFill>
+              <a:srgbClr val="E4E0D6"/>
+            </a:solidFill>
+          </a:ln>
+          <a:effectLst/>
+        </p:spPr>
+        <p:style>
+          <a:lnRef idx="1">
+            <a:schemeClr val="accent1"/>
+          </a:lnRef>
+          <a:fillRef idx="3">
+            <a:schemeClr val="accent1"/>
+          </a:fillRef>
+          <a:effectRef idx="2">
+            <a:schemeClr val="accent1"/>
+          </a:effectRef>
+          <a:fontRef idx="minor">
+            <a:schemeClr val="lt1"/>
+          </a:fontRef>
+        </p:style>
+        <p:txBody>
+          <a:bodyPr rtlCol="0" anchor="ctr" lIns="256032" rIns="256032" tIns="256032" bIns="256032" wrap="square"/>
+          <a:lstStyle/>
+          <a:p>
+            <a:pPr algn="ctr">
+              <a:spcAft>
+                <a:spcPts val="1200"/>
+              </a:spcAft>
+              <a:defRPr sz="1600" b="1">
+                <a:solidFill>
+                  <a:srgbClr val="B85C3E"/>
+                </a:solidFill>
+                <a:latin typeface="Georgia"/>
+              </a:defRPr>
+            </a:pPr>
+            <a:r>
+              <a:t>Personalization: the Spotify / YouTube analogy</a:t>
+            </a:r>
+          </a:p>
+          <a:p>
+            <a:pPr>
+              <a:lnSpc>
+                <a:spcPct val="118000"/>
+              </a:lnSpc>
+              <a:spcAft>
+                <a:spcPts val="800"/>
+              </a:spcAft>
+              <a:defRPr sz="1250">
+                <a:solidFill>
+                  <a:srgbClr val="5E5A52"/>
+                </a:solidFill>
+                <a:latin typeface="Avenir Next"/>
+              </a:defRPr>
+            </a:pPr>
+            <a:r>
+              <a:t>—  Just as Spotify curates Discover Weekly from listening history, ZKD learns cardmember preferences.</a:t>
+            </a:r>
+          </a:p>
+          <a:p>
+            <a:pPr>
+              <a:lnSpc>
+                <a:spcPct val="118000"/>
+              </a:lnSpc>
+              <a:spcAft>
+                <a:spcPts val="800"/>
+              </a:spcAft>
+              <a:defRPr sz="1250">
+                <a:solidFill>
+                  <a:srgbClr val="5E5A52"/>
+                </a:solidFill>
+                <a:latin typeface="Avenir Next"/>
+              </a:defRPr>
+            </a:pPr>
+            <a:r>
+              <a:t>—  Captures seat preference, cabin entitlement, layover tolerance, and companion rules.</a:t>
+            </a:r>
+          </a:p>
+          <a:p>
+            <a:pPr>
+              <a:lnSpc>
+                <a:spcPct val="118000"/>
+              </a:lnSpc>
+              <a:spcAft>
+                <a:spcPts val="800"/>
+              </a:spcAft>
+              <a:defRPr sz="1250">
+                <a:solidFill>
+                  <a:srgbClr val="5E5A52"/>
+                </a:solidFill>
+                <a:latin typeface="Avenir Next"/>
+              </a:defRPr>
+            </a:pPr>
+            <a:r>
+              <a:t>—  Translates free-text member intent (server/preferences/intent.ts) into weighted scoring rules.</a:t>
+            </a:r>
+          </a:p>
+          <a:p>
+            <a:pPr>
+              <a:lnSpc>
+                <a:spcPct val="118000"/>
+              </a:lnSpc>
+              <a:spcAft>
+                <a:spcPts val="800"/>
+              </a:spcAft>
+              <a:defRPr sz="1250">
+                <a:solidFill>
+                  <a:srgbClr val="5E5A52"/>
+                </a:solidFill>
+                <a:latin typeface="Avenir Next"/>
+              </a:defRPr>
+            </a:pPr>
+            <a:r>
+              <a:t>—  Dynamic adaptation: refines options from implicit choices and explicit feedback.</a:t>
             </a:r>
           </a:p>
         </p:txBody>
@@ -4540,96 +5281,25 @@
       <p:grpSpPr/>
       <p:sp>
         <p:nvSpPr>
-          <p:cNvPr id="2" name="TextBox 1"/>
-          <p:cNvSpPr txBox="1"/>
+          <p:cNvPr id="2" name="Rectangle 1"/>
+          <p:cNvSpPr/>
           <p:nvPr/>
         </p:nvSpPr>
         <p:spPr>
           <a:xfrm>
-            <a:off x="731520" y="457200"/>
-            <a:ext cx="10698480" cy="365760"/>
+            <a:off x="0" y="0"/>
+            <a:ext cx="12191695" cy="6858000"/>
           </a:xfrm>
           <a:prstGeom prst="rect">
             <a:avLst/>
           </a:prstGeom>
-          <a:noFill/>
-        </p:spPr>
-        <p:txBody>
-          <a:bodyPr wrap="square">
-            <a:spAutoFit/>
-          </a:bodyPr>
-          <a:lstStyle/>
-          <a:p>
-            <a:pPr>
-              <a:defRPr sz="1000" b="1">
-                <a:solidFill>
-                  <a:srgbClr val="006FCF"/>
-                </a:solidFill>
-              </a:defRPr>
-            </a:pPr>
-            <a:r>
-              <a:t>ZKD CONCIERGE · AMERICAN EXPRESS / CODESTREET 2026</a:t>
-            </a:r>
-          </a:p>
-        </p:txBody>
-      </p:sp>
-      <p:sp>
-        <p:nvSpPr>
-          <p:cNvPr id="3" name="TextBox 2"/>
-          <p:cNvSpPr txBox="1"/>
-          <p:nvPr/>
-        </p:nvSpPr>
-        <p:spPr>
-          <a:xfrm>
-            <a:off x="731520" y="731520"/>
-            <a:ext cx="10698480" cy="731520"/>
-          </a:xfrm>
-          <a:prstGeom prst="rect">
-            <a:avLst/>
-          </a:prstGeom>
-          <a:noFill/>
-        </p:spPr>
-        <p:txBody>
-          <a:bodyPr wrap="square">
-            <a:spAutoFit/>
-          </a:bodyPr>
-          <a:lstStyle/>
-          <a:p>
-            <a:pPr>
-              <a:defRPr sz="2600" b="1">
-                <a:solidFill>
-                  <a:srgbClr val="0F172A"/>
-                </a:solidFill>
-              </a:defRPr>
-            </a:pPr>
-            <a:r>
-              <a:t>The Disruption Lifecycle Workflow (Prediction Buys Speed)</a:t>
-            </a:r>
-          </a:p>
-        </p:txBody>
-      </p:sp>
-      <p:sp>
-        <p:nvSpPr>
-          <p:cNvPr id="4" name="Rounded Rectangle 3"/>
-          <p:cNvSpPr/>
-          <p:nvPr/>
-        </p:nvSpPr>
-        <p:spPr>
-          <a:xfrm>
-            <a:off x="731520" y="1828800"/>
-            <a:ext cx="2468880" cy="3840480"/>
-          </a:xfrm>
-          <a:prstGeom prst="roundRect">
-            <a:avLst/>
-          </a:prstGeom>
           <a:solidFill>
-            <a:srgbClr val="F8FAFC"/>
+            <a:srgbClr val="FAF9F5"/>
           </a:solidFill>
           <a:ln>
-            <a:solidFill>
-              <a:srgbClr val="CBD5E1"/>
-            </a:solidFill>
+            <a:noFill/>
           </a:ln>
+          <a:effectLst/>
         </p:spPr>
         <p:style>
           <a:lnRef idx="1">
@@ -4646,74 +5316,106 @@
           </a:fontRef>
         </p:style>
         <p:txBody>
-          <a:bodyPr rtlCol="0" anchor="ctr" wrap="square"/>
-          <a:lstStyle/>
-          <a:p>
-            <a:pPr algn="ctr">
-              <a:spcAft>
-                <a:spcPts val="400"/>
-              </a:spcAft>
-              <a:defRPr sz="1500" b="1">
-                <a:solidFill>
-                  <a:srgbClr val="006FCF"/>
-                </a:solidFill>
-              </a:defRPr>
-            </a:pPr>
-            <a:r>
-              <a:t>1. PREDICT</a:t>
-            </a:r>
-          </a:p>
+          <a:bodyPr rtlCol="0" anchor="ctr"/>
+          <a:lstStyle/>
+          <a:p>
+            <a:pPr algn="ctr"/>
+          </a:p>
+        </p:txBody>
+      </p:sp>
+      <p:sp>
+        <p:nvSpPr>
+          <p:cNvPr id="3" name="TextBox 2"/>
+          <p:cNvSpPr txBox="1"/>
+          <p:nvPr/>
+        </p:nvSpPr>
+        <p:spPr>
+          <a:xfrm>
+            <a:off x="731520" y="502920"/>
+            <a:ext cx="10698480" cy="320040"/>
+          </a:xfrm>
+          <a:prstGeom prst="rect">
+            <a:avLst/>
+          </a:prstGeom>
+          <a:noFill/>
+        </p:spPr>
+        <p:txBody>
+          <a:bodyPr wrap="square">
+            <a:spAutoFit/>
+          </a:bodyPr>
+          <a:lstStyle/>
           <a:p>
             <a:pPr>
-              <a:spcAft>
-                <a:spcPts val="1200"/>
-              </a:spcAft>
-              <a:defRPr sz="1100" b="1">
-                <a:solidFill>
-                  <a:srgbClr val="D97706"/>
-                </a:solidFill>
-              </a:defRPr>
-            </a:pPr>
-            <a:r>
-              <a:t>42s Head Start</a:t>
-            </a:r>
-          </a:p>
+              <a:defRPr sz="1050" b="1">
+                <a:solidFill>
+                  <a:srgbClr val="B85C3E"/>
+                </a:solidFill>
+                <a:latin typeface="Avenir Next"/>
+              </a:defRPr>
+            </a:pPr>
+            <a:r>
+              <a:t>ZKD CONCIERGE  ·  AMERICAN EXPRESS  /  CODESTREET 2026</a:t>
+            </a:r>
+          </a:p>
+        </p:txBody>
+      </p:sp>
+      <p:sp>
+        <p:nvSpPr>
+          <p:cNvPr id="4" name="TextBox 3"/>
+          <p:cNvSpPr txBox="1"/>
+          <p:nvPr/>
+        </p:nvSpPr>
+        <p:spPr>
+          <a:xfrm>
+            <a:off x="731520" y="804672"/>
+            <a:ext cx="10058400" cy="777240"/>
+          </a:xfrm>
+          <a:prstGeom prst="rect">
+            <a:avLst/>
+          </a:prstGeom>
+          <a:noFill/>
+        </p:spPr>
+        <p:txBody>
+          <a:bodyPr wrap="square">
+            <a:spAutoFit/>
+          </a:bodyPr>
+          <a:lstStyle/>
           <a:p>
             <a:pPr>
-              <a:defRPr sz="1200">
-                <a:solidFill>
-                  <a:srgbClr val="64748B"/>
-                </a:solidFill>
-              </a:defRPr>
-            </a:pPr>
-            <a:r>
-              <a:t>Model forecasts cancellation probability before airline files it. Pre-caches alt flights &amp; hotels warm.</a:t>
-            </a:r>
-          </a:p>
-        </p:txBody>
-      </p:sp>
-      <p:sp>
-        <p:nvSpPr>
-          <p:cNvPr id="5" name="Rounded Rectangle 4"/>
+              <a:defRPr sz="2700" b="0">
+                <a:solidFill>
+                  <a:srgbClr val="1F1E1C"/>
+                </a:solidFill>
+                <a:latin typeface="Georgia"/>
+              </a:defRPr>
+            </a:pPr>
+            <a:r>
+              <a:t>The disruption lifecycle — prediction buys speed</a:t>
+            </a:r>
+          </a:p>
+        </p:txBody>
+      </p:sp>
+      <p:sp>
+        <p:nvSpPr>
+          <p:cNvPr id="5" name="Rectangle 4"/>
           <p:cNvSpPr/>
           <p:nvPr/>
         </p:nvSpPr>
         <p:spPr>
           <a:xfrm>
-            <a:off x="3383280" y="1828800"/>
-            <a:ext cx="2468880" cy="3840480"/>
-          </a:xfrm>
-          <a:prstGeom prst="roundRect">
+            <a:off x="731520" y="1481328"/>
+            <a:ext cx="502920" cy="44450"/>
+          </a:xfrm>
+          <a:prstGeom prst="rect">
             <a:avLst/>
           </a:prstGeom>
           <a:solidFill>
-            <a:srgbClr val="F8FAFC"/>
+            <a:srgbClr val="D97757"/>
           </a:solidFill>
           <a:ln>
-            <a:solidFill>
-              <a:srgbClr val="CBD5E1"/>
-            </a:solidFill>
+            <a:noFill/>
           </a:ln>
+          <a:effectLst/>
         </p:spPr>
         <p:style>
           <a:lnRef idx="1">
@@ -4730,74 +5432,74 @@
           </a:fontRef>
         </p:style>
         <p:txBody>
-          <a:bodyPr rtlCol="0" anchor="ctr" wrap="square"/>
-          <a:lstStyle/>
-          <a:p>
-            <a:pPr algn="ctr">
-              <a:spcAft>
-                <a:spcPts val="400"/>
-              </a:spcAft>
-              <a:defRPr sz="1500" b="1">
-                <a:solidFill>
-                  <a:srgbClr val="006FCF"/>
-                </a:solidFill>
-              </a:defRPr>
-            </a:pPr>
-            <a:r>
-              <a:t>2. PRE-CACHE</a:t>
-            </a:r>
-          </a:p>
-          <a:p>
-            <a:pPr>
-              <a:spcAft>
-                <a:spcPts val="1200"/>
-              </a:spcAft>
-              <a:defRPr sz="1100" b="1">
-                <a:solidFill>
-                  <a:srgbClr val="D97706"/>
-                </a:solidFill>
-              </a:defRPr>
-            </a:pPr>
-            <a:r>
-              <a:t>Zero Spend / No Hold</a:t>
-            </a:r>
-          </a:p>
-          <a:p>
-            <a:pPr>
-              <a:defRPr sz="1200">
-                <a:solidFill>
-                  <a:srgbClr val="64748B"/>
-                </a:solidFill>
-              </a:defRPr>
-            </a:pPr>
-            <a:r>
-              <a:t>Options priced and held warm in memory. No booking, no spend, no financial liability.</a:t>
-            </a:r>
-          </a:p>
-        </p:txBody>
-      </p:sp>
-      <p:sp>
-        <p:nvSpPr>
-          <p:cNvPr id="6" name="Rounded Rectangle 5"/>
+          <a:bodyPr rtlCol="0" anchor="ctr"/>
+          <a:lstStyle/>
+          <a:p>
+            <a:pPr algn="ctr"/>
+          </a:p>
+        </p:txBody>
+      </p:sp>
+      <p:sp>
+        <p:nvSpPr>
+          <p:cNvPr id="6" name="TextBox 5"/>
+          <p:cNvSpPr txBox="1"/>
+          <p:nvPr/>
+        </p:nvSpPr>
+        <p:spPr>
+          <a:xfrm>
+            <a:off x="11430000" y="6446520"/>
+            <a:ext cx="548640" cy="320040"/>
+          </a:xfrm>
+          <a:prstGeom prst="rect">
+            <a:avLst/>
+          </a:prstGeom>
+          <a:noFill/>
+        </p:spPr>
+        <p:txBody>
+          <a:bodyPr wrap="none">
+            <a:spAutoFit/>
+          </a:bodyPr>
+          <a:lstStyle/>
+          <a:p>
+            <a:pPr algn="r">
+              <a:defRPr sz="1000">
+                <a:solidFill>
+                  <a:srgbClr val="5E5A52"/>
+                </a:solidFill>
+                <a:latin typeface="Avenir Next"/>
+              </a:defRPr>
+            </a:pPr>
+            <a:r>
+              <a:t>05</a:t>
+            </a:r>
+          </a:p>
+        </p:txBody>
+      </p:sp>
+      <p:sp>
+        <p:nvSpPr>
+          <p:cNvPr id="7" name="Rounded Rectangle 6"/>
           <p:cNvSpPr/>
           <p:nvPr/>
         </p:nvSpPr>
         <p:spPr>
           <a:xfrm>
-            <a:off x="6035040" y="1828800"/>
-            <a:ext cx="2468880" cy="3840480"/>
+            <a:off x="731520" y="1874519"/>
+            <a:ext cx="2496312" cy="3977639"/>
           </a:xfrm>
           <a:prstGeom prst="roundRect">
-            <a:avLst/>
+            <a:avLst>
+              <a:gd name="adj" fmla="val 6000"/>
+            </a:avLst>
           </a:prstGeom>
           <a:solidFill>
-            <a:srgbClr val="F8FAFC"/>
+            <a:srgbClr val="FFFFFF"/>
           </a:solidFill>
-          <a:ln>
+          <a:ln w="9525">
             <a:solidFill>
-              <a:srgbClr val="CBD5E1"/>
+              <a:srgbClr val="E4E0D6"/>
             </a:solidFill>
           </a:ln>
+          <a:effectLst/>
         </p:spPr>
         <p:style>
           <a:lnRef idx="1">
@@ -4814,74 +5516,95 @@
           </a:fontRef>
         </p:style>
         <p:txBody>
-          <a:bodyPr rtlCol="0" anchor="ctr" wrap="square"/>
+          <a:bodyPr rtlCol="0" anchor="ctr" lIns="201168" rIns="201168" tIns="201168" bIns="201168" wrap="square"/>
           <a:lstStyle/>
           <a:p>
             <a:pPr algn="ctr">
               <a:spcAft>
                 <a:spcPts val="400"/>
               </a:spcAft>
-              <a:defRPr sz="1500" b="1">
-                <a:solidFill>
-                  <a:srgbClr val="006FCF"/>
-                </a:solidFill>
-              </a:defRPr>
-            </a:pPr>
-            <a:r>
-              <a:t>3. CONSENT GATE</a:t>
+              <a:defRPr sz="1100" b="1">
+                <a:solidFill>
+                  <a:srgbClr val="5E5A52"/>
+                </a:solidFill>
+                <a:latin typeface="Avenir Next"/>
+              </a:defRPr>
+            </a:pPr>
+            <a:r>
+              <a:t>01</a:t>
             </a:r>
           </a:p>
           <a:p>
             <a:pPr>
               <a:spcAft>
-                <a:spcPts val="1200"/>
+                <a:spcPts val="200"/>
+              </a:spcAft>
+              <a:defRPr sz="1600" b="1">
+                <a:solidFill>
+                  <a:srgbClr val="1F1E1C"/>
+                </a:solidFill>
+                <a:latin typeface="Georgia"/>
+              </a:defRPr>
+            </a:pPr>
+            <a:r>
+              <a:t>Predict</a:t>
+            </a:r>
+          </a:p>
+          <a:p>
+            <a:pPr>
+              <a:spcAft>
+                <a:spcPts val="1400"/>
               </a:spcAft>
               <a:defRPr sz="1100" b="1">
                 <a:solidFill>
-                  <a:srgbClr val="D97706"/>
-                </a:solidFill>
-              </a:defRPr>
-            </a:pPr>
-            <a:r>
-              <a:t>Member Control</a:t>
+                  <a:srgbClr val="B85C3E"/>
+                </a:solidFill>
+                <a:latin typeface="Avenir Next"/>
+              </a:defRPr>
+            </a:pPr>
+            <a:r>
+              <a:t>~42s head start</a:t>
             </a:r>
           </a:p>
           <a:p>
             <a:pPr>
-              <a:defRPr sz="1200">
-                <a:solidFill>
-                  <a:srgbClr val="64748B"/>
-                </a:solidFill>
-              </a:defRPr>
-            </a:pPr>
-            <a:r>
-              <a:t>High-risk threshold triggers pre-auth. Member chooses or approves autopilot in advance.</a:t>
-            </a:r>
-          </a:p>
-        </p:txBody>
-      </p:sp>
-      <p:sp>
-        <p:nvSpPr>
-          <p:cNvPr id="7" name="Rounded Rectangle 6"/>
+              <a:lnSpc>
+                <a:spcPct val="120000"/>
+              </a:lnSpc>
+              <a:defRPr sz="1150">
+                <a:solidFill>
+                  <a:srgbClr val="5E5A52"/>
+                </a:solidFill>
+                <a:latin typeface="Avenir Next"/>
+              </a:defRPr>
+            </a:pPr>
+            <a:r>
+              <a:t>Model forecasts cancellation probability before the airline files it. Alt flights and hotels are pre-cached warm.</a:t>
+            </a:r>
+          </a:p>
+        </p:txBody>
+      </p:sp>
+      <p:sp>
+        <p:nvSpPr>
+          <p:cNvPr id="8" name="Rectangle 7"/>
           <p:cNvSpPr/>
           <p:nvPr/>
         </p:nvSpPr>
         <p:spPr>
           <a:xfrm>
-            <a:off x="8686800" y="1828800"/>
-            <a:ext cx="2468880" cy="3840480"/>
-          </a:xfrm>
-          <a:prstGeom prst="roundRect">
+            <a:off x="3246120" y="3794760"/>
+            <a:ext cx="38100" cy="128016"/>
+          </a:xfrm>
+          <a:prstGeom prst="rect">
             <a:avLst/>
           </a:prstGeom>
           <a:solidFill>
-            <a:srgbClr val="F8FAFC"/>
+            <a:srgbClr val="E4E0D6"/>
           </a:solidFill>
           <a:ln>
-            <a:solidFill>
-              <a:srgbClr val="CBD5E1"/>
-            </a:solidFill>
+            <a:noFill/>
           </a:ln>
+          <a:effectLst/>
         </p:spPr>
         <p:style>
           <a:lnRef idx="1">
@@ -4898,48 +5621,424 @@
           </a:fontRef>
         </p:style>
         <p:txBody>
-          <a:bodyPr rtlCol="0" anchor="ctr" wrap="square"/>
+          <a:bodyPr rtlCol="0" anchor="ctr"/>
+          <a:lstStyle/>
+          <a:p>
+            <a:pPr algn="ctr"/>
+          </a:p>
+        </p:txBody>
+      </p:sp>
+      <p:sp>
+        <p:nvSpPr>
+          <p:cNvPr id="9" name="Rounded Rectangle 8"/>
+          <p:cNvSpPr/>
+          <p:nvPr/>
+        </p:nvSpPr>
+        <p:spPr>
+          <a:xfrm>
+            <a:off x="3410712" y="1874519"/>
+            <a:ext cx="2496312" cy="3977639"/>
+          </a:xfrm>
+          <a:prstGeom prst="roundRect">
+            <a:avLst>
+              <a:gd name="adj" fmla="val 6000"/>
+            </a:avLst>
+          </a:prstGeom>
+          <a:solidFill>
+            <a:srgbClr val="FFFFFF"/>
+          </a:solidFill>
+          <a:ln w="9525">
+            <a:solidFill>
+              <a:srgbClr val="E4E0D6"/>
+            </a:solidFill>
+          </a:ln>
+          <a:effectLst/>
+        </p:spPr>
+        <p:style>
+          <a:lnRef idx="1">
+            <a:schemeClr val="accent1"/>
+          </a:lnRef>
+          <a:fillRef idx="3">
+            <a:schemeClr val="accent1"/>
+          </a:fillRef>
+          <a:effectRef idx="2">
+            <a:schemeClr val="accent1"/>
+          </a:effectRef>
+          <a:fontRef idx="minor">
+            <a:schemeClr val="lt1"/>
+          </a:fontRef>
+        </p:style>
+        <p:txBody>
+          <a:bodyPr rtlCol="0" anchor="ctr" lIns="201168" rIns="201168" tIns="201168" bIns="201168" wrap="square"/>
           <a:lstStyle/>
           <a:p>
             <a:pPr algn="ctr">
               <a:spcAft>
                 <a:spcPts val="400"/>
               </a:spcAft>
-              <a:defRPr sz="1500" b="1">
-                <a:solidFill>
-                  <a:srgbClr val="006FCF"/>
-                </a:solidFill>
-              </a:defRPr>
-            </a:pPr>
-            <a:r>
-              <a:t>4. ACT &amp; SETTLE</a:t>
+              <a:defRPr sz="1100" b="1">
+                <a:solidFill>
+                  <a:srgbClr val="5E5A52"/>
+                </a:solidFill>
+                <a:latin typeface="Avenir Next"/>
+              </a:defRPr>
+            </a:pPr>
+            <a:r>
+              <a:t>02</a:t>
             </a:r>
           </a:p>
           <a:p>
             <a:pPr>
               <a:spcAft>
-                <a:spcPts val="1200"/>
+                <a:spcPts val="200"/>
+              </a:spcAft>
+              <a:defRPr sz="1600" b="1">
+                <a:solidFill>
+                  <a:srgbClr val="1F1E1C"/>
+                </a:solidFill>
+                <a:latin typeface="Georgia"/>
+              </a:defRPr>
+            </a:pPr>
+            <a:r>
+              <a:t>Pre-cache</a:t>
+            </a:r>
+          </a:p>
+          <a:p>
+            <a:pPr>
+              <a:spcAft>
+                <a:spcPts val="1400"/>
               </a:spcAft>
               <a:defRPr sz="1100" b="1">
                 <a:solidFill>
-                  <a:srgbClr val="D97706"/>
-                </a:solidFill>
-              </a:defRPr>
-            </a:pPr>
-            <a:r>
-              <a:t>~11s Recovery</a:t>
+                  <a:srgbClr val="B85C3E"/>
+                </a:solidFill>
+                <a:latin typeface="Avenir Next"/>
+              </a:defRPr>
+            </a:pPr>
+            <a:r>
+              <a:t>Zero spend, no hold</a:t>
             </a:r>
           </a:p>
           <a:p>
             <a:pPr>
-              <a:defRPr sz="1200">
-                <a:solidFill>
-                  <a:srgbClr val="64748B"/>
-                </a:solidFill>
-              </a:defRPr>
-            </a:pPr>
-            <a:r>
-              <a:t>Confirmed booking executed instantly. DGCA duty-of-care claims filed automatically.</a:t>
+              <a:lnSpc>
+                <a:spcPct val="120000"/>
+              </a:lnSpc>
+              <a:defRPr sz="1150">
+                <a:solidFill>
+                  <a:srgbClr val="5E5A52"/>
+                </a:solidFill>
+                <a:latin typeface="Avenir Next"/>
+              </a:defRPr>
+            </a:pPr>
+            <a:r>
+              <a:t>Options are priced and held warm in memory. No booking, no spend, no financial liability.</a:t>
+            </a:r>
+          </a:p>
+        </p:txBody>
+      </p:sp>
+      <p:sp>
+        <p:nvSpPr>
+          <p:cNvPr id="10" name="Rectangle 9"/>
+          <p:cNvSpPr/>
+          <p:nvPr/>
+        </p:nvSpPr>
+        <p:spPr>
+          <a:xfrm>
+            <a:off x="5925312" y="3794760"/>
+            <a:ext cx="38100" cy="128016"/>
+          </a:xfrm>
+          <a:prstGeom prst="rect">
+            <a:avLst/>
+          </a:prstGeom>
+          <a:solidFill>
+            <a:srgbClr val="E4E0D6"/>
+          </a:solidFill>
+          <a:ln>
+            <a:noFill/>
+          </a:ln>
+          <a:effectLst/>
+        </p:spPr>
+        <p:style>
+          <a:lnRef idx="1">
+            <a:schemeClr val="accent1"/>
+          </a:lnRef>
+          <a:fillRef idx="3">
+            <a:schemeClr val="accent1"/>
+          </a:fillRef>
+          <a:effectRef idx="2">
+            <a:schemeClr val="accent1"/>
+          </a:effectRef>
+          <a:fontRef idx="minor">
+            <a:schemeClr val="lt1"/>
+          </a:fontRef>
+        </p:style>
+        <p:txBody>
+          <a:bodyPr rtlCol="0" anchor="ctr"/>
+          <a:lstStyle/>
+          <a:p>
+            <a:pPr algn="ctr"/>
+          </a:p>
+        </p:txBody>
+      </p:sp>
+      <p:sp>
+        <p:nvSpPr>
+          <p:cNvPr id="11" name="Rounded Rectangle 10"/>
+          <p:cNvSpPr/>
+          <p:nvPr/>
+        </p:nvSpPr>
+        <p:spPr>
+          <a:xfrm>
+            <a:off x="6089904" y="1874519"/>
+            <a:ext cx="2496312" cy="3977639"/>
+          </a:xfrm>
+          <a:prstGeom prst="roundRect">
+            <a:avLst>
+              <a:gd name="adj" fmla="val 6000"/>
+            </a:avLst>
+          </a:prstGeom>
+          <a:solidFill>
+            <a:srgbClr val="FFFFFF"/>
+          </a:solidFill>
+          <a:ln w="9525">
+            <a:solidFill>
+              <a:srgbClr val="E4E0D6"/>
+            </a:solidFill>
+          </a:ln>
+          <a:effectLst/>
+        </p:spPr>
+        <p:style>
+          <a:lnRef idx="1">
+            <a:schemeClr val="accent1"/>
+          </a:lnRef>
+          <a:fillRef idx="3">
+            <a:schemeClr val="accent1"/>
+          </a:fillRef>
+          <a:effectRef idx="2">
+            <a:schemeClr val="accent1"/>
+          </a:effectRef>
+          <a:fontRef idx="minor">
+            <a:schemeClr val="lt1"/>
+          </a:fontRef>
+        </p:style>
+        <p:txBody>
+          <a:bodyPr rtlCol="0" anchor="ctr" lIns="201168" rIns="201168" tIns="201168" bIns="201168" wrap="square"/>
+          <a:lstStyle/>
+          <a:p>
+            <a:pPr algn="ctr">
+              <a:spcAft>
+                <a:spcPts val="400"/>
+              </a:spcAft>
+              <a:defRPr sz="1100" b="1">
+                <a:solidFill>
+                  <a:srgbClr val="5E5A52"/>
+                </a:solidFill>
+                <a:latin typeface="Avenir Next"/>
+              </a:defRPr>
+            </a:pPr>
+            <a:r>
+              <a:t>03</a:t>
+            </a:r>
+          </a:p>
+          <a:p>
+            <a:pPr>
+              <a:spcAft>
+                <a:spcPts val="200"/>
+              </a:spcAft>
+              <a:defRPr sz="1600" b="1">
+                <a:solidFill>
+                  <a:srgbClr val="1F1E1C"/>
+                </a:solidFill>
+                <a:latin typeface="Georgia"/>
+              </a:defRPr>
+            </a:pPr>
+            <a:r>
+              <a:t>Consent gate</a:t>
+            </a:r>
+          </a:p>
+          <a:p>
+            <a:pPr>
+              <a:spcAft>
+                <a:spcPts val="1400"/>
+              </a:spcAft>
+              <a:defRPr sz="1100" b="1">
+                <a:solidFill>
+                  <a:srgbClr val="B85C3E"/>
+                </a:solidFill>
+                <a:latin typeface="Avenir Next"/>
+              </a:defRPr>
+            </a:pPr>
+            <a:r>
+              <a:t>Member control</a:t>
+            </a:r>
+          </a:p>
+          <a:p>
+            <a:pPr>
+              <a:lnSpc>
+                <a:spcPct val="120000"/>
+              </a:lnSpc>
+              <a:defRPr sz="1150">
+                <a:solidFill>
+                  <a:srgbClr val="5E5A52"/>
+                </a:solidFill>
+                <a:latin typeface="Avenir Next"/>
+              </a:defRPr>
+            </a:pPr>
+            <a:r>
+              <a:t>A high-risk threshold triggers pre-auth. The member chooses, or approves autopilot in advance.</a:t>
+            </a:r>
+          </a:p>
+        </p:txBody>
+      </p:sp>
+      <p:sp>
+        <p:nvSpPr>
+          <p:cNvPr id="12" name="Rectangle 11"/>
+          <p:cNvSpPr/>
+          <p:nvPr/>
+        </p:nvSpPr>
+        <p:spPr>
+          <a:xfrm>
+            <a:off x="8604504" y="3794760"/>
+            <a:ext cx="38100" cy="128016"/>
+          </a:xfrm>
+          <a:prstGeom prst="rect">
+            <a:avLst/>
+          </a:prstGeom>
+          <a:solidFill>
+            <a:srgbClr val="E4E0D6"/>
+          </a:solidFill>
+          <a:ln>
+            <a:noFill/>
+          </a:ln>
+          <a:effectLst/>
+        </p:spPr>
+        <p:style>
+          <a:lnRef idx="1">
+            <a:schemeClr val="accent1"/>
+          </a:lnRef>
+          <a:fillRef idx="3">
+            <a:schemeClr val="accent1"/>
+          </a:fillRef>
+          <a:effectRef idx="2">
+            <a:schemeClr val="accent1"/>
+          </a:effectRef>
+          <a:fontRef idx="minor">
+            <a:schemeClr val="lt1"/>
+          </a:fontRef>
+        </p:style>
+        <p:txBody>
+          <a:bodyPr rtlCol="0" anchor="ctr"/>
+          <a:lstStyle/>
+          <a:p>
+            <a:pPr algn="ctr"/>
+          </a:p>
+        </p:txBody>
+      </p:sp>
+      <p:sp>
+        <p:nvSpPr>
+          <p:cNvPr id="13" name="Rounded Rectangle 12"/>
+          <p:cNvSpPr/>
+          <p:nvPr/>
+        </p:nvSpPr>
+        <p:spPr>
+          <a:xfrm>
+            <a:off x="8769096" y="1874519"/>
+            <a:ext cx="2496312" cy="3977639"/>
+          </a:xfrm>
+          <a:prstGeom prst="roundRect">
+            <a:avLst>
+              <a:gd name="adj" fmla="val 6000"/>
+            </a:avLst>
+          </a:prstGeom>
+          <a:solidFill>
+            <a:srgbClr val="FFFFFF"/>
+          </a:solidFill>
+          <a:ln w="9525">
+            <a:solidFill>
+              <a:srgbClr val="E4E0D6"/>
+            </a:solidFill>
+          </a:ln>
+          <a:effectLst/>
+        </p:spPr>
+        <p:style>
+          <a:lnRef idx="1">
+            <a:schemeClr val="accent1"/>
+          </a:lnRef>
+          <a:fillRef idx="3">
+            <a:schemeClr val="accent1"/>
+          </a:fillRef>
+          <a:effectRef idx="2">
+            <a:schemeClr val="accent1"/>
+          </a:effectRef>
+          <a:fontRef idx="minor">
+            <a:schemeClr val="lt1"/>
+          </a:fontRef>
+        </p:style>
+        <p:txBody>
+          <a:bodyPr rtlCol="0" anchor="ctr" lIns="201168" rIns="201168" tIns="201168" bIns="201168" wrap="square"/>
+          <a:lstStyle/>
+          <a:p>
+            <a:pPr algn="ctr">
+              <a:spcAft>
+                <a:spcPts val="400"/>
+              </a:spcAft>
+              <a:defRPr sz="1100" b="1">
+                <a:solidFill>
+                  <a:srgbClr val="5E5A52"/>
+                </a:solidFill>
+                <a:latin typeface="Avenir Next"/>
+              </a:defRPr>
+            </a:pPr>
+            <a:r>
+              <a:t>04</a:t>
+            </a:r>
+          </a:p>
+          <a:p>
+            <a:pPr>
+              <a:spcAft>
+                <a:spcPts val="200"/>
+              </a:spcAft>
+              <a:defRPr sz="1600" b="1">
+                <a:solidFill>
+                  <a:srgbClr val="1F1E1C"/>
+                </a:solidFill>
+                <a:latin typeface="Georgia"/>
+              </a:defRPr>
+            </a:pPr>
+            <a:r>
+              <a:t>Act &amp; settle</a:t>
+            </a:r>
+          </a:p>
+          <a:p>
+            <a:pPr>
+              <a:spcAft>
+                <a:spcPts val="1400"/>
+              </a:spcAft>
+              <a:defRPr sz="1100" b="1">
+                <a:solidFill>
+                  <a:srgbClr val="B85C3E"/>
+                </a:solidFill>
+                <a:latin typeface="Avenir Next"/>
+              </a:defRPr>
+            </a:pPr>
+            <a:r>
+              <a:t>~11s recovery</a:t>
+            </a:r>
+          </a:p>
+          <a:p>
+            <a:pPr>
+              <a:lnSpc>
+                <a:spcPct val="120000"/>
+              </a:lnSpc>
+              <a:defRPr sz="1150">
+                <a:solidFill>
+                  <a:srgbClr val="5E5A52"/>
+                </a:solidFill>
+                <a:latin typeface="Avenir Next"/>
+              </a:defRPr>
+            </a:pPr>
+            <a:r>
+              <a:t>The confirmed booking executes instantly. DGCA duty-of-care claims are filed automatically.</a:t>
             </a:r>
           </a:p>
         </p:txBody>
@@ -4964,96 +6063,25 @@
       <p:grpSpPr/>
       <p:sp>
         <p:nvSpPr>
-          <p:cNvPr id="2" name="TextBox 1"/>
-          <p:cNvSpPr txBox="1"/>
+          <p:cNvPr id="2" name="Rectangle 1"/>
+          <p:cNvSpPr/>
           <p:nvPr/>
         </p:nvSpPr>
         <p:spPr>
           <a:xfrm>
-            <a:off x="731520" y="457200"/>
-            <a:ext cx="10698480" cy="365760"/>
+            <a:off x="0" y="0"/>
+            <a:ext cx="12191695" cy="6858000"/>
           </a:xfrm>
           <a:prstGeom prst="rect">
             <a:avLst/>
           </a:prstGeom>
-          <a:noFill/>
-        </p:spPr>
-        <p:txBody>
-          <a:bodyPr wrap="square">
-            <a:spAutoFit/>
-          </a:bodyPr>
-          <a:lstStyle/>
-          <a:p>
-            <a:pPr>
-              <a:defRPr sz="1000" b="1">
-                <a:solidFill>
-                  <a:srgbClr val="006FCF"/>
-                </a:solidFill>
-              </a:defRPr>
-            </a:pPr>
-            <a:r>
-              <a:t>ZKD CONCIERGE · AMERICAN EXPRESS / CODESTREET 2026</a:t>
-            </a:r>
-          </a:p>
-        </p:txBody>
-      </p:sp>
-      <p:sp>
-        <p:nvSpPr>
-          <p:cNvPr id="3" name="TextBox 2"/>
-          <p:cNvSpPr txBox="1"/>
-          <p:nvPr/>
-        </p:nvSpPr>
-        <p:spPr>
-          <a:xfrm>
-            <a:off x="731520" y="731520"/>
-            <a:ext cx="10698480" cy="731520"/>
-          </a:xfrm>
-          <a:prstGeom prst="rect">
-            <a:avLst/>
-          </a:prstGeom>
-          <a:noFill/>
-        </p:spPr>
-        <p:txBody>
-          <a:bodyPr wrap="square">
-            <a:spAutoFit/>
-          </a:bodyPr>
-          <a:lstStyle/>
-          <a:p>
-            <a:pPr>
-              <a:defRPr sz="2600" b="1">
-                <a:solidFill>
-                  <a:srgbClr val="0F172A"/>
-                </a:solidFill>
-              </a:defRPr>
-            </a:pPr>
-            <a:r>
-              <a:t>Policy Intelligence via RAG &amp; Multi-Regulation Compliance</a:t>
-            </a:r>
-          </a:p>
-        </p:txBody>
-      </p:sp>
-      <p:sp>
-        <p:nvSpPr>
-          <p:cNvPr id="4" name="Rounded Rectangle 3"/>
-          <p:cNvSpPr/>
-          <p:nvPr/>
-        </p:nvSpPr>
-        <p:spPr>
-          <a:xfrm>
-            <a:off x="731520" y="1645920"/>
-            <a:ext cx="5120640" cy="4389120"/>
-          </a:xfrm>
-          <a:prstGeom prst="roundRect">
-            <a:avLst/>
-          </a:prstGeom>
           <a:solidFill>
-            <a:srgbClr val="F8FAFC"/>
+            <a:srgbClr val="FAF9F5"/>
           </a:solidFill>
           <a:ln>
-            <a:solidFill>
-              <a:srgbClr val="E2E8F0"/>
-            </a:solidFill>
+            <a:noFill/>
           </a:ln>
+          <a:effectLst/>
         </p:spPr>
         <p:style>
           <a:lnRef idx="1">
@@ -5070,107 +6098,106 @@
           </a:fontRef>
         </p:style>
         <p:txBody>
-          <a:bodyPr rtlCol="0" anchor="ctr" wrap="square"/>
-          <a:lstStyle/>
-          <a:p>
-            <a:pPr algn="ctr">
-              <a:spcAft>
-                <a:spcPts val="1000"/>
-              </a:spcAft>
-              <a:defRPr sz="1600" b="1">
-                <a:solidFill>
-                  <a:srgbClr val="0F172A"/>
-                </a:solidFill>
-              </a:defRPr>
-            </a:pPr>
-            <a:r>
-              <a:t>Multi-Regulation Scope (Beyond DGCA)</a:t>
-            </a:r>
-          </a:p>
+          <a:bodyPr rtlCol="0" anchor="ctr"/>
+          <a:lstStyle/>
+          <a:p>
+            <a:pPr algn="ctr"/>
+          </a:p>
+        </p:txBody>
+      </p:sp>
+      <p:sp>
+        <p:nvSpPr>
+          <p:cNvPr id="3" name="TextBox 2"/>
+          <p:cNvSpPr txBox="1"/>
+          <p:nvPr/>
+        </p:nvSpPr>
+        <p:spPr>
+          <a:xfrm>
+            <a:off x="731520" y="502920"/>
+            <a:ext cx="10698480" cy="320040"/>
+          </a:xfrm>
+          <a:prstGeom prst="rect">
+            <a:avLst/>
+          </a:prstGeom>
+          <a:noFill/>
+        </p:spPr>
+        <p:txBody>
+          <a:bodyPr wrap="square">
+            <a:spAutoFit/>
+          </a:bodyPr>
+          <a:lstStyle/>
           <a:p>
             <a:pPr>
-              <a:spcAft>
-                <a:spcPts val="600"/>
-              </a:spcAft>
-              <a:defRPr sz="1200">
-                <a:solidFill>
-                  <a:srgbClr val="64748B"/>
-                </a:solidFill>
-              </a:defRPr>
-            </a:pPr>
-            <a:r>
-              <a:t>• Not just DGCA (Indian domestic aviation), but international passenger rights frameworks: **EU261** and **UK261**.</a:t>
-            </a:r>
-          </a:p>
+              <a:defRPr sz="1050" b="1">
+                <a:solidFill>
+                  <a:srgbClr val="B85C3E"/>
+                </a:solidFill>
+                <a:latin typeface="Avenir Next"/>
+              </a:defRPr>
+            </a:pPr>
+            <a:r>
+              <a:t>ZKD CONCIERGE  ·  AMERICAN EXPRESS  /  CODESTREET 2026</a:t>
+            </a:r>
+          </a:p>
+        </p:txBody>
+      </p:sp>
+      <p:sp>
+        <p:nvSpPr>
+          <p:cNvPr id="4" name="TextBox 3"/>
+          <p:cNvSpPr txBox="1"/>
+          <p:nvPr/>
+        </p:nvSpPr>
+        <p:spPr>
+          <a:xfrm>
+            <a:off x="731520" y="804672"/>
+            <a:ext cx="10058400" cy="777240"/>
+          </a:xfrm>
+          <a:prstGeom prst="rect">
+            <a:avLst/>
+          </a:prstGeom>
+          <a:noFill/>
+        </p:spPr>
+        <p:txBody>
+          <a:bodyPr wrap="square">
+            <a:spAutoFit/>
+          </a:bodyPr>
+          <a:lstStyle/>
           <a:p>
             <a:pPr>
-              <a:spcAft>
-                <a:spcPts val="600"/>
-              </a:spcAft>
-              <a:defRPr sz="1200">
-                <a:solidFill>
-                  <a:srgbClr val="64748B"/>
-                </a:solidFill>
-              </a:defRPr>
-            </a:pPr>
-            <a:r>
-              <a:t>• Carrier-specific contract clauses &amp; operating terms (e.g. British Airways vs Emirates compensation entitlements).</a:t>
-            </a:r>
-          </a:p>
-          <a:p>
-            <a:pPr>
-              <a:spcAft>
-                <a:spcPts val="600"/>
-              </a:spcAft>
-              <a:defRPr sz="1200">
-                <a:solidFill>
-                  <a:srgbClr val="64748B"/>
-                </a:solidFill>
-              </a:defRPr>
-            </a:pPr>
-            <a:r>
-              <a:t>• Amex Card Product Benefit terms (`server/myca.ts`): card-holder cabin ceilings, lounge access, and per-transaction rules.</a:t>
-            </a:r>
-          </a:p>
-          <a:p>
-            <a:pPr>
-              <a:spcAft>
-                <a:spcPts val="600"/>
-              </a:spcAft>
-              <a:defRPr sz="1200">
-                <a:solidFill>
-                  <a:srgbClr val="64748B"/>
-                </a:solidFill>
-              </a:defRPr>
-            </a:pPr>
-            <a:r>
-              <a:t>• Jurisdiction routing: automatically detects which regulatory framework governs the PNR.</a:t>
-            </a:r>
-          </a:p>
-        </p:txBody>
-      </p:sp>
-      <p:sp>
-        <p:nvSpPr>
-          <p:cNvPr id="5" name="Rounded Rectangle 4"/>
+              <a:defRPr sz="2700" b="0">
+                <a:solidFill>
+                  <a:srgbClr val="1F1E1C"/>
+                </a:solidFill>
+                <a:latin typeface="Georgia"/>
+              </a:defRPr>
+            </a:pPr>
+            <a:r>
+              <a:t>Policy intelligence via RAG &amp; multi-regulation compliance</a:t>
+            </a:r>
+          </a:p>
+        </p:txBody>
+      </p:sp>
+      <p:sp>
+        <p:nvSpPr>
+          <p:cNvPr id="5" name="Rectangle 4"/>
           <p:cNvSpPr/>
           <p:nvPr/>
         </p:nvSpPr>
         <p:spPr>
           <a:xfrm>
-            <a:off x="6217920" y="1645920"/>
-            <a:ext cx="5212080" cy="4389120"/>
-          </a:xfrm>
-          <a:prstGeom prst="roundRect">
+            <a:off x="731520" y="1481328"/>
+            <a:ext cx="502920" cy="44450"/>
+          </a:xfrm>
+          <a:prstGeom prst="rect">
             <a:avLst/>
           </a:prstGeom>
           <a:solidFill>
-            <a:srgbClr val="F8FAFC"/>
+            <a:srgbClr val="D97757"/>
           </a:solidFill>
           <a:ln>
-            <a:solidFill>
-              <a:srgbClr val="E2E8F0"/>
-            </a:solidFill>
+            <a:noFill/>
           </a:ln>
+          <a:effectLst/>
         </p:spPr>
         <p:style>
           <a:lnRef idx="1">
@@ -5187,81 +6214,319 @@
           </a:fontRef>
         </p:style>
         <p:txBody>
-          <a:bodyPr rtlCol="0" anchor="ctr" wrap="square"/>
+          <a:bodyPr rtlCol="0" anchor="ctr"/>
+          <a:lstStyle/>
+          <a:p>
+            <a:pPr algn="ctr"/>
+          </a:p>
+        </p:txBody>
+      </p:sp>
+      <p:sp>
+        <p:nvSpPr>
+          <p:cNvPr id="6" name="TextBox 5"/>
+          <p:cNvSpPr txBox="1"/>
+          <p:nvPr/>
+        </p:nvSpPr>
+        <p:spPr>
+          <a:xfrm>
+            <a:off x="11430000" y="6446520"/>
+            <a:ext cx="548640" cy="320040"/>
+          </a:xfrm>
+          <a:prstGeom prst="rect">
+            <a:avLst/>
+          </a:prstGeom>
+          <a:noFill/>
+        </p:spPr>
+        <p:txBody>
+          <a:bodyPr wrap="none">
+            <a:spAutoFit/>
+          </a:bodyPr>
+          <a:lstStyle/>
+          <a:p>
+            <a:pPr algn="r">
+              <a:defRPr sz="1000">
+                <a:solidFill>
+                  <a:srgbClr val="5E5A52"/>
+                </a:solidFill>
+                <a:latin typeface="Avenir Next"/>
+              </a:defRPr>
+            </a:pPr>
+            <a:r>
+              <a:t>06</a:t>
+            </a:r>
+          </a:p>
+        </p:txBody>
+      </p:sp>
+      <p:sp>
+        <p:nvSpPr>
+          <p:cNvPr id="7" name="Rounded Rectangle 6"/>
+          <p:cNvSpPr/>
+          <p:nvPr/>
+        </p:nvSpPr>
+        <p:spPr>
+          <a:xfrm>
+            <a:off x="731520" y="1783080"/>
+            <a:ext cx="5120640" cy="4251960"/>
+          </a:xfrm>
+          <a:prstGeom prst="roundRect">
+            <a:avLst>
+              <a:gd name="adj" fmla="val 6000"/>
+            </a:avLst>
+          </a:prstGeom>
+          <a:solidFill>
+            <a:srgbClr val="FFFFFF"/>
+          </a:solidFill>
+          <a:ln w="9525">
+            <a:solidFill>
+              <a:srgbClr val="E4E0D6"/>
+            </a:solidFill>
+          </a:ln>
+          <a:effectLst/>
+        </p:spPr>
+        <p:style>
+          <a:lnRef idx="1">
+            <a:schemeClr val="accent1"/>
+          </a:lnRef>
+          <a:fillRef idx="3">
+            <a:schemeClr val="accent1"/>
+          </a:fillRef>
+          <a:effectRef idx="2">
+            <a:schemeClr val="accent1"/>
+          </a:effectRef>
+          <a:fontRef idx="minor">
+            <a:schemeClr val="lt1"/>
+          </a:fontRef>
+        </p:style>
+        <p:txBody>
+          <a:bodyPr rtlCol="0" anchor="ctr" lIns="256032" rIns="256032" tIns="256032" bIns="256032" wrap="square"/>
           <a:lstStyle/>
           <a:p>
             <a:pPr algn="ctr">
               <a:spcAft>
-                <a:spcPts val="1000"/>
+                <a:spcPts val="1200"/>
               </a:spcAft>
               <a:defRPr sz="1600" b="1">
                 <a:solidFill>
-                  <a:srgbClr val="006FCF"/>
-                </a:solidFill>
-              </a:defRPr>
-            </a:pPr>
-            <a:r>
-              <a:t>RAG &amp; Default-Deny Policy Engine</a:t>
+                  <a:srgbClr val="1F1E1C"/>
+                </a:solidFill>
+                <a:latin typeface="Georgia"/>
+              </a:defRPr>
+            </a:pPr>
+            <a:r>
+              <a:t>Multi-regulation scope (beyond DGCA)</a:t>
             </a:r>
           </a:p>
           <a:p>
             <a:pPr>
+              <a:lnSpc>
+                <a:spcPct val="118000"/>
+              </a:lnSpc>
               <a:spcAft>
-                <a:spcPts val="600"/>
+                <a:spcPts val="800"/>
               </a:spcAft>
-              <a:defRPr sz="1200">
-                <a:solidFill>
-                  <a:srgbClr val="64748B"/>
-                </a:solidFill>
-              </a:defRPr>
-            </a:pPr>
-            <a:r>
-              <a:t>• **RAG Ingestion:** Automatically vectorizes and indexes complex aviation regulations, carrier fare rules, and card terms.</a:t>
+              <a:defRPr sz="1250">
+                <a:solidFill>
+                  <a:srgbClr val="5E5A52"/>
+                </a:solidFill>
+                <a:latin typeface="Avenir Next"/>
+              </a:defRPr>
+            </a:pPr>
+            <a:r>
+              <a:t>—  Not just DGCA (Indian domestic aviation) — international frameworks too: EU261 and UK261.</a:t>
             </a:r>
           </a:p>
           <a:p>
             <a:pPr>
+              <a:lnSpc>
+                <a:spcPct val="118000"/>
+              </a:lnSpc>
               <a:spcAft>
-                <a:spcPts val="600"/>
+                <a:spcPts val="800"/>
               </a:spcAft>
-              <a:defRPr sz="1200">
-                <a:solidFill>
-                  <a:srgbClr val="64748B"/>
-                </a:solidFill>
-              </a:defRPr>
-            </a:pPr>
-            <a:r>
-              <a:t>• **Context Retrieval:** Dynamically queries relevant clauses when a disruption occurs for a specific PNR and airline.</a:t>
+              <a:defRPr sz="1250">
+                <a:solidFill>
+                  <a:srgbClr val="5E5A52"/>
+                </a:solidFill>
+                <a:latin typeface="Avenir Next"/>
+              </a:defRPr>
+            </a:pPr>
+            <a:r>
+              <a:t>—  Carrier-specific contract clauses and operating terms (e.g. British Airways vs Emirates entitlements).</a:t>
             </a:r>
           </a:p>
           <a:p>
             <a:pPr>
+              <a:lnSpc>
+                <a:spcPct val="118000"/>
+              </a:lnSpc>
               <a:spcAft>
-                <a:spcPts val="600"/>
+                <a:spcPts val="800"/>
               </a:spcAft>
-              <a:defRPr sz="1200">
-                <a:solidFill>
-                  <a:srgbClr val="64748B"/>
-                </a:solidFill>
-              </a:defRPr>
-            </a:pPr>
-            <a:r>
-              <a:t>• **OPA Policy Gate (`server/policy/`):** Default-deny rule engine. Every option is evaluated against retrieved policy clauses in-process (&lt;1ms).</a:t>
+              <a:defRPr sz="1250">
+                <a:solidFill>
+                  <a:srgbClr val="5E5A52"/>
+                </a:solidFill>
+                <a:latin typeface="Avenir Next"/>
+              </a:defRPr>
+            </a:pPr>
+            <a:r>
+              <a:t>—  Amex card product benefit terms (server/myca.ts): cabin ceilings, lounge access, per-transaction rules.</a:t>
             </a:r>
           </a:p>
           <a:p>
             <a:pPr>
+              <a:lnSpc>
+                <a:spcPct val="118000"/>
+              </a:lnSpc>
               <a:spcAft>
-                <a:spcPts val="600"/>
+                <a:spcPts val="800"/>
               </a:spcAft>
-              <a:defRPr sz="1200">
-                <a:solidFill>
-                  <a:srgbClr val="64748B"/>
-                </a:solidFill>
-              </a:defRPr>
-            </a:pPr>
-            <a:r>
-              <a:t>• Incomplete policy inputs trigger default-deny — nothing executes without explicit allow.</a:t>
+              <a:defRPr sz="1250">
+                <a:solidFill>
+                  <a:srgbClr val="5E5A52"/>
+                </a:solidFill>
+                <a:latin typeface="Avenir Next"/>
+              </a:defRPr>
+            </a:pPr>
+            <a:r>
+              <a:t>—  Jurisdiction routing automatically detects which regulatory framework governs the PNR.</a:t>
+            </a:r>
+          </a:p>
+        </p:txBody>
+      </p:sp>
+      <p:sp>
+        <p:nvSpPr>
+          <p:cNvPr id="8" name="Rounded Rectangle 7"/>
+          <p:cNvSpPr/>
+          <p:nvPr/>
+        </p:nvSpPr>
+        <p:spPr>
+          <a:xfrm>
+            <a:off x="6263640" y="1783080"/>
+            <a:ext cx="5166360" cy="4251960"/>
+          </a:xfrm>
+          <a:prstGeom prst="roundRect">
+            <a:avLst>
+              <a:gd name="adj" fmla="val 6000"/>
+            </a:avLst>
+          </a:prstGeom>
+          <a:solidFill>
+            <a:srgbClr val="F3E3DB"/>
+          </a:solidFill>
+          <a:ln w="9525">
+            <a:solidFill>
+              <a:srgbClr val="E4E0D6"/>
+            </a:solidFill>
+          </a:ln>
+          <a:effectLst/>
+        </p:spPr>
+        <p:style>
+          <a:lnRef idx="1">
+            <a:schemeClr val="accent1"/>
+          </a:lnRef>
+          <a:fillRef idx="3">
+            <a:schemeClr val="accent1"/>
+          </a:fillRef>
+          <a:effectRef idx="2">
+            <a:schemeClr val="accent1"/>
+          </a:effectRef>
+          <a:fontRef idx="minor">
+            <a:schemeClr val="lt1"/>
+          </a:fontRef>
+        </p:style>
+        <p:txBody>
+          <a:bodyPr rtlCol="0" anchor="ctr" lIns="256032" rIns="256032" tIns="256032" bIns="256032" wrap="square"/>
+          <a:lstStyle/>
+          <a:p>
+            <a:pPr algn="ctr">
+              <a:spcAft>
+                <a:spcPts val="1200"/>
+              </a:spcAft>
+              <a:defRPr sz="1600" b="1">
+                <a:solidFill>
+                  <a:srgbClr val="B85C3E"/>
+                </a:solidFill>
+                <a:latin typeface="Georgia"/>
+              </a:defRPr>
+            </a:pPr>
+            <a:r>
+              <a:t>RAG &amp; default-deny policy engine</a:t>
+            </a:r>
+          </a:p>
+          <a:p>
+            <a:pPr>
+              <a:lnSpc>
+                <a:spcPct val="118000"/>
+              </a:lnSpc>
+              <a:spcAft>
+                <a:spcPts val="800"/>
+              </a:spcAft>
+              <a:defRPr sz="1250">
+                <a:solidFill>
+                  <a:srgbClr val="5E5A52"/>
+                </a:solidFill>
+                <a:latin typeface="Avenir Next"/>
+              </a:defRPr>
+            </a:pPr>
+            <a:r>
+              <a:t>—  RAG ingestion automatically vectorizes and indexes aviation regulations, fare rules, and card terms.</a:t>
+            </a:r>
+          </a:p>
+          <a:p>
+            <a:pPr>
+              <a:lnSpc>
+                <a:spcPct val="118000"/>
+              </a:lnSpc>
+              <a:spcAft>
+                <a:spcPts val="800"/>
+              </a:spcAft>
+              <a:defRPr sz="1250">
+                <a:solidFill>
+                  <a:srgbClr val="5E5A52"/>
+                </a:solidFill>
+                <a:latin typeface="Avenir Next"/>
+              </a:defRPr>
+            </a:pPr>
+            <a:r>
+              <a:t>—  Context retrieval dynamically queries relevant clauses when a disruption occurs for a given PNR.</a:t>
+            </a:r>
+          </a:p>
+          <a:p>
+            <a:pPr>
+              <a:lnSpc>
+                <a:spcPct val="118000"/>
+              </a:lnSpc>
+              <a:spcAft>
+                <a:spcPts val="800"/>
+              </a:spcAft>
+              <a:defRPr sz="1250">
+                <a:solidFill>
+                  <a:srgbClr val="5E5A52"/>
+                </a:solidFill>
+                <a:latin typeface="Avenir Next"/>
+              </a:defRPr>
+            </a:pPr>
+            <a:r>
+              <a:t>—  OPA policy gate (server/policy/): default-deny rule engine, evaluated in-process in under 1ms.</a:t>
+            </a:r>
+          </a:p>
+          <a:p>
+            <a:pPr>
+              <a:lnSpc>
+                <a:spcPct val="118000"/>
+              </a:lnSpc>
+              <a:spcAft>
+                <a:spcPts val="800"/>
+              </a:spcAft>
+              <a:defRPr sz="1250">
+                <a:solidFill>
+                  <a:srgbClr val="5E5A52"/>
+                </a:solidFill>
+                <a:latin typeface="Avenir Next"/>
+              </a:defRPr>
+            </a:pPr>
+            <a:r>
+              <a:t>—  Incomplete policy inputs trigger default-deny — nothing executes without an explicit allow.</a:t>
             </a:r>
           </a:p>
         </p:txBody>
@@ -5286,96 +6551,25 @@
       <p:grpSpPr/>
       <p:sp>
         <p:nvSpPr>
-          <p:cNvPr id="2" name="TextBox 1"/>
-          <p:cNvSpPr txBox="1"/>
+          <p:cNvPr id="2" name="Rectangle 1"/>
+          <p:cNvSpPr/>
           <p:nvPr/>
         </p:nvSpPr>
         <p:spPr>
           <a:xfrm>
-            <a:off x="731520" y="457200"/>
-            <a:ext cx="10698480" cy="365760"/>
+            <a:off x="0" y="0"/>
+            <a:ext cx="12191695" cy="6858000"/>
           </a:xfrm>
           <a:prstGeom prst="rect">
             <a:avLst/>
           </a:prstGeom>
-          <a:noFill/>
-        </p:spPr>
-        <p:txBody>
-          <a:bodyPr wrap="square">
-            <a:spAutoFit/>
-          </a:bodyPr>
-          <a:lstStyle/>
-          <a:p>
-            <a:pPr>
-              <a:defRPr sz="1000" b="1">
-                <a:solidFill>
-                  <a:srgbClr val="006FCF"/>
-                </a:solidFill>
-              </a:defRPr>
-            </a:pPr>
-            <a:r>
-              <a:t>ZKD CONCIERGE · AMERICAN EXPRESS / CODESTREET 2026</a:t>
-            </a:r>
-          </a:p>
-        </p:txBody>
-      </p:sp>
-      <p:sp>
-        <p:nvSpPr>
-          <p:cNvPr id="3" name="TextBox 2"/>
-          <p:cNvSpPr txBox="1"/>
-          <p:nvPr/>
-        </p:nvSpPr>
-        <p:spPr>
-          <a:xfrm>
-            <a:off x="731520" y="731520"/>
-            <a:ext cx="10698480" cy="731520"/>
-          </a:xfrm>
-          <a:prstGeom prst="rect">
-            <a:avLst/>
-          </a:prstGeom>
-          <a:noFill/>
-        </p:spPr>
-        <p:txBody>
-          <a:bodyPr wrap="square">
-            <a:spAutoFit/>
-          </a:bodyPr>
-          <a:lstStyle/>
-          <a:p>
-            <a:pPr>
-              <a:defRPr sz="2600" b="1">
-                <a:solidFill>
-                  <a:srgbClr val="0F172A"/>
-                </a:solidFill>
-              </a:defRPr>
-            </a:pPr>
-            <a:r>
-              <a:t>System Architecture &amp; Multi-Device State Sync</a:t>
-            </a:r>
-          </a:p>
-        </p:txBody>
-      </p:sp>
-      <p:sp>
-        <p:nvSpPr>
-          <p:cNvPr id="4" name="Rounded Rectangle 3"/>
-          <p:cNvSpPr/>
-          <p:nvPr/>
-        </p:nvSpPr>
-        <p:spPr>
-          <a:xfrm>
-            <a:off x="731520" y="1645920"/>
-            <a:ext cx="5120640" cy="4389120"/>
-          </a:xfrm>
-          <a:prstGeom prst="roundRect">
-            <a:avLst/>
-          </a:prstGeom>
           <a:solidFill>
-            <a:srgbClr val="F8FAFC"/>
+            <a:srgbClr val="FAF9F5"/>
           </a:solidFill>
           <a:ln>
-            <a:solidFill>
-              <a:srgbClr val="E2E8F0"/>
-            </a:solidFill>
+            <a:noFill/>
           </a:ln>
+          <a:effectLst/>
         </p:spPr>
         <p:style>
           <a:lnRef idx="1">
@@ -5392,107 +6586,106 @@
           </a:fontRef>
         </p:style>
         <p:txBody>
-          <a:bodyPr rtlCol="0" anchor="ctr" wrap="square"/>
-          <a:lstStyle/>
-          <a:p>
-            <a:pPr algn="ctr">
-              <a:spcAft>
-                <a:spcPts val="1000"/>
-              </a:spcAft>
-              <a:defRPr sz="1600" b="1">
-                <a:solidFill>
-                  <a:srgbClr val="0F172A"/>
-                </a:solidFill>
-              </a:defRPr>
-            </a:pPr>
-            <a:r>
-              <a:t>Server-Authoritative Simulation Engine</a:t>
-            </a:r>
-          </a:p>
+          <a:bodyPr rtlCol="0" anchor="ctr"/>
+          <a:lstStyle/>
+          <a:p>
+            <a:pPr algn="ctr"/>
+          </a:p>
+        </p:txBody>
+      </p:sp>
+      <p:sp>
+        <p:nvSpPr>
+          <p:cNvPr id="3" name="TextBox 2"/>
+          <p:cNvSpPr txBox="1"/>
+          <p:nvPr/>
+        </p:nvSpPr>
+        <p:spPr>
+          <a:xfrm>
+            <a:off x="731520" y="502920"/>
+            <a:ext cx="10698480" cy="320040"/>
+          </a:xfrm>
+          <a:prstGeom prst="rect">
+            <a:avLst/>
+          </a:prstGeom>
+          <a:noFill/>
+        </p:spPr>
+        <p:txBody>
+          <a:bodyPr wrap="square">
+            <a:spAutoFit/>
+          </a:bodyPr>
+          <a:lstStyle/>
           <a:p>
             <a:pPr>
-              <a:spcAft>
-                <a:spcPts val="600"/>
-              </a:spcAft>
-              <a:defRPr sz="1200">
-                <a:solidFill>
-                  <a:srgbClr val="64748B"/>
-                </a:solidFill>
-              </a:defRPr>
-            </a:pPr>
-            <a:r>
-              <a:t>• Module-level simulation engine (`server/engine/simulation.ts`) runs the whole lifecycle.</a:t>
-            </a:r>
-          </a:p>
+              <a:defRPr sz="1050" b="1">
+                <a:solidFill>
+                  <a:srgbClr val="B85C3E"/>
+                </a:solidFill>
+                <a:latin typeface="Avenir Next"/>
+              </a:defRPr>
+            </a:pPr>
+            <a:r>
+              <a:t>ZKD CONCIERGE  ·  AMERICAN EXPRESS  /  CODESTREET 2026</a:t>
+            </a:r>
+          </a:p>
+        </p:txBody>
+      </p:sp>
+      <p:sp>
+        <p:nvSpPr>
+          <p:cNvPr id="4" name="TextBox 3"/>
+          <p:cNvSpPr txBox="1"/>
+          <p:nvPr/>
+        </p:nvSpPr>
+        <p:spPr>
+          <a:xfrm>
+            <a:off x="731520" y="804672"/>
+            <a:ext cx="10058400" cy="777240"/>
+          </a:xfrm>
+          <a:prstGeom prst="rect">
+            <a:avLst/>
+          </a:prstGeom>
+          <a:noFill/>
+        </p:spPr>
+        <p:txBody>
+          <a:bodyPr wrap="square">
+            <a:spAutoFit/>
+          </a:bodyPr>
+          <a:lstStyle/>
           <a:p>
             <a:pPr>
-              <a:spcAft>
-                <a:spcPts val="600"/>
-              </a:spcAft>
-              <a:defRPr sz="1200">
-                <a:solidFill>
-                  <a:srgbClr val="64748B"/>
-                </a:solidFill>
-              </a:defRPr>
-            </a:pPr>
-            <a:r>
-              <a:t>• Real `setTimeout`/`setInterval` chains resolve on schedule whether devices watch or not.</a:t>
-            </a:r>
-          </a:p>
-          <a:p>
-            <a:pPr>
-              <a:spcAft>
-                <a:spcPts val="600"/>
-              </a:spcAft>
-              <a:defRPr sz="1200">
-                <a:solidFill>
-                  <a:srgbClr val="64748B"/>
-                </a:solidFill>
-              </a:defRPr>
-            </a:pPr>
-            <a:r>
-              <a:t>• Single source of truth: shared state ledger (`server/decisionLedger.ts`).</a:t>
-            </a:r>
-          </a:p>
-          <a:p>
-            <a:pPr>
-              <a:spcAft>
-                <a:spcPts val="600"/>
-              </a:spcAft>
-              <a:defRPr sz="1200">
-                <a:solidFill>
-                  <a:srgbClr val="64748B"/>
-                </a:solidFill>
-              </a:defRPr>
-            </a:pPr>
-            <a:r>
-              <a:t>• Zero GPU on critical path: 95% of time is network wait on supplier APIs.</a:t>
-            </a:r>
-          </a:p>
-        </p:txBody>
-      </p:sp>
-      <p:sp>
-        <p:nvSpPr>
-          <p:cNvPr id="5" name="Rounded Rectangle 4"/>
+              <a:defRPr sz="2700" b="0">
+                <a:solidFill>
+                  <a:srgbClr val="1F1E1C"/>
+                </a:solidFill>
+                <a:latin typeface="Georgia"/>
+              </a:defRPr>
+            </a:pPr>
+            <a:r>
+              <a:t>System architecture &amp; multi-device state sync</a:t>
+            </a:r>
+          </a:p>
+        </p:txBody>
+      </p:sp>
+      <p:sp>
+        <p:nvSpPr>
+          <p:cNvPr id="5" name="Rectangle 4"/>
           <p:cNvSpPr/>
           <p:nvPr/>
         </p:nvSpPr>
         <p:spPr>
           <a:xfrm>
-            <a:off x="6217920" y="1645920"/>
-            <a:ext cx="5212080" cy="4389120"/>
-          </a:xfrm>
-          <a:prstGeom prst="roundRect">
+            <a:off x="731520" y="1481328"/>
+            <a:ext cx="502920" cy="44450"/>
+          </a:xfrm>
+          <a:prstGeom prst="rect">
             <a:avLst/>
           </a:prstGeom>
           <a:solidFill>
-            <a:srgbClr val="F8FAFC"/>
+            <a:srgbClr val="D97757"/>
           </a:solidFill>
           <a:ln>
-            <a:solidFill>
-              <a:srgbClr val="E2E8F0"/>
-            </a:solidFill>
+            <a:noFill/>
           </a:ln>
+          <a:effectLst/>
         </p:spPr>
         <p:style>
           <a:lnRef idx="1">
@@ -5509,81 +6702,319 @@
           </a:fontRef>
         </p:style>
         <p:txBody>
-          <a:bodyPr rtlCol="0" anchor="ctr" wrap="square"/>
+          <a:bodyPr rtlCol="0" anchor="ctr"/>
+          <a:lstStyle/>
+          <a:p>
+            <a:pPr algn="ctr"/>
+          </a:p>
+        </p:txBody>
+      </p:sp>
+      <p:sp>
+        <p:nvSpPr>
+          <p:cNvPr id="6" name="TextBox 5"/>
+          <p:cNvSpPr txBox="1"/>
+          <p:nvPr/>
+        </p:nvSpPr>
+        <p:spPr>
+          <a:xfrm>
+            <a:off x="11430000" y="6446520"/>
+            <a:ext cx="548640" cy="320040"/>
+          </a:xfrm>
+          <a:prstGeom prst="rect">
+            <a:avLst/>
+          </a:prstGeom>
+          <a:noFill/>
+        </p:spPr>
+        <p:txBody>
+          <a:bodyPr wrap="none">
+            <a:spAutoFit/>
+          </a:bodyPr>
+          <a:lstStyle/>
+          <a:p>
+            <a:pPr algn="r">
+              <a:defRPr sz="1000">
+                <a:solidFill>
+                  <a:srgbClr val="5E5A52"/>
+                </a:solidFill>
+                <a:latin typeface="Avenir Next"/>
+              </a:defRPr>
+            </a:pPr>
+            <a:r>
+              <a:t>07</a:t>
+            </a:r>
+          </a:p>
+        </p:txBody>
+      </p:sp>
+      <p:sp>
+        <p:nvSpPr>
+          <p:cNvPr id="7" name="Rounded Rectangle 6"/>
+          <p:cNvSpPr/>
+          <p:nvPr/>
+        </p:nvSpPr>
+        <p:spPr>
+          <a:xfrm>
+            <a:off x="731520" y="1783080"/>
+            <a:ext cx="5120640" cy="4251960"/>
+          </a:xfrm>
+          <a:prstGeom prst="roundRect">
+            <a:avLst>
+              <a:gd name="adj" fmla="val 6000"/>
+            </a:avLst>
+          </a:prstGeom>
+          <a:solidFill>
+            <a:srgbClr val="FFFFFF"/>
+          </a:solidFill>
+          <a:ln w="9525">
+            <a:solidFill>
+              <a:srgbClr val="E4E0D6"/>
+            </a:solidFill>
+          </a:ln>
+          <a:effectLst/>
+        </p:spPr>
+        <p:style>
+          <a:lnRef idx="1">
+            <a:schemeClr val="accent1"/>
+          </a:lnRef>
+          <a:fillRef idx="3">
+            <a:schemeClr val="accent1"/>
+          </a:fillRef>
+          <a:effectRef idx="2">
+            <a:schemeClr val="accent1"/>
+          </a:effectRef>
+          <a:fontRef idx="minor">
+            <a:schemeClr val="lt1"/>
+          </a:fontRef>
+        </p:style>
+        <p:txBody>
+          <a:bodyPr rtlCol="0" anchor="ctr" lIns="256032" rIns="256032" tIns="256032" bIns="256032" wrap="square"/>
           <a:lstStyle/>
           <a:p>
             <a:pPr algn="ctr">
               <a:spcAft>
-                <a:spcPts val="1000"/>
+                <a:spcPts val="1200"/>
               </a:spcAft>
               <a:defRPr sz="1600" b="1">
                 <a:solidFill>
-                  <a:srgbClr val="006FCF"/>
-                </a:solidFill>
-              </a:defRPr>
-            </a:pPr>
-            <a:r>
-              <a:t>Multi-Device Sync &amp; Identity Switchers</a:t>
+                  <a:srgbClr val="1F1E1C"/>
+                </a:solidFill>
+                <a:latin typeface="Georgia"/>
+              </a:defRPr>
+            </a:pPr>
+            <a:r>
+              <a:t>Server-authoritative simulation engine</a:t>
             </a:r>
           </a:p>
           <a:p>
             <a:pPr>
+              <a:lnSpc>
+                <a:spcPct val="118000"/>
+              </a:lnSpc>
               <a:spcAft>
-                <a:spcPts val="600"/>
+                <a:spcPts val="800"/>
               </a:spcAft>
-              <a:defRPr sz="1200">
-                <a:solidFill>
-                  <a:srgbClr val="64748B"/>
-                </a:solidFill>
-              </a:defRPr>
-            </a:pPr>
-            <a:r>
-              <a:t>• Stateless clients: Next.js web app (`zkd-app/`) &amp; Expo React Native Android app (`zkd-android/`).</a:t>
+              <a:defRPr sz="1250">
+                <a:solidFill>
+                  <a:srgbClr val="5E5A52"/>
+                </a:solidFill>
+                <a:latin typeface="Avenir Next"/>
+              </a:defRPr>
+            </a:pPr>
+            <a:r>
+              <a:t>—  Module-level simulation engine (server/engine/simulation.ts) runs the whole lifecycle.</a:t>
             </a:r>
           </a:p>
           <a:p>
             <a:pPr>
+              <a:lnSpc>
+                <a:spcPct val="118000"/>
+              </a:lnSpc>
               <a:spcAft>
-                <a:spcPts val="600"/>
+                <a:spcPts val="800"/>
               </a:spcAft>
-              <a:defRPr sz="1200">
-                <a:solidFill>
-                  <a:srgbClr val="64748B"/>
-                </a:solidFill>
-              </a:defRPr>
-            </a:pPr>
-            <a:r>
-              <a:t>• Clean polling architecture (`GET /api/passengers/[id]/schedule`).</a:t>
+              <a:defRPr sz="1250">
+                <a:solidFill>
+                  <a:srgbClr val="5E5A52"/>
+                </a:solidFill>
+                <a:latin typeface="Avenir Next"/>
+              </a:defRPr>
+            </a:pPr>
+            <a:r>
+              <a:t>—  Real setTimeout/setInterval chains resolve on schedule whether devices watch or not.</a:t>
             </a:r>
           </a:p>
           <a:p>
             <a:pPr>
+              <a:lnSpc>
+                <a:spcPct val="118000"/>
+              </a:lnSpc>
               <a:spcAft>
-                <a:spcPts val="600"/>
+                <a:spcPts val="800"/>
               </a:spcAft>
-              <a:defRPr sz="1200">
-                <a:solidFill>
-                  <a:srgbClr val="64748B"/>
-                </a:solidFill>
-              </a:defRPr>
-            </a:pPr>
-            <a:r>
-              <a:t>• Identity switcher (`?as=p-priya` vs `?as=p-arjun`): open two tabs side-by-side to prove independent tenant state.</a:t>
+              <a:defRPr sz="1250">
+                <a:solidFill>
+                  <a:srgbClr val="5E5A52"/>
+                </a:solidFill>
+                <a:latin typeface="Avenir Next"/>
+              </a:defRPr>
+            </a:pPr>
+            <a:r>
+              <a:t>—  Single source of truth: the shared state ledger (server/decisionLedger.ts).</a:t>
             </a:r>
           </a:p>
           <a:p>
             <a:pPr>
+              <a:lnSpc>
+                <a:spcPct val="118000"/>
+              </a:lnSpc>
               <a:spcAft>
-                <a:spcPts val="600"/>
+                <a:spcPts val="800"/>
               </a:spcAft>
-              <a:defRPr sz="1200">
-                <a:solidFill>
-                  <a:srgbClr val="64748B"/>
-                </a:solidFill>
-              </a:defRPr>
-            </a:pPr>
-            <a:r>
-              <a:t>• Actions on mobile/web instantly converge via shared backend.</a:t>
+              <a:defRPr sz="1250">
+                <a:solidFill>
+                  <a:srgbClr val="5E5A52"/>
+                </a:solidFill>
+                <a:latin typeface="Avenir Next"/>
+              </a:defRPr>
+            </a:pPr>
+            <a:r>
+              <a:t>—  Zero GPU on the critical path — 95% of the time is network wait on supplier APIs.</a:t>
+            </a:r>
+          </a:p>
+        </p:txBody>
+      </p:sp>
+      <p:sp>
+        <p:nvSpPr>
+          <p:cNvPr id="8" name="Rounded Rectangle 7"/>
+          <p:cNvSpPr/>
+          <p:nvPr/>
+        </p:nvSpPr>
+        <p:spPr>
+          <a:xfrm>
+            <a:off x="6263640" y="1783080"/>
+            <a:ext cx="5166360" cy="4251960"/>
+          </a:xfrm>
+          <a:prstGeom prst="roundRect">
+            <a:avLst>
+              <a:gd name="adj" fmla="val 6000"/>
+            </a:avLst>
+          </a:prstGeom>
+          <a:solidFill>
+            <a:srgbClr val="F3E3DB"/>
+          </a:solidFill>
+          <a:ln w="9525">
+            <a:solidFill>
+              <a:srgbClr val="E4E0D6"/>
+            </a:solidFill>
+          </a:ln>
+          <a:effectLst/>
+        </p:spPr>
+        <p:style>
+          <a:lnRef idx="1">
+            <a:schemeClr val="accent1"/>
+          </a:lnRef>
+          <a:fillRef idx="3">
+            <a:schemeClr val="accent1"/>
+          </a:fillRef>
+          <a:effectRef idx="2">
+            <a:schemeClr val="accent1"/>
+          </a:effectRef>
+          <a:fontRef idx="minor">
+            <a:schemeClr val="lt1"/>
+          </a:fontRef>
+        </p:style>
+        <p:txBody>
+          <a:bodyPr rtlCol="0" anchor="ctr" lIns="256032" rIns="256032" tIns="256032" bIns="256032" wrap="square"/>
+          <a:lstStyle/>
+          <a:p>
+            <a:pPr algn="ctr">
+              <a:spcAft>
+                <a:spcPts val="1200"/>
+              </a:spcAft>
+              <a:defRPr sz="1600" b="1">
+                <a:solidFill>
+                  <a:srgbClr val="B85C3E"/>
+                </a:solidFill>
+                <a:latin typeface="Georgia"/>
+              </a:defRPr>
+            </a:pPr>
+            <a:r>
+              <a:t>Multi-device sync &amp; identity switchers</a:t>
+            </a:r>
+          </a:p>
+          <a:p>
+            <a:pPr>
+              <a:lnSpc>
+                <a:spcPct val="118000"/>
+              </a:lnSpc>
+              <a:spcAft>
+                <a:spcPts val="800"/>
+              </a:spcAft>
+              <a:defRPr sz="1250">
+                <a:solidFill>
+                  <a:srgbClr val="5E5A52"/>
+                </a:solidFill>
+                <a:latin typeface="Avenir Next"/>
+              </a:defRPr>
+            </a:pPr>
+            <a:r>
+              <a:t>—  Stateless clients: the Next.js web app (zkd-app/) and the Expo React Native app (zkd-android/).</a:t>
+            </a:r>
+          </a:p>
+          <a:p>
+            <a:pPr>
+              <a:lnSpc>
+                <a:spcPct val="118000"/>
+              </a:lnSpc>
+              <a:spcAft>
+                <a:spcPts val="800"/>
+              </a:spcAft>
+              <a:defRPr sz="1250">
+                <a:solidFill>
+                  <a:srgbClr val="5E5A52"/>
+                </a:solidFill>
+                <a:latin typeface="Avenir Next"/>
+              </a:defRPr>
+            </a:pPr>
+            <a:r>
+              <a:t>—  Clean polling architecture: GET /api/passengers/[id]/schedule.</a:t>
+            </a:r>
+          </a:p>
+          <a:p>
+            <a:pPr>
+              <a:lnSpc>
+                <a:spcPct val="118000"/>
+              </a:lnSpc>
+              <a:spcAft>
+                <a:spcPts val="800"/>
+              </a:spcAft>
+              <a:defRPr sz="1250">
+                <a:solidFill>
+                  <a:srgbClr val="5E5A52"/>
+                </a:solidFill>
+                <a:latin typeface="Avenir Next"/>
+              </a:defRPr>
+            </a:pPr>
+            <a:r>
+              <a:t>—  Identity switcher (?as=p-priya vs ?as=p-arjun): two tabs side by side prove independent tenant state.</a:t>
+            </a:r>
+          </a:p>
+          <a:p>
+            <a:pPr>
+              <a:lnSpc>
+                <a:spcPct val="118000"/>
+              </a:lnSpc>
+              <a:spcAft>
+                <a:spcPts val="800"/>
+              </a:spcAft>
+              <a:defRPr sz="1250">
+                <a:solidFill>
+                  <a:srgbClr val="5E5A52"/>
+                </a:solidFill>
+                <a:latin typeface="Avenir Next"/>
+              </a:defRPr>
+            </a:pPr>
+            <a:r>
+              <a:t>—  Actions on mobile and web instantly converge via the shared backend.</a:t>
             </a:r>
           </a:p>
         </p:txBody>
@@ -5608,14 +7039,58 @@
       <p:grpSpPr/>
       <p:sp>
         <p:nvSpPr>
-          <p:cNvPr id="2" name="TextBox 1"/>
+          <p:cNvPr id="2" name="Rectangle 1"/>
+          <p:cNvSpPr/>
+          <p:nvPr/>
+        </p:nvSpPr>
+        <p:spPr>
+          <a:xfrm>
+            <a:off x="0" y="0"/>
+            <a:ext cx="12191695" cy="6858000"/>
+          </a:xfrm>
+          <a:prstGeom prst="rect">
+            <a:avLst/>
+          </a:prstGeom>
+          <a:solidFill>
+            <a:srgbClr val="FAF9F5"/>
+          </a:solidFill>
+          <a:ln>
+            <a:noFill/>
+          </a:ln>
+          <a:effectLst/>
+        </p:spPr>
+        <p:style>
+          <a:lnRef idx="1">
+            <a:schemeClr val="accent1"/>
+          </a:lnRef>
+          <a:fillRef idx="3">
+            <a:schemeClr val="accent1"/>
+          </a:fillRef>
+          <a:effectRef idx="2">
+            <a:schemeClr val="accent1"/>
+          </a:effectRef>
+          <a:fontRef idx="minor">
+            <a:schemeClr val="lt1"/>
+          </a:fontRef>
+        </p:style>
+        <p:txBody>
+          <a:bodyPr rtlCol="0" anchor="ctr"/>
+          <a:lstStyle/>
+          <a:p>
+            <a:pPr algn="ctr"/>
+          </a:p>
+        </p:txBody>
+      </p:sp>
+      <p:sp>
+        <p:nvSpPr>
+          <p:cNvPr id="3" name="TextBox 2"/>
           <p:cNvSpPr txBox="1"/>
           <p:nvPr/>
         </p:nvSpPr>
         <p:spPr>
           <a:xfrm>
-            <a:off x="731520" y="457200"/>
-            <a:ext cx="10698480" cy="365760"/>
+            <a:off x="731520" y="502920"/>
+            <a:ext cx="10698480" cy="320040"/>
           </a:xfrm>
           <a:prstGeom prst="rect">
             <a:avLst/>
@@ -5629,28 +7104,29 @@
           <a:lstStyle/>
           <a:p>
             <a:pPr>
-              <a:defRPr sz="1000" b="1">
-                <a:solidFill>
-                  <a:srgbClr val="006FCF"/>
-                </a:solidFill>
-              </a:defRPr>
-            </a:pPr>
-            <a:r>
-              <a:t>ZKD CONCIERGE · AMERICAN EXPRESS / CODESTREET 2026</a:t>
-            </a:r>
-          </a:p>
-        </p:txBody>
-      </p:sp>
-      <p:sp>
-        <p:nvSpPr>
-          <p:cNvPr id="3" name="TextBox 2"/>
+              <a:defRPr sz="1050" b="1">
+                <a:solidFill>
+                  <a:srgbClr val="B85C3E"/>
+                </a:solidFill>
+                <a:latin typeface="Avenir Next"/>
+              </a:defRPr>
+            </a:pPr>
+            <a:r>
+              <a:t>ZKD CONCIERGE  ·  AMERICAN EXPRESS  /  CODESTREET 2026</a:t>
+            </a:r>
+          </a:p>
+        </p:txBody>
+      </p:sp>
+      <p:sp>
+        <p:nvSpPr>
+          <p:cNvPr id="4" name="TextBox 3"/>
           <p:cNvSpPr txBox="1"/>
           <p:nvPr/>
         </p:nvSpPr>
         <p:spPr>
           <a:xfrm>
-            <a:off x="731520" y="731520"/>
-            <a:ext cx="10698480" cy="731520"/>
+            <a:off x="731520" y="804672"/>
+            <a:ext cx="10058400" cy="777240"/>
           </a:xfrm>
           <a:prstGeom prst="rect">
             <a:avLst/>
@@ -5664,29 +7140,110 @@
           <a:lstStyle/>
           <a:p>
             <a:pPr>
-              <a:defRPr sz="2600" b="1">
-                <a:solidFill>
-                  <a:srgbClr val="0F172A"/>
-                </a:solidFill>
-              </a:defRPr>
-            </a:pPr>
-            <a:r>
-              <a:t>Customer Experience KPIs Matrix (Strictly No Revenue Proxies)</a:t>
+              <a:defRPr sz="2700" b="0">
+                <a:solidFill>
+                  <a:srgbClr val="1F1E1C"/>
+                </a:solidFill>
+                <a:latin typeface="Georgia"/>
+              </a:defRPr>
+            </a:pPr>
+            <a:r>
+              <a:t>Customer experience KPIs — strictly no revenue proxies</a:t>
+            </a:r>
+          </a:p>
+        </p:txBody>
+      </p:sp>
+      <p:sp>
+        <p:nvSpPr>
+          <p:cNvPr id="5" name="Rectangle 4"/>
+          <p:cNvSpPr/>
+          <p:nvPr/>
+        </p:nvSpPr>
+        <p:spPr>
+          <a:xfrm>
+            <a:off x="731520" y="1481328"/>
+            <a:ext cx="502920" cy="44450"/>
+          </a:xfrm>
+          <a:prstGeom prst="rect">
+            <a:avLst/>
+          </a:prstGeom>
+          <a:solidFill>
+            <a:srgbClr val="D97757"/>
+          </a:solidFill>
+          <a:ln>
+            <a:noFill/>
+          </a:ln>
+          <a:effectLst/>
+        </p:spPr>
+        <p:style>
+          <a:lnRef idx="1">
+            <a:schemeClr val="accent1"/>
+          </a:lnRef>
+          <a:fillRef idx="3">
+            <a:schemeClr val="accent1"/>
+          </a:fillRef>
+          <a:effectRef idx="2">
+            <a:schemeClr val="accent1"/>
+          </a:effectRef>
+          <a:fontRef idx="minor">
+            <a:schemeClr val="lt1"/>
+          </a:fontRef>
+        </p:style>
+        <p:txBody>
+          <a:bodyPr rtlCol="0" anchor="ctr"/>
+          <a:lstStyle/>
+          <a:p>
+            <a:pPr algn="ctr"/>
+          </a:p>
+        </p:txBody>
+      </p:sp>
+      <p:sp>
+        <p:nvSpPr>
+          <p:cNvPr id="6" name="TextBox 5"/>
+          <p:cNvSpPr txBox="1"/>
+          <p:nvPr/>
+        </p:nvSpPr>
+        <p:spPr>
+          <a:xfrm>
+            <a:off x="11430000" y="6446520"/>
+            <a:ext cx="548640" cy="320040"/>
+          </a:xfrm>
+          <a:prstGeom prst="rect">
+            <a:avLst/>
+          </a:prstGeom>
+          <a:noFill/>
+        </p:spPr>
+        <p:txBody>
+          <a:bodyPr wrap="none">
+            <a:spAutoFit/>
+          </a:bodyPr>
+          <a:lstStyle/>
+          <a:p>
+            <a:pPr algn="r">
+              <a:defRPr sz="1000">
+                <a:solidFill>
+                  <a:srgbClr val="5E5A52"/>
+                </a:solidFill>
+                <a:latin typeface="Avenir Next"/>
+              </a:defRPr>
+            </a:pPr>
+            <a:r>
+              <a:t>08</a:t>
             </a:r>
           </a:p>
         </p:txBody>
       </p:sp>
       <p:graphicFrame>
         <p:nvGraphicFramePr>
-          <p:cNvPr id="4" name="Table 3"/>
+          <p:cNvPr id="7" name="Table 6"/>
           <p:cNvGraphicFramePr>
             <a:graphicFrameLocks noGrp="1"/>
           </p:cNvGraphicFramePr>
           <p:nvPr/>
         </p:nvGraphicFramePr>
         <p:xfrm>
-          <a:off x="731520" y="1645920"/>
-          <a:ext cx="10698480" cy="4389120"/>
+          <a:off x="731520" y="1783080"/>
+          <a:ext cx="10725912" cy="4206240"/>
         </p:xfrm>
         <a:graphic>
           <a:graphicData uri="http://schemas.openxmlformats.org/drawingml/2006/table">
@@ -5696,21 +7253,22 @@
               </a:tblPr>
               <a:tblGrid>
                 <a:gridCol w="2011680"/>
-                <a:gridCol w="2926080"/>
-                <a:gridCol w="1828800"/>
-                <a:gridCol w="3931920"/>
+                <a:gridCol w="2953512"/>
+                <a:gridCol w="1737360"/>
+                <a:gridCol w="4023360"/>
               </a:tblGrid>
-              <a:tr h="877824">
+              <a:tr h="841248">
                 <a:tc>
                   <a:txBody>
                     <a:bodyPr/>
                     <a:lstStyle/>
                     <a:p>
                       <a:pPr>
-                        <a:defRPr b="1" sz="1200">
+                        <a:defRPr b="1" sz="1150">
                           <a:solidFill>
-                            <a:srgbClr val="FFFFFF"/>
+                            <a:srgbClr val="F7F5F0"/>
                           </a:solidFill>
+                          <a:latin typeface="Avenir Next"/>
                         </a:defRPr>
                       </a:pPr>
                       <a:r>
@@ -5718,9 +7276,9 @@
                       </a:r>
                     </a:p>
                   </a:txBody>
-                  <a:tcPr>
+                  <a:tcPr marL="128016" marT="73152" anchor="ctr">
                     <a:solidFill>
-                      <a:srgbClr val="0F172A"/>
+                      <a:srgbClr val="1F1E1C"/>
                     </a:solidFill>
                   </a:tcPr>
                 </a:tc>
@@ -5730,20 +7288,21 @@
                     <a:lstStyle/>
                     <a:p>
                       <a:pPr>
-                        <a:defRPr b="1" sz="1200">
+                        <a:defRPr b="1" sz="1150">
                           <a:solidFill>
-                            <a:srgbClr val="FFFFFF"/>
+                            <a:srgbClr val="F7F5F0"/>
                           </a:solidFill>
+                          <a:latin typeface="Avenir Next"/>
                         </a:defRPr>
                       </a:pPr>
                       <a:r>
-                        <a:t>Metric Name</a:t>
+                        <a:t>Metric name</a:t>
                       </a:r>
                     </a:p>
                   </a:txBody>
-                  <a:tcPr>
+                  <a:tcPr marL="128016" marT="73152" anchor="ctr">
                     <a:solidFill>
-                      <a:srgbClr val="0F172A"/>
+                      <a:srgbClr val="1F1E1C"/>
                     </a:solidFill>
                   </a:tcPr>
                 </a:tc>
@@ -5753,10 +7312,11 @@
                     <a:lstStyle/>
                     <a:p>
                       <a:pPr>
-                        <a:defRPr b="1" sz="1200">
+                        <a:defRPr b="1" sz="1150">
                           <a:solidFill>
-                            <a:srgbClr val="FFFFFF"/>
+                            <a:srgbClr val="F7F5F0"/>
                           </a:solidFill>
+                          <a:latin typeface="Avenir Next"/>
                         </a:defRPr>
                       </a:pPr>
                       <a:r>
@@ -5764,9 +7324,9 @@
                       </a:r>
                     </a:p>
                   </a:txBody>
-                  <a:tcPr>
+                  <a:tcPr marL="128016" marT="73152" anchor="ctr">
                     <a:solidFill>
-                      <a:srgbClr val="0F172A"/>
+                      <a:srgbClr val="1F1E1C"/>
                     </a:solidFill>
                   </a:tcPr>
                 </a:tc>
@@ -5776,25 +7336,26 @@
                     <a:lstStyle/>
                     <a:p>
                       <a:pPr>
-                        <a:defRPr b="1" sz="1200">
+                        <a:defRPr b="1" sz="1150">
                           <a:solidFill>
-                            <a:srgbClr val="FFFFFF"/>
+                            <a:srgbClr val="F7F5F0"/>
                           </a:solidFill>
+                          <a:latin typeface="Avenir Next"/>
                         </a:defRPr>
                       </a:pPr>
                       <a:r>
-                        <a:t>System Evidence / Reality</a:t>
+                        <a:t>System evidence / reality</a:t>
                       </a:r>
                     </a:p>
                   </a:txBody>
-                  <a:tcPr>
+                  <a:tcPr marL="128016" marT="73152" anchor="ctr">
                     <a:solidFill>
-                      <a:srgbClr val="0F172A"/>
+                      <a:srgbClr val="1F1E1C"/>
                     </a:solidFill>
                   </a:tcPr>
                 </a:tc>
               </a:tr>
-              <a:tr h="877824">
+              <a:tr h="841248">
                 <a:tc>
                   <a:txBody>
                     <a:bodyPr/>
@@ -5803,8 +7364,9 @@
                       <a:pPr>
                         <a:defRPr sz="1100">
                           <a:solidFill>
-                            <a:srgbClr val="0F172A"/>
+                            <a:srgbClr val="1F1E1C"/>
                           </a:solidFill>
+                          <a:latin typeface="Avenir Next"/>
                         </a:defRPr>
                       </a:pPr>
                       <a:r>
@@ -5812,9 +7374,9 @@
                       </a:r>
                     </a:p>
                   </a:txBody>
-                  <a:tcPr>
+                  <a:tcPr marL="128016" anchor="ctr">
                     <a:solidFill>
-                      <a:srgbClr val="F8FAFC"/>
+                      <a:srgbClr val="FFFFFF"/>
                     </a:solidFill>
                   </a:tcPr>
                 </a:tc>
@@ -5826,8 +7388,9 @@
                       <a:pPr>
                         <a:defRPr sz="1100">
                           <a:solidFill>
-                            <a:srgbClr val="0F172A"/>
+                            <a:srgbClr val="5E5A52"/>
                           </a:solidFill>
+                          <a:latin typeface="Avenir Next"/>
                         </a:defRPr>
                       </a:pPr>
                       <a:r>
@@ -5835,9 +7398,9 @@
                       </a:r>
                     </a:p>
                   </a:txBody>
-                  <a:tcPr>
+                  <a:tcPr marL="128016" anchor="ctr">
                     <a:solidFill>
-                      <a:srgbClr val="F8FAFC"/>
+                      <a:srgbClr val="FFFFFF"/>
                     </a:solidFill>
                   </a:tcPr>
                 </a:tc>
@@ -5849,8 +7412,9 @@
                       <a:pPr>
                         <a:defRPr sz="1100" b="1">
                           <a:solidFill>
-                            <a:srgbClr val="006FCF"/>
+                            <a:srgbClr val="B85C3E"/>
                           </a:solidFill>
+                          <a:latin typeface="Avenir Next"/>
                         </a:defRPr>
                       </a:pPr>
                       <a:r>
@@ -5858,9 +7422,9 @@
                       </a:r>
                     </a:p>
                   </a:txBody>
-                  <a:tcPr>
+                  <a:tcPr marL="128016" anchor="ctr">
                     <a:solidFill>
-                      <a:srgbClr val="F8FAFC"/>
+                      <a:srgbClr val="FFFFFF"/>
                     </a:solidFill>
                   </a:tcPr>
                 </a:tc>
@@ -5872,23 +7436,24 @@
                       <a:pPr>
                         <a:defRPr sz="1100">
                           <a:solidFill>
-                            <a:srgbClr val="0F172A"/>
+                            <a:srgbClr val="5E5A52"/>
                           </a:solidFill>
+                          <a:latin typeface="Avenir Next"/>
                         </a:defRPr>
                       </a:pPr>
                       <a:r>
-                        <a:t>~11s measured via pipeline journal (`journal.ts`).</a:t>
+                        <a:t>~11s measured via the pipeline journal (journal.ts).</a:t>
                       </a:r>
                     </a:p>
                   </a:txBody>
-                  <a:tcPr>
+                  <a:tcPr marL="128016" anchor="ctr">
                     <a:solidFill>
-                      <a:srgbClr val="F8FAFC"/>
+                      <a:srgbClr val="FFFFFF"/>
                     </a:solidFill>
                   </a:tcPr>
                 </a:tc>
               </a:tr>
-              <a:tr h="877824">
+              <a:tr h="841248">
                 <a:tc>
                   <a:txBody>
                     <a:bodyPr/>
@@ -5897,18 +7462,19 @@
                       <a:pPr>
                         <a:defRPr sz="1100">
                           <a:solidFill>
-                            <a:srgbClr val="0F172A"/>
+                            <a:srgbClr val="1F1E1C"/>
                           </a:solidFill>
+                          <a:latin typeface="Avenir Next"/>
                         </a:defRPr>
                       </a:pPr>
                       <a:r>
-                        <a:t>Member Effort</a:t>
+                        <a:t>Member effort</a:t>
                       </a:r>
                     </a:p>
                   </a:txBody>
-                  <a:tcPr>
+                  <a:tcPr marL="128016" anchor="ctr">
                     <a:solidFill>
-                      <a:srgbClr val="F8FAFC"/>
+                      <a:srgbClr val="F0EEE6"/>
                     </a:solidFill>
                   </a:tcPr>
                 </a:tc>
@@ -5920,8 +7486,9 @@
                       <a:pPr>
                         <a:defRPr sz="1100">
                           <a:solidFill>
-                            <a:srgbClr val="0F172A"/>
+                            <a:srgbClr val="5E5A52"/>
                           </a:solidFill>
+                          <a:latin typeface="Avenir Next"/>
                         </a:defRPr>
                       </a:pPr>
                       <a:r>
@@ -5929,9 +7496,9 @@
                       </a:r>
                     </a:p>
                   </a:txBody>
-                  <a:tcPr>
+                  <a:tcPr marL="128016" anchor="ctr">
                     <a:solidFill>
-                      <a:srgbClr val="F8FAFC"/>
+                      <a:srgbClr val="F0EEE6"/>
                     </a:solidFill>
                   </a:tcPr>
                 </a:tc>
@@ -5943,8 +7510,9 @@
                       <a:pPr>
                         <a:defRPr sz="1100" b="1">
                           <a:solidFill>
-                            <a:srgbClr val="006FCF"/>
+                            <a:srgbClr val="B85C3E"/>
                           </a:solidFill>
+                          <a:latin typeface="Avenir Next"/>
                         </a:defRPr>
                       </a:pPr>
                       <a:r>
@@ -5952,9 +7520,9 @@
                       </a:r>
                     </a:p>
                   </a:txBody>
-                  <a:tcPr>
+                  <a:tcPr marL="128016" anchor="ctr">
                     <a:solidFill>
-                      <a:srgbClr val="F8FAFC"/>
+                      <a:srgbClr val="F0EEE6"/>
                     </a:solidFill>
                   </a:tcPr>
                 </a:tc>
@@ -5966,23 +7534,24 @@
                       <a:pPr>
                         <a:defRPr sz="1100">
                           <a:solidFill>
-                            <a:srgbClr val="0F172A"/>
+                            <a:srgbClr val="5E5A52"/>
                           </a:solidFill>
+                          <a:latin typeface="Avenir Next"/>
                         </a:defRPr>
                       </a:pPr>
                       <a:r>
-                        <a:t>Tracked via `DisruptionResolution.kind === 'handed-over'`.</a:t>
+                        <a:t>Tracked via DisruptionResolution.kind === 'handed-over'.</a:t>
                       </a:r>
                     </a:p>
                   </a:txBody>
-                  <a:tcPr>
+                  <a:tcPr marL="128016" anchor="ctr">
                     <a:solidFill>
-                      <a:srgbClr val="F8FAFC"/>
+                      <a:srgbClr val="F0EEE6"/>
                     </a:solidFill>
                   </a:tcPr>
                 </a:tc>
               </a:tr>
-              <a:tr h="877824">
+              <a:tr h="841248">
                 <a:tc>
                   <a:txBody>
                     <a:bodyPr/>
@@ -5991,18 +7560,19 @@
                       <a:pPr>
                         <a:defRPr sz="1100">
                           <a:solidFill>
-                            <a:srgbClr val="0F172A"/>
+                            <a:srgbClr val="1F1E1C"/>
                           </a:solidFill>
+                          <a:latin typeface="Avenir Next"/>
                         </a:defRPr>
                       </a:pPr>
                       <a:r>
-                        <a:t>Outcome Quality</a:t>
+                        <a:t>Outcome quality</a:t>
                       </a:r>
                     </a:p>
                   </a:txBody>
-                  <a:tcPr>
+                  <a:tcPr marL="128016" anchor="ctr">
                     <a:solidFill>
-                      <a:srgbClr val="F8FAFC"/>
+                      <a:srgbClr val="FFFFFF"/>
                     </a:solidFill>
                   </a:tcPr>
                 </a:tc>
@@ -6014,8 +7584,9 @@
                       <a:pPr>
                         <a:defRPr sz="1100">
                           <a:solidFill>
-                            <a:srgbClr val="0F172A"/>
+                            <a:srgbClr val="5E5A52"/>
                           </a:solidFill>
+                          <a:latin typeface="Avenir Next"/>
                         </a:defRPr>
                       </a:pPr>
                       <a:r>
@@ -6023,9 +7594,9 @@
                       </a:r>
                     </a:p>
                   </a:txBody>
-                  <a:tcPr>
+                  <a:tcPr marL="128016" anchor="ctr">
                     <a:solidFill>
-                      <a:srgbClr val="F8FAFC"/>
+                      <a:srgbClr val="FFFFFF"/>
                     </a:solidFill>
                   </a:tcPr>
                 </a:tc>
@@ -6037,8 +7608,9 @@
                       <a:pPr>
                         <a:defRPr sz="1100" b="1">
                           <a:solidFill>
-                            <a:srgbClr val="006FCF"/>
+                            <a:srgbClr val="B85C3E"/>
                           </a:solidFill>
+                          <a:latin typeface="Avenir Next"/>
                         </a:defRPr>
                       </a:pPr>
                       <a:r>
@@ -6046,9 +7618,9 @@
                       </a:r>
                     </a:p>
                   </a:txBody>
-                  <a:tcPr>
+                  <a:tcPr marL="128016" anchor="ctr">
                     <a:solidFill>
-                      <a:srgbClr val="F8FAFC"/>
+                      <a:srgbClr val="FFFFFF"/>
                     </a:solidFill>
                   </a:tcPr>
                 </a:tc>
@@ -6060,8 +7632,9 @@
                       <a:pPr>
                         <a:defRPr sz="1100">
                           <a:solidFill>
-                            <a:srgbClr val="0F172A"/>
+                            <a:srgbClr val="5E5A52"/>
                           </a:solidFill>
+                          <a:latin typeface="Avenir Next"/>
                         </a:defRPr>
                       </a:pPr>
                       <a:r>
@@ -6069,14 +7642,14 @@
                       </a:r>
                     </a:p>
                   </a:txBody>
-                  <a:tcPr>
+                  <a:tcPr marL="128016" anchor="ctr">
                     <a:solidFill>
-                      <a:srgbClr val="F8FAFC"/>
+                      <a:srgbClr val="FFFFFF"/>
                     </a:solidFill>
                   </a:tcPr>
                 </a:tc>
               </a:tr>
-              <a:tr h="877824">
+              <a:tr h="841248">
                 <a:tc>
                   <a:txBody>
                     <a:bodyPr/>
@@ -6085,18 +7658,19 @@
                       <a:pPr>
                         <a:defRPr sz="1100">
                           <a:solidFill>
-                            <a:srgbClr val="0F172A"/>
+                            <a:srgbClr val="1F1E1C"/>
                           </a:solidFill>
+                          <a:latin typeface="Avenir Next"/>
                         </a:defRPr>
                       </a:pPr>
                       <a:r>
-                        <a:t>Trust &amp; Loyalty</a:t>
+                        <a:t>Trust &amp; loyalty</a:t>
                       </a:r>
                     </a:p>
                   </a:txBody>
-                  <a:tcPr>
+                  <a:tcPr marL="128016" anchor="ctr">
                     <a:solidFill>
-                      <a:srgbClr val="F8FAFC"/>
+                      <a:srgbClr val="F0EEE6"/>
                     </a:solidFill>
                   </a:tcPr>
                 </a:tc>
@@ -6108,8 +7682,9 @@
                       <a:pPr>
                         <a:defRPr sz="1100">
                           <a:solidFill>
-                            <a:srgbClr val="0F172A"/>
+                            <a:srgbClr val="5E5A52"/>
                           </a:solidFill>
+                          <a:latin typeface="Avenir Next"/>
                         </a:defRPr>
                       </a:pPr>
                       <a:r>
@@ -6117,9 +7692,9 @@
                       </a:r>
                     </a:p>
                   </a:txBody>
-                  <a:tcPr>
+                  <a:tcPr marL="128016" anchor="ctr">
                     <a:solidFill>
-                      <a:srgbClr val="F8FAFC"/>
+                      <a:srgbClr val="F0EEE6"/>
                     </a:solidFill>
                   </a:tcPr>
                 </a:tc>
@@ -6131,8 +7706,9 @@
                       <a:pPr>
                         <a:defRPr sz="1100" b="1">
                           <a:solidFill>
-                            <a:srgbClr val="006FCF"/>
+                            <a:srgbClr val="B85C3E"/>
                           </a:solidFill>
+                          <a:latin typeface="Avenir Next"/>
                         </a:defRPr>
                       </a:pPr>
                       <a:r>
@@ -6140,9 +7716,9 @@
                       </a:r>
                     </a:p>
                   </a:txBody>
-                  <a:tcPr>
+                  <a:tcPr marL="128016" anchor="ctr">
                     <a:solidFill>
-                      <a:srgbClr val="F8FAFC"/>
+                      <a:srgbClr val="F0EEE6"/>
                     </a:solidFill>
                   </a:tcPr>
                 </a:tc>
@@ -6154,18 +7730,19 @@
                       <a:pPr>
                         <a:defRPr sz="1100">
                           <a:solidFill>
-                            <a:srgbClr val="0F172A"/>
+                            <a:srgbClr val="5E5A52"/>
                           </a:solidFill>
+                          <a:latin typeface="Avenir Next"/>
                         </a:defRPr>
                       </a:pPr>
                       <a:r>
-                        <a:t>Share of members trusting system unsupervised.</a:t>
+                        <a:t>Share of members trusting the system unsupervised.</a:t>
                       </a:r>
                     </a:p>
                   </a:txBody>
-                  <a:tcPr>
+                  <a:tcPr marL="128016" anchor="ctr">
                     <a:solidFill>
-                      <a:srgbClr val="F8FAFC"/>
+                      <a:srgbClr val="F0EEE6"/>
                     </a:solidFill>
                   </a:tcPr>
                 </a:tc>
@@ -6194,96 +7771,25 @@
       <p:grpSpPr/>
       <p:sp>
         <p:nvSpPr>
-          <p:cNvPr id="2" name="TextBox 1"/>
-          <p:cNvSpPr txBox="1"/>
+          <p:cNvPr id="2" name="Rectangle 1"/>
+          <p:cNvSpPr/>
           <p:nvPr/>
         </p:nvSpPr>
         <p:spPr>
           <a:xfrm>
-            <a:off x="731520" y="457200"/>
-            <a:ext cx="10698480" cy="365760"/>
+            <a:off x="0" y="0"/>
+            <a:ext cx="12191695" cy="6858000"/>
           </a:xfrm>
           <a:prstGeom prst="rect">
             <a:avLst/>
           </a:prstGeom>
-          <a:noFill/>
-        </p:spPr>
-        <p:txBody>
-          <a:bodyPr wrap="square">
-            <a:spAutoFit/>
-          </a:bodyPr>
-          <a:lstStyle/>
-          <a:p>
-            <a:pPr>
-              <a:defRPr sz="1000" b="1">
-                <a:solidFill>
-                  <a:srgbClr val="006FCF"/>
-                </a:solidFill>
-              </a:defRPr>
-            </a:pPr>
-            <a:r>
-              <a:t>ZKD CONCIERGE · AMERICAN EXPRESS / CODESTREET 2026</a:t>
-            </a:r>
-          </a:p>
-        </p:txBody>
-      </p:sp>
-      <p:sp>
-        <p:nvSpPr>
-          <p:cNvPr id="3" name="TextBox 2"/>
-          <p:cNvSpPr txBox="1"/>
-          <p:nvPr/>
-        </p:nvSpPr>
-        <p:spPr>
-          <a:xfrm>
-            <a:off x="731520" y="731520"/>
-            <a:ext cx="10698480" cy="731520"/>
-          </a:xfrm>
-          <a:prstGeom prst="rect">
-            <a:avLst/>
-          </a:prstGeom>
-          <a:noFill/>
-        </p:spPr>
-        <p:txBody>
-          <a:bodyPr wrap="square">
-            <a:spAutoFit/>
-          </a:bodyPr>
-          <a:lstStyle/>
-          <a:p>
-            <a:pPr>
-              <a:defRPr sz="2600" b="1">
-                <a:solidFill>
-                  <a:srgbClr val="0F172A"/>
-                </a:solidFill>
-              </a:defRPr>
-            </a:pPr>
-            <a:r>
-              <a:t>Engineering Deep Dive: The 11-Second Recovery</a:t>
-            </a:r>
-          </a:p>
-        </p:txBody>
-      </p:sp>
-      <p:sp>
-        <p:nvSpPr>
-          <p:cNvPr id="4" name="Rounded Rectangle 3"/>
-          <p:cNvSpPr/>
-          <p:nvPr/>
-        </p:nvSpPr>
-        <p:spPr>
-          <a:xfrm>
-            <a:off x="731520" y="1645920"/>
-            <a:ext cx="5120640" cy="4389120"/>
-          </a:xfrm>
-          <a:prstGeom prst="roundRect">
-            <a:avLst/>
-          </a:prstGeom>
           <a:solidFill>
-            <a:srgbClr val="F8FAFC"/>
+            <a:srgbClr val="FAF9F5"/>
           </a:solidFill>
           <a:ln>
-            <a:solidFill>
-              <a:srgbClr val="E2E8F0"/>
-            </a:solidFill>
+            <a:noFill/>
           </a:ln>
+          <a:effectLst/>
         </p:spPr>
         <p:style>
           <a:lnRef idx="1">
@@ -6300,92 +7806,106 @@
           </a:fontRef>
         </p:style>
         <p:txBody>
-          <a:bodyPr rtlCol="0" anchor="ctr" wrap="square"/>
-          <a:lstStyle/>
-          <a:p>
-            <a:pPr algn="ctr">
-              <a:spcAft>
-                <a:spcPts val="1000"/>
-              </a:spcAft>
-              <a:defRPr sz="1600" b="1">
-                <a:solidFill>
-                  <a:srgbClr val="0F172A"/>
-                </a:solidFill>
-              </a:defRPr>
-            </a:pPr>
-            <a:r>
-              <a:t>Where Does the ~11s Go?</a:t>
-            </a:r>
-          </a:p>
+          <a:bodyPr rtlCol="0" anchor="ctr"/>
+          <a:lstStyle/>
+          <a:p>
+            <a:pPr algn="ctr"/>
+          </a:p>
+        </p:txBody>
+      </p:sp>
+      <p:sp>
+        <p:nvSpPr>
+          <p:cNvPr id="3" name="TextBox 2"/>
+          <p:cNvSpPr txBox="1"/>
+          <p:nvPr/>
+        </p:nvSpPr>
+        <p:spPr>
+          <a:xfrm>
+            <a:off x="731520" y="502920"/>
+            <a:ext cx="10698480" cy="320040"/>
+          </a:xfrm>
+          <a:prstGeom prst="rect">
+            <a:avLst/>
+          </a:prstGeom>
+          <a:noFill/>
+        </p:spPr>
+        <p:txBody>
+          <a:bodyPr wrap="square">
+            <a:spAutoFit/>
+          </a:bodyPr>
+          <a:lstStyle/>
           <a:p>
             <a:pPr>
-              <a:spcAft>
-                <a:spcPts val="800"/>
-              </a:spcAft>
-              <a:defRPr sz="1300">
-                <a:solidFill>
-                  <a:srgbClr val="64748B"/>
-                </a:solidFill>
-              </a:defRPr>
-            </a:pPr>
-            <a:r>
-              <a:t>• 95% of wall-clock time (~10.4s) is pure network I/O waiting on external supplier APIs (Duffel flight booking, LiteAPI hotel reservation).</a:t>
-            </a:r>
-          </a:p>
+              <a:defRPr sz="1050" b="1">
+                <a:solidFill>
+                  <a:srgbClr val="B85C3E"/>
+                </a:solidFill>
+                <a:latin typeface="Avenir Next"/>
+              </a:defRPr>
+            </a:pPr>
+            <a:r>
+              <a:t>ZKD CONCIERGE  ·  AMERICAN EXPRESS  /  CODESTREET 2026</a:t>
+            </a:r>
+          </a:p>
+        </p:txBody>
+      </p:sp>
+      <p:sp>
+        <p:nvSpPr>
+          <p:cNvPr id="4" name="TextBox 3"/>
+          <p:cNvSpPr txBox="1"/>
+          <p:nvPr/>
+        </p:nvSpPr>
+        <p:spPr>
+          <a:xfrm>
+            <a:off x="731520" y="804672"/>
+            <a:ext cx="10058400" cy="777240"/>
+          </a:xfrm>
+          <a:prstGeom prst="rect">
+            <a:avLst/>
+          </a:prstGeom>
+          <a:noFill/>
+        </p:spPr>
+        <p:txBody>
+          <a:bodyPr wrap="square">
+            <a:spAutoFit/>
+          </a:bodyPr>
+          <a:lstStyle/>
           <a:p>
             <a:pPr>
-              <a:spcAft>
-                <a:spcPts val="800"/>
-              </a:spcAft>
-              <a:defRPr sz="1300">
-                <a:solidFill>
-                  <a:srgbClr val="64748B"/>
-                </a:solidFill>
-              </a:defRPr>
-            </a:pPr>
-            <a:r>
-              <a:t>• &lt;0.6s is computational overhead: preference scoring, allocation, 3 negotiation rounds, and OPA policy checks.</a:t>
-            </a:r>
-          </a:p>
-          <a:p>
-            <a:pPr>
-              <a:spcAft>
-                <a:spcPts val="800"/>
-              </a:spcAft>
-              <a:defRPr sz="1300">
-                <a:solidFill>
-                  <a:srgbClr val="64748B"/>
-                </a:solidFill>
-              </a:defRPr>
-            </a:pPr>
-            <a:r>
-              <a:t>• Zero GPU on critical path: rule-based preference matching and heuristic ranking run instantly in-memory.</a:t>
-            </a:r>
-          </a:p>
-        </p:txBody>
-      </p:sp>
-      <p:sp>
-        <p:nvSpPr>
-          <p:cNvPr id="5" name="Rounded Rectangle 4"/>
+              <a:defRPr sz="2700" b="0">
+                <a:solidFill>
+                  <a:srgbClr val="1F1E1C"/>
+                </a:solidFill>
+                <a:latin typeface="Georgia"/>
+              </a:defRPr>
+            </a:pPr>
+            <a:r>
+              <a:t>Engineering deep dive: the 11-second recovery</a:t>
+            </a:r>
+          </a:p>
+        </p:txBody>
+      </p:sp>
+      <p:sp>
+        <p:nvSpPr>
+          <p:cNvPr id="5" name="Rectangle 4"/>
           <p:cNvSpPr/>
           <p:nvPr/>
         </p:nvSpPr>
         <p:spPr>
           <a:xfrm>
-            <a:off x="6217920" y="1645920"/>
-            <a:ext cx="5212080" cy="4389120"/>
-          </a:xfrm>
-          <a:prstGeom prst="roundRect">
+            <a:off x="731520" y="1481328"/>
+            <a:ext cx="502920" cy="44450"/>
+          </a:xfrm>
+          <a:prstGeom prst="rect">
             <a:avLst/>
           </a:prstGeom>
           <a:solidFill>
-            <a:srgbClr val="F8FAFC"/>
+            <a:srgbClr val="D97757"/>
           </a:solidFill>
           <a:ln>
-            <a:solidFill>
-              <a:srgbClr val="E2E8F0"/>
-            </a:solidFill>
+            <a:noFill/>
           </a:ln>
+          <a:effectLst/>
         </p:spPr>
         <p:style>
           <a:lnRef idx="1">
@@ -6402,66 +7922,281 @@
           </a:fontRef>
         </p:style>
         <p:txBody>
-          <a:bodyPr rtlCol="0" anchor="ctr" wrap="square"/>
+          <a:bodyPr rtlCol="0" anchor="ctr"/>
+          <a:lstStyle/>
+          <a:p>
+            <a:pPr algn="ctr"/>
+          </a:p>
+        </p:txBody>
+      </p:sp>
+      <p:sp>
+        <p:nvSpPr>
+          <p:cNvPr id="6" name="TextBox 5"/>
+          <p:cNvSpPr txBox="1"/>
+          <p:nvPr/>
+        </p:nvSpPr>
+        <p:spPr>
+          <a:xfrm>
+            <a:off x="11430000" y="6446520"/>
+            <a:ext cx="548640" cy="320040"/>
+          </a:xfrm>
+          <a:prstGeom prst="rect">
+            <a:avLst/>
+          </a:prstGeom>
+          <a:noFill/>
+        </p:spPr>
+        <p:txBody>
+          <a:bodyPr wrap="none">
+            <a:spAutoFit/>
+          </a:bodyPr>
+          <a:lstStyle/>
+          <a:p>
+            <a:pPr algn="r">
+              <a:defRPr sz="1000">
+                <a:solidFill>
+                  <a:srgbClr val="5E5A52"/>
+                </a:solidFill>
+                <a:latin typeface="Avenir Next"/>
+              </a:defRPr>
+            </a:pPr>
+            <a:r>
+              <a:t>09</a:t>
+            </a:r>
+          </a:p>
+        </p:txBody>
+      </p:sp>
+      <p:sp>
+        <p:nvSpPr>
+          <p:cNvPr id="7" name="Rounded Rectangle 6"/>
+          <p:cNvSpPr/>
+          <p:nvPr/>
+        </p:nvSpPr>
+        <p:spPr>
+          <a:xfrm>
+            <a:off x="731520" y="1783080"/>
+            <a:ext cx="5120640" cy="4251960"/>
+          </a:xfrm>
+          <a:prstGeom prst="roundRect">
+            <a:avLst>
+              <a:gd name="adj" fmla="val 6000"/>
+            </a:avLst>
+          </a:prstGeom>
+          <a:solidFill>
+            <a:srgbClr val="FFFFFF"/>
+          </a:solidFill>
+          <a:ln w="9525">
+            <a:solidFill>
+              <a:srgbClr val="E4E0D6"/>
+            </a:solidFill>
+          </a:ln>
+          <a:effectLst/>
+        </p:spPr>
+        <p:style>
+          <a:lnRef idx="1">
+            <a:schemeClr val="accent1"/>
+          </a:lnRef>
+          <a:fillRef idx="3">
+            <a:schemeClr val="accent1"/>
+          </a:fillRef>
+          <a:effectRef idx="2">
+            <a:schemeClr val="accent1"/>
+          </a:effectRef>
+          <a:fontRef idx="minor">
+            <a:schemeClr val="lt1"/>
+          </a:fontRef>
+        </p:style>
+        <p:txBody>
+          <a:bodyPr rtlCol="0" anchor="ctr" lIns="256032" rIns="256032" tIns="256032" bIns="256032" wrap="square"/>
           <a:lstStyle/>
           <a:p>
             <a:pPr algn="ctr">
               <a:spcAft>
-                <a:spcPts val="1000"/>
+                <a:spcPts val="1200"/>
               </a:spcAft>
               <a:defRPr sz="1600" b="1">
                 <a:solidFill>
-                  <a:srgbClr val="006FCF"/>
-                </a:solidFill>
-              </a:defRPr>
-            </a:pPr>
-            <a:r>
-              <a:t>Why Prediction is the Enabler</a:t>
+                  <a:srgbClr val="1F1E1C"/>
+                </a:solidFill>
+                <a:latin typeface="Georgia"/>
+              </a:defRPr>
+            </a:pPr>
+            <a:r>
+              <a:t>Where does the ~11s go?</a:t>
             </a:r>
           </a:p>
           <a:p>
             <a:pPr>
+              <a:lnSpc>
+                <a:spcPct val="118000"/>
+              </a:lnSpc>
               <a:spcAft>
                 <a:spcPts val="800"/>
               </a:spcAft>
               <a:defRPr sz="1300">
                 <a:solidFill>
-                  <a:srgbClr val="64748B"/>
-                </a:solidFill>
-              </a:defRPr>
-            </a:pPr>
-            <a:r>
-              <a:t>• Prediction buys speed, not safety. False positive = 1 API call; false negative = 42 seconds lost.</a:t>
+                  <a:srgbClr val="5E5A52"/>
+                </a:solidFill>
+                <a:latin typeface="Avenir Next"/>
+              </a:defRPr>
+            </a:pPr>
+            <a:r>
+              <a:t>—  95% of wall-clock time (~10.4s) is pure network I/O waiting on external supplier APIs (Duffel flight booking, LiteAPI hotel reservation).</a:t>
             </a:r>
           </a:p>
           <a:p>
             <a:pPr>
+              <a:lnSpc>
+                <a:spcPct val="118000"/>
+              </a:lnSpc>
               <a:spcAft>
                 <a:spcPts val="800"/>
               </a:spcAft>
               <a:defRPr sz="1300">
                 <a:solidFill>
-                  <a:srgbClr val="64748B"/>
-                </a:solidFill>
-              </a:defRPr>
-            </a:pPr>
-            <a:r>
-              <a:t>• Pre-caching alternative itineraries before cancellation means the choice set is already in memory when consent arrives.</a:t>
+                  <a:srgbClr val="5E5A52"/>
+                </a:solidFill>
+                <a:latin typeface="Avenir Next"/>
+              </a:defRPr>
+            </a:pPr>
+            <a:r>
+              <a:t>—  Under 0.6s is computational overhead: preference scoring, allocation, 3 negotiation rounds, and OPA policy checks.</a:t>
             </a:r>
           </a:p>
           <a:p>
             <a:pPr>
+              <a:lnSpc>
+                <a:spcPct val="118000"/>
+              </a:lnSpc>
               <a:spcAft>
                 <a:spcPts val="800"/>
               </a:spcAft>
               <a:defRPr sz="1300">
                 <a:solidFill>
-                  <a:srgbClr val="64748B"/>
-                </a:solidFill>
-              </a:defRPr>
-            </a:pPr>
-            <a:r>
-              <a:t>• Safety rests entirely on consent gates and notification ladders—never on a probability score.</a:t>
+                  <a:srgbClr val="5E5A52"/>
+                </a:solidFill>
+                <a:latin typeface="Avenir Next"/>
+              </a:defRPr>
+            </a:pPr>
+            <a:r>
+              <a:t>—  Zero GPU on the critical path — rule-based preference matching and heuristic ranking run instantly in-memory.</a:t>
+            </a:r>
+          </a:p>
+        </p:txBody>
+      </p:sp>
+      <p:sp>
+        <p:nvSpPr>
+          <p:cNvPr id="8" name="Rounded Rectangle 7"/>
+          <p:cNvSpPr/>
+          <p:nvPr/>
+        </p:nvSpPr>
+        <p:spPr>
+          <a:xfrm>
+            <a:off x="6263640" y="1783080"/>
+            <a:ext cx="5166360" cy="4251960"/>
+          </a:xfrm>
+          <a:prstGeom prst="roundRect">
+            <a:avLst>
+              <a:gd name="adj" fmla="val 6000"/>
+            </a:avLst>
+          </a:prstGeom>
+          <a:solidFill>
+            <a:srgbClr val="F3E3DB"/>
+          </a:solidFill>
+          <a:ln w="9525">
+            <a:solidFill>
+              <a:srgbClr val="E4E0D6"/>
+            </a:solidFill>
+          </a:ln>
+          <a:effectLst/>
+        </p:spPr>
+        <p:style>
+          <a:lnRef idx="1">
+            <a:schemeClr val="accent1"/>
+          </a:lnRef>
+          <a:fillRef idx="3">
+            <a:schemeClr val="accent1"/>
+          </a:fillRef>
+          <a:effectRef idx="2">
+            <a:schemeClr val="accent1"/>
+          </a:effectRef>
+          <a:fontRef idx="minor">
+            <a:schemeClr val="lt1"/>
+          </a:fontRef>
+        </p:style>
+        <p:txBody>
+          <a:bodyPr rtlCol="0" anchor="ctr" lIns="256032" rIns="256032" tIns="256032" bIns="256032" wrap="square"/>
+          <a:lstStyle/>
+          <a:p>
+            <a:pPr algn="ctr">
+              <a:spcAft>
+                <a:spcPts val="1200"/>
+              </a:spcAft>
+              <a:defRPr sz="1600" b="1">
+                <a:solidFill>
+                  <a:srgbClr val="B85C3E"/>
+                </a:solidFill>
+                <a:latin typeface="Georgia"/>
+              </a:defRPr>
+            </a:pPr>
+            <a:r>
+              <a:t>Why prediction is the enabler</a:t>
+            </a:r>
+          </a:p>
+          <a:p>
+            <a:pPr>
+              <a:lnSpc>
+                <a:spcPct val="118000"/>
+              </a:lnSpc>
+              <a:spcAft>
+                <a:spcPts val="800"/>
+              </a:spcAft>
+              <a:defRPr sz="1300">
+                <a:solidFill>
+                  <a:srgbClr val="5E5A52"/>
+                </a:solidFill>
+                <a:latin typeface="Avenir Next"/>
+              </a:defRPr>
+            </a:pPr>
+            <a:r>
+              <a:t>—  Prediction buys speed, not safety. A false positive costs one API call; a false negative costs 42 seconds.</a:t>
+            </a:r>
+          </a:p>
+          <a:p>
+            <a:pPr>
+              <a:lnSpc>
+                <a:spcPct val="118000"/>
+              </a:lnSpc>
+              <a:spcAft>
+                <a:spcPts val="800"/>
+              </a:spcAft>
+              <a:defRPr sz="1300">
+                <a:solidFill>
+                  <a:srgbClr val="5E5A52"/>
+                </a:solidFill>
+                <a:latin typeface="Avenir Next"/>
+              </a:defRPr>
+            </a:pPr>
+            <a:r>
+              <a:t>—  Pre-caching alternative itineraries before cancellation means the choice set is already in memory when consent arrives.</a:t>
+            </a:r>
+          </a:p>
+          <a:p>
+            <a:pPr>
+              <a:lnSpc>
+                <a:spcPct val="118000"/>
+              </a:lnSpc>
+              <a:spcAft>
+                <a:spcPts val="800"/>
+              </a:spcAft>
+              <a:defRPr sz="1300">
+                <a:solidFill>
+                  <a:srgbClr val="5E5A52"/>
+                </a:solidFill>
+                <a:latin typeface="Avenir Next"/>
+              </a:defRPr>
+            </a:pPr>
+            <a:r>
+              <a:t>—  Safety rests entirely on consent gates and notification ladders — never on a probability score.</a:t>
             </a:r>
           </a:p>
         </p:txBody>

--- a/assets/deck/ZKD_Concierge_Codestreet_2026.pptx
+++ b/assets/deck/ZKD_Concierge_Codestreet_2026.pptx
@@ -3090,6 +3090,14 @@
 <file path=ppt/slides/slide1.xml><?xml version="1.0" encoding="utf-8"?>
 <p:sld xmlns:a="http://schemas.openxmlformats.org/drawingml/2006/main" xmlns:p="http://schemas.openxmlformats.org/presentationml/2006/main" xmlns:r="http://schemas.openxmlformats.org/officeDocument/2006/relationships">
   <p:cSld>
+    <p:bg>
+      <p:bgPr>
+        <a:solidFill>
+          <a:srgbClr val="0A1B3D"/>
+        </a:solidFill>
+        <a:effectLst/>
+      </p:bgPr>
+    </p:bg>
     <p:spTree>
       <p:nvGrpSpPr>
         <p:cNvPr id="1" name=""/>
@@ -3099,20 +3107,22 @@
       <p:grpSpPr/>
       <p:sp>
         <p:nvSpPr>
-          <p:cNvPr id="2" name="Rectangle 1"/>
+          <p:cNvPr id="2" name="Rounded Rectangle 1"/>
           <p:cNvSpPr/>
           <p:nvPr/>
         </p:nvSpPr>
         <p:spPr>
-          <a:xfrm>
-            <a:off x="0" y="0"/>
-            <a:ext cx="12191695" cy="6858000"/>
-          </a:xfrm>
-          <a:prstGeom prst="rect">
-            <a:avLst/>
+          <a:xfrm rot="720000">
+            <a:off x="-2926080" y="-2377440"/>
+            <a:ext cx="7680960" cy="7680960"/>
+          </a:xfrm>
+          <a:prstGeom prst="roundRect">
+            <a:avLst>
+              <a:gd name="adj" fmla="val 50000"/>
+            </a:avLst>
           </a:prstGeom>
           <a:solidFill>
-            <a:srgbClr val="2A2824"/>
+            <a:srgbClr val="0E2450"/>
           </a:solidFill>
           <a:ln>
             <a:noFill/>
@@ -3143,20 +3153,22 @@
       </p:sp>
       <p:sp>
         <p:nvSpPr>
-          <p:cNvPr id="3" name="Oval 2"/>
+          <p:cNvPr id="3" name="Rounded Rectangle 2"/>
           <p:cNvSpPr/>
           <p:nvPr/>
         </p:nvSpPr>
         <p:spPr>
-          <a:xfrm>
-            <a:off x="822960" y="868680"/>
-            <a:ext cx="146304" cy="146304"/>
-          </a:xfrm>
-          <a:prstGeom prst="ellipse">
-            <a:avLst/>
+          <a:xfrm rot="21120000">
+            <a:off x="8321040" y="-1737360"/>
+            <a:ext cx="6035040" cy="6035040"/>
+          </a:xfrm>
+          <a:prstGeom prst="roundRect">
+            <a:avLst>
+              <a:gd name="adj" fmla="val 50000"/>
+            </a:avLst>
           </a:prstGeom>
           <a:solidFill>
-            <a:srgbClr val="D97757"/>
+            <a:srgbClr val="10275A"/>
           </a:solidFill>
           <a:ln>
             <a:noFill/>
@@ -3187,104 +3199,22 @@
       </p:sp>
       <p:sp>
         <p:nvSpPr>
-          <p:cNvPr id="4" name="TextBox 3"/>
-          <p:cNvSpPr txBox="1"/>
-          <p:nvPr/>
-        </p:nvSpPr>
-        <p:spPr>
-          <a:xfrm>
-            <a:off x="914400" y="1965960"/>
-            <a:ext cx="10058400" cy="3291840"/>
-          </a:xfrm>
-          <a:prstGeom prst="rect">
-            <a:avLst/>
-          </a:prstGeom>
-          <a:noFill/>
-        </p:spPr>
-        <p:txBody>
-          <a:bodyPr wrap="square" lIns="0" rIns="0" tIns="0" bIns="0">
-            <a:spAutoFit/>
-          </a:bodyPr>
-          <a:lstStyle/>
-          <a:p>
-            <a:pPr>
-              <a:spcAft>
-                <a:spcPts val="1600"/>
-              </a:spcAft>
-              <a:defRPr sz="1300" b="1">
-                <a:solidFill>
-                  <a:srgbClr val="D97757"/>
-                </a:solidFill>
-                <a:latin typeface="Avenir Next"/>
-              </a:defRPr>
-            </a:pPr>
-            <a:r>
-              <a:t>CODESTREET 2026  /  AMERICAN EXPRESS</a:t>
-            </a:r>
-          </a:p>
-          <a:p>
-            <a:pPr>
-              <a:spcAft>
-                <a:spcPts val="1000"/>
-              </a:spcAft>
-              <a:defRPr sz="5200" b="0">
-                <a:solidFill>
-                  <a:srgbClr val="F7F5F0"/>
-                </a:solidFill>
-                <a:latin typeface="Georgia"/>
-              </a:defRPr>
-            </a:pPr>
-            <a:r>
-              <a:t>ZKD Concierge</a:t>
-            </a:r>
-          </a:p>
-          <a:p>
-            <a:pPr>
-              <a:spcAft>
-                <a:spcPts val="2800"/>
-              </a:spcAft>
-              <a:defRPr sz="1900">
-                <a:solidFill>
-                  <a:srgbClr val="C9C3B8"/>
-                </a:solidFill>
-                <a:latin typeface="Avenir Next"/>
-              </a:defRPr>
-            </a:pPr>
-            <a:r>
-              <a:t>An autonomous travel-disruption concierge for Indian domestic aviation</a:t>
-            </a:r>
-          </a:p>
-          <a:p>
-            <a:pPr>
-              <a:defRPr sz="1250">
-                <a:solidFill>
-                  <a:srgbClr val="9A948A"/>
-                </a:solidFill>
-                <a:latin typeface="Avenir Next"/>
-              </a:defRPr>
-            </a:pPr>
-            <a:r>
-              <a:t>Team ZKD · IIT Madras   —   Live MVP presentation (20 min pitch + 10 min Q&amp;A)</a:t>
-            </a:r>
-          </a:p>
-        </p:txBody>
-      </p:sp>
-      <p:sp>
-        <p:nvSpPr>
-          <p:cNvPr id="5" name="Rectangle 4"/>
+          <p:cNvPr id="4" name="Rounded Rectangle 3"/>
           <p:cNvSpPr/>
           <p:nvPr/>
         </p:nvSpPr>
         <p:spPr>
-          <a:xfrm>
-            <a:off x="914400" y="1847088"/>
-            <a:ext cx="502920" cy="44450"/>
-          </a:xfrm>
-          <a:prstGeom prst="rect">
-            <a:avLst/>
+          <a:xfrm rot="1200000">
+            <a:off x="9509760" y="-548640"/>
+            <a:ext cx="3566160" cy="3566160"/>
+          </a:xfrm>
+          <a:prstGeom prst="roundRect">
+            <a:avLst>
+              <a:gd name="adj" fmla="val 50000"/>
+            </a:avLst>
           </a:prstGeom>
           <a:solidFill>
-            <a:srgbClr val="D97757"/>
+            <a:srgbClr val="16336F"/>
           </a:solidFill>
           <a:ln>
             <a:noFill/>
@@ -3313,40 +3243,95 @@
           </a:p>
         </p:txBody>
       </p:sp>
-    </p:spTree>
-  </p:cSld>
-  <p:clrMapOvr>
-    <a:masterClrMapping/>
-  </p:clrMapOvr>
-</p:sld>
-</file>
-
-<file path=ppt/slides/slide10.xml><?xml version="1.0" encoding="utf-8"?>
-<p:sld xmlns:a="http://schemas.openxmlformats.org/drawingml/2006/main" xmlns:p="http://schemas.openxmlformats.org/presentationml/2006/main" xmlns:r="http://schemas.openxmlformats.org/officeDocument/2006/relationships">
-  <p:cSld>
-    <p:spTree>
-      <p:nvGrpSpPr>
-        <p:cNvPr id="1" name=""/>
-        <p:cNvGrpSpPr/>
-        <p:nvPr/>
-      </p:nvGrpSpPr>
-      <p:grpSpPr/>
-      <p:sp>
-        <p:nvSpPr>
-          <p:cNvPr id="2" name="Rectangle 1"/>
-          <p:cNvSpPr/>
+      <p:sp>
+        <p:nvSpPr>
+          <p:cNvPr id="5" name="TextBox 4"/>
+          <p:cNvSpPr txBox="1"/>
           <p:nvPr/>
         </p:nvSpPr>
         <p:spPr>
           <a:xfrm>
-            <a:off x="0" y="0"/>
-            <a:ext cx="12191695" cy="6858000"/>
+            <a:off x="914400" y="1965960"/>
+            <a:ext cx="10058400" cy="2468880"/>
           </a:xfrm>
           <a:prstGeom prst="rect">
             <a:avLst/>
           </a:prstGeom>
+          <a:noFill/>
+        </p:spPr>
+        <p:txBody>
+          <a:bodyPr wrap="square" lIns="0" rIns="0" tIns="0" bIns="0">
+            <a:spAutoFit/>
+          </a:bodyPr>
+          <a:lstStyle/>
+          <a:p>
+            <a:pPr>
+              <a:spcAft>
+                <a:spcPts val="1600"/>
+              </a:spcAft>
+              <a:defRPr sz="1300" b="1">
+                <a:solidFill>
+                  <a:srgbClr val="3D9CFF"/>
+                </a:solidFill>
+                <a:latin typeface="Calibri"/>
+              </a:defRPr>
+            </a:pPr>
+            <a:r>
+              <a:t>CODESTREET 2026  ·  AMERICAN EXPRESS</a:t>
+            </a:r>
+          </a:p>
+          <a:p>
+            <a:pPr>
+              <a:spcAft>
+                <a:spcPts val="1000"/>
+              </a:spcAft>
+              <a:defRPr sz="5000" b="1">
+                <a:solidFill>
+                  <a:srgbClr val="FFFFFF"/>
+                </a:solidFill>
+                <a:latin typeface="Cambria"/>
+              </a:defRPr>
+            </a:pPr>
+            <a:r>
+              <a:t>ZKD Concierge</a:t>
+            </a:r>
+          </a:p>
+          <a:p>
+            <a:pPr>
+              <a:spcAft>
+                <a:spcPts val="400"/>
+              </a:spcAft>
+              <a:defRPr sz="1900">
+                <a:solidFill>
+                  <a:srgbClr val="A9BEDC"/>
+                </a:solidFill>
+                <a:latin typeface="Calibri"/>
+              </a:defRPr>
+            </a:pPr>
+            <a:r>
+              <a:t>An autonomous travel-disruption concierge for Indian domestic aviation</a:t>
+            </a:r>
+          </a:p>
+        </p:txBody>
+      </p:sp>
+      <p:sp>
+        <p:nvSpPr>
+          <p:cNvPr id="6" name="Rounded Rectangle 5"/>
+          <p:cNvSpPr/>
+          <p:nvPr/>
+        </p:nvSpPr>
+        <p:spPr>
+          <a:xfrm>
+            <a:off x="914400" y="4617720"/>
+            <a:ext cx="2432304" cy="1234440"/>
+          </a:xfrm>
+          <a:prstGeom prst="roundRect">
+            <a:avLst>
+              <a:gd name="adj" fmla="val 6000"/>
+            </a:avLst>
+          </a:prstGeom>
           <a:solidFill>
-            <a:srgbClr val="FAF9F5"/>
+            <a:srgbClr val="0D2246"/>
           </a:solidFill>
           <a:ln>
             <a:noFill/>
@@ -3368,101 +3353,60 @@
           </a:fontRef>
         </p:style>
         <p:txBody>
-          <a:bodyPr rtlCol="0" anchor="ctr"/>
-          <a:lstStyle/>
-          <a:p>
-            <a:pPr algn="ctr"/>
-          </a:p>
-        </p:txBody>
-      </p:sp>
-      <p:sp>
-        <p:nvSpPr>
-          <p:cNvPr id="3" name="TextBox 2"/>
-          <p:cNvSpPr txBox="1"/>
-          <p:nvPr/>
-        </p:nvSpPr>
-        <p:spPr>
-          <a:xfrm>
-            <a:off x="731520" y="502920"/>
-            <a:ext cx="10698480" cy="320040"/>
-          </a:xfrm>
-          <a:prstGeom prst="rect">
-            <a:avLst/>
-          </a:prstGeom>
-          <a:noFill/>
-        </p:spPr>
-        <p:txBody>
-          <a:bodyPr wrap="square">
-            <a:spAutoFit/>
-          </a:bodyPr>
-          <a:lstStyle/>
-          <a:p>
-            <a:pPr>
-              <a:defRPr sz="1050" b="1">
-                <a:solidFill>
-                  <a:srgbClr val="B85C3E"/>
-                </a:solidFill>
-                <a:latin typeface="Avenir Next"/>
-              </a:defRPr>
-            </a:pPr>
-            <a:r>
-              <a:t>ZKD CONCIERGE  ·  AMERICAN EXPRESS  /  CODESTREET 2026</a:t>
-            </a:r>
-          </a:p>
-        </p:txBody>
-      </p:sp>
-      <p:sp>
-        <p:nvSpPr>
-          <p:cNvPr id="4" name="TextBox 3"/>
-          <p:cNvSpPr txBox="1"/>
-          <p:nvPr/>
-        </p:nvSpPr>
-        <p:spPr>
-          <a:xfrm>
-            <a:off x="731520" y="804672"/>
-            <a:ext cx="10058400" cy="777240"/>
-          </a:xfrm>
-          <a:prstGeom prst="rect">
-            <a:avLst/>
-          </a:prstGeom>
-          <a:noFill/>
-        </p:spPr>
-        <p:txBody>
-          <a:bodyPr wrap="square">
-            <a:spAutoFit/>
-          </a:bodyPr>
-          <a:lstStyle/>
-          <a:p>
-            <a:pPr>
-              <a:defRPr sz="2700" b="0">
-                <a:solidFill>
-                  <a:srgbClr val="1F1E1C"/>
-                </a:solidFill>
-                <a:latin typeface="Georgia"/>
-              </a:defRPr>
-            </a:pPr>
-            <a:r>
-              <a:t>Honest limitations, roadmap &amp; conclusion</a:t>
-            </a:r>
-          </a:p>
-        </p:txBody>
-      </p:sp>
-      <p:sp>
-        <p:nvSpPr>
-          <p:cNvPr id="5" name="Rectangle 4"/>
+          <a:bodyPr rtlCol="0" anchor="ctr" lIns="182880" rIns="182880" tIns="182880" bIns="182880" wrap="square"/>
+          <a:lstStyle/>
+          <a:p>
+            <a:pPr algn="ctr">
+              <a:spcAft>
+                <a:spcPts val="200"/>
+              </a:spcAft>
+              <a:defRPr sz="2500" b="1">
+                <a:solidFill>
+                  <a:srgbClr val="3D9CFF"/>
+                </a:solidFill>
+                <a:latin typeface="Cambria"/>
+              </a:defRPr>
+            </a:pPr>
+            <a:r>
+              <a:t>~11 s</a:t>
+            </a:r>
+          </a:p>
+          <a:p>
+            <a:pPr>
+              <a:lnSpc>
+                <a:spcPct val="110000"/>
+              </a:lnSpc>
+              <a:defRPr sz="1050">
+                <a:solidFill>
+                  <a:srgbClr val="A9BEDC"/>
+                </a:solidFill>
+                <a:latin typeface="Calibri"/>
+              </a:defRPr>
+            </a:pPr>
+            <a:r>
+              <a:t>cancellation to a confirmed, paid-for trip</a:t>
+            </a:r>
+          </a:p>
+        </p:txBody>
+      </p:sp>
+      <p:sp>
+        <p:nvSpPr>
+          <p:cNvPr id="7" name="Rounded Rectangle 6"/>
           <p:cNvSpPr/>
           <p:nvPr/>
         </p:nvSpPr>
         <p:spPr>
           <a:xfrm>
-            <a:off x="731520" y="1481328"/>
-            <a:ext cx="502920" cy="44450"/>
-          </a:xfrm>
-          <a:prstGeom prst="rect">
-            <a:avLst/>
+            <a:off x="3529584" y="4617720"/>
+            <a:ext cx="2432304" cy="1234440"/>
+          </a:xfrm>
+          <a:prstGeom prst="roundRect">
+            <a:avLst>
+              <a:gd name="adj" fmla="val 6000"/>
+            </a:avLst>
           </a:prstGeom>
           <a:solidFill>
-            <a:srgbClr val="D97757"/>
+            <a:srgbClr val="0D2246"/>
           </a:solidFill>
           <a:ln>
             <a:noFill/>
@@ -3484,59 +3428,52 @@
           </a:fontRef>
         </p:style>
         <p:txBody>
-          <a:bodyPr rtlCol="0" anchor="ctr"/>
-          <a:lstStyle/>
-          <a:p>
-            <a:pPr algn="ctr"/>
-          </a:p>
-        </p:txBody>
-      </p:sp>
-      <p:sp>
-        <p:nvSpPr>
-          <p:cNvPr id="6" name="TextBox 5"/>
-          <p:cNvSpPr txBox="1"/>
-          <p:nvPr/>
-        </p:nvSpPr>
-        <p:spPr>
-          <a:xfrm>
-            <a:off x="11430000" y="6446520"/>
-            <a:ext cx="548640" cy="320040"/>
-          </a:xfrm>
-          <a:prstGeom prst="rect">
-            <a:avLst/>
-          </a:prstGeom>
-          <a:noFill/>
-        </p:spPr>
-        <p:txBody>
-          <a:bodyPr wrap="none">
-            <a:spAutoFit/>
-          </a:bodyPr>
-          <a:lstStyle/>
-          <a:p>
-            <a:pPr algn="r">
-              <a:defRPr sz="1000">
-                <a:solidFill>
-                  <a:srgbClr val="5E5A52"/>
-                </a:solidFill>
-                <a:latin typeface="Avenir Next"/>
-              </a:defRPr>
-            </a:pPr>
-            <a:r>
-              <a:t>10</a:t>
-            </a:r>
-          </a:p>
-        </p:txBody>
-      </p:sp>
-      <p:sp>
-        <p:nvSpPr>
-          <p:cNvPr id="7" name="Rounded Rectangle 6"/>
+          <a:bodyPr rtlCol="0" anchor="ctr" lIns="182880" rIns="182880" tIns="182880" bIns="182880" wrap="square"/>
+          <a:lstStyle/>
+          <a:p>
+            <a:pPr algn="ctr">
+              <a:spcAft>
+                <a:spcPts val="200"/>
+              </a:spcAft>
+              <a:defRPr sz="2500" b="1">
+                <a:solidFill>
+                  <a:srgbClr val="3D9CFF"/>
+                </a:solidFill>
+                <a:latin typeface="Cambria"/>
+              </a:defRPr>
+            </a:pPr>
+            <a:r>
+              <a:t>42 s</a:t>
+            </a:r>
+          </a:p>
+          <a:p>
+            <a:pPr>
+              <a:lnSpc>
+                <a:spcPct val="110000"/>
+              </a:lnSpc>
+              <a:defRPr sz="1050">
+                <a:solidFill>
+                  <a:srgbClr val="A9BEDC"/>
+                </a:solidFill>
+                <a:latin typeface="Calibri"/>
+              </a:defRPr>
+            </a:pPr>
+            <a:r>
+              <a:t>of the work already done before it happens</a:t>
+            </a:r>
+          </a:p>
+        </p:txBody>
+      </p:sp>
+      <p:sp>
+        <p:nvSpPr>
+          <p:cNvPr id="8" name="Rounded Rectangle 7"/>
           <p:cNvSpPr/>
           <p:nvPr/>
         </p:nvSpPr>
         <p:spPr>
           <a:xfrm>
-            <a:off x="731520" y="1783080"/>
-            <a:ext cx="5120640" cy="4251960"/>
+            <a:off x="6144768" y="4617720"/>
+            <a:ext cx="2432304" cy="1234440"/>
           </a:xfrm>
           <a:prstGeom prst="roundRect">
             <a:avLst>
@@ -3544,12 +3481,10 @@
             </a:avLst>
           </a:prstGeom>
           <a:solidFill>
-            <a:srgbClr val="F4E4DF"/>
+            <a:srgbClr val="0D2246"/>
           </a:solidFill>
-          <a:ln w="9525">
-            <a:solidFill>
-              <a:srgbClr val="E3C3B8"/>
-            </a:solidFill>
+          <a:ln>
+            <a:noFill/>
           </a:ln>
           <a:effectLst/>
         </p:spPr>
@@ -3568,93 +3503,52 @@
           </a:fontRef>
         </p:style>
         <p:txBody>
-          <a:bodyPr rtlCol="0" anchor="ctr" lIns="256032" rIns="256032" tIns="256032" bIns="256032" wrap="square"/>
+          <a:bodyPr rtlCol="0" anchor="ctr" lIns="182880" rIns="182880" tIns="182880" bIns="182880" wrap="square"/>
           <a:lstStyle/>
           <a:p>
             <a:pPr algn="ctr">
               <a:spcAft>
-                <a:spcPts val="1200"/>
-              </a:spcAft>
-              <a:defRPr sz="1600" b="1">
-                <a:solidFill>
-                  <a:srgbClr val="8A3B2E"/>
-                </a:solidFill>
-                <a:latin typeface="Georgia"/>
-              </a:defRPr>
-            </a:pPr>
-            <a:r>
-              <a:t>Honest limitations</a:t>
+                <a:spcPts val="200"/>
+              </a:spcAft>
+              <a:defRPr sz="2500" b="1">
+                <a:solidFill>
+                  <a:srgbClr val="3D9CFF"/>
+                </a:solidFill>
+                <a:latin typeface="Cambria"/>
+              </a:defRPr>
+            </a:pPr>
+            <a:r>
+              <a:t>3</a:t>
             </a:r>
           </a:p>
           <a:p>
             <a:pPr>
               <a:lnSpc>
-                <a:spcPct val="118000"/>
+                <a:spcPct val="110000"/>
               </a:lnSpc>
-              <a:spcAft>
-                <a:spcPts val="800"/>
-              </a:spcAft>
-              <a:defRPr sz="1250">
-                <a:solidFill>
-                  <a:srgbClr val="8A3B2E"/>
-                </a:solidFill>
-                <a:latin typeface="Avenir Next"/>
-              </a:defRPr>
-            </a:pPr>
-            <a:r>
-              <a:t>—  No Indian domestic training data yet: the risk model cold-starts to a population base rate until the retrain loop runs.</a:t>
-            </a:r>
-          </a:p>
-          <a:p>
-            <a:pPr>
-              <a:lnSpc>
-                <a:spcPct val="118000"/>
-              </a:lnSpc>
-              <a:spcAft>
-                <a:spcPts val="800"/>
-              </a:spcAft>
-              <a:defRPr sz="1250">
-                <a:solidFill>
-                  <a:srgbClr val="8A3B2E"/>
-                </a:solidFill>
-                <a:latin typeface="Avenir Next"/>
-              </a:defRPr>
-            </a:pPr>
-            <a:r>
-              <a:t>—  Payment is mocked — a vPayment contract test, no live payment gateway.</a:t>
-            </a:r>
-          </a:p>
-          <a:p>
-            <a:pPr>
-              <a:lnSpc>
-                <a:spcPct val="118000"/>
-              </a:lnSpc>
-              <a:spcAft>
-                <a:spcPts val="800"/>
-              </a:spcAft>
-              <a:defRPr sz="1250">
-                <a:solidFill>
-                  <a:srgbClr val="8A3B2E"/>
-                </a:solidFill>
-                <a:latin typeface="Avenir Next"/>
-              </a:defRPr>
-            </a:pPr>
-            <a:r>
-              <a:t>—  Pull-only API rate-limit constraints on flight status feeds.</a:t>
-            </a:r>
-          </a:p>
-        </p:txBody>
-      </p:sp>
-      <p:sp>
-        <p:nvSpPr>
-          <p:cNvPr id="8" name="Rounded Rectangle 7"/>
+              <a:defRPr sz="1050">
+                <a:solidFill>
+                  <a:srgbClr val="A9BEDC"/>
+                </a:solidFill>
+                <a:latin typeface="Calibri"/>
+              </a:defRPr>
+            </a:pPr>
+            <a:r>
+              <a:t>consent modes, one default-deny policy gate</a:t>
+            </a:r>
+          </a:p>
+        </p:txBody>
+      </p:sp>
+      <p:sp>
+        <p:nvSpPr>
+          <p:cNvPr id="9" name="Rounded Rectangle 8"/>
           <p:cNvSpPr/>
           <p:nvPr/>
         </p:nvSpPr>
         <p:spPr>
           <a:xfrm>
-            <a:off x="6263640" y="1783080"/>
-            <a:ext cx="5166360" cy="4251960"/>
+            <a:off x="8759952" y="4617720"/>
+            <a:ext cx="2432304" cy="1234440"/>
           </a:xfrm>
           <a:prstGeom prst="roundRect">
             <a:avLst>
@@ -3662,12 +3556,10 @@
             </a:avLst>
           </a:prstGeom>
           <a:solidFill>
-            <a:srgbClr val="E7EEE2"/>
+            <a:srgbClr val="0D2246"/>
           </a:solidFill>
-          <a:ln w="9525">
-            <a:solidFill>
-              <a:srgbClr val="C9D9C0"/>
-            </a:solidFill>
+          <a:ln>
+            <a:noFill/>
           </a:ln>
           <a:effectLst/>
         </p:spPr>
@@ -3686,79 +3578,74 @@
           </a:fontRef>
         </p:style>
         <p:txBody>
-          <a:bodyPr rtlCol="0" anchor="ctr" lIns="256032" rIns="256032" tIns="256032" bIns="256032" wrap="square"/>
+          <a:bodyPr rtlCol="0" anchor="ctr" lIns="182880" rIns="182880" tIns="182880" bIns="182880" wrap="square"/>
           <a:lstStyle/>
           <a:p>
             <a:pPr algn="ctr">
               <a:spcAft>
-                <a:spcPts val="1200"/>
-              </a:spcAft>
-              <a:defRPr sz="1600" b="1">
-                <a:solidFill>
-                  <a:srgbClr val="3F5D3A"/>
-                </a:solidFill>
-                <a:latin typeface="Georgia"/>
-              </a:defRPr>
-            </a:pPr>
-            <a:r>
-              <a:t>Roadmap &amp; closing</a:t>
+                <a:spcPts val="200"/>
+              </a:spcAft>
+              <a:defRPr sz="2500" b="1">
+                <a:solidFill>
+                  <a:srgbClr val="3D9CFF"/>
+                </a:solidFill>
+                <a:latin typeface="Cambria"/>
+              </a:defRPr>
+            </a:pPr>
+            <a:r>
+              <a:t>100%</a:t>
             </a:r>
           </a:p>
           <a:p>
             <a:pPr>
               <a:lnSpc>
-                <a:spcPct val="118000"/>
+                <a:spcPct val="110000"/>
               </a:lnSpc>
-              <a:spcAft>
-                <a:spcPts val="800"/>
-              </a:spcAft>
-              <a:defRPr sz="1250">
-                <a:solidFill>
-                  <a:srgbClr val="3F5D3A"/>
-                </a:solidFill>
-                <a:latin typeface="Avenir Next"/>
-              </a:defRPr>
-            </a:pPr>
-            <a:r>
-              <a:t>—  Production rollout: live webhook subscriptions and automated event loggers.</a:t>
-            </a:r>
-          </a:p>
-          <a:p>
-            <a:pPr>
-              <a:lnSpc>
-                <a:spcPct val="118000"/>
-              </a:lnSpc>
-              <a:spcAft>
-                <a:spcPts val="800"/>
-              </a:spcAft>
-              <a:defRPr sz="1250">
-                <a:solidFill>
-                  <a:srgbClr val="3F5D3A"/>
-                </a:solidFill>
-                <a:latin typeface="Avenir Next"/>
-              </a:defRPr>
-            </a:pPr>
-            <a:r>
-              <a:t>—  Full integration of the default-deny policy engine (server/policy/).</a:t>
-            </a:r>
-          </a:p>
-          <a:p>
-            <a:pPr>
-              <a:lnSpc>
-                <a:spcPct val="118000"/>
-              </a:lnSpc>
-              <a:spcAft>
-                <a:spcPts val="800"/>
-              </a:spcAft>
-              <a:defRPr sz="1250">
-                <a:solidFill>
-                  <a:srgbClr val="3F5D3A"/>
-                </a:solidFill>
-                <a:latin typeface="Avenir Next"/>
-              </a:defRPr>
-            </a:pPr>
-            <a:r>
-              <a:t>—  Elevating American Express cardmember trust through uncompromising proactive service.</a:t>
+              <a:defRPr sz="1050">
+                <a:solidFill>
+                  <a:srgbClr val="A9BEDC"/>
+                </a:solidFill>
+                <a:latin typeface="Calibri"/>
+              </a:defRPr>
+            </a:pPr>
+            <a:r>
+              <a:t>agent actions passed through OPA / Rego</a:t>
+            </a:r>
+          </a:p>
+        </p:txBody>
+      </p:sp>
+      <p:sp>
+        <p:nvSpPr>
+          <p:cNvPr id="10" name="TextBox 9"/>
+          <p:cNvSpPr txBox="1"/>
+          <p:nvPr/>
+        </p:nvSpPr>
+        <p:spPr>
+          <a:xfrm>
+            <a:off x="914400" y="6172200"/>
+            <a:ext cx="10058400" cy="365760"/>
+          </a:xfrm>
+          <a:prstGeom prst="rect">
+            <a:avLst/>
+          </a:prstGeom>
+          <a:noFill/>
+        </p:spPr>
+        <p:txBody>
+          <a:bodyPr wrap="none">
+            <a:spAutoFit/>
+          </a:bodyPr>
+          <a:lstStyle/>
+          <a:p>
+            <a:pPr>
+              <a:defRPr sz="1200">
+                <a:solidFill>
+                  <a:srgbClr val="7B94BA"/>
+                </a:solidFill>
+                <a:latin typeface="Calibri"/>
+              </a:defRPr>
+            </a:pPr>
+            <a:r>
+              <a:t>Team ZKD · IIT Madras   —   Live MVP presentation (20 min pitch + 10 min Q&amp;A)</a:t>
             </a:r>
           </a:p>
         </p:txBody>
@@ -3771,9 +3658,17 @@
 </p:sld>
 </file>
 
-<file path=ppt/slides/slide2.xml><?xml version="1.0" encoding="utf-8"?>
+<file path=ppt/slides/slide10.xml><?xml version="1.0" encoding="utf-8"?>
 <p:sld xmlns:a="http://schemas.openxmlformats.org/drawingml/2006/main" xmlns:p="http://schemas.openxmlformats.org/presentationml/2006/main" xmlns:r="http://schemas.openxmlformats.org/officeDocument/2006/relationships">
   <p:cSld>
+    <p:bg>
+      <p:bgPr>
+        <a:solidFill>
+          <a:srgbClr val="0A1B3D"/>
+        </a:solidFill>
+        <a:effectLst/>
+      </p:bgPr>
+    </p:bg>
     <p:spTree>
       <p:nvGrpSpPr>
         <p:cNvPr id="1" name=""/>
@@ -3783,20 +3678,166 @@
       <p:grpSpPr/>
       <p:sp>
         <p:nvSpPr>
-          <p:cNvPr id="2" name="Rectangle 1"/>
-          <p:cNvSpPr/>
+          <p:cNvPr id="2" name="TextBox 1"/>
+          <p:cNvSpPr txBox="1"/>
           <p:nvPr/>
         </p:nvSpPr>
         <p:spPr>
           <a:xfrm>
-            <a:off x="0" y="0"/>
-            <a:ext cx="12191695" cy="6858000"/>
+            <a:off x="457200" y="146304"/>
+            <a:ext cx="8229600" cy="256032"/>
           </a:xfrm>
           <a:prstGeom prst="rect">
             <a:avLst/>
           </a:prstGeom>
+          <a:noFill/>
+        </p:spPr>
+        <p:txBody>
+          <a:bodyPr wrap="square">
+            <a:spAutoFit/>
+          </a:bodyPr>
+          <a:lstStyle/>
+          <a:p>
+            <a:pPr>
+              <a:defRPr sz="1150" b="1">
+                <a:solidFill>
+                  <a:srgbClr val="3D9CFF"/>
+                </a:solidFill>
+                <a:latin typeface="Calibri"/>
+              </a:defRPr>
+            </a:pPr>
+            <a:r>
+              <a:t>09 · LIMITATIONS &amp; ROADMAP</a:t>
+            </a:r>
+          </a:p>
+        </p:txBody>
+      </p:sp>
+      <p:sp>
+        <p:nvSpPr>
+          <p:cNvPr id="3" name="TextBox 2"/>
+          <p:cNvSpPr txBox="1"/>
+          <p:nvPr/>
+        </p:nvSpPr>
+        <p:spPr>
+          <a:xfrm>
+            <a:off x="11155680" y="146304"/>
+            <a:ext cx="548640" cy="256032"/>
+          </a:xfrm>
+          <a:prstGeom prst="rect">
+            <a:avLst/>
+          </a:prstGeom>
+          <a:noFill/>
+        </p:spPr>
+        <p:txBody>
+          <a:bodyPr wrap="none">
+            <a:spAutoFit/>
+          </a:bodyPr>
+          <a:lstStyle/>
+          <a:p>
+            <a:pPr algn="r">
+              <a:defRPr sz="1150">
+                <a:solidFill>
+                  <a:srgbClr val="7B94BA"/>
+                </a:solidFill>
+                <a:latin typeface="Calibri"/>
+              </a:defRPr>
+            </a:pPr>
+            <a:r>
+              <a:t>10</a:t>
+            </a:r>
+          </a:p>
+        </p:txBody>
+      </p:sp>
+      <p:sp>
+        <p:nvSpPr>
+          <p:cNvPr id="4" name="TextBox 3"/>
+          <p:cNvSpPr txBox="1"/>
+          <p:nvPr/>
+        </p:nvSpPr>
+        <p:spPr>
+          <a:xfrm>
+            <a:off x="457200" y="365760"/>
+            <a:ext cx="10881360" cy="640080"/>
+          </a:xfrm>
+          <a:prstGeom prst="rect">
+            <a:avLst/>
+          </a:prstGeom>
+          <a:noFill/>
+        </p:spPr>
+        <p:txBody>
+          <a:bodyPr wrap="square">
+            <a:spAutoFit/>
+          </a:bodyPr>
+          <a:lstStyle/>
+          <a:p>
+            <a:pPr>
+              <a:defRPr sz="2500" b="1">
+                <a:solidFill>
+                  <a:srgbClr val="FFFFFF"/>
+                </a:solidFill>
+                <a:latin typeface="Cambria"/>
+              </a:defRPr>
+            </a:pPr>
+            <a:r>
+              <a:t>Honest limitations, roadmap &amp; conclusion</a:t>
+            </a:r>
+          </a:p>
+        </p:txBody>
+      </p:sp>
+      <p:sp>
+        <p:nvSpPr>
+          <p:cNvPr id="5" name="TextBox 4"/>
+          <p:cNvSpPr txBox="1"/>
+          <p:nvPr/>
+        </p:nvSpPr>
+        <p:spPr>
+          <a:xfrm>
+            <a:off x="457200" y="932688"/>
+            <a:ext cx="10881360" cy="365760"/>
+          </a:xfrm>
+          <a:prstGeom prst="rect">
+            <a:avLst/>
+          </a:prstGeom>
+          <a:noFill/>
+        </p:spPr>
+        <p:txBody>
+          <a:bodyPr wrap="square">
+            <a:spAutoFit/>
+          </a:bodyPr>
+          <a:lstStyle/>
+          <a:p>
+            <a:pPr>
+              <a:defRPr sz="1300">
+                <a:solidFill>
+                  <a:srgbClr val="A9BEDC"/>
+                </a:solidFill>
+                <a:latin typeface="Calibri"/>
+              </a:defRPr>
+            </a:pPr>
+            <a:r>
+              <a:t>What is not built yet, and what ships next.</a:t>
+            </a:r>
+          </a:p>
+        </p:txBody>
+      </p:sp>
+      <p:sp>
+        <p:nvSpPr>
+          <p:cNvPr id="6" name="Rounded Rectangle 5"/>
+          <p:cNvSpPr/>
+          <p:nvPr/>
+        </p:nvSpPr>
+        <p:spPr>
+          <a:xfrm>
+            <a:off x="457200" y="1417320"/>
+            <a:ext cx="5394960" cy="4709160"/>
+          </a:xfrm>
+          <a:prstGeom prst="roundRect">
+            <a:avLst>
+              <a:gd name="adj" fmla="val 6000"/>
+            </a:avLst>
+          </a:prstGeom>
           <a:solidFill>
-            <a:srgbClr val="FAF9F5"/>
+            <a:srgbClr val="132C52"/>
           </a:solidFill>
           <a:ln>
             <a:noFill/>
@@ -3818,101 +3859,117 @@
           </a:fontRef>
         </p:style>
         <p:txBody>
-          <a:bodyPr rtlCol="0" anchor="ctr"/>
-          <a:lstStyle/>
-          <a:p>
-            <a:pPr algn="ctr"/>
-          </a:p>
-        </p:txBody>
-      </p:sp>
-      <p:sp>
-        <p:nvSpPr>
-          <p:cNvPr id="3" name="TextBox 2"/>
-          <p:cNvSpPr txBox="1"/>
-          <p:nvPr/>
-        </p:nvSpPr>
-        <p:spPr>
-          <a:xfrm>
-            <a:off x="731520" y="502920"/>
-            <a:ext cx="10698480" cy="320040"/>
-          </a:xfrm>
-          <a:prstGeom prst="rect">
-            <a:avLst/>
-          </a:prstGeom>
-          <a:noFill/>
-        </p:spPr>
-        <p:txBody>
-          <a:bodyPr wrap="square">
-            <a:spAutoFit/>
-          </a:bodyPr>
-          <a:lstStyle/>
-          <a:p>
-            <a:pPr>
-              <a:defRPr sz="1050" b="1">
-                <a:solidFill>
-                  <a:srgbClr val="B85C3E"/>
-                </a:solidFill>
-                <a:latin typeface="Avenir Next"/>
-              </a:defRPr>
-            </a:pPr>
-            <a:r>
-              <a:t>ZKD CONCIERGE  ·  AMERICAN EXPRESS  /  CODESTREET 2026</a:t>
-            </a:r>
-          </a:p>
-        </p:txBody>
-      </p:sp>
-      <p:sp>
-        <p:nvSpPr>
-          <p:cNvPr id="4" name="TextBox 3"/>
-          <p:cNvSpPr txBox="1"/>
-          <p:nvPr/>
-        </p:nvSpPr>
-        <p:spPr>
-          <a:xfrm>
-            <a:off x="731520" y="804672"/>
-            <a:ext cx="10058400" cy="777240"/>
-          </a:xfrm>
-          <a:prstGeom prst="rect">
-            <a:avLst/>
-          </a:prstGeom>
-          <a:noFill/>
-        </p:spPr>
-        <p:txBody>
-          <a:bodyPr wrap="square">
-            <a:spAutoFit/>
-          </a:bodyPr>
-          <a:lstStyle/>
-          <a:p>
-            <a:pPr>
-              <a:defRPr sz="2700" b="0">
-                <a:solidFill>
-                  <a:srgbClr val="1F1E1C"/>
-                </a:solidFill>
-                <a:latin typeface="Georgia"/>
-              </a:defRPr>
-            </a:pPr>
-            <a:r>
-              <a:t>The passenger reality: from panic to peace of mind</a:t>
-            </a:r>
-          </a:p>
-        </p:txBody>
-      </p:sp>
-      <p:sp>
-        <p:nvSpPr>
-          <p:cNvPr id="5" name="Rectangle 4"/>
+          <a:bodyPr rtlCol="0" anchor="ctr" lIns="256032" rIns="256032" tIns="256032" bIns="256032" wrap="square"/>
+          <a:lstStyle/>
+          <a:p>
+            <a:pPr algn="ctr">
+              <a:spcAft>
+                <a:spcPts val="400"/>
+              </a:spcAft>
+              <a:defRPr sz="1100" b="1">
+                <a:solidFill>
+                  <a:srgbClr val="FF6B6B"/>
+                </a:solidFill>
+                <a:latin typeface="Calibri"/>
+              </a:defRPr>
+            </a:pPr>
+            <a:r>
+              <a:t>LIMITATIONS</a:t>
+            </a:r>
+          </a:p>
+          <a:p>
+            <a:pPr>
+              <a:spcAft>
+                <a:spcPts val="1000"/>
+              </a:spcAft>
+              <a:defRPr sz="1650" b="1">
+                <a:solidFill>
+                  <a:srgbClr val="FFFFFF"/>
+                </a:solidFill>
+                <a:latin typeface="Cambria"/>
+              </a:defRPr>
+            </a:pPr>
+            <a:r>
+              <a:t>Honest limitations</a:t>
+            </a:r>
+          </a:p>
+          <a:p>
+            <a:pPr>
+              <a:lnSpc>
+                <a:spcPct val="120000"/>
+              </a:lnSpc>
+              <a:spcAft>
+                <a:spcPts val="800"/>
+              </a:spcAft>
+              <a:defRPr sz="1250">
+                <a:solidFill>
+                  <a:srgbClr val="A9BEDC"/>
+                </a:solidFill>
+                <a:latin typeface="Calibri"/>
+              </a:defRPr>
+            </a:pPr>
+            <a:r>
+              <a:t>—  No Indian domestic training data yet: the risk model cold-starts to a population base rate until the retrain loop runs.</a:t>
+            </a:r>
+          </a:p>
+          <a:p>
+            <a:pPr>
+              <a:lnSpc>
+                <a:spcPct val="120000"/>
+              </a:lnSpc>
+              <a:spcAft>
+                <a:spcPts val="800"/>
+              </a:spcAft>
+              <a:defRPr sz="1250">
+                <a:solidFill>
+                  <a:srgbClr val="A9BEDC"/>
+                </a:solidFill>
+                <a:latin typeface="Calibri"/>
+              </a:defRPr>
+            </a:pPr>
+            <a:r>
+              <a:t>—  Payment is mocked — a vPayment contract test, no live payment gateway.</a:t>
+            </a:r>
+          </a:p>
+          <a:p>
+            <a:pPr>
+              <a:lnSpc>
+                <a:spcPct val="120000"/>
+              </a:lnSpc>
+              <a:spcAft>
+                <a:spcPts val="800"/>
+              </a:spcAft>
+              <a:defRPr sz="1250">
+                <a:solidFill>
+                  <a:srgbClr val="A9BEDC"/>
+                </a:solidFill>
+                <a:latin typeface="Calibri"/>
+              </a:defRPr>
+            </a:pPr>
+            <a:r>
+              <a:t>—  Pull-only API rate-limit constraints on flight status feeds.</a:t>
+            </a:r>
+          </a:p>
+        </p:txBody>
+      </p:sp>
+      <p:sp>
+        <p:nvSpPr>
+          <p:cNvPr id="7" name="Rounded Rectangle 6"/>
           <p:cNvSpPr/>
           <p:nvPr/>
         </p:nvSpPr>
         <p:spPr>
           <a:xfrm>
-            <a:off x="731520" y="1481328"/>
-            <a:ext cx="502920" cy="44450"/>
-          </a:xfrm>
-          <a:prstGeom prst="rect">
-            <a:avLst/>
+            <a:off x="6080760" y="1417320"/>
+            <a:ext cx="5650992" cy="4709160"/>
+          </a:xfrm>
+          <a:prstGeom prst="roundRect">
+            <a:avLst>
+              <a:gd name="adj" fmla="val 6000"/>
+            </a:avLst>
           </a:prstGeom>
           <a:solidFill>
-            <a:srgbClr val="D97757"/>
+            <a:srgbClr val="132C52"/>
           </a:solidFill>
           <a:ln>
             <a:noFill/>
@@ -3934,23 +3991,135 @@
           </a:fontRef>
         </p:style>
         <p:txBody>
-          <a:bodyPr rtlCol="0" anchor="ctr"/>
-          <a:lstStyle/>
-          <a:p>
-            <a:pPr algn="ctr"/>
-          </a:p>
-        </p:txBody>
-      </p:sp>
-      <p:sp>
-        <p:nvSpPr>
-          <p:cNvPr id="6" name="TextBox 5"/>
+          <a:bodyPr rtlCol="0" anchor="ctr" lIns="256032" rIns="256032" tIns="256032" bIns="256032" wrap="square"/>
+          <a:lstStyle/>
+          <a:p>
+            <a:pPr algn="ctr">
+              <a:spcAft>
+                <a:spcPts val="400"/>
+              </a:spcAft>
+              <a:defRPr sz="1100" b="1">
+                <a:solidFill>
+                  <a:srgbClr val="2ECC9A"/>
+                </a:solidFill>
+                <a:latin typeface="Calibri"/>
+              </a:defRPr>
+            </a:pPr>
+            <a:r>
+              <a:t>ROADMAP</a:t>
+            </a:r>
+          </a:p>
+          <a:p>
+            <a:pPr>
+              <a:spcAft>
+                <a:spcPts val="1000"/>
+              </a:spcAft>
+              <a:defRPr sz="1650" b="1">
+                <a:solidFill>
+                  <a:srgbClr val="FFFFFF"/>
+                </a:solidFill>
+                <a:latin typeface="Cambria"/>
+              </a:defRPr>
+            </a:pPr>
+            <a:r>
+              <a:t>Roadmap &amp; closing</a:t>
+            </a:r>
+          </a:p>
+          <a:p>
+            <a:pPr>
+              <a:lnSpc>
+                <a:spcPct val="120000"/>
+              </a:lnSpc>
+              <a:spcAft>
+                <a:spcPts val="800"/>
+              </a:spcAft>
+              <a:defRPr sz="1250">
+                <a:solidFill>
+                  <a:srgbClr val="A9BEDC"/>
+                </a:solidFill>
+                <a:latin typeface="Calibri"/>
+              </a:defRPr>
+            </a:pPr>
+            <a:r>
+              <a:t>—  Production rollout: live webhook subscriptions and automated event loggers.</a:t>
+            </a:r>
+          </a:p>
+          <a:p>
+            <a:pPr>
+              <a:lnSpc>
+                <a:spcPct val="120000"/>
+              </a:lnSpc>
+              <a:spcAft>
+                <a:spcPts val="800"/>
+              </a:spcAft>
+              <a:defRPr sz="1250">
+                <a:solidFill>
+                  <a:srgbClr val="A9BEDC"/>
+                </a:solidFill>
+                <a:latin typeface="Calibri"/>
+              </a:defRPr>
+            </a:pPr>
+            <a:r>
+              <a:t>—  Full integration of the default-deny policy engine (server/policy/).</a:t>
+            </a:r>
+          </a:p>
+          <a:p>
+            <a:pPr>
+              <a:lnSpc>
+                <a:spcPct val="120000"/>
+              </a:lnSpc>
+              <a:spcAft>
+                <a:spcPts val="800"/>
+              </a:spcAft>
+              <a:defRPr sz="1250">
+                <a:solidFill>
+                  <a:srgbClr val="A9BEDC"/>
+                </a:solidFill>
+                <a:latin typeface="Calibri"/>
+              </a:defRPr>
+            </a:pPr>
+            <a:r>
+              <a:t>—  Elevating American Express cardmember trust through uncompromising proactive service.</a:t>
+            </a:r>
+          </a:p>
+        </p:txBody>
+      </p:sp>
+    </p:spTree>
+  </p:cSld>
+  <p:clrMapOvr>
+    <a:masterClrMapping/>
+  </p:clrMapOvr>
+</p:sld>
+</file>
+
+<file path=ppt/slides/slide2.xml><?xml version="1.0" encoding="utf-8"?>
+<p:sld xmlns:a="http://schemas.openxmlformats.org/drawingml/2006/main" xmlns:p="http://schemas.openxmlformats.org/presentationml/2006/main" xmlns:r="http://schemas.openxmlformats.org/officeDocument/2006/relationships">
+  <p:cSld>
+    <p:bg>
+      <p:bgPr>
+        <a:solidFill>
+          <a:srgbClr val="0A1B3D"/>
+        </a:solidFill>
+        <a:effectLst/>
+      </p:bgPr>
+    </p:bg>
+    <p:spTree>
+      <p:nvGrpSpPr>
+        <p:cNvPr id="1" name=""/>
+        <p:cNvGrpSpPr/>
+        <p:nvPr/>
+      </p:nvGrpSpPr>
+      <p:grpSpPr/>
+      <p:sp>
+        <p:nvSpPr>
+          <p:cNvPr id="2" name="TextBox 1"/>
           <p:cNvSpPr txBox="1"/>
           <p:nvPr/>
         </p:nvSpPr>
         <p:spPr>
           <a:xfrm>
-            <a:off x="11430000" y="6446520"/>
-            <a:ext cx="548640" cy="320040"/>
+            <a:off x="457200" y="146304"/>
+            <a:ext cx="8229600" cy="256032"/>
           </a:xfrm>
           <a:prstGeom prst="rect">
             <a:avLst/>
@@ -3958,35 +4127,143 @@
           <a:noFill/>
         </p:spPr>
         <p:txBody>
+          <a:bodyPr wrap="square">
+            <a:spAutoFit/>
+          </a:bodyPr>
+          <a:lstStyle/>
+          <a:p>
+            <a:pPr>
+              <a:defRPr sz="1150" b="1">
+                <a:solidFill>
+                  <a:srgbClr val="3D9CFF"/>
+                </a:solidFill>
+                <a:latin typeface="Calibri"/>
+              </a:defRPr>
+            </a:pPr>
+            <a:r>
+              <a:t>01 · THE REALITY</a:t>
+            </a:r>
+          </a:p>
+        </p:txBody>
+      </p:sp>
+      <p:sp>
+        <p:nvSpPr>
+          <p:cNvPr id="3" name="TextBox 2"/>
+          <p:cNvSpPr txBox="1"/>
+          <p:nvPr/>
+        </p:nvSpPr>
+        <p:spPr>
+          <a:xfrm>
+            <a:off x="11155680" y="146304"/>
+            <a:ext cx="548640" cy="256032"/>
+          </a:xfrm>
+          <a:prstGeom prst="rect">
+            <a:avLst/>
+          </a:prstGeom>
+          <a:noFill/>
+        </p:spPr>
+        <p:txBody>
           <a:bodyPr wrap="none">
             <a:spAutoFit/>
           </a:bodyPr>
           <a:lstStyle/>
           <a:p>
             <a:pPr algn="r">
-              <a:defRPr sz="1000">
-                <a:solidFill>
-                  <a:srgbClr val="5E5A52"/>
-                </a:solidFill>
-                <a:latin typeface="Avenir Next"/>
-              </a:defRPr>
-            </a:pPr>
-            <a:r>
-              <a:t>02</a:t>
-            </a:r>
-          </a:p>
-        </p:txBody>
-      </p:sp>
-      <p:sp>
-        <p:nvSpPr>
-          <p:cNvPr id="7" name="Rounded Rectangle 6"/>
+              <a:defRPr sz="1150">
+                <a:solidFill>
+                  <a:srgbClr val="7B94BA"/>
+                </a:solidFill>
+                <a:latin typeface="Calibri"/>
+              </a:defRPr>
+            </a:pPr>
+            <a:r>
+              <a:t>2</a:t>
+            </a:r>
+          </a:p>
+        </p:txBody>
+      </p:sp>
+      <p:sp>
+        <p:nvSpPr>
+          <p:cNvPr id="4" name="TextBox 3"/>
+          <p:cNvSpPr txBox="1"/>
+          <p:nvPr/>
+        </p:nvSpPr>
+        <p:spPr>
+          <a:xfrm>
+            <a:off x="457200" y="365760"/>
+            <a:ext cx="10881360" cy="640080"/>
+          </a:xfrm>
+          <a:prstGeom prst="rect">
+            <a:avLst/>
+          </a:prstGeom>
+          <a:noFill/>
+        </p:spPr>
+        <p:txBody>
+          <a:bodyPr wrap="square">
+            <a:spAutoFit/>
+          </a:bodyPr>
+          <a:lstStyle/>
+          <a:p>
+            <a:pPr>
+              <a:defRPr sz="2500" b="1">
+                <a:solidFill>
+                  <a:srgbClr val="FFFFFF"/>
+                </a:solidFill>
+                <a:latin typeface="Cambria"/>
+              </a:defRPr>
+            </a:pPr>
+            <a:r>
+              <a:t>The passenger reality: from panic to peace of mind</a:t>
+            </a:r>
+          </a:p>
+        </p:txBody>
+      </p:sp>
+      <p:sp>
+        <p:nvSpPr>
+          <p:cNvPr id="5" name="TextBox 4"/>
+          <p:cNvSpPr txBox="1"/>
+          <p:nvPr/>
+        </p:nvSpPr>
+        <p:spPr>
+          <a:xfrm>
+            <a:off x="457200" y="932688"/>
+            <a:ext cx="10881360" cy="365760"/>
+          </a:xfrm>
+          <a:prstGeom prst="rect">
+            <a:avLst/>
+          </a:prstGeom>
+          <a:noFill/>
+        </p:spPr>
+        <p:txBody>
+          <a:bodyPr wrap="square">
+            <a:spAutoFit/>
+          </a:bodyPr>
+          <a:lstStyle/>
+          <a:p>
+            <a:pPr>
+              <a:defRPr sz="1300">
+                <a:solidFill>
+                  <a:srgbClr val="A9BEDC"/>
+                </a:solidFill>
+                <a:latin typeface="Calibri"/>
+              </a:defRPr>
+            </a:pPr>
+            <a:r>
+              <a:t>What changes for the member the moment a flight is cancelled.</a:t>
+            </a:r>
+          </a:p>
+        </p:txBody>
+      </p:sp>
+      <p:sp>
+        <p:nvSpPr>
+          <p:cNvPr id="6" name="Rounded Rectangle 5"/>
           <p:cNvSpPr/>
           <p:nvPr/>
         </p:nvSpPr>
         <p:spPr>
           <a:xfrm>
-            <a:off x="731520" y="1783080"/>
-            <a:ext cx="5120640" cy="4251960"/>
+            <a:off x="457200" y="1417320"/>
+            <a:ext cx="5394960" cy="4709160"/>
           </a:xfrm>
           <a:prstGeom prst="roundRect">
             <a:avLst>
@@ -3994,12 +4271,10 @@
             </a:avLst>
           </a:prstGeom>
           <a:solidFill>
-            <a:srgbClr val="F4E4DF"/>
+            <a:srgbClr val="132C52"/>
           </a:solidFill>
-          <a:ln w="9525">
-            <a:solidFill>
-              <a:srgbClr val="E3C3B8"/>
-            </a:solidFill>
+          <a:ln>
+            <a:noFill/>
           </a:ln>
           <a:effectLst/>
         </p:spPr>
@@ -4023,32 +4298,48 @@
           <a:p>
             <a:pPr algn="ctr">
               <a:spcAft>
-                <a:spcPts val="1200"/>
-              </a:spcAft>
-              <a:defRPr sz="1600" b="1">
-                <a:solidFill>
-                  <a:srgbClr val="8A3B2E"/>
-                </a:solidFill>
-                <a:latin typeface="Georgia"/>
-              </a:defRPr>
-            </a:pPr>
-            <a:r>
-              <a:t>Today — the reactive IRROPS nightmare</a:t>
+                <a:spcPts val="400"/>
+              </a:spcAft>
+              <a:defRPr sz="1100" b="1">
+                <a:solidFill>
+                  <a:srgbClr val="FF6B6B"/>
+                </a:solidFill>
+                <a:latin typeface="Calibri"/>
+              </a:defRPr>
+            </a:pPr>
+            <a:r>
+              <a:t>TODAY</a:t>
+            </a:r>
+          </a:p>
+          <a:p>
+            <a:pPr>
+              <a:spcAft>
+                <a:spcPts val="1000"/>
+              </a:spcAft>
+              <a:defRPr sz="1650" b="1">
+                <a:solidFill>
+                  <a:srgbClr val="FFFFFF"/>
+                </a:solidFill>
+                <a:latin typeface="Cambria"/>
+              </a:defRPr>
+            </a:pPr>
+            <a:r>
+              <a:t>The reactive IRROPS nightmare</a:t>
             </a:r>
           </a:p>
           <a:p>
             <a:pPr>
               <a:lnSpc>
-                <a:spcPct val="118000"/>
+                <a:spcPct val="120000"/>
               </a:lnSpc>
               <a:spcAft>
                 <a:spcPts val="800"/>
               </a:spcAft>
               <a:defRPr sz="1250">
                 <a:solidFill>
-                  <a:srgbClr val="8A3B2E"/>
-                </a:solidFill>
-                <a:latin typeface="Avenir Next"/>
+                  <a:srgbClr val="A9BEDC"/>
+                </a:solidFill>
+                <a:latin typeface="Calibri"/>
               </a:defRPr>
             </a:pPr>
             <a:r>
@@ -4058,16 +4349,16 @@
           <a:p>
             <a:pPr>
               <a:lnSpc>
-                <a:spcPct val="118000"/>
+                <a:spcPct val="120000"/>
               </a:lnSpc>
               <a:spcAft>
                 <a:spcPts val="800"/>
               </a:spcAft>
               <a:defRPr sz="1250">
                 <a:solidFill>
-                  <a:srgbClr val="8A3B2E"/>
-                </a:solidFill>
-                <a:latin typeface="Avenir Next"/>
+                  <a:srgbClr val="A9BEDC"/>
+                </a:solidFill>
+                <a:latin typeface="Calibri"/>
               </a:defRPr>
             </a:pPr>
             <a:r>
@@ -4077,16 +4368,16 @@
           <a:p>
             <a:pPr>
               <a:lnSpc>
-                <a:spcPct val="118000"/>
+                <a:spcPct val="120000"/>
               </a:lnSpc>
               <a:spcAft>
                 <a:spcPts val="800"/>
               </a:spcAft>
               <a:defRPr sz="1250">
                 <a:solidFill>
-                  <a:srgbClr val="8A3B2E"/>
-                </a:solidFill>
-                <a:latin typeface="Avenir Next"/>
+                  <a:srgbClr val="A9BEDC"/>
+                </a:solidFill>
+                <a:latin typeface="Calibri"/>
               </a:defRPr>
             </a:pPr>
             <a:r>
@@ -4096,16 +4387,16 @@
           <a:p>
             <a:pPr>
               <a:lnSpc>
-                <a:spcPct val="118000"/>
+                <a:spcPct val="120000"/>
               </a:lnSpc>
               <a:spcAft>
                 <a:spcPts val="800"/>
               </a:spcAft>
               <a:defRPr sz="1250">
                 <a:solidFill>
-                  <a:srgbClr val="8A3B2E"/>
-                </a:solidFill>
-                <a:latin typeface="Avenir Next"/>
+                  <a:srgbClr val="A9BEDC"/>
+                </a:solidFill>
+                <a:latin typeface="Calibri"/>
               </a:defRPr>
             </a:pPr>
             <a:r>
@@ -4116,14 +4407,14 @@
       </p:sp>
       <p:sp>
         <p:nvSpPr>
-          <p:cNvPr id="8" name="Rounded Rectangle 7"/>
+          <p:cNvPr id="7" name="Rounded Rectangle 6"/>
           <p:cNvSpPr/>
           <p:nvPr/>
         </p:nvSpPr>
         <p:spPr>
           <a:xfrm>
-            <a:off x="6263640" y="1783080"/>
-            <a:ext cx="5166360" cy="4251960"/>
+            <a:off x="6080760" y="1417320"/>
+            <a:ext cx="5650992" cy="4709160"/>
           </a:xfrm>
           <a:prstGeom prst="roundRect">
             <a:avLst>
@@ -4131,12 +4422,10 @@
             </a:avLst>
           </a:prstGeom>
           <a:solidFill>
-            <a:srgbClr val="E7EEE2"/>
+            <a:srgbClr val="132C52"/>
           </a:solidFill>
-          <a:ln w="9525">
-            <a:solidFill>
-              <a:srgbClr val="C9D9C0"/>
-            </a:solidFill>
+          <a:ln>
+            <a:noFill/>
           </a:ln>
           <a:effectLst/>
         </p:spPr>
@@ -4160,32 +4449,48 @@
           <a:p>
             <a:pPr algn="ctr">
               <a:spcAft>
-                <a:spcPts val="1200"/>
-              </a:spcAft>
-              <a:defRPr sz="1600" b="1">
-                <a:solidFill>
-                  <a:srgbClr val="3F5D3A"/>
-                </a:solidFill>
-                <a:latin typeface="Georgia"/>
-              </a:defRPr>
-            </a:pPr>
-            <a:r>
-              <a:t>ZKD Concierge — proactive and autonomous</a:t>
+                <a:spcPts val="400"/>
+              </a:spcAft>
+              <a:defRPr sz="1100" b="1">
+                <a:solidFill>
+                  <a:srgbClr val="2ECC9A"/>
+                </a:solidFill>
+                <a:latin typeface="Calibri"/>
+              </a:defRPr>
+            </a:pPr>
+            <a:r>
+              <a:t>ZKD CONCIERGE</a:t>
+            </a:r>
+          </a:p>
+          <a:p>
+            <a:pPr>
+              <a:spcAft>
+                <a:spcPts val="1000"/>
+              </a:spcAft>
+              <a:defRPr sz="1650" b="1">
+                <a:solidFill>
+                  <a:srgbClr val="FFFFFF"/>
+                </a:solidFill>
+                <a:latin typeface="Cambria"/>
+              </a:defRPr>
+            </a:pPr>
+            <a:r>
+              <a:t>Proactive and autonomous</a:t>
             </a:r>
           </a:p>
           <a:p>
             <a:pPr>
               <a:lnSpc>
-                <a:spcPct val="118000"/>
+                <a:spcPct val="120000"/>
               </a:lnSpc>
               <a:spcAft>
                 <a:spcPts val="800"/>
               </a:spcAft>
               <a:defRPr sz="1250">
                 <a:solidFill>
-                  <a:srgbClr val="3F5D3A"/>
-                </a:solidFill>
-                <a:latin typeface="Avenir Next"/>
+                  <a:srgbClr val="A9BEDC"/>
+                </a:solidFill>
+                <a:latin typeface="Calibri"/>
               </a:defRPr>
             </a:pPr>
             <a:r>
@@ -4195,16 +4500,16 @@
           <a:p>
             <a:pPr>
               <a:lnSpc>
-                <a:spcPct val="118000"/>
+                <a:spcPct val="120000"/>
               </a:lnSpc>
               <a:spcAft>
                 <a:spcPts val="800"/>
               </a:spcAft>
               <a:defRPr sz="1250">
                 <a:solidFill>
-                  <a:srgbClr val="3F5D3A"/>
-                </a:solidFill>
-                <a:latin typeface="Avenir Next"/>
+                  <a:srgbClr val="A9BEDC"/>
+                </a:solidFill>
+                <a:latin typeface="Calibri"/>
               </a:defRPr>
             </a:pPr>
             <a:r>
@@ -4214,16 +4519,16 @@
           <a:p>
             <a:pPr>
               <a:lnSpc>
-                <a:spcPct val="118000"/>
+                <a:spcPct val="120000"/>
               </a:lnSpc>
               <a:spcAft>
                 <a:spcPts val="800"/>
               </a:spcAft>
               <a:defRPr sz="1250">
                 <a:solidFill>
-                  <a:srgbClr val="3F5D3A"/>
-                </a:solidFill>
-                <a:latin typeface="Avenir Next"/>
+                  <a:srgbClr val="A9BEDC"/>
+                </a:solidFill>
+                <a:latin typeface="Calibri"/>
               </a:defRPr>
             </a:pPr>
             <a:r>
@@ -4233,16 +4538,16 @@
           <a:p>
             <a:pPr>
               <a:lnSpc>
-                <a:spcPct val="118000"/>
+                <a:spcPct val="120000"/>
               </a:lnSpc>
               <a:spcAft>
                 <a:spcPts val="800"/>
               </a:spcAft>
               <a:defRPr sz="1250">
                 <a:solidFill>
-                  <a:srgbClr val="3F5D3A"/>
-                </a:solidFill>
-                <a:latin typeface="Avenir Next"/>
+                  <a:srgbClr val="A9BEDC"/>
+                </a:solidFill>
+                <a:latin typeface="Calibri"/>
               </a:defRPr>
             </a:pPr>
             <a:r>
@@ -4262,6 +4567,14 @@
 <file path=ppt/slides/slide3.xml><?xml version="1.0" encoding="utf-8"?>
 <p:sld xmlns:a="http://schemas.openxmlformats.org/drawingml/2006/main" xmlns:p="http://schemas.openxmlformats.org/presentationml/2006/main" xmlns:r="http://schemas.openxmlformats.org/officeDocument/2006/relationships">
   <p:cSld>
+    <p:bg>
+      <p:bgPr>
+        <a:solidFill>
+          <a:srgbClr val="0A1B3D"/>
+        </a:solidFill>
+        <a:effectLst/>
+      </p:bgPr>
+    </p:bg>
     <p:spTree>
       <p:nvGrpSpPr>
         <p:cNvPr id="1" name=""/>
@@ -4271,20 +4584,166 @@
       <p:grpSpPr/>
       <p:sp>
         <p:nvSpPr>
-          <p:cNvPr id="2" name="Rectangle 1"/>
-          <p:cNvSpPr/>
+          <p:cNvPr id="2" name="TextBox 1"/>
+          <p:cNvSpPr txBox="1"/>
           <p:nvPr/>
         </p:nvSpPr>
         <p:spPr>
           <a:xfrm>
-            <a:off x="0" y="0"/>
-            <a:ext cx="12191695" cy="6858000"/>
+            <a:off x="457200" y="146304"/>
+            <a:ext cx="8229600" cy="256032"/>
           </a:xfrm>
           <a:prstGeom prst="rect">
             <a:avLst/>
           </a:prstGeom>
+          <a:noFill/>
+        </p:spPr>
+        <p:txBody>
+          <a:bodyPr wrap="square">
+            <a:spAutoFit/>
+          </a:bodyPr>
+          <a:lstStyle/>
+          <a:p>
+            <a:pPr>
+              <a:defRPr sz="1150" b="1">
+                <a:solidFill>
+                  <a:srgbClr val="3D9CFF"/>
+                </a:solidFill>
+                <a:latin typeface="Calibri"/>
+              </a:defRPr>
+            </a:pPr>
+            <a:r>
+              <a:t>02 · LIVE DEMO</a:t>
+            </a:r>
+          </a:p>
+        </p:txBody>
+      </p:sp>
+      <p:sp>
+        <p:nvSpPr>
+          <p:cNvPr id="3" name="TextBox 2"/>
+          <p:cNvSpPr txBox="1"/>
+          <p:nvPr/>
+        </p:nvSpPr>
+        <p:spPr>
+          <a:xfrm>
+            <a:off x="11155680" y="146304"/>
+            <a:ext cx="548640" cy="256032"/>
+          </a:xfrm>
+          <a:prstGeom prst="rect">
+            <a:avLst/>
+          </a:prstGeom>
+          <a:noFill/>
+        </p:spPr>
+        <p:txBody>
+          <a:bodyPr wrap="none">
+            <a:spAutoFit/>
+          </a:bodyPr>
+          <a:lstStyle/>
+          <a:p>
+            <a:pPr algn="r">
+              <a:defRPr sz="1150">
+                <a:solidFill>
+                  <a:srgbClr val="7B94BA"/>
+                </a:solidFill>
+                <a:latin typeface="Calibri"/>
+              </a:defRPr>
+            </a:pPr>
+            <a:r>
+              <a:t>3</a:t>
+            </a:r>
+          </a:p>
+        </p:txBody>
+      </p:sp>
+      <p:sp>
+        <p:nvSpPr>
+          <p:cNvPr id="4" name="TextBox 3"/>
+          <p:cNvSpPr txBox="1"/>
+          <p:nvPr/>
+        </p:nvSpPr>
+        <p:spPr>
+          <a:xfrm>
+            <a:off x="457200" y="365760"/>
+            <a:ext cx="10881360" cy="640080"/>
+          </a:xfrm>
+          <a:prstGeom prst="rect">
+            <a:avLst/>
+          </a:prstGeom>
+          <a:noFill/>
+        </p:spPr>
+        <p:txBody>
+          <a:bodyPr wrap="square">
+            <a:spAutoFit/>
+          </a:bodyPr>
+          <a:lstStyle/>
+          <a:p>
+            <a:pPr>
+              <a:defRPr sz="2500" b="1">
+                <a:solidFill>
+                  <a:srgbClr val="FFFFFF"/>
+                </a:solidFill>
+                <a:latin typeface="Cambria"/>
+              </a:defRPr>
+            </a:pPr>
+            <a:r>
+              <a:t>Live MVP demo walkthrough</a:t>
+            </a:r>
+          </a:p>
+        </p:txBody>
+      </p:sp>
+      <p:sp>
+        <p:nvSpPr>
+          <p:cNvPr id="5" name="TextBox 4"/>
+          <p:cNvSpPr txBox="1"/>
+          <p:nvPr/>
+        </p:nvSpPr>
+        <p:spPr>
+          <a:xfrm>
+            <a:off x="457200" y="932688"/>
+            <a:ext cx="10881360" cy="365760"/>
+          </a:xfrm>
+          <a:prstGeom prst="rect">
+            <a:avLst/>
+          </a:prstGeom>
+          <a:noFill/>
+        </p:spPr>
+        <p:txBody>
+          <a:bodyPr wrap="square">
+            <a:spAutoFit/>
+          </a:bodyPr>
+          <a:lstStyle/>
+          <a:p>
+            <a:pPr>
+              <a:defRPr sz="1300">
+                <a:solidFill>
+                  <a:srgbClr val="A9BEDC"/>
+                </a:solidFill>
+                <a:latin typeface="Calibri"/>
+              </a:defRPr>
+            </a:pPr>
+            <a:r>
+              <a:t>The pre-tea-break hero flow, run end to end on the live app.</a:t>
+            </a:r>
+          </a:p>
+        </p:txBody>
+      </p:sp>
+      <p:sp>
+        <p:nvSpPr>
+          <p:cNvPr id="6" name="Rounded Rectangle 5"/>
+          <p:cNvSpPr/>
+          <p:nvPr/>
+        </p:nvSpPr>
+        <p:spPr>
+          <a:xfrm>
+            <a:off x="457200" y="1417320"/>
+            <a:ext cx="5394960" cy="2103120"/>
+          </a:xfrm>
+          <a:prstGeom prst="roundRect">
+            <a:avLst>
+              <a:gd name="adj" fmla="val 6000"/>
+            </a:avLst>
+          </a:prstGeom>
           <a:solidFill>
-            <a:srgbClr val="FAF9F5"/>
+            <a:srgbClr val="132C52"/>
           </a:solidFill>
           <a:ln>
             <a:noFill/>
@@ -4306,101 +4765,76 @@
           </a:fontRef>
         </p:style>
         <p:txBody>
-          <a:bodyPr rtlCol="0" anchor="ctr"/>
-          <a:lstStyle/>
-          <a:p>
-            <a:pPr algn="ctr"/>
-          </a:p>
-        </p:txBody>
-      </p:sp>
-      <p:sp>
-        <p:nvSpPr>
-          <p:cNvPr id="3" name="TextBox 2"/>
-          <p:cNvSpPr txBox="1"/>
-          <p:nvPr/>
-        </p:nvSpPr>
-        <p:spPr>
-          <a:xfrm>
-            <a:off x="731520" y="502920"/>
-            <a:ext cx="10698480" cy="320040"/>
-          </a:xfrm>
-          <a:prstGeom prst="rect">
-            <a:avLst/>
-          </a:prstGeom>
-          <a:noFill/>
-        </p:spPr>
-        <p:txBody>
-          <a:bodyPr wrap="square">
-            <a:spAutoFit/>
-          </a:bodyPr>
-          <a:lstStyle/>
-          <a:p>
-            <a:pPr>
-              <a:defRPr sz="1050" b="1">
-                <a:solidFill>
-                  <a:srgbClr val="B85C3E"/>
-                </a:solidFill>
-                <a:latin typeface="Avenir Next"/>
-              </a:defRPr>
-            </a:pPr>
-            <a:r>
-              <a:t>ZKD CONCIERGE  ·  AMERICAN EXPRESS  /  CODESTREET 2026</a:t>
-            </a:r>
-          </a:p>
-        </p:txBody>
-      </p:sp>
-      <p:sp>
-        <p:nvSpPr>
-          <p:cNvPr id="4" name="TextBox 3"/>
-          <p:cNvSpPr txBox="1"/>
-          <p:nvPr/>
-        </p:nvSpPr>
-        <p:spPr>
-          <a:xfrm>
-            <a:off x="731520" y="804672"/>
-            <a:ext cx="10058400" cy="777240"/>
-          </a:xfrm>
-          <a:prstGeom prst="rect">
-            <a:avLst/>
-          </a:prstGeom>
-          <a:noFill/>
-        </p:spPr>
-        <p:txBody>
-          <a:bodyPr wrap="square">
-            <a:spAutoFit/>
-          </a:bodyPr>
-          <a:lstStyle/>
-          <a:p>
-            <a:pPr>
-              <a:defRPr sz="2700" b="0">
-                <a:solidFill>
-                  <a:srgbClr val="1F1E1C"/>
-                </a:solidFill>
-                <a:latin typeface="Georgia"/>
-              </a:defRPr>
-            </a:pPr>
-            <a:r>
-              <a:t>Live MVP demo walkthrough (pre-tea-break hero flow)</a:t>
-            </a:r>
-          </a:p>
-        </p:txBody>
-      </p:sp>
-      <p:sp>
-        <p:nvSpPr>
-          <p:cNvPr id="5" name="Rectangle 4"/>
+          <a:bodyPr rtlCol="0" anchor="ctr" lIns="256032" rIns="256032" tIns="256032" bIns="256032" wrap="square"/>
+          <a:lstStyle/>
+          <a:p>
+            <a:pPr algn="ctr">
+              <a:spcAft>
+                <a:spcPts val="400"/>
+              </a:spcAft>
+              <a:defRPr sz="1500" b="1">
+                <a:solidFill>
+                  <a:srgbClr val="3D9CFF"/>
+                </a:solidFill>
+                <a:latin typeface="Courier New"/>
+              </a:defRPr>
+            </a:pPr>
+            <a:r>
+              <a:t>01</a:t>
+            </a:r>
+          </a:p>
+          <a:p>
+            <a:pPr>
+              <a:spcAft>
+                <a:spcPts val="800"/>
+              </a:spcAft>
+              <a:defRPr sz="1550" b="1">
+                <a:solidFill>
+                  <a:srgbClr val="FFFFFF"/>
+                </a:solidFill>
+                <a:latin typeface="Cambria"/>
+              </a:defRPr>
+            </a:pPr>
+            <a:r>
+              <a:t>Operator console (/ops)</a:t>
+            </a:r>
+          </a:p>
+          <a:p>
+            <a:pPr>
+              <a:lnSpc>
+                <a:spcPct val="120000"/>
+              </a:lnSpc>
+              <a:defRPr sz="1250">
+                <a:solidFill>
+                  <a:srgbClr val="A9BEDC"/>
+                </a:solidFill>
+                <a:latin typeface="Calibri"/>
+              </a:defRPr>
+            </a:pPr>
+            <a:r>
+              <a:t>Trigger test disruptions locally or hosted; exercises the webhook and poller simulation channels instantly.</a:t>
+            </a:r>
+          </a:p>
+        </p:txBody>
+      </p:sp>
+      <p:sp>
+        <p:nvSpPr>
+          <p:cNvPr id="7" name="Rounded Rectangle 6"/>
           <p:cNvSpPr/>
           <p:nvPr/>
         </p:nvSpPr>
         <p:spPr>
           <a:xfrm>
-            <a:off x="731520" y="1481328"/>
-            <a:ext cx="502920" cy="44450"/>
-          </a:xfrm>
-          <a:prstGeom prst="rect">
-            <a:avLst/>
+            <a:off x="6108192" y="1417320"/>
+            <a:ext cx="5394960" cy="2103120"/>
+          </a:xfrm>
+          <a:prstGeom prst="roundRect">
+            <a:avLst>
+              <a:gd name="adj" fmla="val 6000"/>
+            </a:avLst>
           </a:prstGeom>
           <a:solidFill>
-            <a:srgbClr val="D97757"/>
+            <a:srgbClr val="132C52"/>
           </a:solidFill>
           <a:ln>
             <a:noFill/>
@@ -4422,59 +4856,68 @@
           </a:fontRef>
         </p:style>
         <p:txBody>
-          <a:bodyPr rtlCol="0" anchor="ctr"/>
-          <a:lstStyle/>
-          <a:p>
-            <a:pPr algn="ctr"/>
-          </a:p>
-        </p:txBody>
-      </p:sp>
-      <p:sp>
-        <p:nvSpPr>
-          <p:cNvPr id="6" name="TextBox 5"/>
-          <p:cNvSpPr txBox="1"/>
-          <p:nvPr/>
-        </p:nvSpPr>
-        <p:spPr>
-          <a:xfrm>
-            <a:off x="11430000" y="6446520"/>
-            <a:ext cx="548640" cy="320040"/>
-          </a:xfrm>
-          <a:prstGeom prst="rect">
-            <a:avLst/>
-          </a:prstGeom>
-          <a:noFill/>
-        </p:spPr>
-        <p:txBody>
-          <a:bodyPr wrap="none">
-            <a:spAutoFit/>
-          </a:bodyPr>
-          <a:lstStyle/>
-          <a:p>
-            <a:pPr algn="r">
-              <a:defRPr sz="1000">
-                <a:solidFill>
-                  <a:srgbClr val="5E5A52"/>
-                </a:solidFill>
-                <a:latin typeface="Avenir Next"/>
-              </a:defRPr>
-            </a:pPr>
-            <a:r>
-              <a:t>03</a:t>
-            </a:r>
-          </a:p>
-        </p:txBody>
-      </p:sp>
-      <p:sp>
-        <p:nvSpPr>
-          <p:cNvPr id="7" name="Rounded Rectangle 6"/>
+          <a:bodyPr rtlCol="0" anchor="ctr" lIns="256032" rIns="256032" tIns="256032" bIns="256032" wrap="square"/>
+          <a:lstStyle/>
+          <a:p>
+            <a:pPr algn="ctr">
+              <a:spcAft>
+                <a:spcPts val="400"/>
+              </a:spcAft>
+              <a:defRPr sz="1500" b="1">
+                <a:solidFill>
+                  <a:srgbClr val="9B8CFF"/>
+                </a:solidFill>
+                <a:latin typeface="Courier New"/>
+              </a:defRPr>
+            </a:pPr>
+            <a:r>
+              <a:t>02</a:t>
+            </a:r>
+          </a:p>
+          <a:p>
+            <a:pPr>
+              <a:spcAft>
+                <a:spcPts val="800"/>
+              </a:spcAft>
+              <a:defRPr sz="1550" b="1">
+                <a:solidFill>
+                  <a:srgbClr val="FFFFFF"/>
+                </a:solidFill>
+                <a:latin typeface="Cambria"/>
+              </a:defRPr>
+            </a:pPr>
+            <a:r>
+              <a:t>Risk &amp; LLM explanation</a:t>
+            </a:r>
+          </a:p>
+          <a:p>
+            <a:pPr>
+              <a:lnSpc>
+                <a:spcPct val="120000"/>
+              </a:lnSpc>
+              <a:defRPr sz="1250">
+                <a:solidFill>
+                  <a:srgbClr val="A9BEDC"/>
+                </a:solidFill>
+                <a:latin typeface="Calibri"/>
+              </a:defRPr>
+            </a:pPr>
+            <a:r>
+              <a:t>Live risk gauge crossing thresholds, with a plain-language Gemini explanation of the weather/airline risk.</a:t>
+            </a:r>
+          </a:p>
+        </p:txBody>
+      </p:sp>
+      <p:sp>
+        <p:nvSpPr>
+          <p:cNvPr id="8" name="Rounded Rectangle 7"/>
           <p:cNvSpPr/>
           <p:nvPr/>
         </p:nvSpPr>
         <p:spPr>
           <a:xfrm>
-            <a:off x="731520" y="1783080"/>
-            <a:ext cx="5212080" cy="1965960"/>
+            <a:off x="457200" y="3749039"/>
+            <a:ext cx="5394960" cy="2103120"/>
           </a:xfrm>
           <a:prstGeom prst="roundRect">
             <a:avLst>
@@ -4482,12 +4925,10 @@
             </a:avLst>
           </a:prstGeom>
           <a:solidFill>
-            <a:srgbClr val="FFFFFF"/>
+            <a:srgbClr val="132C52"/>
           </a:solidFill>
-          <a:ln w="9525">
-            <a:solidFill>
-              <a:srgbClr val="E4E0D6"/>
-            </a:solidFill>
+          <a:ln>
+            <a:noFill/>
           </a:ln>
           <a:effectLst/>
         </p:spPr>
@@ -4511,17 +4952,33 @@
           <a:p>
             <a:pPr algn="ctr">
               <a:spcAft>
+                <a:spcPts val="400"/>
+              </a:spcAft>
+              <a:defRPr sz="1500" b="1">
+                <a:solidFill>
+                  <a:srgbClr val="2ECC9A"/>
+                </a:solidFill>
+                <a:latin typeface="Courier New"/>
+              </a:defRPr>
+            </a:pPr>
+            <a:r>
+              <a:t>03</a:t>
+            </a:r>
+          </a:p>
+          <a:p>
+            <a:pPr>
+              <a:spcAft>
                 <a:spcPts val="800"/>
               </a:spcAft>
               <a:defRPr sz="1550" b="1">
                 <a:solidFill>
-                  <a:srgbClr val="B85C3E"/>
-                </a:solidFill>
-                <a:latin typeface="Georgia"/>
-              </a:defRPr>
-            </a:pPr>
-            <a:r>
-              <a:t>01   Operator console (/ops)</a:t>
+                  <a:srgbClr val="FFFFFF"/>
+                </a:solidFill>
+                <a:latin typeface="Cambria"/>
+              </a:defRPr>
+            </a:pPr>
+            <a:r>
+              <a:t>Edge case: self-cancel</a:t>
             </a:r>
           </a:p>
           <a:p>
@@ -4531,27 +4988,27 @@
               </a:lnSpc>
               <a:defRPr sz="1250">
                 <a:solidFill>
-                  <a:srgbClr val="5E5A52"/>
-                </a:solidFill>
-                <a:latin typeface="Avenir Next"/>
-              </a:defRPr>
-            </a:pPr>
-            <a:r>
-              <a:t>Trigger test disruptions locally or hosted; exercises the webhook and poller simulation channels instantly.</a:t>
-            </a:r>
-          </a:p>
-        </p:txBody>
-      </p:sp>
-      <p:sp>
-        <p:nvSpPr>
-          <p:cNvPr id="8" name="Rounded Rectangle 7"/>
+                  <a:srgbClr val="A9BEDC"/>
+                </a:solidFill>
+                <a:latin typeface="Calibri"/>
+              </a:defRPr>
+            </a:pPr>
+            <a:r>
+              <a:t>Member-initiated changes, a clean hand-off (handed-over), and zero-friction state sync.</a:t>
+            </a:r>
+          </a:p>
+        </p:txBody>
+      </p:sp>
+      <p:sp>
+        <p:nvSpPr>
+          <p:cNvPr id="9" name="Rounded Rectangle 8"/>
           <p:cNvSpPr/>
           <p:nvPr/>
         </p:nvSpPr>
         <p:spPr>
           <a:xfrm>
-            <a:off x="6217920" y="1783080"/>
-            <a:ext cx="5212080" cy="1965960"/>
+            <a:off x="6108192" y="3749039"/>
+            <a:ext cx="5394960" cy="2103120"/>
           </a:xfrm>
           <a:prstGeom prst="roundRect">
             <a:avLst>
@@ -4559,12 +5016,10 @@
             </a:avLst>
           </a:prstGeom>
           <a:solidFill>
-            <a:srgbClr val="FFFFFF"/>
+            <a:srgbClr val="132C52"/>
           </a:solidFill>
-          <a:ln w="9525">
-            <a:solidFill>
-              <a:srgbClr val="E4E0D6"/>
-            </a:solidFill>
+          <a:ln>
+            <a:noFill/>
           </a:ln>
           <a:effectLst/>
         </p:spPr>
@@ -4588,17 +5043,33 @@
           <a:p>
             <a:pPr algn="ctr">
               <a:spcAft>
+                <a:spcPts val="400"/>
+              </a:spcAft>
+              <a:defRPr sz="1500" b="1">
+                <a:solidFill>
+                  <a:srgbClr val="FFB020"/>
+                </a:solidFill>
+                <a:latin typeface="Courier New"/>
+              </a:defRPr>
+            </a:pPr>
+            <a:r>
+              <a:t>04</a:t>
+            </a:r>
+          </a:p>
+          <a:p>
+            <a:pPr>
+              <a:spcAft>
                 <a:spcPts val="800"/>
               </a:spcAft>
               <a:defRPr sz="1550" b="1">
                 <a:solidFill>
-                  <a:srgbClr val="B85C3E"/>
-                </a:solidFill>
-                <a:latin typeface="Georgia"/>
-              </a:defRPr>
-            </a:pPr>
-            <a:r>
-              <a:t>02   Risk &amp; LLM explanation</a:t>
+                  <a:srgbClr val="FFFFFF"/>
+                </a:solidFill>
+                <a:latin typeface="Cambria"/>
+              </a:defRPr>
+            </a:pPr>
+            <a:r>
+              <a:t>11-second autonomous recovery</a:t>
             </a:r>
           </a:p>
           <a:p>
@@ -4608,27 +5079,197 @@
               </a:lnSpc>
               <a:defRPr sz="1250">
                 <a:solidFill>
-                  <a:srgbClr val="5E5A52"/>
-                </a:solidFill>
-                <a:latin typeface="Avenir Next"/>
-              </a:defRPr>
-            </a:pPr>
-            <a:r>
-              <a:t>Live risk gauge crossing thresholds, with a plain-language Gemini explanation of the weather/airline risk.</a:t>
-            </a:r>
-          </a:p>
-        </p:txBody>
-      </p:sp>
-      <p:sp>
-        <p:nvSpPr>
-          <p:cNvPr id="9" name="Rounded Rectangle 8"/>
+                  <a:srgbClr val="A9BEDC"/>
+                </a:solidFill>
+                <a:latin typeface="Calibri"/>
+              </a:defRPr>
+            </a:pPr>
+            <a:r>
+              <a:t>Pre-auth consent gate, multi-supplier option ranking, and 1-tap booking confirmation in ~11s.</a:t>
+            </a:r>
+          </a:p>
+        </p:txBody>
+      </p:sp>
+    </p:spTree>
+  </p:cSld>
+  <p:clrMapOvr>
+    <a:masterClrMapping/>
+  </p:clrMapOvr>
+</p:sld>
+</file>
+
+<file path=ppt/slides/slide4.xml><?xml version="1.0" encoding="utf-8"?>
+<p:sld xmlns:a="http://schemas.openxmlformats.org/drawingml/2006/main" xmlns:p="http://schemas.openxmlformats.org/presentationml/2006/main" xmlns:r="http://schemas.openxmlformats.org/officeDocument/2006/relationships">
+  <p:cSld>
+    <p:bg>
+      <p:bgPr>
+        <a:solidFill>
+          <a:srgbClr val="0A1B3D"/>
+        </a:solidFill>
+        <a:effectLst/>
+      </p:bgPr>
+    </p:bg>
+    <p:spTree>
+      <p:nvGrpSpPr>
+        <p:cNvPr id="1" name=""/>
+        <p:cNvGrpSpPr/>
+        <p:nvPr/>
+      </p:nvGrpSpPr>
+      <p:grpSpPr/>
+      <p:sp>
+        <p:nvSpPr>
+          <p:cNvPr id="2" name="TextBox 1"/>
+          <p:cNvSpPr txBox="1"/>
+          <p:nvPr/>
+        </p:nvSpPr>
+        <p:spPr>
+          <a:xfrm>
+            <a:off x="457200" y="146304"/>
+            <a:ext cx="8229600" cy="256032"/>
+          </a:xfrm>
+          <a:prstGeom prst="rect">
+            <a:avLst/>
+          </a:prstGeom>
+          <a:noFill/>
+        </p:spPr>
+        <p:txBody>
+          <a:bodyPr wrap="square">
+            <a:spAutoFit/>
+          </a:bodyPr>
+          <a:lstStyle/>
+          <a:p>
+            <a:pPr>
+              <a:defRPr sz="1150" b="1">
+                <a:solidFill>
+                  <a:srgbClr val="3D9CFF"/>
+                </a:solidFill>
+                <a:latin typeface="Calibri"/>
+              </a:defRPr>
+            </a:pPr>
+            <a:r>
+              <a:t>03 · PREDICTION &amp; PERSONALIZATION</a:t>
+            </a:r>
+          </a:p>
+        </p:txBody>
+      </p:sp>
+      <p:sp>
+        <p:nvSpPr>
+          <p:cNvPr id="3" name="TextBox 2"/>
+          <p:cNvSpPr txBox="1"/>
+          <p:nvPr/>
+        </p:nvSpPr>
+        <p:spPr>
+          <a:xfrm>
+            <a:off x="11155680" y="146304"/>
+            <a:ext cx="548640" cy="256032"/>
+          </a:xfrm>
+          <a:prstGeom prst="rect">
+            <a:avLst/>
+          </a:prstGeom>
+          <a:noFill/>
+        </p:spPr>
+        <p:txBody>
+          <a:bodyPr wrap="none">
+            <a:spAutoFit/>
+          </a:bodyPr>
+          <a:lstStyle/>
+          <a:p>
+            <a:pPr algn="r">
+              <a:defRPr sz="1150">
+                <a:solidFill>
+                  <a:srgbClr val="7B94BA"/>
+                </a:solidFill>
+                <a:latin typeface="Calibri"/>
+              </a:defRPr>
+            </a:pPr>
+            <a:r>
+              <a:t>4</a:t>
+            </a:r>
+          </a:p>
+        </p:txBody>
+      </p:sp>
+      <p:sp>
+        <p:nvSpPr>
+          <p:cNvPr id="4" name="TextBox 3"/>
+          <p:cNvSpPr txBox="1"/>
+          <p:nvPr/>
+        </p:nvSpPr>
+        <p:spPr>
+          <a:xfrm>
+            <a:off x="457200" y="365760"/>
+            <a:ext cx="10881360" cy="640080"/>
+          </a:xfrm>
+          <a:prstGeom prst="rect">
+            <a:avLst/>
+          </a:prstGeom>
+          <a:noFill/>
+        </p:spPr>
+        <p:txBody>
+          <a:bodyPr wrap="square">
+            <a:spAutoFit/>
+          </a:bodyPr>
+          <a:lstStyle/>
+          <a:p>
+            <a:pPr>
+              <a:defRPr sz="2500" b="1">
+                <a:solidFill>
+                  <a:srgbClr val="FFFFFF"/>
+                </a:solidFill>
+                <a:latin typeface="Cambria"/>
+              </a:defRPr>
+            </a:pPr>
+            <a:r>
+              <a:t>Predictive ML model &amp; personalization</a:t>
+            </a:r>
+          </a:p>
+        </p:txBody>
+      </p:sp>
+      <p:sp>
+        <p:nvSpPr>
+          <p:cNvPr id="5" name="TextBox 4"/>
+          <p:cNvSpPr txBox="1"/>
+          <p:nvPr/>
+        </p:nvSpPr>
+        <p:spPr>
+          <a:xfrm>
+            <a:off x="457200" y="932688"/>
+            <a:ext cx="10881360" cy="365760"/>
+          </a:xfrm>
+          <a:prstGeom prst="rect">
+            <a:avLst/>
+          </a:prstGeom>
+          <a:noFill/>
+        </p:spPr>
+        <p:txBody>
+          <a:bodyPr wrap="square">
+            <a:spAutoFit/>
+          </a:bodyPr>
+          <a:lstStyle/>
+          <a:p>
+            <a:pPr>
+              <a:defRPr sz="1300">
+                <a:solidFill>
+                  <a:srgbClr val="A9BEDC"/>
+                </a:solidFill>
+                <a:latin typeface="Calibri"/>
+              </a:defRPr>
+            </a:pPr>
+            <a:r>
+              <a:t>The Spotify analogy: the same curation instinct, applied to a cancelled flight.</a:t>
+            </a:r>
+          </a:p>
+        </p:txBody>
+      </p:sp>
+      <p:sp>
+        <p:nvSpPr>
+          <p:cNvPr id="6" name="Rounded Rectangle 5"/>
           <p:cNvSpPr/>
           <p:nvPr/>
         </p:nvSpPr>
         <p:spPr>
           <a:xfrm>
-            <a:off x="731520" y="3995928"/>
-            <a:ext cx="5212080" cy="1965960"/>
+            <a:off x="457200" y="1417320"/>
+            <a:ext cx="5394960" cy="4709160"/>
           </a:xfrm>
           <a:prstGeom prst="roundRect">
             <a:avLst>
@@ -4636,12 +5277,10 @@
             </a:avLst>
           </a:prstGeom>
           <a:solidFill>
-            <a:srgbClr val="FFFFFF"/>
+            <a:srgbClr val="132C52"/>
           </a:solidFill>
-          <a:ln w="9525">
-            <a:solidFill>
-              <a:srgbClr val="E4E0D6"/>
-            </a:solidFill>
+          <a:ln>
+            <a:noFill/>
           </a:ln>
           <a:effectLst/>
         </p:spPr>
@@ -4665,17 +5304,33 @@
           <a:p>
             <a:pPr algn="ctr">
               <a:spcAft>
-                <a:spcPts val="800"/>
-              </a:spcAft>
-              <a:defRPr sz="1550" b="1">
-                <a:solidFill>
-                  <a:srgbClr val="B85C3E"/>
-                </a:solidFill>
-                <a:latin typeface="Georgia"/>
-              </a:defRPr>
-            </a:pPr>
-            <a:r>
-              <a:t>03   Edge case: self-cancel</a:t>
+                <a:spcPts val="400"/>
+              </a:spcAft>
+              <a:defRPr sz="1100" b="1">
+                <a:solidFill>
+                  <a:srgbClr val="3D9CFF"/>
+                </a:solidFill>
+                <a:latin typeface="Calibri"/>
+              </a:defRPr>
+            </a:pPr>
+            <a:r>
+              <a:t>RISK MODEL</a:t>
+            </a:r>
+          </a:p>
+          <a:p>
+            <a:pPr>
+              <a:spcAft>
+                <a:spcPts val="1000"/>
+              </a:spcAft>
+              <a:defRPr sz="1650" b="1">
+                <a:solidFill>
+                  <a:srgbClr val="FFFFFF"/>
+                </a:solidFill>
+                <a:latin typeface="Cambria"/>
+              </a:defRPr>
+            </a:pPr>
+            <a:r>
+              <a:t>Self-trained cancellation risk model</a:t>
             </a:r>
           </a:p>
           <a:p>
@@ -4683,29 +5338,89 @@
               <a:lnSpc>
                 <a:spcPct val="120000"/>
               </a:lnSpc>
+              <a:spcAft>
+                <a:spcPts val="800"/>
+              </a:spcAft>
               <a:defRPr sz="1250">
                 <a:solidFill>
-                  <a:srgbClr val="5E5A52"/>
-                </a:solidFill>
-                <a:latin typeface="Avenir Next"/>
-              </a:defRPr>
-            </a:pPr>
-            <a:r>
-              <a:t>Member-initiated changes, a clean hand-off (`handed-over`), and zero-friction state sync.</a:t>
-            </a:r>
-          </a:p>
-        </p:txBody>
-      </p:sp>
-      <p:sp>
-        <p:nvSpPr>
-          <p:cNvPr id="10" name="Rounded Rectangle 9"/>
+                  <a:srgbClr val="A9BEDC"/>
+                </a:solidFill>
+                <a:latin typeface="Calibri"/>
+              </a:defRPr>
+            </a:pPr>
+            <a:r>
+              <a:t>—  Built in zkd-risk-model/: XGBoost trained on real US DOT/BTS and Brazil ANAC historical data.</a:t>
+            </a:r>
+          </a:p>
+          <a:p>
+            <a:pPr>
+              <a:lnSpc>
+                <a:spcPct val="120000"/>
+              </a:lnSpc>
+              <a:spcAft>
+                <a:spcPts val="800"/>
+              </a:spcAft>
+              <a:defRPr sz="1250">
+                <a:solidFill>
+                  <a:srgbClr val="A9BEDC"/>
+                </a:solidFill>
+                <a:latin typeface="Calibri"/>
+              </a:defRPr>
+            </a:pPr>
+            <a:r>
+              <a:t>—  Extracts weather, route congestion, and airline rolling delays.</a:t>
+            </a:r>
+          </a:p>
+          <a:p>
+            <a:pPr>
+              <a:lnSpc>
+                <a:spcPct val="120000"/>
+              </a:lnSpc>
+              <a:spcAft>
+                <a:spcPts val="800"/>
+              </a:spcAft>
+              <a:defRPr sz="1250">
+                <a:solidFill>
+                  <a:srgbClr val="A9BEDC"/>
+                </a:solidFill>
+                <a:latin typeface="Calibri"/>
+              </a:defRPr>
+            </a:pPr>
+            <a:r>
+              <a:t>—  Outputs a continuous probability score with adaptive thresholds — not a flat 25/55/80.</a:t>
+            </a:r>
+          </a:p>
+          <a:p>
+            <a:pPr>
+              <a:lnSpc>
+                <a:spcPct val="120000"/>
+              </a:lnSpc>
+              <a:spcAft>
+                <a:spcPts val="800"/>
+              </a:spcAft>
+              <a:defRPr sz="1250">
+                <a:solidFill>
+                  <a:srgbClr val="A9BEDC"/>
+                </a:solidFill>
+                <a:latin typeface="Calibri"/>
+              </a:defRPr>
+            </a:pPr>
+            <a:r>
+              <a:t>—  Advisory role only: decides when we start preparing, never whether we spend member money.</a:t>
+            </a:r>
+          </a:p>
+        </p:txBody>
+      </p:sp>
+      <p:sp>
+        <p:nvSpPr>
+          <p:cNvPr id="7" name="Rounded Rectangle 6"/>
           <p:cNvSpPr/>
           <p:nvPr/>
         </p:nvSpPr>
         <p:spPr>
           <a:xfrm>
-            <a:off x="6217920" y="3995928"/>
-            <a:ext cx="5212080" cy="1965960"/>
+            <a:off x="6080760" y="1417320"/>
+            <a:ext cx="5650992" cy="4709160"/>
           </a:xfrm>
           <a:prstGeom prst="roundRect">
             <a:avLst>
@@ -4713,12 +5428,10 @@
             </a:avLst>
           </a:prstGeom>
           <a:solidFill>
-            <a:srgbClr val="FFFFFF"/>
+            <a:srgbClr val="132C52"/>
           </a:solidFill>
-          <a:ln w="9525">
-            <a:solidFill>
-              <a:srgbClr val="E4E0D6"/>
-            </a:solidFill>
+          <a:ln>
+            <a:noFill/>
           </a:ln>
           <a:effectLst/>
         </p:spPr>
@@ -4742,17 +5455,33 @@
           <a:p>
             <a:pPr algn="ctr">
               <a:spcAft>
-                <a:spcPts val="800"/>
-              </a:spcAft>
-              <a:defRPr sz="1550" b="1">
-                <a:solidFill>
-                  <a:srgbClr val="B85C3E"/>
-                </a:solidFill>
-                <a:latin typeface="Georgia"/>
-              </a:defRPr>
-            </a:pPr>
-            <a:r>
-              <a:t>04   11-second autonomous recovery</a:t>
+                <a:spcPts val="400"/>
+              </a:spcAft>
+              <a:defRPr sz="1100" b="1">
+                <a:solidFill>
+                  <a:srgbClr val="9B8CFF"/>
+                </a:solidFill>
+                <a:latin typeface="Calibri"/>
+              </a:defRPr>
+            </a:pPr>
+            <a:r>
+              <a:t>PERSONALIZATION</a:t>
+            </a:r>
+          </a:p>
+          <a:p>
+            <a:pPr>
+              <a:spcAft>
+                <a:spcPts val="1000"/>
+              </a:spcAft>
+              <a:defRPr sz="1650" b="1">
+                <a:solidFill>
+                  <a:srgbClr val="FFFFFF"/>
+                </a:solidFill>
+                <a:latin typeface="Cambria"/>
+              </a:defRPr>
+            </a:pPr>
+            <a:r>
+              <a:t>The Spotify / YouTube analogy</a:t>
             </a:r>
           </a:p>
           <a:p>
@@ -4760,15 +5489,75 @@
               <a:lnSpc>
                 <a:spcPct val="120000"/>
               </a:lnSpc>
+              <a:spcAft>
+                <a:spcPts val="800"/>
+              </a:spcAft>
               <a:defRPr sz="1250">
                 <a:solidFill>
-                  <a:srgbClr val="5E5A52"/>
-                </a:solidFill>
-                <a:latin typeface="Avenir Next"/>
-              </a:defRPr>
-            </a:pPr>
-            <a:r>
-              <a:t>Pre-auth consent gate, multi-supplier option ranking, and 1-tap booking confirmation in ~11s.</a:t>
+                  <a:srgbClr val="A9BEDC"/>
+                </a:solidFill>
+                <a:latin typeface="Calibri"/>
+              </a:defRPr>
+            </a:pPr>
+            <a:r>
+              <a:t>—  Just as Spotify curates Discover Weekly from listening history, ZKD learns cardmember preferences.</a:t>
+            </a:r>
+          </a:p>
+          <a:p>
+            <a:pPr>
+              <a:lnSpc>
+                <a:spcPct val="120000"/>
+              </a:lnSpc>
+              <a:spcAft>
+                <a:spcPts val="800"/>
+              </a:spcAft>
+              <a:defRPr sz="1250">
+                <a:solidFill>
+                  <a:srgbClr val="A9BEDC"/>
+                </a:solidFill>
+                <a:latin typeface="Calibri"/>
+              </a:defRPr>
+            </a:pPr>
+            <a:r>
+              <a:t>—  Captures seat preference, cabin entitlement, layover tolerance, and companion rules.</a:t>
+            </a:r>
+          </a:p>
+          <a:p>
+            <a:pPr>
+              <a:lnSpc>
+                <a:spcPct val="120000"/>
+              </a:lnSpc>
+              <a:spcAft>
+                <a:spcPts val="800"/>
+              </a:spcAft>
+              <a:defRPr sz="1250">
+                <a:solidFill>
+                  <a:srgbClr val="A9BEDC"/>
+                </a:solidFill>
+                <a:latin typeface="Calibri"/>
+              </a:defRPr>
+            </a:pPr>
+            <a:r>
+              <a:t>—  Translates free-text member intent (server/preferences/intent.ts) into weighted scoring rules.</a:t>
+            </a:r>
+          </a:p>
+          <a:p>
+            <a:pPr>
+              <a:lnSpc>
+                <a:spcPct val="120000"/>
+              </a:lnSpc>
+              <a:spcAft>
+                <a:spcPts val="800"/>
+              </a:spcAft>
+              <a:defRPr sz="1250">
+                <a:solidFill>
+                  <a:srgbClr val="A9BEDC"/>
+                </a:solidFill>
+                <a:latin typeface="Calibri"/>
+              </a:defRPr>
+            </a:pPr>
+            <a:r>
+              <a:t>—  Dynamic adaptation: refines options from implicit choices and explicit feedback.</a:t>
             </a:r>
           </a:p>
         </p:txBody>
@@ -4781,9 +5570,17 @@
 </p:sld>
 </file>
 
-<file path=ppt/slides/slide4.xml><?xml version="1.0" encoding="utf-8"?>
+<file path=ppt/slides/slide5.xml><?xml version="1.0" encoding="utf-8"?>
 <p:sld xmlns:a="http://schemas.openxmlformats.org/drawingml/2006/main" xmlns:p="http://schemas.openxmlformats.org/presentationml/2006/main" xmlns:r="http://schemas.openxmlformats.org/officeDocument/2006/relationships">
   <p:cSld>
+    <p:bg>
+      <p:bgPr>
+        <a:solidFill>
+          <a:srgbClr val="0A1B3D"/>
+        </a:solidFill>
+        <a:effectLst/>
+      </p:bgPr>
+    </p:bg>
     <p:spTree>
       <p:nvGrpSpPr>
         <p:cNvPr id="1" name=""/>
@@ -4793,20 +5590,166 @@
       <p:grpSpPr/>
       <p:sp>
         <p:nvSpPr>
-          <p:cNvPr id="2" name="Rectangle 1"/>
-          <p:cNvSpPr/>
+          <p:cNvPr id="2" name="TextBox 1"/>
+          <p:cNvSpPr txBox="1"/>
           <p:nvPr/>
         </p:nvSpPr>
         <p:spPr>
           <a:xfrm>
-            <a:off x="0" y="0"/>
-            <a:ext cx="12191695" cy="6858000"/>
+            <a:off x="457200" y="146304"/>
+            <a:ext cx="8229600" cy="256032"/>
           </a:xfrm>
           <a:prstGeom prst="rect">
             <a:avLst/>
           </a:prstGeom>
+          <a:noFill/>
+        </p:spPr>
+        <p:txBody>
+          <a:bodyPr wrap="square">
+            <a:spAutoFit/>
+          </a:bodyPr>
+          <a:lstStyle/>
+          <a:p>
+            <a:pPr>
+              <a:defRPr sz="1150" b="1">
+                <a:solidFill>
+                  <a:srgbClr val="3D9CFF"/>
+                </a:solidFill>
+                <a:latin typeface="Calibri"/>
+              </a:defRPr>
+            </a:pPr>
+            <a:r>
+              <a:t>04 · THE LIFECYCLE</a:t>
+            </a:r>
+          </a:p>
+        </p:txBody>
+      </p:sp>
+      <p:sp>
+        <p:nvSpPr>
+          <p:cNvPr id="3" name="TextBox 2"/>
+          <p:cNvSpPr txBox="1"/>
+          <p:nvPr/>
+        </p:nvSpPr>
+        <p:spPr>
+          <a:xfrm>
+            <a:off x="11155680" y="146304"/>
+            <a:ext cx="548640" cy="256032"/>
+          </a:xfrm>
+          <a:prstGeom prst="rect">
+            <a:avLst/>
+          </a:prstGeom>
+          <a:noFill/>
+        </p:spPr>
+        <p:txBody>
+          <a:bodyPr wrap="none">
+            <a:spAutoFit/>
+          </a:bodyPr>
+          <a:lstStyle/>
+          <a:p>
+            <a:pPr algn="r">
+              <a:defRPr sz="1150">
+                <a:solidFill>
+                  <a:srgbClr val="7B94BA"/>
+                </a:solidFill>
+                <a:latin typeface="Calibri"/>
+              </a:defRPr>
+            </a:pPr>
+            <a:r>
+              <a:t>5</a:t>
+            </a:r>
+          </a:p>
+        </p:txBody>
+      </p:sp>
+      <p:sp>
+        <p:nvSpPr>
+          <p:cNvPr id="4" name="TextBox 3"/>
+          <p:cNvSpPr txBox="1"/>
+          <p:nvPr/>
+        </p:nvSpPr>
+        <p:spPr>
+          <a:xfrm>
+            <a:off x="457200" y="365760"/>
+            <a:ext cx="10881360" cy="640080"/>
+          </a:xfrm>
+          <a:prstGeom prst="rect">
+            <a:avLst/>
+          </a:prstGeom>
+          <a:noFill/>
+        </p:spPr>
+        <p:txBody>
+          <a:bodyPr wrap="square">
+            <a:spAutoFit/>
+          </a:bodyPr>
+          <a:lstStyle/>
+          <a:p>
+            <a:pPr>
+              <a:defRPr sz="2500" b="1">
+                <a:solidFill>
+                  <a:srgbClr val="FFFFFF"/>
+                </a:solidFill>
+                <a:latin typeface="Cambria"/>
+              </a:defRPr>
+            </a:pPr>
+            <a:r>
+              <a:t>The disruption lifecycle</a:t>
+            </a:r>
+          </a:p>
+        </p:txBody>
+      </p:sp>
+      <p:sp>
+        <p:nvSpPr>
+          <p:cNvPr id="5" name="TextBox 4"/>
+          <p:cNvSpPr txBox="1"/>
+          <p:nvPr/>
+        </p:nvSpPr>
+        <p:spPr>
+          <a:xfrm>
+            <a:off x="457200" y="932688"/>
+            <a:ext cx="10881360" cy="365760"/>
+          </a:xfrm>
+          <a:prstGeom prst="rect">
+            <a:avLst/>
+          </a:prstGeom>
+          <a:noFill/>
+        </p:spPr>
+        <p:txBody>
+          <a:bodyPr wrap="square">
+            <a:spAutoFit/>
+          </a:bodyPr>
+          <a:lstStyle/>
+          <a:p>
+            <a:pPr>
+              <a:defRPr sz="1300">
+                <a:solidFill>
+                  <a:srgbClr val="A9BEDC"/>
+                </a:solidFill>
+                <a:latin typeface="Calibri"/>
+              </a:defRPr>
+            </a:pPr>
+            <a:r>
+              <a:t>Prediction buys speed: every phase before consent runs before the airline even confirms.</a:t>
+            </a:r>
+          </a:p>
+        </p:txBody>
+      </p:sp>
+      <p:sp>
+        <p:nvSpPr>
+          <p:cNvPr id="6" name="Rounded Rectangle 5"/>
+          <p:cNvSpPr/>
+          <p:nvPr/>
+        </p:nvSpPr>
+        <p:spPr>
+          <a:xfrm>
+            <a:off x="457200" y="1508760"/>
+            <a:ext cx="2615184" cy="4480560"/>
+          </a:xfrm>
+          <a:prstGeom prst="roundRect">
+            <a:avLst>
+              <a:gd name="adj" fmla="val 6000"/>
+            </a:avLst>
+          </a:prstGeom>
           <a:solidFill>
-            <a:srgbClr val="FAF9F5"/>
+            <a:srgbClr val="132C52"/>
           </a:solidFill>
           <a:ln>
             <a:noFill/>
@@ -4828,101 +5771,92 @@
           </a:fontRef>
         </p:style>
         <p:txBody>
-          <a:bodyPr rtlCol="0" anchor="ctr"/>
-          <a:lstStyle/>
-          <a:p>
-            <a:pPr algn="ctr"/>
-          </a:p>
-        </p:txBody>
-      </p:sp>
-      <p:sp>
-        <p:nvSpPr>
-          <p:cNvPr id="3" name="TextBox 2"/>
-          <p:cNvSpPr txBox="1"/>
-          <p:nvPr/>
-        </p:nvSpPr>
-        <p:spPr>
-          <a:xfrm>
-            <a:off x="731520" y="502920"/>
-            <a:ext cx="10698480" cy="320040"/>
-          </a:xfrm>
-          <a:prstGeom prst="rect">
-            <a:avLst/>
-          </a:prstGeom>
-          <a:noFill/>
-        </p:spPr>
-        <p:txBody>
-          <a:bodyPr wrap="square">
-            <a:spAutoFit/>
-          </a:bodyPr>
-          <a:lstStyle/>
-          <a:p>
-            <a:pPr>
-              <a:defRPr sz="1050" b="1">
-                <a:solidFill>
-                  <a:srgbClr val="B85C3E"/>
-                </a:solidFill>
-                <a:latin typeface="Avenir Next"/>
-              </a:defRPr>
-            </a:pPr>
-            <a:r>
-              <a:t>ZKD CONCIERGE  ·  AMERICAN EXPRESS  /  CODESTREET 2026</a:t>
-            </a:r>
-          </a:p>
-        </p:txBody>
-      </p:sp>
-      <p:sp>
-        <p:nvSpPr>
-          <p:cNvPr id="4" name="TextBox 3"/>
-          <p:cNvSpPr txBox="1"/>
-          <p:nvPr/>
-        </p:nvSpPr>
-        <p:spPr>
-          <a:xfrm>
-            <a:off x="731520" y="804672"/>
-            <a:ext cx="10058400" cy="777240"/>
-          </a:xfrm>
-          <a:prstGeom prst="rect">
-            <a:avLst/>
-          </a:prstGeom>
-          <a:noFill/>
-        </p:spPr>
-        <p:txBody>
-          <a:bodyPr wrap="square">
-            <a:spAutoFit/>
-          </a:bodyPr>
-          <a:lstStyle/>
-          <a:p>
-            <a:pPr>
-              <a:defRPr sz="2700" b="0">
-                <a:solidFill>
-                  <a:srgbClr val="1F1E1C"/>
-                </a:solidFill>
-                <a:latin typeface="Georgia"/>
-              </a:defRPr>
-            </a:pPr>
-            <a:r>
-              <a:t>Predictive ML model &amp; personalization — the Spotify analogy</a:t>
-            </a:r>
-          </a:p>
-        </p:txBody>
-      </p:sp>
-      <p:sp>
-        <p:nvSpPr>
-          <p:cNvPr id="5" name="Rectangle 4"/>
+          <a:bodyPr rtlCol="0" anchor="ctr" lIns="219456" rIns="219456" tIns="219456" bIns="219456" wrap="square"/>
+          <a:lstStyle/>
+          <a:p>
+            <a:pPr algn="ctr">
+              <a:spcAft>
+                <a:spcPts val="600"/>
+              </a:spcAft>
+              <a:defRPr sz="1300" b="1">
+                <a:solidFill>
+                  <a:srgbClr val="3D9CFF"/>
+                </a:solidFill>
+                <a:latin typeface="Courier New"/>
+              </a:defRPr>
+            </a:pPr>
+            <a:r>
+              <a:t>01</a:t>
+            </a:r>
+          </a:p>
+          <a:p>
+            <a:pPr>
+              <a:spcAft>
+                <a:spcPts val="200"/>
+              </a:spcAft>
+              <a:defRPr sz="1700" b="1">
+                <a:solidFill>
+                  <a:srgbClr val="FFFFFF"/>
+                </a:solidFill>
+                <a:latin typeface="Cambria"/>
+              </a:defRPr>
+            </a:pPr>
+            <a:r>
+              <a:t>Predict</a:t>
+            </a:r>
+          </a:p>
+          <a:p>
+            <a:pPr>
+              <a:spcAft>
+                <a:spcPts val="1400"/>
+              </a:spcAft>
+              <a:defRPr sz="1100" b="1">
+                <a:solidFill>
+                  <a:srgbClr val="3D9CFF"/>
+                </a:solidFill>
+                <a:latin typeface="Calibri"/>
+              </a:defRPr>
+            </a:pPr>
+            <a:r>
+              <a:t>~42s head start</a:t>
+            </a:r>
+          </a:p>
+          <a:p>
+            <a:pPr>
+              <a:lnSpc>
+                <a:spcPct val="125000"/>
+              </a:lnSpc>
+              <a:defRPr sz="1150">
+                <a:solidFill>
+                  <a:srgbClr val="A9BEDC"/>
+                </a:solidFill>
+                <a:latin typeface="Calibri"/>
+              </a:defRPr>
+            </a:pPr>
+            <a:r>
+              <a:t>Model forecasts cancellation probability before the airline files it. Alt flights and hotels are pre-cached warm.</a:t>
+            </a:r>
+          </a:p>
+        </p:txBody>
+      </p:sp>
+      <p:sp>
+        <p:nvSpPr>
+          <p:cNvPr id="7" name="Rounded Rectangle 6"/>
           <p:cNvSpPr/>
           <p:nvPr/>
         </p:nvSpPr>
         <p:spPr>
           <a:xfrm>
-            <a:off x="731520" y="1481328"/>
-            <a:ext cx="502920" cy="44450"/>
-          </a:xfrm>
-          <a:prstGeom prst="rect">
-            <a:avLst/>
+            <a:off x="3255264" y="1508760"/>
+            <a:ext cx="2615184" cy="4480560"/>
+          </a:xfrm>
+          <a:prstGeom prst="roundRect">
+            <a:avLst>
+              <a:gd name="adj" fmla="val 6000"/>
+            </a:avLst>
           </a:prstGeom>
           <a:solidFill>
-            <a:srgbClr val="D97757"/>
+            <a:srgbClr val="132C52"/>
           </a:solidFill>
           <a:ln>
             <a:noFill/>
@@ -4944,59 +5878,84 @@
           </a:fontRef>
         </p:style>
         <p:txBody>
-          <a:bodyPr rtlCol="0" anchor="ctr"/>
-          <a:lstStyle/>
-          <a:p>
-            <a:pPr algn="ctr"/>
-          </a:p>
-        </p:txBody>
-      </p:sp>
-      <p:sp>
-        <p:nvSpPr>
-          <p:cNvPr id="6" name="TextBox 5"/>
-          <p:cNvSpPr txBox="1"/>
-          <p:nvPr/>
-        </p:nvSpPr>
-        <p:spPr>
-          <a:xfrm>
-            <a:off x="11430000" y="6446520"/>
-            <a:ext cx="548640" cy="320040"/>
-          </a:xfrm>
-          <a:prstGeom prst="rect">
-            <a:avLst/>
-          </a:prstGeom>
-          <a:noFill/>
-        </p:spPr>
-        <p:txBody>
-          <a:bodyPr wrap="none">
-            <a:spAutoFit/>
-          </a:bodyPr>
-          <a:lstStyle/>
-          <a:p>
-            <a:pPr algn="r">
-              <a:defRPr sz="1000">
-                <a:solidFill>
-                  <a:srgbClr val="5E5A52"/>
-                </a:solidFill>
-                <a:latin typeface="Avenir Next"/>
-              </a:defRPr>
-            </a:pPr>
-            <a:r>
-              <a:t>04</a:t>
-            </a:r>
-          </a:p>
-        </p:txBody>
-      </p:sp>
-      <p:sp>
-        <p:nvSpPr>
-          <p:cNvPr id="7" name="Rounded Rectangle 6"/>
+          <a:bodyPr rtlCol="0" anchor="ctr" lIns="219456" rIns="219456" tIns="219456" bIns="219456" wrap="square"/>
+          <a:lstStyle/>
+          <a:p>
+            <a:pPr algn="ctr">
+              <a:spcAft>
+                <a:spcPts val="600"/>
+              </a:spcAft>
+              <a:defRPr sz="1300" b="1">
+                <a:solidFill>
+                  <a:srgbClr val="9B8CFF"/>
+                </a:solidFill>
+                <a:latin typeface="Courier New"/>
+              </a:defRPr>
+            </a:pPr>
+            <a:r>
+              <a:t>02</a:t>
+            </a:r>
+          </a:p>
+          <a:p>
+            <a:pPr>
+              <a:spcAft>
+                <a:spcPts val="200"/>
+              </a:spcAft>
+              <a:defRPr sz="1700" b="1">
+                <a:solidFill>
+                  <a:srgbClr val="FFFFFF"/>
+                </a:solidFill>
+                <a:latin typeface="Cambria"/>
+              </a:defRPr>
+            </a:pPr>
+            <a:r>
+              <a:t>Pre-cache</a:t>
+            </a:r>
+          </a:p>
+          <a:p>
+            <a:pPr>
+              <a:spcAft>
+                <a:spcPts val="1400"/>
+              </a:spcAft>
+              <a:defRPr sz="1100" b="1">
+                <a:solidFill>
+                  <a:srgbClr val="9B8CFF"/>
+                </a:solidFill>
+                <a:latin typeface="Calibri"/>
+              </a:defRPr>
+            </a:pPr>
+            <a:r>
+              <a:t>Zero spend, no hold</a:t>
+            </a:r>
+          </a:p>
+          <a:p>
+            <a:pPr>
+              <a:lnSpc>
+                <a:spcPct val="125000"/>
+              </a:lnSpc>
+              <a:defRPr sz="1150">
+                <a:solidFill>
+                  <a:srgbClr val="A9BEDC"/>
+                </a:solidFill>
+                <a:latin typeface="Calibri"/>
+              </a:defRPr>
+            </a:pPr>
+            <a:r>
+              <a:t>Options are priced and held warm in memory. No booking, no spend, no financial liability.</a:t>
+            </a:r>
+          </a:p>
+        </p:txBody>
+      </p:sp>
+      <p:sp>
+        <p:nvSpPr>
+          <p:cNvPr id="8" name="Rounded Rectangle 7"/>
           <p:cNvSpPr/>
           <p:nvPr/>
         </p:nvSpPr>
         <p:spPr>
           <a:xfrm>
-            <a:off x="731520" y="1783080"/>
-            <a:ext cx="5120640" cy="4251960"/>
+            <a:off x="6053328" y="1508760"/>
+            <a:ext cx="2615184" cy="4480560"/>
           </a:xfrm>
           <a:prstGeom prst="roundRect">
             <a:avLst>
@@ -5004,12 +5963,10 @@
             </a:avLst>
           </a:prstGeom>
           <a:solidFill>
-            <a:srgbClr val="FFFFFF"/>
+            <a:srgbClr val="132C52"/>
           </a:solidFill>
-          <a:ln w="9525">
-            <a:solidFill>
-              <a:srgbClr val="E4E0D6"/>
-            </a:solidFill>
+          <a:ln>
+            <a:noFill/>
           </a:ln>
           <a:effectLst/>
         </p:spPr>
@@ -5028,112 +5985,84 @@
           </a:fontRef>
         </p:style>
         <p:txBody>
-          <a:bodyPr rtlCol="0" anchor="ctr" lIns="256032" rIns="256032" tIns="256032" bIns="256032" wrap="square"/>
+          <a:bodyPr rtlCol="0" anchor="ctr" lIns="219456" rIns="219456" tIns="219456" bIns="219456" wrap="square"/>
           <a:lstStyle/>
           <a:p>
             <a:pPr algn="ctr">
               <a:spcAft>
-                <a:spcPts val="1200"/>
-              </a:spcAft>
-              <a:defRPr sz="1600" b="1">
-                <a:solidFill>
-                  <a:srgbClr val="1F1E1C"/>
-                </a:solidFill>
-                <a:latin typeface="Georgia"/>
-              </a:defRPr>
-            </a:pPr>
-            <a:r>
-              <a:t>Self-trained cancellation risk model</a:t>
+                <a:spcPts val="600"/>
+              </a:spcAft>
+              <a:defRPr sz="1300" b="1">
+                <a:solidFill>
+                  <a:srgbClr val="2ECC9A"/>
+                </a:solidFill>
+                <a:latin typeface="Courier New"/>
+              </a:defRPr>
+            </a:pPr>
+            <a:r>
+              <a:t>03</a:t>
+            </a:r>
+          </a:p>
+          <a:p>
+            <a:pPr>
+              <a:spcAft>
+                <a:spcPts val="200"/>
+              </a:spcAft>
+              <a:defRPr sz="1700" b="1">
+                <a:solidFill>
+                  <a:srgbClr val="FFFFFF"/>
+                </a:solidFill>
+                <a:latin typeface="Cambria"/>
+              </a:defRPr>
+            </a:pPr>
+            <a:r>
+              <a:t>Consent gate</a:t>
+            </a:r>
+          </a:p>
+          <a:p>
+            <a:pPr>
+              <a:spcAft>
+                <a:spcPts val="1400"/>
+              </a:spcAft>
+              <a:defRPr sz="1100" b="1">
+                <a:solidFill>
+                  <a:srgbClr val="2ECC9A"/>
+                </a:solidFill>
+                <a:latin typeface="Calibri"/>
+              </a:defRPr>
+            </a:pPr>
+            <a:r>
+              <a:t>Member control</a:t>
             </a:r>
           </a:p>
           <a:p>
             <a:pPr>
               <a:lnSpc>
-                <a:spcPct val="118000"/>
+                <a:spcPct val="125000"/>
               </a:lnSpc>
-              <a:spcAft>
-                <a:spcPts val="800"/>
-              </a:spcAft>
-              <a:defRPr sz="1250">
-                <a:solidFill>
-                  <a:srgbClr val="5E5A52"/>
-                </a:solidFill>
-                <a:latin typeface="Avenir Next"/>
-              </a:defRPr>
-            </a:pPr>
-            <a:r>
-              <a:t>—  Built in zkd-risk-model/: XGBoost trained on real US DOT/BTS and Brazil ANAC historical data.</a:t>
-            </a:r>
-          </a:p>
-          <a:p>
-            <a:pPr>
-              <a:lnSpc>
-                <a:spcPct val="118000"/>
-              </a:lnSpc>
-              <a:spcAft>
-                <a:spcPts val="800"/>
-              </a:spcAft>
-              <a:defRPr sz="1250">
-                <a:solidFill>
-                  <a:srgbClr val="5E5A52"/>
-                </a:solidFill>
-                <a:latin typeface="Avenir Next"/>
-              </a:defRPr>
-            </a:pPr>
-            <a:r>
-              <a:t>—  Extracts weather, route congestion, and airline rolling delays.</a:t>
-            </a:r>
-          </a:p>
-          <a:p>
-            <a:pPr>
-              <a:lnSpc>
-                <a:spcPct val="118000"/>
-              </a:lnSpc>
-              <a:spcAft>
-                <a:spcPts val="800"/>
-              </a:spcAft>
-              <a:defRPr sz="1250">
-                <a:solidFill>
-                  <a:srgbClr val="5E5A52"/>
-                </a:solidFill>
-                <a:latin typeface="Avenir Next"/>
-              </a:defRPr>
-            </a:pPr>
-            <a:r>
-              <a:t>—  Outputs a continuous probability score with adaptive thresholds — not a flat 25/55/80.</a:t>
-            </a:r>
-          </a:p>
-          <a:p>
-            <a:pPr>
-              <a:lnSpc>
-                <a:spcPct val="118000"/>
-              </a:lnSpc>
-              <a:spcAft>
-                <a:spcPts val="800"/>
-              </a:spcAft>
-              <a:defRPr sz="1250">
-                <a:solidFill>
-                  <a:srgbClr val="5E5A52"/>
-                </a:solidFill>
-                <a:latin typeface="Avenir Next"/>
-              </a:defRPr>
-            </a:pPr>
-            <a:r>
-              <a:t>—  Advisory role only: decides when we start preparing, never whether we spend member money.</a:t>
-            </a:r>
-          </a:p>
-        </p:txBody>
-      </p:sp>
-      <p:sp>
-        <p:nvSpPr>
-          <p:cNvPr id="8" name="Rounded Rectangle 7"/>
+              <a:defRPr sz="1150">
+                <a:solidFill>
+                  <a:srgbClr val="A9BEDC"/>
+                </a:solidFill>
+                <a:latin typeface="Calibri"/>
+              </a:defRPr>
+            </a:pPr>
+            <a:r>
+              <a:t>A high-risk threshold triggers pre-auth. The member chooses, or approves autopilot in advance.</a:t>
+            </a:r>
+          </a:p>
+        </p:txBody>
+      </p:sp>
+      <p:sp>
+        <p:nvSpPr>
+          <p:cNvPr id="9" name="Rounded Rectangle 8"/>
           <p:cNvSpPr/>
           <p:nvPr/>
         </p:nvSpPr>
         <p:spPr>
           <a:xfrm>
-            <a:off x="6263640" y="1783080"/>
-            <a:ext cx="5166360" cy="4251960"/>
+            <a:off x="8851392" y="1508760"/>
+            <a:ext cx="2615184" cy="4480560"/>
           </a:xfrm>
           <a:prstGeom prst="roundRect">
             <a:avLst>
@@ -5141,12 +6070,10 @@
             </a:avLst>
           </a:prstGeom>
           <a:solidFill>
-            <a:srgbClr val="F3E3DB"/>
+            <a:srgbClr val="132C52"/>
           </a:solidFill>
-          <a:ln w="9525">
-            <a:solidFill>
-              <a:srgbClr val="E4E0D6"/>
-            </a:solidFill>
+          <a:ln>
+            <a:noFill/>
           </a:ln>
           <a:effectLst/>
         </p:spPr>
@@ -5165,98 +6092,70 @@
           </a:fontRef>
         </p:style>
         <p:txBody>
-          <a:bodyPr rtlCol="0" anchor="ctr" lIns="256032" rIns="256032" tIns="256032" bIns="256032" wrap="square"/>
+          <a:bodyPr rtlCol="0" anchor="ctr" lIns="219456" rIns="219456" tIns="219456" bIns="219456" wrap="square"/>
           <a:lstStyle/>
           <a:p>
             <a:pPr algn="ctr">
               <a:spcAft>
-                <a:spcPts val="1200"/>
-              </a:spcAft>
-              <a:defRPr sz="1600" b="1">
-                <a:solidFill>
-                  <a:srgbClr val="B85C3E"/>
-                </a:solidFill>
-                <a:latin typeface="Georgia"/>
-              </a:defRPr>
-            </a:pPr>
-            <a:r>
-              <a:t>Personalization: the Spotify / YouTube analogy</a:t>
+                <a:spcPts val="600"/>
+              </a:spcAft>
+              <a:defRPr sz="1300" b="1">
+                <a:solidFill>
+                  <a:srgbClr val="FFB020"/>
+                </a:solidFill>
+                <a:latin typeface="Courier New"/>
+              </a:defRPr>
+            </a:pPr>
+            <a:r>
+              <a:t>04</a:t>
+            </a:r>
+          </a:p>
+          <a:p>
+            <a:pPr>
+              <a:spcAft>
+                <a:spcPts val="200"/>
+              </a:spcAft>
+              <a:defRPr sz="1700" b="1">
+                <a:solidFill>
+                  <a:srgbClr val="FFFFFF"/>
+                </a:solidFill>
+                <a:latin typeface="Cambria"/>
+              </a:defRPr>
+            </a:pPr>
+            <a:r>
+              <a:t>Act &amp; settle</a:t>
+            </a:r>
+          </a:p>
+          <a:p>
+            <a:pPr>
+              <a:spcAft>
+                <a:spcPts val="1400"/>
+              </a:spcAft>
+              <a:defRPr sz="1100" b="1">
+                <a:solidFill>
+                  <a:srgbClr val="FFB020"/>
+                </a:solidFill>
+                <a:latin typeface="Calibri"/>
+              </a:defRPr>
+            </a:pPr>
+            <a:r>
+              <a:t>~11s recovery</a:t>
             </a:r>
           </a:p>
           <a:p>
             <a:pPr>
               <a:lnSpc>
-                <a:spcPct val="118000"/>
+                <a:spcPct val="125000"/>
               </a:lnSpc>
-              <a:spcAft>
-                <a:spcPts val="800"/>
-              </a:spcAft>
-              <a:defRPr sz="1250">
-                <a:solidFill>
-                  <a:srgbClr val="5E5A52"/>
-                </a:solidFill>
-                <a:latin typeface="Avenir Next"/>
-              </a:defRPr>
-            </a:pPr>
-            <a:r>
-              <a:t>—  Just as Spotify curates Discover Weekly from listening history, ZKD learns cardmember preferences.</a:t>
-            </a:r>
-          </a:p>
-          <a:p>
-            <a:pPr>
-              <a:lnSpc>
-                <a:spcPct val="118000"/>
-              </a:lnSpc>
-              <a:spcAft>
-                <a:spcPts val="800"/>
-              </a:spcAft>
-              <a:defRPr sz="1250">
-                <a:solidFill>
-                  <a:srgbClr val="5E5A52"/>
-                </a:solidFill>
-                <a:latin typeface="Avenir Next"/>
-              </a:defRPr>
-            </a:pPr>
-            <a:r>
-              <a:t>—  Captures seat preference, cabin entitlement, layover tolerance, and companion rules.</a:t>
-            </a:r>
-          </a:p>
-          <a:p>
-            <a:pPr>
-              <a:lnSpc>
-                <a:spcPct val="118000"/>
-              </a:lnSpc>
-              <a:spcAft>
-                <a:spcPts val="800"/>
-              </a:spcAft>
-              <a:defRPr sz="1250">
-                <a:solidFill>
-                  <a:srgbClr val="5E5A52"/>
-                </a:solidFill>
-                <a:latin typeface="Avenir Next"/>
-              </a:defRPr>
-            </a:pPr>
-            <a:r>
-              <a:t>—  Translates free-text member intent (server/preferences/intent.ts) into weighted scoring rules.</a:t>
-            </a:r>
-          </a:p>
-          <a:p>
-            <a:pPr>
-              <a:lnSpc>
-                <a:spcPct val="118000"/>
-              </a:lnSpc>
-              <a:spcAft>
-                <a:spcPts val="800"/>
-              </a:spcAft>
-              <a:defRPr sz="1250">
-                <a:solidFill>
-                  <a:srgbClr val="5E5A52"/>
-                </a:solidFill>
-                <a:latin typeface="Avenir Next"/>
-              </a:defRPr>
-            </a:pPr>
-            <a:r>
-              <a:t>—  Dynamic adaptation: refines options from implicit choices and explicit feedback.</a:t>
+              <a:defRPr sz="1150">
+                <a:solidFill>
+                  <a:srgbClr val="A9BEDC"/>
+                </a:solidFill>
+                <a:latin typeface="Calibri"/>
+              </a:defRPr>
+            </a:pPr>
+            <a:r>
+              <a:t>The confirmed booking executes instantly. DGCA duty-of-care claims are filed automatically.</a:t>
             </a:r>
           </a:p>
         </p:txBody>
@@ -5269,9 +6168,17 @@
 </p:sld>
 </file>
 
-<file path=ppt/slides/slide5.xml><?xml version="1.0" encoding="utf-8"?>
+<file path=ppt/slides/slide6.xml><?xml version="1.0" encoding="utf-8"?>
 <p:sld xmlns:a="http://schemas.openxmlformats.org/drawingml/2006/main" xmlns:p="http://schemas.openxmlformats.org/presentationml/2006/main" xmlns:r="http://schemas.openxmlformats.org/officeDocument/2006/relationships">
   <p:cSld>
+    <p:bg>
+      <p:bgPr>
+        <a:solidFill>
+          <a:srgbClr val="0A1B3D"/>
+        </a:solidFill>
+        <a:effectLst/>
+      </p:bgPr>
+    </p:bg>
     <p:spTree>
       <p:nvGrpSpPr>
         <p:cNvPr id="1" name=""/>
@@ -5281,20 +6188,166 @@
       <p:grpSpPr/>
       <p:sp>
         <p:nvSpPr>
-          <p:cNvPr id="2" name="Rectangle 1"/>
-          <p:cNvSpPr/>
+          <p:cNvPr id="2" name="TextBox 1"/>
+          <p:cNvSpPr txBox="1"/>
           <p:nvPr/>
         </p:nvSpPr>
         <p:spPr>
           <a:xfrm>
-            <a:off x="0" y="0"/>
-            <a:ext cx="12191695" cy="6858000"/>
+            <a:off x="457200" y="146304"/>
+            <a:ext cx="8229600" cy="256032"/>
           </a:xfrm>
           <a:prstGeom prst="rect">
             <a:avLst/>
           </a:prstGeom>
+          <a:noFill/>
+        </p:spPr>
+        <p:txBody>
+          <a:bodyPr wrap="square">
+            <a:spAutoFit/>
+          </a:bodyPr>
+          <a:lstStyle/>
+          <a:p>
+            <a:pPr>
+              <a:defRPr sz="1150" b="1">
+                <a:solidFill>
+                  <a:srgbClr val="3D9CFF"/>
+                </a:solidFill>
+                <a:latin typeface="Calibri"/>
+              </a:defRPr>
+            </a:pPr>
+            <a:r>
+              <a:t>05 · POLICY &amp; COMPLIANCE</a:t>
+            </a:r>
+          </a:p>
+        </p:txBody>
+      </p:sp>
+      <p:sp>
+        <p:nvSpPr>
+          <p:cNvPr id="3" name="TextBox 2"/>
+          <p:cNvSpPr txBox="1"/>
+          <p:nvPr/>
+        </p:nvSpPr>
+        <p:spPr>
+          <a:xfrm>
+            <a:off x="11155680" y="146304"/>
+            <a:ext cx="548640" cy="256032"/>
+          </a:xfrm>
+          <a:prstGeom prst="rect">
+            <a:avLst/>
+          </a:prstGeom>
+          <a:noFill/>
+        </p:spPr>
+        <p:txBody>
+          <a:bodyPr wrap="none">
+            <a:spAutoFit/>
+          </a:bodyPr>
+          <a:lstStyle/>
+          <a:p>
+            <a:pPr algn="r">
+              <a:defRPr sz="1150">
+                <a:solidFill>
+                  <a:srgbClr val="7B94BA"/>
+                </a:solidFill>
+                <a:latin typeface="Calibri"/>
+              </a:defRPr>
+            </a:pPr>
+            <a:r>
+              <a:t>6</a:t>
+            </a:r>
+          </a:p>
+        </p:txBody>
+      </p:sp>
+      <p:sp>
+        <p:nvSpPr>
+          <p:cNvPr id="4" name="TextBox 3"/>
+          <p:cNvSpPr txBox="1"/>
+          <p:nvPr/>
+        </p:nvSpPr>
+        <p:spPr>
+          <a:xfrm>
+            <a:off x="457200" y="365760"/>
+            <a:ext cx="10881360" cy="640080"/>
+          </a:xfrm>
+          <a:prstGeom prst="rect">
+            <a:avLst/>
+          </a:prstGeom>
+          <a:noFill/>
+        </p:spPr>
+        <p:txBody>
+          <a:bodyPr wrap="square">
+            <a:spAutoFit/>
+          </a:bodyPr>
+          <a:lstStyle/>
+          <a:p>
+            <a:pPr>
+              <a:defRPr sz="2500" b="1">
+                <a:solidFill>
+                  <a:srgbClr val="FFFFFF"/>
+                </a:solidFill>
+                <a:latin typeface="Cambria"/>
+              </a:defRPr>
+            </a:pPr>
+            <a:r>
+              <a:t>Policy intelligence via RAG</a:t>
+            </a:r>
+          </a:p>
+        </p:txBody>
+      </p:sp>
+      <p:sp>
+        <p:nvSpPr>
+          <p:cNvPr id="5" name="TextBox 4"/>
+          <p:cNvSpPr txBox="1"/>
+          <p:nvPr/>
+        </p:nvSpPr>
+        <p:spPr>
+          <a:xfrm>
+            <a:off x="457200" y="932688"/>
+            <a:ext cx="10881360" cy="365760"/>
+          </a:xfrm>
+          <a:prstGeom prst="rect">
+            <a:avLst/>
+          </a:prstGeom>
+          <a:noFill/>
+        </p:spPr>
+        <p:txBody>
+          <a:bodyPr wrap="square">
+            <a:spAutoFit/>
+          </a:bodyPr>
+          <a:lstStyle/>
+          <a:p>
+            <a:pPr>
+              <a:defRPr sz="1300">
+                <a:solidFill>
+                  <a:srgbClr val="A9BEDC"/>
+                </a:solidFill>
+                <a:latin typeface="Calibri"/>
+              </a:defRPr>
+            </a:pPr>
+            <a:r>
+              <a:t>Multi-regulation compliance, enforced by a default-deny policy gate.</a:t>
+            </a:r>
+          </a:p>
+        </p:txBody>
+      </p:sp>
+      <p:sp>
+        <p:nvSpPr>
+          <p:cNvPr id="6" name="Rounded Rectangle 5"/>
+          <p:cNvSpPr/>
+          <p:nvPr/>
+        </p:nvSpPr>
+        <p:spPr>
+          <a:xfrm>
+            <a:off x="457200" y="1417320"/>
+            <a:ext cx="5394960" cy="4709160"/>
+          </a:xfrm>
+          <a:prstGeom prst="roundRect">
+            <a:avLst>
+              <a:gd name="adj" fmla="val 6000"/>
+            </a:avLst>
+          </a:prstGeom>
           <a:solidFill>
-            <a:srgbClr val="FAF9F5"/>
+            <a:srgbClr val="132C52"/>
           </a:solidFill>
           <a:ln>
             <a:noFill/>
@@ -5316,101 +6369,136 @@
           </a:fontRef>
         </p:style>
         <p:txBody>
-          <a:bodyPr rtlCol="0" anchor="ctr"/>
-          <a:lstStyle/>
-          <a:p>
-            <a:pPr algn="ctr"/>
-          </a:p>
-        </p:txBody>
-      </p:sp>
-      <p:sp>
-        <p:nvSpPr>
-          <p:cNvPr id="3" name="TextBox 2"/>
-          <p:cNvSpPr txBox="1"/>
-          <p:nvPr/>
-        </p:nvSpPr>
-        <p:spPr>
-          <a:xfrm>
-            <a:off x="731520" y="502920"/>
-            <a:ext cx="10698480" cy="320040"/>
-          </a:xfrm>
-          <a:prstGeom prst="rect">
-            <a:avLst/>
-          </a:prstGeom>
-          <a:noFill/>
-        </p:spPr>
-        <p:txBody>
-          <a:bodyPr wrap="square">
-            <a:spAutoFit/>
-          </a:bodyPr>
-          <a:lstStyle/>
-          <a:p>
-            <a:pPr>
-              <a:defRPr sz="1050" b="1">
-                <a:solidFill>
-                  <a:srgbClr val="B85C3E"/>
-                </a:solidFill>
-                <a:latin typeface="Avenir Next"/>
-              </a:defRPr>
-            </a:pPr>
-            <a:r>
-              <a:t>ZKD CONCIERGE  ·  AMERICAN EXPRESS  /  CODESTREET 2026</a:t>
-            </a:r>
-          </a:p>
-        </p:txBody>
-      </p:sp>
-      <p:sp>
-        <p:nvSpPr>
-          <p:cNvPr id="4" name="TextBox 3"/>
-          <p:cNvSpPr txBox="1"/>
-          <p:nvPr/>
-        </p:nvSpPr>
-        <p:spPr>
-          <a:xfrm>
-            <a:off x="731520" y="804672"/>
-            <a:ext cx="10058400" cy="777240"/>
-          </a:xfrm>
-          <a:prstGeom prst="rect">
-            <a:avLst/>
-          </a:prstGeom>
-          <a:noFill/>
-        </p:spPr>
-        <p:txBody>
-          <a:bodyPr wrap="square">
-            <a:spAutoFit/>
-          </a:bodyPr>
-          <a:lstStyle/>
-          <a:p>
-            <a:pPr>
-              <a:defRPr sz="2700" b="0">
-                <a:solidFill>
-                  <a:srgbClr val="1F1E1C"/>
-                </a:solidFill>
-                <a:latin typeface="Georgia"/>
-              </a:defRPr>
-            </a:pPr>
-            <a:r>
-              <a:t>The disruption lifecycle — prediction buys speed</a:t>
-            </a:r>
-          </a:p>
-        </p:txBody>
-      </p:sp>
-      <p:sp>
-        <p:nvSpPr>
-          <p:cNvPr id="5" name="Rectangle 4"/>
+          <a:bodyPr rtlCol="0" anchor="ctr" lIns="256032" rIns="256032" tIns="256032" bIns="256032" wrap="square"/>
+          <a:lstStyle/>
+          <a:p>
+            <a:pPr algn="ctr">
+              <a:spcAft>
+                <a:spcPts val="400"/>
+              </a:spcAft>
+              <a:defRPr sz="1100" b="1">
+                <a:solidFill>
+                  <a:srgbClr val="3D9CFF"/>
+                </a:solidFill>
+                <a:latin typeface="Calibri"/>
+              </a:defRPr>
+            </a:pPr>
+            <a:r>
+              <a:t>SCOPE</a:t>
+            </a:r>
+          </a:p>
+          <a:p>
+            <a:pPr>
+              <a:spcAft>
+                <a:spcPts val="1000"/>
+              </a:spcAft>
+              <a:defRPr sz="1650" b="1">
+                <a:solidFill>
+                  <a:srgbClr val="FFFFFF"/>
+                </a:solidFill>
+                <a:latin typeface="Cambria"/>
+              </a:defRPr>
+            </a:pPr>
+            <a:r>
+              <a:t>Multi-regulation scope (beyond DGCA)</a:t>
+            </a:r>
+          </a:p>
+          <a:p>
+            <a:pPr>
+              <a:lnSpc>
+                <a:spcPct val="120000"/>
+              </a:lnSpc>
+              <a:spcAft>
+                <a:spcPts val="800"/>
+              </a:spcAft>
+              <a:defRPr sz="1250">
+                <a:solidFill>
+                  <a:srgbClr val="A9BEDC"/>
+                </a:solidFill>
+                <a:latin typeface="Calibri"/>
+              </a:defRPr>
+            </a:pPr>
+            <a:r>
+              <a:t>—  Not just DGCA (Indian domestic aviation) — international frameworks too: EU261 and UK261.</a:t>
+            </a:r>
+          </a:p>
+          <a:p>
+            <a:pPr>
+              <a:lnSpc>
+                <a:spcPct val="120000"/>
+              </a:lnSpc>
+              <a:spcAft>
+                <a:spcPts val="800"/>
+              </a:spcAft>
+              <a:defRPr sz="1250">
+                <a:solidFill>
+                  <a:srgbClr val="A9BEDC"/>
+                </a:solidFill>
+                <a:latin typeface="Calibri"/>
+              </a:defRPr>
+            </a:pPr>
+            <a:r>
+              <a:t>—  Carrier-specific contract clauses and operating terms (e.g. British Airways vs Emirates entitlements).</a:t>
+            </a:r>
+          </a:p>
+          <a:p>
+            <a:pPr>
+              <a:lnSpc>
+                <a:spcPct val="120000"/>
+              </a:lnSpc>
+              <a:spcAft>
+                <a:spcPts val="800"/>
+              </a:spcAft>
+              <a:defRPr sz="1250">
+                <a:solidFill>
+                  <a:srgbClr val="A9BEDC"/>
+                </a:solidFill>
+                <a:latin typeface="Calibri"/>
+              </a:defRPr>
+            </a:pPr>
+            <a:r>
+              <a:t>—  Amex card product benefit terms (server/myca.ts): cabin ceilings, lounge access, per-transaction rules.</a:t>
+            </a:r>
+          </a:p>
+          <a:p>
+            <a:pPr>
+              <a:lnSpc>
+                <a:spcPct val="120000"/>
+              </a:lnSpc>
+              <a:spcAft>
+                <a:spcPts val="800"/>
+              </a:spcAft>
+              <a:defRPr sz="1250">
+                <a:solidFill>
+                  <a:srgbClr val="A9BEDC"/>
+                </a:solidFill>
+                <a:latin typeface="Calibri"/>
+              </a:defRPr>
+            </a:pPr>
+            <a:r>
+              <a:t>—  Jurisdiction routing automatically detects which regulatory framework governs the PNR.</a:t>
+            </a:r>
+          </a:p>
+        </p:txBody>
+      </p:sp>
+      <p:sp>
+        <p:nvSpPr>
+          <p:cNvPr id="7" name="Rounded Rectangle 6"/>
           <p:cNvSpPr/>
           <p:nvPr/>
         </p:nvSpPr>
         <p:spPr>
           <a:xfrm>
-            <a:off x="731520" y="1481328"/>
-            <a:ext cx="502920" cy="44450"/>
-          </a:xfrm>
-          <a:prstGeom prst="rect">
-            <a:avLst/>
+            <a:off x="6080760" y="1417320"/>
+            <a:ext cx="5650992" cy="4709160"/>
+          </a:xfrm>
+          <a:prstGeom prst="roundRect">
+            <a:avLst>
+              <a:gd name="adj" fmla="val 6000"/>
+            </a:avLst>
           </a:prstGeom>
           <a:solidFill>
-            <a:srgbClr val="D97757"/>
+            <a:srgbClr val="132C52"/>
           </a:solidFill>
           <a:ln>
             <a:noFill/>
@@ -5432,23 +6520,154 @@
           </a:fontRef>
         </p:style>
         <p:txBody>
-          <a:bodyPr rtlCol="0" anchor="ctr"/>
-          <a:lstStyle/>
-          <a:p>
-            <a:pPr algn="ctr"/>
-          </a:p>
-        </p:txBody>
-      </p:sp>
-      <p:sp>
-        <p:nvSpPr>
-          <p:cNvPr id="6" name="TextBox 5"/>
+          <a:bodyPr rtlCol="0" anchor="ctr" lIns="256032" rIns="256032" tIns="256032" bIns="256032" wrap="square"/>
+          <a:lstStyle/>
+          <a:p>
+            <a:pPr algn="ctr">
+              <a:spcAft>
+                <a:spcPts val="400"/>
+              </a:spcAft>
+              <a:defRPr sz="1100" b="1">
+                <a:solidFill>
+                  <a:srgbClr val="FFB020"/>
+                </a:solidFill>
+                <a:latin typeface="Calibri"/>
+              </a:defRPr>
+            </a:pPr>
+            <a:r>
+              <a:t>ENGINE</a:t>
+            </a:r>
+          </a:p>
+          <a:p>
+            <a:pPr>
+              <a:spcAft>
+                <a:spcPts val="1000"/>
+              </a:spcAft>
+              <a:defRPr sz="1650" b="1">
+                <a:solidFill>
+                  <a:srgbClr val="FFFFFF"/>
+                </a:solidFill>
+                <a:latin typeface="Cambria"/>
+              </a:defRPr>
+            </a:pPr>
+            <a:r>
+              <a:t>RAG &amp; default-deny policy engine</a:t>
+            </a:r>
+          </a:p>
+          <a:p>
+            <a:pPr>
+              <a:lnSpc>
+                <a:spcPct val="120000"/>
+              </a:lnSpc>
+              <a:spcAft>
+                <a:spcPts val="800"/>
+              </a:spcAft>
+              <a:defRPr sz="1250">
+                <a:solidFill>
+                  <a:srgbClr val="A9BEDC"/>
+                </a:solidFill>
+                <a:latin typeface="Calibri"/>
+              </a:defRPr>
+            </a:pPr>
+            <a:r>
+              <a:t>—  RAG ingestion automatically vectorizes and indexes aviation regulations, fare rules, and card terms.</a:t>
+            </a:r>
+          </a:p>
+          <a:p>
+            <a:pPr>
+              <a:lnSpc>
+                <a:spcPct val="120000"/>
+              </a:lnSpc>
+              <a:spcAft>
+                <a:spcPts val="800"/>
+              </a:spcAft>
+              <a:defRPr sz="1250">
+                <a:solidFill>
+                  <a:srgbClr val="A9BEDC"/>
+                </a:solidFill>
+                <a:latin typeface="Calibri"/>
+              </a:defRPr>
+            </a:pPr>
+            <a:r>
+              <a:t>—  Context retrieval dynamically queries relevant clauses when a disruption occurs for a given PNR.</a:t>
+            </a:r>
+          </a:p>
+          <a:p>
+            <a:pPr>
+              <a:lnSpc>
+                <a:spcPct val="120000"/>
+              </a:lnSpc>
+              <a:spcAft>
+                <a:spcPts val="800"/>
+              </a:spcAft>
+              <a:defRPr sz="1250">
+                <a:solidFill>
+                  <a:srgbClr val="A9BEDC"/>
+                </a:solidFill>
+                <a:latin typeface="Calibri"/>
+              </a:defRPr>
+            </a:pPr>
+            <a:r>
+              <a:t>—  OPA policy gate (server/policy/): default-deny rule engine, evaluated in-process in under 1ms.</a:t>
+            </a:r>
+          </a:p>
+          <a:p>
+            <a:pPr>
+              <a:lnSpc>
+                <a:spcPct val="120000"/>
+              </a:lnSpc>
+              <a:spcAft>
+                <a:spcPts val="800"/>
+              </a:spcAft>
+              <a:defRPr sz="1250">
+                <a:solidFill>
+                  <a:srgbClr val="A9BEDC"/>
+                </a:solidFill>
+                <a:latin typeface="Calibri"/>
+              </a:defRPr>
+            </a:pPr>
+            <a:r>
+              <a:t>—  Incomplete policy inputs trigger default-deny — nothing executes without an explicit allow.</a:t>
+            </a:r>
+          </a:p>
+        </p:txBody>
+      </p:sp>
+    </p:spTree>
+  </p:cSld>
+  <p:clrMapOvr>
+    <a:masterClrMapping/>
+  </p:clrMapOvr>
+</p:sld>
+</file>
+
+<file path=ppt/slides/slide7.xml><?xml version="1.0" encoding="utf-8"?>
+<p:sld xmlns:a="http://schemas.openxmlformats.org/drawingml/2006/main" xmlns:p="http://schemas.openxmlformats.org/presentationml/2006/main" xmlns:r="http://schemas.openxmlformats.org/officeDocument/2006/relationships">
+  <p:cSld>
+    <p:bg>
+      <p:bgPr>
+        <a:solidFill>
+          <a:srgbClr val="0A1B3D"/>
+        </a:solidFill>
+        <a:effectLst/>
+      </p:bgPr>
+    </p:bg>
+    <p:spTree>
+      <p:nvGrpSpPr>
+        <p:cNvPr id="1" name=""/>
+        <p:cNvGrpSpPr/>
+        <p:nvPr/>
+      </p:nvGrpSpPr>
+      <p:grpSpPr/>
+      <p:sp>
+        <p:nvSpPr>
+          <p:cNvPr id="2" name="TextBox 1"/>
           <p:cNvSpPr txBox="1"/>
           <p:nvPr/>
         </p:nvSpPr>
         <p:spPr>
           <a:xfrm>
-            <a:off x="11430000" y="6446520"/>
-            <a:ext cx="548640" cy="320040"/>
+            <a:off x="457200" y="146304"/>
+            <a:ext cx="8229600" cy="256032"/>
           </a:xfrm>
           <a:prstGeom prst="rect">
             <a:avLst/>
@@ -5456,35 +6675,143 @@
           <a:noFill/>
         </p:spPr>
         <p:txBody>
+          <a:bodyPr wrap="square">
+            <a:spAutoFit/>
+          </a:bodyPr>
+          <a:lstStyle/>
+          <a:p>
+            <a:pPr>
+              <a:defRPr sz="1150" b="1">
+                <a:solidFill>
+                  <a:srgbClr val="3D9CFF"/>
+                </a:solidFill>
+                <a:latin typeface="Calibri"/>
+              </a:defRPr>
+            </a:pPr>
+            <a:r>
+              <a:t>06 · ARCHITECTURE</a:t>
+            </a:r>
+          </a:p>
+        </p:txBody>
+      </p:sp>
+      <p:sp>
+        <p:nvSpPr>
+          <p:cNvPr id="3" name="TextBox 2"/>
+          <p:cNvSpPr txBox="1"/>
+          <p:nvPr/>
+        </p:nvSpPr>
+        <p:spPr>
+          <a:xfrm>
+            <a:off x="11155680" y="146304"/>
+            <a:ext cx="548640" cy="256032"/>
+          </a:xfrm>
+          <a:prstGeom prst="rect">
+            <a:avLst/>
+          </a:prstGeom>
+          <a:noFill/>
+        </p:spPr>
+        <p:txBody>
           <a:bodyPr wrap="none">
             <a:spAutoFit/>
           </a:bodyPr>
           <a:lstStyle/>
           <a:p>
             <a:pPr algn="r">
-              <a:defRPr sz="1000">
-                <a:solidFill>
-                  <a:srgbClr val="5E5A52"/>
-                </a:solidFill>
-                <a:latin typeface="Avenir Next"/>
-              </a:defRPr>
-            </a:pPr>
-            <a:r>
-              <a:t>05</a:t>
-            </a:r>
-          </a:p>
-        </p:txBody>
-      </p:sp>
-      <p:sp>
-        <p:nvSpPr>
-          <p:cNvPr id="7" name="Rounded Rectangle 6"/>
+              <a:defRPr sz="1150">
+                <a:solidFill>
+                  <a:srgbClr val="7B94BA"/>
+                </a:solidFill>
+                <a:latin typeface="Calibri"/>
+              </a:defRPr>
+            </a:pPr>
+            <a:r>
+              <a:t>7</a:t>
+            </a:r>
+          </a:p>
+        </p:txBody>
+      </p:sp>
+      <p:sp>
+        <p:nvSpPr>
+          <p:cNvPr id="4" name="TextBox 3"/>
+          <p:cNvSpPr txBox="1"/>
+          <p:nvPr/>
+        </p:nvSpPr>
+        <p:spPr>
+          <a:xfrm>
+            <a:off x="457200" y="365760"/>
+            <a:ext cx="10881360" cy="640080"/>
+          </a:xfrm>
+          <a:prstGeom prst="rect">
+            <a:avLst/>
+          </a:prstGeom>
+          <a:noFill/>
+        </p:spPr>
+        <p:txBody>
+          <a:bodyPr wrap="square">
+            <a:spAutoFit/>
+          </a:bodyPr>
+          <a:lstStyle/>
+          <a:p>
+            <a:pPr>
+              <a:defRPr sz="2500" b="1">
+                <a:solidFill>
+                  <a:srgbClr val="FFFFFF"/>
+                </a:solidFill>
+                <a:latin typeface="Cambria"/>
+              </a:defRPr>
+            </a:pPr>
+            <a:r>
+              <a:t>System architecture &amp; multi-device sync</a:t>
+            </a:r>
+          </a:p>
+        </p:txBody>
+      </p:sp>
+      <p:sp>
+        <p:nvSpPr>
+          <p:cNvPr id="5" name="TextBox 4"/>
+          <p:cNvSpPr txBox="1"/>
+          <p:nvPr/>
+        </p:nvSpPr>
+        <p:spPr>
+          <a:xfrm>
+            <a:off x="457200" y="932688"/>
+            <a:ext cx="10881360" cy="365760"/>
+          </a:xfrm>
+          <a:prstGeom prst="rect">
+            <a:avLst/>
+          </a:prstGeom>
+          <a:noFill/>
+        </p:spPr>
+        <p:txBody>
+          <a:bodyPr wrap="square">
+            <a:spAutoFit/>
+          </a:bodyPr>
+          <a:lstStyle/>
+          <a:p>
+            <a:pPr>
+              <a:defRPr sz="1300">
+                <a:solidFill>
+                  <a:srgbClr val="A9BEDC"/>
+                </a:solidFill>
+                <a:latin typeface="Calibri"/>
+              </a:defRPr>
+            </a:pPr>
+            <a:r>
+              <a:t>A server-authoritative engine, and clients that are honest about holding no state.</a:t>
+            </a:r>
+          </a:p>
+        </p:txBody>
+      </p:sp>
+      <p:sp>
+        <p:nvSpPr>
+          <p:cNvPr id="6" name="Rounded Rectangle 5"/>
           <p:cNvSpPr/>
           <p:nvPr/>
         </p:nvSpPr>
         <p:spPr>
           <a:xfrm>
-            <a:off x="731520" y="1874519"/>
-            <a:ext cx="2496312" cy="3977639"/>
+            <a:off x="457200" y="1417320"/>
+            <a:ext cx="5394960" cy="4709160"/>
           </a:xfrm>
           <a:prstGeom prst="roundRect">
             <a:avLst>
@@ -5492,12 +6819,10 @@
             </a:avLst>
           </a:prstGeom>
           <a:solidFill>
-            <a:srgbClr val="FFFFFF"/>
+            <a:srgbClr val="132C52"/>
           </a:solidFill>
-          <a:ln w="9525">
-            <a:solidFill>
-              <a:srgbClr val="E4E0D6"/>
-            </a:solidFill>
+          <a:ln>
+            <a:noFill/>
           </a:ln>
           <a:effectLst/>
         </p:spPr>
@@ -5516,7 +6841,7 @@
           </a:fontRef>
         </p:style>
         <p:txBody>
-          <a:bodyPr rtlCol="0" anchor="ctr" lIns="201168" rIns="201168" tIns="201168" bIns="201168" wrap="square"/>
+          <a:bodyPr rtlCol="0" anchor="ctr" lIns="256032" rIns="256032" tIns="256032" bIns="256032" wrap="square"/>
           <a:lstStyle/>
           <a:p>
             <a:pPr algn="ctr">
@@ -5525,45 +6850,29 @@
               </a:spcAft>
               <a:defRPr sz="1100" b="1">
                 <a:solidFill>
-                  <a:srgbClr val="5E5A52"/>
-                </a:solidFill>
-                <a:latin typeface="Avenir Next"/>
-              </a:defRPr>
-            </a:pPr>
-            <a:r>
-              <a:t>01</a:t>
-            </a:r>
-          </a:p>
-          <a:p>
-            <a:pPr>
-              <a:spcAft>
-                <a:spcPts val="200"/>
-              </a:spcAft>
-              <a:defRPr sz="1600" b="1">
-                <a:solidFill>
-                  <a:srgbClr val="1F1E1C"/>
-                </a:solidFill>
-                <a:latin typeface="Georgia"/>
-              </a:defRPr>
-            </a:pPr>
-            <a:r>
-              <a:t>Predict</a:t>
-            </a:r>
-          </a:p>
-          <a:p>
-            <a:pPr>
-              <a:spcAft>
-                <a:spcPts val="1400"/>
-              </a:spcAft>
-              <a:defRPr sz="1100" b="1">
-                <a:solidFill>
-                  <a:srgbClr val="B85C3E"/>
-                </a:solidFill>
-                <a:latin typeface="Avenir Next"/>
-              </a:defRPr>
-            </a:pPr>
-            <a:r>
-              <a:t>~42s head start</a:t>
+                  <a:srgbClr val="3D9CFF"/>
+                </a:solidFill>
+                <a:latin typeface="Calibri"/>
+              </a:defRPr>
+            </a:pPr>
+            <a:r>
+              <a:t>ENGINE</a:t>
+            </a:r>
+          </a:p>
+          <a:p>
+            <a:pPr>
+              <a:spcAft>
+                <a:spcPts val="1000"/>
+              </a:spcAft>
+              <a:defRPr sz="1650" b="1">
+                <a:solidFill>
+                  <a:srgbClr val="FFFFFF"/>
+                </a:solidFill>
+                <a:latin typeface="Cambria"/>
+              </a:defRPr>
+            </a:pPr>
+            <a:r>
+              <a:t>Server-authoritative simulation engine</a:t>
             </a:r>
           </a:p>
           <a:p>
@@ -5571,35 +6880,97 @@
               <a:lnSpc>
                 <a:spcPct val="120000"/>
               </a:lnSpc>
-              <a:defRPr sz="1150">
-                <a:solidFill>
-                  <a:srgbClr val="5E5A52"/>
-                </a:solidFill>
-                <a:latin typeface="Avenir Next"/>
-              </a:defRPr>
-            </a:pPr>
-            <a:r>
-              <a:t>Model forecasts cancellation probability before the airline files it. Alt flights and hotels are pre-cached warm.</a:t>
-            </a:r>
-          </a:p>
-        </p:txBody>
-      </p:sp>
-      <p:sp>
-        <p:nvSpPr>
-          <p:cNvPr id="8" name="Rectangle 7"/>
+              <a:spcAft>
+                <a:spcPts val="800"/>
+              </a:spcAft>
+              <a:defRPr sz="1250">
+                <a:solidFill>
+                  <a:srgbClr val="A9BEDC"/>
+                </a:solidFill>
+                <a:latin typeface="Calibri"/>
+              </a:defRPr>
+            </a:pPr>
+            <a:r>
+              <a:t>—  Module-level simulation engine (server/engine/simulation.ts) runs the whole lifecycle.</a:t>
+            </a:r>
+          </a:p>
+          <a:p>
+            <a:pPr>
+              <a:lnSpc>
+                <a:spcPct val="120000"/>
+              </a:lnSpc>
+              <a:spcAft>
+                <a:spcPts val="800"/>
+              </a:spcAft>
+              <a:defRPr sz="1250">
+                <a:solidFill>
+                  <a:srgbClr val="A9BEDC"/>
+                </a:solidFill>
+                <a:latin typeface="Calibri"/>
+              </a:defRPr>
+            </a:pPr>
+            <a:r>
+              <a:t>—  Real setTimeout/setInterval chains resolve on schedule whether devices watch or not.</a:t>
+            </a:r>
+          </a:p>
+          <a:p>
+            <a:pPr>
+              <a:lnSpc>
+                <a:spcPct val="120000"/>
+              </a:lnSpc>
+              <a:spcAft>
+                <a:spcPts val="800"/>
+              </a:spcAft>
+              <a:defRPr sz="1250">
+                <a:solidFill>
+                  <a:srgbClr val="A9BEDC"/>
+                </a:solidFill>
+                <a:latin typeface="Calibri"/>
+              </a:defRPr>
+            </a:pPr>
+            <a:r>
+              <a:t>—  Single source of truth: the shared state ledger (server/decisionLedger.ts).</a:t>
+            </a:r>
+          </a:p>
+          <a:p>
+            <a:pPr>
+              <a:lnSpc>
+                <a:spcPct val="120000"/>
+              </a:lnSpc>
+              <a:spcAft>
+                <a:spcPts val="800"/>
+              </a:spcAft>
+              <a:defRPr sz="1250">
+                <a:solidFill>
+                  <a:srgbClr val="A9BEDC"/>
+                </a:solidFill>
+                <a:latin typeface="Calibri"/>
+              </a:defRPr>
+            </a:pPr>
+            <a:r>
+              <a:t>—  Zero GPU on the critical path — 95% of the time is network wait on supplier APIs.</a:t>
+            </a:r>
+          </a:p>
+        </p:txBody>
+      </p:sp>
+      <p:sp>
+        <p:nvSpPr>
+          <p:cNvPr id="7" name="Rounded Rectangle 6"/>
           <p:cNvSpPr/>
           <p:nvPr/>
         </p:nvSpPr>
         <p:spPr>
           <a:xfrm>
-            <a:off x="3246120" y="3794760"/>
-            <a:ext cx="38100" cy="128016"/>
-          </a:xfrm>
-          <a:prstGeom prst="rect">
-            <a:avLst/>
+            <a:off x="6080760" y="1417320"/>
+            <a:ext cx="5650992" cy="4709160"/>
+          </a:xfrm>
+          <a:prstGeom prst="roundRect">
+            <a:avLst>
+              <a:gd name="adj" fmla="val 6000"/>
+            </a:avLst>
           </a:prstGeom>
           <a:solidFill>
-            <a:srgbClr val="E4E0D6"/>
+            <a:srgbClr val="132C52"/>
           </a:solidFill>
           <a:ln>
             <a:noFill/>
@@ -5621,55 +6992,7 @@
           </a:fontRef>
         </p:style>
         <p:txBody>
-          <a:bodyPr rtlCol="0" anchor="ctr"/>
-          <a:lstStyle/>
-          <a:p>
-            <a:pPr algn="ctr"/>
-          </a:p>
-        </p:txBody>
-      </p:sp>
-      <p:sp>
-        <p:nvSpPr>
-          <p:cNvPr id="9" name="Rounded Rectangle 8"/>
-          <p:cNvSpPr/>
-          <p:nvPr/>
-        </p:nvSpPr>
-        <p:spPr>
-          <a:xfrm>
-            <a:off x="3410712" y="1874519"/>
-            <a:ext cx="2496312" cy="3977639"/>
-          </a:xfrm>
-          <a:prstGeom prst="roundRect">
-            <a:avLst>
-              <a:gd name="adj" fmla="val 6000"/>
-            </a:avLst>
-          </a:prstGeom>
-          <a:solidFill>
-            <a:srgbClr val="FFFFFF"/>
-          </a:solidFill>
-          <a:ln w="9525">
-            <a:solidFill>
-              <a:srgbClr val="E4E0D6"/>
-            </a:solidFill>
-          </a:ln>
-          <a:effectLst/>
-        </p:spPr>
-        <p:style>
-          <a:lnRef idx="1">
-            <a:schemeClr val="accent1"/>
-          </a:lnRef>
-          <a:fillRef idx="3">
-            <a:schemeClr val="accent1"/>
-          </a:fillRef>
-          <a:effectRef idx="2">
-            <a:schemeClr val="accent1"/>
-          </a:effectRef>
-          <a:fontRef idx="minor">
-            <a:schemeClr val="lt1"/>
-          </a:fontRef>
-        </p:style>
-        <p:txBody>
-          <a:bodyPr rtlCol="0" anchor="ctr" lIns="201168" rIns="201168" tIns="201168" bIns="201168" wrap="square"/>
+          <a:bodyPr rtlCol="0" anchor="ctr" lIns="256032" rIns="256032" tIns="256032" bIns="256032" wrap="square"/>
           <a:lstStyle/>
           <a:p>
             <a:pPr algn="ctr">
@@ -5678,45 +7001,29 @@
               </a:spcAft>
               <a:defRPr sz="1100" b="1">
                 <a:solidFill>
-                  <a:srgbClr val="5E5A52"/>
-                </a:solidFill>
-                <a:latin typeface="Avenir Next"/>
-              </a:defRPr>
-            </a:pPr>
-            <a:r>
-              <a:t>02</a:t>
-            </a:r>
-          </a:p>
-          <a:p>
-            <a:pPr>
-              <a:spcAft>
-                <a:spcPts val="200"/>
-              </a:spcAft>
-              <a:defRPr sz="1600" b="1">
-                <a:solidFill>
-                  <a:srgbClr val="1F1E1C"/>
-                </a:solidFill>
-                <a:latin typeface="Georgia"/>
-              </a:defRPr>
-            </a:pPr>
-            <a:r>
-              <a:t>Pre-cache</a:t>
-            </a:r>
-          </a:p>
-          <a:p>
-            <a:pPr>
-              <a:spcAft>
-                <a:spcPts val="1400"/>
-              </a:spcAft>
-              <a:defRPr sz="1100" b="1">
-                <a:solidFill>
-                  <a:srgbClr val="B85C3E"/>
-                </a:solidFill>
-                <a:latin typeface="Avenir Next"/>
-              </a:defRPr>
-            </a:pPr>
-            <a:r>
-              <a:t>Zero spend, no hold</a:t>
+                  <a:srgbClr val="9B8CFF"/>
+                </a:solidFill>
+                <a:latin typeface="Calibri"/>
+              </a:defRPr>
+            </a:pPr>
+            <a:r>
+              <a:t>CLIENTS</a:t>
+            </a:r>
+          </a:p>
+          <a:p>
+            <a:pPr>
+              <a:spcAft>
+                <a:spcPts val="1000"/>
+              </a:spcAft>
+              <a:defRPr sz="1650" b="1">
+                <a:solidFill>
+                  <a:srgbClr val="FFFFFF"/>
+                </a:solidFill>
+                <a:latin typeface="Cambria"/>
+              </a:defRPr>
+            </a:pPr>
+            <a:r>
+              <a:t>Multi-device sync &amp; identity switchers</a:t>
             </a:r>
           </a:p>
           <a:p>
@@ -5724,152 +7031,18 @@
               <a:lnSpc>
                 <a:spcPct val="120000"/>
               </a:lnSpc>
-              <a:defRPr sz="1150">
-                <a:solidFill>
-                  <a:srgbClr val="5E5A52"/>
-                </a:solidFill>
-                <a:latin typeface="Avenir Next"/>
-              </a:defRPr>
-            </a:pPr>
-            <a:r>
-              <a:t>Options are priced and held warm in memory. No booking, no spend, no financial liability.</a:t>
-            </a:r>
-          </a:p>
-        </p:txBody>
-      </p:sp>
-      <p:sp>
-        <p:nvSpPr>
-          <p:cNvPr id="10" name="Rectangle 9"/>
-          <p:cNvSpPr/>
-          <p:nvPr/>
-        </p:nvSpPr>
-        <p:spPr>
-          <a:xfrm>
-            <a:off x="5925312" y="3794760"/>
-            <a:ext cx="38100" cy="128016"/>
-          </a:xfrm>
-          <a:prstGeom prst="rect">
-            <a:avLst/>
-          </a:prstGeom>
-          <a:solidFill>
-            <a:srgbClr val="E4E0D6"/>
-          </a:solidFill>
-          <a:ln>
-            <a:noFill/>
-          </a:ln>
-          <a:effectLst/>
-        </p:spPr>
-        <p:style>
-          <a:lnRef idx="1">
-            <a:schemeClr val="accent1"/>
-          </a:lnRef>
-          <a:fillRef idx="3">
-            <a:schemeClr val="accent1"/>
-          </a:fillRef>
-          <a:effectRef idx="2">
-            <a:schemeClr val="accent1"/>
-          </a:effectRef>
-          <a:fontRef idx="minor">
-            <a:schemeClr val="lt1"/>
-          </a:fontRef>
-        </p:style>
-        <p:txBody>
-          <a:bodyPr rtlCol="0" anchor="ctr"/>
-          <a:lstStyle/>
-          <a:p>
-            <a:pPr algn="ctr"/>
-          </a:p>
-        </p:txBody>
-      </p:sp>
-      <p:sp>
-        <p:nvSpPr>
-          <p:cNvPr id="11" name="Rounded Rectangle 10"/>
-          <p:cNvSpPr/>
-          <p:nvPr/>
-        </p:nvSpPr>
-        <p:spPr>
-          <a:xfrm>
-            <a:off x="6089904" y="1874519"/>
-            <a:ext cx="2496312" cy="3977639"/>
-          </a:xfrm>
-          <a:prstGeom prst="roundRect">
-            <a:avLst>
-              <a:gd name="adj" fmla="val 6000"/>
-            </a:avLst>
-          </a:prstGeom>
-          <a:solidFill>
-            <a:srgbClr val="FFFFFF"/>
-          </a:solidFill>
-          <a:ln w="9525">
-            <a:solidFill>
-              <a:srgbClr val="E4E0D6"/>
-            </a:solidFill>
-          </a:ln>
-          <a:effectLst/>
-        </p:spPr>
-        <p:style>
-          <a:lnRef idx="1">
-            <a:schemeClr val="accent1"/>
-          </a:lnRef>
-          <a:fillRef idx="3">
-            <a:schemeClr val="accent1"/>
-          </a:fillRef>
-          <a:effectRef idx="2">
-            <a:schemeClr val="accent1"/>
-          </a:effectRef>
-          <a:fontRef idx="minor">
-            <a:schemeClr val="lt1"/>
-          </a:fontRef>
-        </p:style>
-        <p:txBody>
-          <a:bodyPr rtlCol="0" anchor="ctr" lIns="201168" rIns="201168" tIns="201168" bIns="201168" wrap="square"/>
-          <a:lstStyle/>
-          <a:p>
-            <a:pPr algn="ctr">
-              <a:spcAft>
-                <a:spcPts val="400"/>
-              </a:spcAft>
-              <a:defRPr sz="1100" b="1">
-                <a:solidFill>
-                  <a:srgbClr val="5E5A52"/>
-                </a:solidFill>
-                <a:latin typeface="Avenir Next"/>
-              </a:defRPr>
-            </a:pPr>
-            <a:r>
-              <a:t>03</a:t>
-            </a:r>
-          </a:p>
-          <a:p>
-            <a:pPr>
-              <a:spcAft>
-                <a:spcPts val="200"/>
-              </a:spcAft>
-              <a:defRPr sz="1600" b="1">
-                <a:solidFill>
-                  <a:srgbClr val="1F1E1C"/>
-                </a:solidFill>
-                <a:latin typeface="Georgia"/>
-              </a:defRPr>
-            </a:pPr>
-            <a:r>
-              <a:t>Consent gate</a:t>
-            </a:r>
-          </a:p>
-          <a:p>
-            <a:pPr>
-              <a:spcAft>
-                <a:spcPts val="1400"/>
-              </a:spcAft>
-              <a:defRPr sz="1100" b="1">
-                <a:solidFill>
-                  <a:srgbClr val="B85C3E"/>
-                </a:solidFill>
-                <a:latin typeface="Avenir Next"/>
-              </a:defRPr>
-            </a:pPr>
-            <a:r>
-              <a:t>Member control</a:t>
+              <a:spcAft>
+                <a:spcPts val="800"/>
+              </a:spcAft>
+              <a:defRPr sz="1250">
+                <a:solidFill>
+                  <a:srgbClr val="A9BEDC"/>
+                </a:solidFill>
+                <a:latin typeface="Calibri"/>
+              </a:defRPr>
+            </a:pPr>
+            <a:r>
+              <a:t>—  Stateless clients: the Next.js web app (zkd-app/) and the Expo React Native app (zkd-android/).</a:t>
             </a:r>
           </a:p>
           <a:p>
@@ -5877,152 +7050,18 @@
               <a:lnSpc>
                 <a:spcPct val="120000"/>
               </a:lnSpc>
-              <a:defRPr sz="1150">
-                <a:solidFill>
-                  <a:srgbClr val="5E5A52"/>
-                </a:solidFill>
-                <a:latin typeface="Avenir Next"/>
-              </a:defRPr>
-            </a:pPr>
-            <a:r>
-              <a:t>A high-risk threshold triggers pre-auth. The member chooses, or approves autopilot in advance.</a:t>
-            </a:r>
-          </a:p>
-        </p:txBody>
-      </p:sp>
-      <p:sp>
-        <p:nvSpPr>
-          <p:cNvPr id="12" name="Rectangle 11"/>
-          <p:cNvSpPr/>
-          <p:nvPr/>
-        </p:nvSpPr>
-        <p:spPr>
-          <a:xfrm>
-            <a:off x="8604504" y="3794760"/>
-            <a:ext cx="38100" cy="128016"/>
-          </a:xfrm>
-          <a:prstGeom prst="rect">
-            <a:avLst/>
-          </a:prstGeom>
-          <a:solidFill>
-            <a:srgbClr val="E4E0D6"/>
-          </a:solidFill>
-          <a:ln>
-            <a:noFill/>
-          </a:ln>
-          <a:effectLst/>
-        </p:spPr>
-        <p:style>
-          <a:lnRef idx="1">
-            <a:schemeClr val="accent1"/>
-          </a:lnRef>
-          <a:fillRef idx="3">
-            <a:schemeClr val="accent1"/>
-          </a:fillRef>
-          <a:effectRef idx="2">
-            <a:schemeClr val="accent1"/>
-          </a:effectRef>
-          <a:fontRef idx="minor">
-            <a:schemeClr val="lt1"/>
-          </a:fontRef>
-        </p:style>
-        <p:txBody>
-          <a:bodyPr rtlCol="0" anchor="ctr"/>
-          <a:lstStyle/>
-          <a:p>
-            <a:pPr algn="ctr"/>
-          </a:p>
-        </p:txBody>
-      </p:sp>
-      <p:sp>
-        <p:nvSpPr>
-          <p:cNvPr id="13" name="Rounded Rectangle 12"/>
-          <p:cNvSpPr/>
-          <p:nvPr/>
-        </p:nvSpPr>
-        <p:spPr>
-          <a:xfrm>
-            <a:off x="8769096" y="1874519"/>
-            <a:ext cx="2496312" cy="3977639"/>
-          </a:xfrm>
-          <a:prstGeom prst="roundRect">
-            <a:avLst>
-              <a:gd name="adj" fmla="val 6000"/>
-            </a:avLst>
-          </a:prstGeom>
-          <a:solidFill>
-            <a:srgbClr val="FFFFFF"/>
-          </a:solidFill>
-          <a:ln w="9525">
-            <a:solidFill>
-              <a:srgbClr val="E4E0D6"/>
-            </a:solidFill>
-          </a:ln>
-          <a:effectLst/>
-        </p:spPr>
-        <p:style>
-          <a:lnRef idx="1">
-            <a:schemeClr val="accent1"/>
-          </a:lnRef>
-          <a:fillRef idx="3">
-            <a:schemeClr val="accent1"/>
-          </a:fillRef>
-          <a:effectRef idx="2">
-            <a:schemeClr val="accent1"/>
-          </a:effectRef>
-          <a:fontRef idx="minor">
-            <a:schemeClr val="lt1"/>
-          </a:fontRef>
-        </p:style>
-        <p:txBody>
-          <a:bodyPr rtlCol="0" anchor="ctr" lIns="201168" rIns="201168" tIns="201168" bIns="201168" wrap="square"/>
-          <a:lstStyle/>
-          <a:p>
-            <a:pPr algn="ctr">
-              <a:spcAft>
-                <a:spcPts val="400"/>
-              </a:spcAft>
-              <a:defRPr sz="1100" b="1">
-                <a:solidFill>
-                  <a:srgbClr val="5E5A52"/>
-                </a:solidFill>
-                <a:latin typeface="Avenir Next"/>
-              </a:defRPr>
-            </a:pPr>
-            <a:r>
-              <a:t>04</a:t>
-            </a:r>
-          </a:p>
-          <a:p>
-            <a:pPr>
-              <a:spcAft>
-                <a:spcPts val="200"/>
-              </a:spcAft>
-              <a:defRPr sz="1600" b="1">
-                <a:solidFill>
-                  <a:srgbClr val="1F1E1C"/>
-                </a:solidFill>
-                <a:latin typeface="Georgia"/>
-              </a:defRPr>
-            </a:pPr>
-            <a:r>
-              <a:t>Act &amp; settle</a:t>
-            </a:r>
-          </a:p>
-          <a:p>
-            <a:pPr>
-              <a:spcAft>
-                <a:spcPts val="1400"/>
-              </a:spcAft>
-              <a:defRPr sz="1100" b="1">
-                <a:solidFill>
-                  <a:srgbClr val="B85C3E"/>
-                </a:solidFill>
-                <a:latin typeface="Avenir Next"/>
-              </a:defRPr>
-            </a:pPr>
-            <a:r>
-              <a:t>~11s recovery</a:t>
+              <a:spcAft>
+                <a:spcPts val="800"/>
+              </a:spcAft>
+              <a:defRPr sz="1250">
+                <a:solidFill>
+                  <a:srgbClr val="A9BEDC"/>
+                </a:solidFill>
+                <a:latin typeface="Calibri"/>
+              </a:defRPr>
+            </a:pPr>
+            <a:r>
+              <a:t>—  Clean polling architecture: GET /api/passengers/[id]/schedule.</a:t>
             </a:r>
           </a:p>
           <a:p>
@@ -6030,987 +7069,33 @@
               <a:lnSpc>
                 <a:spcPct val="120000"/>
               </a:lnSpc>
-              <a:defRPr sz="1150">
-                <a:solidFill>
-                  <a:srgbClr val="5E5A52"/>
-                </a:solidFill>
-                <a:latin typeface="Avenir Next"/>
-              </a:defRPr>
-            </a:pPr>
-            <a:r>
-              <a:t>The confirmed booking executes instantly. DGCA duty-of-care claims are filed automatically.</a:t>
-            </a:r>
-          </a:p>
-        </p:txBody>
-      </p:sp>
-    </p:spTree>
-  </p:cSld>
-  <p:clrMapOvr>
-    <a:masterClrMapping/>
-  </p:clrMapOvr>
-</p:sld>
-</file>
-
-<file path=ppt/slides/slide6.xml><?xml version="1.0" encoding="utf-8"?>
-<p:sld xmlns:a="http://schemas.openxmlformats.org/drawingml/2006/main" xmlns:p="http://schemas.openxmlformats.org/presentationml/2006/main" xmlns:r="http://schemas.openxmlformats.org/officeDocument/2006/relationships">
-  <p:cSld>
-    <p:spTree>
-      <p:nvGrpSpPr>
-        <p:cNvPr id="1" name=""/>
-        <p:cNvGrpSpPr/>
-        <p:nvPr/>
-      </p:nvGrpSpPr>
-      <p:grpSpPr/>
-      <p:sp>
-        <p:nvSpPr>
-          <p:cNvPr id="2" name="Rectangle 1"/>
-          <p:cNvSpPr/>
-          <p:nvPr/>
-        </p:nvSpPr>
-        <p:spPr>
-          <a:xfrm>
-            <a:off x="0" y="0"/>
-            <a:ext cx="12191695" cy="6858000"/>
-          </a:xfrm>
-          <a:prstGeom prst="rect">
-            <a:avLst/>
-          </a:prstGeom>
-          <a:solidFill>
-            <a:srgbClr val="FAF9F5"/>
-          </a:solidFill>
-          <a:ln>
-            <a:noFill/>
-          </a:ln>
-          <a:effectLst/>
-        </p:spPr>
-        <p:style>
-          <a:lnRef idx="1">
-            <a:schemeClr val="accent1"/>
-          </a:lnRef>
-          <a:fillRef idx="3">
-            <a:schemeClr val="accent1"/>
-          </a:fillRef>
-          <a:effectRef idx="2">
-            <a:schemeClr val="accent1"/>
-          </a:effectRef>
-          <a:fontRef idx="minor">
-            <a:schemeClr val="lt1"/>
-          </a:fontRef>
-        </p:style>
-        <p:txBody>
-          <a:bodyPr rtlCol="0" anchor="ctr"/>
-          <a:lstStyle/>
-          <a:p>
-            <a:pPr algn="ctr"/>
-          </a:p>
-        </p:txBody>
-      </p:sp>
-      <p:sp>
-        <p:nvSpPr>
-          <p:cNvPr id="3" name="TextBox 2"/>
-          <p:cNvSpPr txBox="1"/>
-          <p:nvPr/>
-        </p:nvSpPr>
-        <p:spPr>
-          <a:xfrm>
-            <a:off x="731520" y="502920"/>
-            <a:ext cx="10698480" cy="320040"/>
-          </a:xfrm>
-          <a:prstGeom prst="rect">
-            <a:avLst/>
-          </a:prstGeom>
-          <a:noFill/>
-        </p:spPr>
-        <p:txBody>
-          <a:bodyPr wrap="square">
-            <a:spAutoFit/>
-          </a:bodyPr>
-          <a:lstStyle/>
-          <a:p>
-            <a:pPr>
-              <a:defRPr sz="1050" b="1">
-                <a:solidFill>
-                  <a:srgbClr val="B85C3E"/>
-                </a:solidFill>
-                <a:latin typeface="Avenir Next"/>
-              </a:defRPr>
-            </a:pPr>
-            <a:r>
-              <a:t>ZKD CONCIERGE  ·  AMERICAN EXPRESS  /  CODESTREET 2026</a:t>
-            </a:r>
-          </a:p>
-        </p:txBody>
-      </p:sp>
-      <p:sp>
-        <p:nvSpPr>
-          <p:cNvPr id="4" name="TextBox 3"/>
-          <p:cNvSpPr txBox="1"/>
-          <p:nvPr/>
-        </p:nvSpPr>
-        <p:spPr>
-          <a:xfrm>
-            <a:off x="731520" y="804672"/>
-            <a:ext cx="10058400" cy="777240"/>
-          </a:xfrm>
-          <a:prstGeom prst="rect">
-            <a:avLst/>
-          </a:prstGeom>
-          <a:noFill/>
-        </p:spPr>
-        <p:txBody>
-          <a:bodyPr wrap="square">
-            <a:spAutoFit/>
-          </a:bodyPr>
-          <a:lstStyle/>
-          <a:p>
-            <a:pPr>
-              <a:defRPr sz="2700" b="0">
-                <a:solidFill>
-                  <a:srgbClr val="1F1E1C"/>
-                </a:solidFill>
-                <a:latin typeface="Georgia"/>
-              </a:defRPr>
-            </a:pPr>
-            <a:r>
-              <a:t>Policy intelligence via RAG &amp; multi-regulation compliance</a:t>
-            </a:r>
-          </a:p>
-        </p:txBody>
-      </p:sp>
-      <p:sp>
-        <p:nvSpPr>
-          <p:cNvPr id="5" name="Rectangle 4"/>
-          <p:cNvSpPr/>
-          <p:nvPr/>
-        </p:nvSpPr>
-        <p:spPr>
-          <a:xfrm>
-            <a:off x="731520" y="1481328"/>
-            <a:ext cx="502920" cy="44450"/>
-          </a:xfrm>
-          <a:prstGeom prst="rect">
-            <a:avLst/>
-          </a:prstGeom>
-          <a:solidFill>
-            <a:srgbClr val="D97757"/>
-          </a:solidFill>
-          <a:ln>
-            <a:noFill/>
-          </a:ln>
-          <a:effectLst/>
-        </p:spPr>
-        <p:style>
-          <a:lnRef idx="1">
-            <a:schemeClr val="accent1"/>
-          </a:lnRef>
-          <a:fillRef idx="3">
-            <a:schemeClr val="accent1"/>
-          </a:fillRef>
-          <a:effectRef idx="2">
-            <a:schemeClr val="accent1"/>
-          </a:effectRef>
-          <a:fontRef idx="minor">
-            <a:schemeClr val="lt1"/>
-          </a:fontRef>
-        </p:style>
-        <p:txBody>
-          <a:bodyPr rtlCol="0" anchor="ctr"/>
-          <a:lstStyle/>
-          <a:p>
-            <a:pPr algn="ctr"/>
-          </a:p>
-        </p:txBody>
-      </p:sp>
-      <p:sp>
-        <p:nvSpPr>
-          <p:cNvPr id="6" name="TextBox 5"/>
-          <p:cNvSpPr txBox="1"/>
-          <p:nvPr/>
-        </p:nvSpPr>
-        <p:spPr>
-          <a:xfrm>
-            <a:off x="11430000" y="6446520"/>
-            <a:ext cx="548640" cy="320040"/>
-          </a:xfrm>
-          <a:prstGeom prst="rect">
-            <a:avLst/>
-          </a:prstGeom>
-          <a:noFill/>
-        </p:spPr>
-        <p:txBody>
-          <a:bodyPr wrap="none">
-            <a:spAutoFit/>
-          </a:bodyPr>
-          <a:lstStyle/>
-          <a:p>
-            <a:pPr algn="r">
-              <a:defRPr sz="1000">
-                <a:solidFill>
-                  <a:srgbClr val="5E5A52"/>
-                </a:solidFill>
-                <a:latin typeface="Avenir Next"/>
-              </a:defRPr>
-            </a:pPr>
-            <a:r>
-              <a:t>06</a:t>
-            </a:r>
-          </a:p>
-        </p:txBody>
-      </p:sp>
-      <p:sp>
-        <p:nvSpPr>
-          <p:cNvPr id="7" name="Rounded Rectangle 6"/>
-          <p:cNvSpPr/>
-          <p:nvPr/>
-        </p:nvSpPr>
-        <p:spPr>
-          <a:xfrm>
-            <a:off x="731520" y="1783080"/>
-            <a:ext cx="5120640" cy="4251960"/>
-          </a:xfrm>
-          <a:prstGeom prst="roundRect">
-            <a:avLst>
-              <a:gd name="adj" fmla="val 6000"/>
-            </a:avLst>
-          </a:prstGeom>
-          <a:solidFill>
-            <a:srgbClr val="FFFFFF"/>
-          </a:solidFill>
-          <a:ln w="9525">
-            <a:solidFill>
-              <a:srgbClr val="E4E0D6"/>
-            </a:solidFill>
-          </a:ln>
-          <a:effectLst/>
-        </p:spPr>
-        <p:style>
-          <a:lnRef idx="1">
-            <a:schemeClr val="accent1"/>
-          </a:lnRef>
-          <a:fillRef idx="3">
-            <a:schemeClr val="accent1"/>
-          </a:fillRef>
-          <a:effectRef idx="2">
-            <a:schemeClr val="accent1"/>
-          </a:effectRef>
-          <a:fontRef idx="minor">
-            <a:schemeClr val="lt1"/>
-          </a:fontRef>
-        </p:style>
-        <p:txBody>
-          <a:bodyPr rtlCol="0" anchor="ctr" lIns="256032" rIns="256032" tIns="256032" bIns="256032" wrap="square"/>
-          <a:lstStyle/>
-          <a:p>
-            <a:pPr algn="ctr">
-              <a:spcAft>
-                <a:spcPts val="1200"/>
-              </a:spcAft>
-              <a:defRPr sz="1600" b="1">
-                <a:solidFill>
-                  <a:srgbClr val="1F1E1C"/>
-                </a:solidFill>
-                <a:latin typeface="Georgia"/>
-              </a:defRPr>
-            </a:pPr>
-            <a:r>
-              <a:t>Multi-regulation scope (beyond DGCA)</a:t>
+              <a:spcAft>
+                <a:spcPts val="800"/>
+              </a:spcAft>
+              <a:defRPr sz="1250">
+                <a:solidFill>
+                  <a:srgbClr val="A9BEDC"/>
+                </a:solidFill>
+                <a:latin typeface="Calibri"/>
+              </a:defRPr>
+            </a:pPr>
+            <a:r>
+              <a:t>—  Identity switcher (?as=p-priya vs ?as=p-arjun): two tabs side by side prove independent tenant state.</a:t>
             </a:r>
           </a:p>
           <a:p>
             <a:pPr>
               <a:lnSpc>
-                <a:spcPct val="118000"/>
+                <a:spcPct val="120000"/>
               </a:lnSpc>
               <a:spcAft>
                 <a:spcPts val="800"/>
               </a:spcAft>
               <a:defRPr sz="1250">
                 <a:solidFill>
-                  <a:srgbClr val="5E5A52"/>
-                </a:solidFill>
-                <a:latin typeface="Avenir Next"/>
-              </a:defRPr>
-            </a:pPr>
-            <a:r>
-              <a:t>—  Not just DGCA (Indian domestic aviation) — international frameworks too: EU261 and UK261.</a:t>
-            </a:r>
-          </a:p>
-          <a:p>
-            <a:pPr>
-              <a:lnSpc>
-                <a:spcPct val="118000"/>
-              </a:lnSpc>
-              <a:spcAft>
-                <a:spcPts val="800"/>
-              </a:spcAft>
-              <a:defRPr sz="1250">
-                <a:solidFill>
-                  <a:srgbClr val="5E5A52"/>
-                </a:solidFill>
-                <a:latin typeface="Avenir Next"/>
-              </a:defRPr>
-            </a:pPr>
-            <a:r>
-              <a:t>—  Carrier-specific contract clauses and operating terms (e.g. British Airways vs Emirates entitlements).</a:t>
-            </a:r>
-          </a:p>
-          <a:p>
-            <a:pPr>
-              <a:lnSpc>
-                <a:spcPct val="118000"/>
-              </a:lnSpc>
-              <a:spcAft>
-                <a:spcPts val="800"/>
-              </a:spcAft>
-              <a:defRPr sz="1250">
-                <a:solidFill>
-                  <a:srgbClr val="5E5A52"/>
-                </a:solidFill>
-                <a:latin typeface="Avenir Next"/>
-              </a:defRPr>
-            </a:pPr>
-            <a:r>
-              <a:t>—  Amex card product benefit terms (server/myca.ts): cabin ceilings, lounge access, per-transaction rules.</a:t>
-            </a:r>
-          </a:p>
-          <a:p>
-            <a:pPr>
-              <a:lnSpc>
-                <a:spcPct val="118000"/>
-              </a:lnSpc>
-              <a:spcAft>
-                <a:spcPts val="800"/>
-              </a:spcAft>
-              <a:defRPr sz="1250">
-                <a:solidFill>
-                  <a:srgbClr val="5E5A52"/>
-                </a:solidFill>
-                <a:latin typeface="Avenir Next"/>
-              </a:defRPr>
-            </a:pPr>
-            <a:r>
-              <a:t>—  Jurisdiction routing automatically detects which regulatory framework governs the PNR.</a:t>
-            </a:r>
-          </a:p>
-        </p:txBody>
-      </p:sp>
-      <p:sp>
-        <p:nvSpPr>
-          <p:cNvPr id="8" name="Rounded Rectangle 7"/>
-          <p:cNvSpPr/>
-          <p:nvPr/>
-        </p:nvSpPr>
-        <p:spPr>
-          <a:xfrm>
-            <a:off x="6263640" y="1783080"/>
-            <a:ext cx="5166360" cy="4251960"/>
-          </a:xfrm>
-          <a:prstGeom prst="roundRect">
-            <a:avLst>
-              <a:gd name="adj" fmla="val 6000"/>
-            </a:avLst>
-          </a:prstGeom>
-          <a:solidFill>
-            <a:srgbClr val="F3E3DB"/>
-          </a:solidFill>
-          <a:ln w="9525">
-            <a:solidFill>
-              <a:srgbClr val="E4E0D6"/>
-            </a:solidFill>
-          </a:ln>
-          <a:effectLst/>
-        </p:spPr>
-        <p:style>
-          <a:lnRef idx="1">
-            <a:schemeClr val="accent1"/>
-          </a:lnRef>
-          <a:fillRef idx="3">
-            <a:schemeClr val="accent1"/>
-          </a:fillRef>
-          <a:effectRef idx="2">
-            <a:schemeClr val="accent1"/>
-          </a:effectRef>
-          <a:fontRef idx="minor">
-            <a:schemeClr val="lt1"/>
-          </a:fontRef>
-        </p:style>
-        <p:txBody>
-          <a:bodyPr rtlCol="0" anchor="ctr" lIns="256032" rIns="256032" tIns="256032" bIns="256032" wrap="square"/>
-          <a:lstStyle/>
-          <a:p>
-            <a:pPr algn="ctr">
-              <a:spcAft>
-                <a:spcPts val="1200"/>
-              </a:spcAft>
-              <a:defRPr sz="1600" b="1">
-                <a:solidFill>
-                  <a:srgbClr val="B85C3E"/>
-                </a:solidFill>
-                <a:latin typeface="Georgia"/>
-              </a:defRPr>
-            </a:pPr>
-            <a:r>
-              <a:t>RAG &amp; default-deny policy engine</a:t>
-            </a:r>
-          </a:p>
-          <a:p>
-            <a:pPr>
-              <a:lnSpc>
-                <a:spcPct val="118000"/>
-              </a:lnSpc>
-              <a:spcAft>
-                <a:spcPts val="800"/>
-              </a:spcAft>
-              <a:defRPr sz="1250">
-                <a:solidFill>
-                  <a:srgbClr val="5E5A52"/>
-                </a:solidFill>
-                <a:latin typeface="Avenir Next"/>
-              </a:defRPr>
-            </a:pPr>
-            <a:r>
-              <a:t>—  RAG ingestion automatically vectorizes and indexes aviation regulations, fare rules, and card terms.</a:t>
-            </a:r>
-          </a:p>
-          <a:p>
-            <a:pPr>
-              <a:lnSpc>
-                <a:spcPct val="118000"/>
-              </a:lnSpc>
-              <a:spcAft>
-                <a:spcPts val="800"/>
-              </a:spcAft>
-              <a:defRPr sz="1250">
-                <a:solidFill>
-                  <a:srgbClr val="5E5A52"/>
-                </a:solidFill>
-                <a:latin typeface="Avenir Next"/>
-              </a:defRPr>
-            </a:pPr>
-            <a:r>
-              <a:t>—  Context retrieval dynamically queries relevant clauses when a disruption occurs for a given PNR.</a:t>
-            </a:r>
-          </a:p>
-          <a:p>
-            <a:pPr>
-              <a:lnSpc>
-                <a:spcPct val="118000"/>
-              </a:lnSpc>
-              <a:spcAft>
-                <a:spcPts val="800"/>
-              </a:spcAft>
-              <a:defRPr sz="1250">
-                <a:solidFill>
-                  <a:srgbClr val="5E5A52"/>
-                </a:solidFill>
-                <a:latin typeface="Avenir Next"/>
-              </a:defRPr>
-            </a:pPr>
-            <a:r>
-              <a:t>—  OPA policy gate (server/policy/): default-deny rule engine, evaluated in-process in under 1ms.</a:t>
-            </a:r>
-          </a:p>
-          <a:p>
-            <a:pPr>
-              <a:lnSpc>
-                <a:spcPct val="118000"/>
-              </a:lnSpc>
-              <a:spcAft>
-                <a:spcPts val="800"/>
-              </a:spcAft>
-              <a:defRPr sz="1250">
-                <a:solidFill>
-                  <a:srgbClr val="5E5A52"/>
-                </a:solidFill>
-                <a:latin typeface="Avenir Next"/>
-              </a:defRPr>
-            </a:pPr>
-            <a:r>
-              <a:t>—  Incomplete policy inputs trigger default-deny — nothing executes without an explicit allow.</a:t>
-            </a:r>
-          </a:p>
-        </p:txBody>
-      </p:sp>
-    </p:spTree>
-  </p:cSld>
-  <p:clrMapOvr>
-    <a:masterClrMapping/>
-  </p:clrMapOvr>
-</p:sld>
-</file>
-
-<file path=ppt/slides/slide7.xml><?xml version="1.0" encoding="utf-8"?>
-<p:sld xmlns:a="http://schemas.openxmlformats.org/drawingml/2006/main" xmlns:p="http://schemas.openxmlformats.org/presentationml/2006/main" xmlns:r="http://schemas.openxmlformats.org/officeDocument/2006/relationships">
-  <p:cSld>
-    <p:spTree>
-      <p:nvGrpSpPr>
-        <p:cNvPr id="1" name=""/>
-        <p:cNvGrpSpPr/>
-        <p:nvPr/>
-      </p:nvGrpSpPr>
-      <p:grpSpPr/>
-      <p:sp>
-        <p:nvSpPr>
-          <p:cNvPr id="2" name="Rectangle 1"/>
-          <p:cNvSpPr/>
-          <p:nvPr/>
-        </p:nvSpPr>
-        <p:spPr>
-          <a:xfrm>
-            <a:off x="0" y="0"/>
-            <a:ext cx="12191695" cy="6858000"/>
-          </a:xfrm>
-          <a:prstGeom prst="rect">
-            <a:avLst/>
-          </a:prstGeom>
-          <a:solidFill>
-            <a:srgbClr val="FAF9F5"/>
-          </a:solidFill>
-          <a:ln>
-            <a:noFill/>
-          </a:ln>
-          <a:effectLst/>
-        </p:spPr>
-        <p:style>
-          <a:lnRef idx="1">
-            <a:schemeClr val="accent1"/>
-          </a:lnRef>
-          <a:fillRef idx="3">
-            <a:schemeClr val="accent1"/>
-          </a:fillRef>
-          <a:effectRef idx="2">
-            <a:schemeClr val="accent1"/>
-          </a:effectRef>
-          <a:fontRef idx="minor">
-            <a:schemeClr val="lt1"/>
-          </a:fontRef>
-        </p:style>
-        <p:txBody>
-          <a:bodyPr rtlCol="0" anchor="ctr"/>
-          <a:lstStyle/>
-          <a:p>
-            <a:pPr algn="ctr"/>
-          </a:p>
-        </p:txBody>
-      </p:sp>
-      <p:sp>
-        <p:nvSpPr>
-          <p:cNvPr id="3" name="TextBox 2"/>
-          <p:cNvSpPr txBox="1"/>
-          <p:nvPr/>
-        </p:nvSpPr>
-        <p:spPr>
-          <a:xfrm>
-            <a:off x="731520" y="502920"/>
-            <a:ext cx="10698480" cy="320040"/>
-          </a:xfrm>
-          <a:prstGeom prst="rect">
-            <a:avLst/>
-          </a:prstGeom>
-          <a:noFill/>
-        </p:spPr>
-        <p:txBody>
-          <a:bodyPr wrap="square">
-            <a:spAutoFit/>
-          </a:bodyPr>
-          <a:lstStyle/>
-          <a:p>
-            <a:pPr>
-              <a:defRPr sz="1050" b="1">
-                <a:solidFill>
-                  <a:srgbClr val="B85C3E"/>
-                </a:solidFill>
-                <a:latin typeface="Avenir Next"/>
-              </a:defRPr>
-            </a:pPr>
-            <a:r>
-              <a:t>ZKD CONCIERGE  ·  AMERICAN EXPRESS  /  CODESTREET 2026</a:t>
-            </a:r>
-          </a:p>
-        </p:txBody>
-      </p:sp>
-      <p:sp>
-        <p:nvSpPr>
-          <p:cNvPr id="4" name="TextBox 3"/>
-          <p:cNvSpPr txBox="1"/>
-          <p:nvPr/>
-        </p:nvSpPr>
-        <p:spPr>
-          <a:xfrm>
-            <a:off x="731520" y="804672"/>
-            <a:ext cx="10058400" cy="777240"/>
-          </a:xfrm>
-          <a:prstGeom prst="rect">
-            <a:avLst/>
-          </a:prstGeom>
-          <a:noFill/>
-        </p:spPr>
-        <p:txBody>
-          <a:bodyPr wrap="square">
-            <a:spAutoFit/>
-          </a:bodyPr>
-          <a:lstStyle/>
-          <a:p>
-            <a:pPr>
-              <a:defRPr sz="2700" b="0">
-                <a:solidFill>
-                  <a:srgbClr val="1F1E1C"/>
-                </a:solidFill>
-                <a:latin typeface="Georgia"/>
-              </a:defRPr>
-            </a:pPr>
-            <a:r>
-              <a:t>System architecture &amp; multi-device state sync</a:t>
-            </a:r>
-          </a:p>
-        </p:txBody>
-      </p:sp>
-      <p:sp>
-        <p:nvSpPr>
-          <p:cNvPr id="5" name="Rectangle 4"/>
-          <p:cNvSpPr/>
-          <p:nvPr/>
-        </p:nvSpPr>
-        <p:spPr>
-          <a:xfrm>
-            <a:off x="731520" y="1481328"/>
-            <a:ext cx="502920" cy="44450"/>
-          </a:xfrm>
-          <a:prstGeom prst="rect">
-            <a:avLst/>
-          </a:prstGeom>
-          <a:solidFill>
-            <a:srgbClr val="D97757"/>
-          </a:solidFill>
-          <a:ln>
-            <a:noFill/>
-          </a:ln>
-          <a:effectLst/>
-        </p:spPr>
-        <p:style>
-          <a:lnRef idx="1">
-            <a:schemeClr val="accent1"/>
-          </a:lnRef>
-          <a:fillRef idx="3">
-            <a:schemeClr val="accent1"/>
-          </a:fillRef>
-          <a:effectRef idx="2">
-            <a:schemeClr val="accent1"/>
-          </a:effectRef>
-          <a:fontRef idx="minor">
-            <a:schemeClr val="lt1"/>
-          </a:fontRef>
-        </p:style>
-        <p:txBody>
-          <a:bodyPr rtlCol="0" anchor="ctr"/>
-          <a:lstStyle/>
-          <a:p>
-            <a:pPr algn="ctr"/>
-          </a:p>
-        </p:txBody>
-      </p:sp>
-      <p:sp>
-        <p:nvSpPr>
-          <p:cNvPr id="6" name="TextBox 5"/>
-          <p:cNvSpPr txBox="1"/>
-          <p:nvPr/>
-        </p:nvSpPr>
-        <p:spPr>
-          <a:xfrm>
-            <a:off x="11430000" y="6446520"/>
-            <a:ext cx="548640" cy="320040"/>
-          </a:xfrm>
-          <a:prstGeom prst="rect">
-            <a:avLst/>
-          </a:prstGeom>
-          <a:noFill/>
-        </p:spPr>
-        <p:txBody>
-          <a:bodyPr wrap="none">
-            <a:spAutoFit/>
-          </a:bodyPr>
-          <a:lstStyle/>
-          <a:p>
-            <a:pPr algn="r">
-              <a:defRPr sz="1000">
-                <a:solidFill>
-                  <a:srgbClr val="5E5A52"/>
-                </a:solidFill>
-                <a:latin typeface="Avenir Next"/>
-              </a:defRPr>
-            </a:pPr>
-            <a:r>
-              <a:t>07</a:t>
-            </a:r>
-          </a:p>
-        </p:txBody>
-      </p:sp>
-      <p:sp>
-        <p:nvSpPr>
-          <p:cNvPr id="7" name="Rounded Rectangle 6"/>
-          <p:cNvSpPr/>
-          <p:nvPr/>
-        </p:nvSpPr>
-        <p:spPr>
-          <a:xfrm>
-            <a:off x="731520" y="1783080"/>
-            <a:ext cx="5120640" cy="4251960"/>
-          </a:xfrm>
-          <a:prstGeom prst="roundRect">
-            <a:avLst>
-              <a:gd name="adj" fmla="val 6000"/>
-            </a:avLst>
-          </a:prstGeom>
-          <a:solidFill>
-            <a:srgbClr val="FFFFFF"/>
-          </a:solidFill>
-          <a:ln w="9525">
-            <a:solidFill>
-              <a:srgbClr val="E4E0D6"/>
-            </a:solidFill>
-          </a:ln>
-          <a:effectLst/>
-        </p:spPr>
-        <p:style>
-          <a:lnRef idx="1">
-            <a:schemeClr val="accent1"/>
-          </a:lnRef>
-          <a:fillRef idx="3">
-            <a:schemeClr val="accent1"/>
-          </a:fillRef>
-          <a:effectRef idx="2">
-            <a:schemeClr val="accent1"/>
-          </a:effectRef>
-          <a:fontRef idx="minor">
-            <a:schemeClr val="lt1"/>
-          </a:fontRef>
-        </p:style>
-        <p:txBody>
-          <a:bodyPr rtlCol="0" anchor="ctr" lIns="256032" rIns="256032" tIns="256032" bIns="256032" wrap="square"/>
-          <a:lstStyle/>
-          <a:p>
-            <a:pPr algn="ctr">
-              <a:spcAft>
-                <a:spcPts val="1200"/>
-              </a:spcAft>
-              <a:defRPr sz="1600" b="1">
-                <a:solidFill>
-                  <a:srgbClr val="1F1E1C"/>
-                </a:solidFill>
-                <a:latin typeface="Georgia"/>
-              </a:defRPr>
-            </a:pPr>
-            <a:r>
-              <a:t>Server-authoritative simulation engine</a:t>
-            </a:r>
-          </a:p>
-          <a:p>
-            <a:pPr>
-              <a:lnSpc>
-                <a:spcPct val="118000"/>
-              </a:lnSpc>
-              <a:spcAft>
-                <a:spcPts val="800"/>
-              </a:spcAft>
-              <a:defRPr sz="1250">
-                <a:solidFill>
-                  <a:srgbClr val="5E5A52"/>
-                </a:solidFill>
-                <a:latin typeface="Avenir Next"/>
-              </a:defRPr>
-            </a:pPr>
-            <a:r>
-              <a:t>—  Module-level simulation engine (server/engine/simulation.ts) runs the whole lifecycle.</a:t>
-            </a:r>
-          </a:p>
-          <a:p>
-            <a:pPr>
-              <a:lnSpc>
-                <a:spcPct val="118000"/>
-              </a:lnSpc>
-              <a:spcAft>
-                <a:spcPts val="800"/>
-              </a:spcAft>
-              <a:defRPr sz="1250">
-                <a:solidFill>
-                  <a:srgbClr val="5E5A52"/>
-                </a:solidFill>
-                <a:latin typeface="Avenir Next"/>
-              </a:defRPr>
-            </a:pPr>
-            <a:r>
-              <a:t>—  Real setTimeout/setInterval chains resolve on schedule whether devices watch or not.</a:t>
-            </a:r>
-          </a:p>
-          <a:p>
-            <a:pPr>
-              <a:lnSpc>
-                <a:spcPct val="118000"/>
-              </a:lnSpc>
-              <a:spcAft>
-                <a:spcPts val="800"/>
-              </a:spcAft>
-              <a:defRPr sz="1250">
-                <a:solidFill>
-                  <a:srgbClr val="5E5A52"/>
-                </a:solidFill>
-                <a:latin typeface="Avenir Next"/>
-              </a:defRPr>
-            </a:pPr>
-            <a:r>
-              <a:t>—  Single source of truth: the shared state ledger (server/decisionLedger.ts).</a:t>
-            </a:r>
-          </a:p>
-          <a:p>
-            <a:pPr>
-              <a:lnSpc>
-                <a:spcPct val="118000"/>
-              </a:lnSpc>
-              <a:spcAft>
-                <a:spcPts val="800"/>
-              </a:spcAft>
-              <a:defRPr sz="1250">
-                <a:solidFill>
-                  <a:srgbClr val="5E5A52"/>
-                </a:solidFill>
-                <a:latin typeface="Avenir Next"/>
-              </a:defRPr>
-            </a:pPr>
-            <a:r>
-              <a:t>—  Zero GPU on the critical path — 95% of the time is network wait on supplier APIs.</a:t>
-            </a:r>
-          </a:p>
-        </p:txBody>
-      </p:sp>
-      <p:sp>
-        <p:nvSpPr>
-          <p:cNvPr id="8" name="Rounded Rectangle 7"/>
-          <p:cNvSpPr/>
-          <p:nvPr/>
-        </p:nvSpPr>
-        <p:spPr>
-          <a:xfrm>
-            <a:off x="6263640" y="1783080"/>
-            <a:ext cx="5166360" cy="4251960"/>
-          </a:xfrm>
-          <a:prstGeom prst="roundRect">
-            <a:avLst>
-              <a:gd name="adj" fmla="val 6000"/>
-            </a:avLst>
-          </a:prstGeom>
-          <a:solidFill>
-            <a:srgbClr val="F3E3DB"/>
-          </a:solidFill>
-          <a:ln w="9525">
-            <a:solidFill>
-              <a:srgbClr val="E4E0D6"/>
-            </a:solidFill>
-          </a:ln>
-          <a:effectLst/>
-        </p:spPr>
-        <p:style>
-          <a:lnRef idx="1">
-            <a:schemeClr val="accent1"/>
-          </a:lnRef>
-          <a:fillRef idx="3">
-            <a:schemeClr val="accent1"/>
-          </a:fillRef>
-          <a:effectRef idx="2">
-            <a:schemeClr val="accent1"/>
-          </a:effectRef>
-          <a:fontRef idx="minor">
-            <a:schemeClr val="lt1"/>
-          </a:fontRef>
-        </p:style>
-        <p:txBody>
-          <a:bodyPr rtlCol="0" anchor="ctr" lIns="256032" rIns="256032" tIns="256032" bIns="256032" wrap="square"/>
-          <a:lstStyle/>
-          <a:p>
-            <a:pPr algn="ctr">
-              <a:spcAft>
-                <a:spcPts val="1200"/>
-              </a:spcAft>
-              <a:defRPr sz="1600" b="1">
-                <a:solidFill>
-                  <a:srgbClr val="B85C3E"/>
-                </a:solidFill>
-                <a:latin typeface="Georgia"/>
-              </a:defRPr>
-            </a:pPr>
-            <a:r>
-              <a:t>Multi-device sync &amp; identity switchers</a:t>
-            </a:r>
-          </a:p>
-          <a:p>
-            <a:pPr>
-              <a:lnSpc>
-                <a:spcPct val="118000"/>
-              </a:lnSpc>
-              <a:spcAft>
-                <a:spcPts val="800"/>
-              </a:spcAft>
-              <a:defRPr sz="1250">
-                <a:solidFill>
-                  <a:srgbClr val="5E5A52"/>
-                </a:solidFill>
-                <a:latin typeface="Avenir Next"/>
-              </a:defRPr>
-            </a:pPr>
-            <a:r>
-              <a:t>—  Stateless clients: the Next.js web app (zkd-app/) and the Expo React Native app (zkd-android/).</a:t>
-            </a:r>
-          </a:p>
-          <a:p>
-            <a:pPr>
-              <a:lnSpc>
-                <a:spcPct val="118000"/>
-              </a:lnSpc>
-              <a:spcAft>
-                <a:spcPts val="800"/>
-              </a:spcAft>
-              <a:defRPr sz="1250">
-                <a:solidFill>
-                  <a:srgbClr val="5E5A52"/>
-                </a:solidFill>
-                <a:latin typeface="Avenir Next"/>
-              </a:defRPr>
-            </a:pPr>
-            <a:r>
-              <a:t>—  Clean polling architecture: GET /api/passengers/[id]/schedule.</a:t>
-            </a:r>
-          </a:p>
-          <a:p>
-            <a:pPr>
-              <a:lnSpc>
-                <a:spcPct val="118000"/>
-              </a:lnSpc>
-              <a:spcAft>
-                <a:spcPts val="800"/>
-              </a:spcAft>
-              <a:defRPr sz="1250">
-                <a:solidFill>
-                  <a:srgbClr val="5E5A52"/>
-                </a:solidFill>
-                <a:latin typeface="Avenir Next"/>
-              </a:defRPr>
-            </a:pPr>
-            <a:r>
-              <a:t>—  Identity switcher (?as=p-priya vs ?as=p-arjun): two tabs side by side prove independent tenant state.</a:t>
-            </a:r>
-          </a:p>
-          <a:p>
-            <a:pPr>
-              <a:lnSpc>
-                <a:spcPct val="118000"/>
-              </a:lnSpc>
-              <a:spcAft>
-                <a:spcPts val="800"/>
-              </a:spcAft>
-              <a:defRPr sz="1250">
-                <a:solidFill>
-                  <a:srgbClr val="5E5A52"/>
-                </a:solidFill>
-                <a:latin typeface="Avenir Next"/>
+                  <a:srgbClr val="A9BEDC"/>
+                </a:solidFill>
+                <a:latin typeface="Calibri"/>
               </a:defRPr>
             </a:pPr>
             <a:r>
@@ -7030,6 +7115,14 @@
 <file path=ppt/slides/slide8.xml><?xml version="1.0" encoding="utf-8"?>
 <p:sld xmlns:a="http://schemas.openxmlformats.org/drawingml/2006/main" xmlns:p="http://schemas.openxmlformats.org/presentationml/2006/main" xmlns:r="http://schemas.openxmlformats.org/officeDocument/2006/relationships">
   <p:cSld>
+    <p:bg>
+      <p:bgPr>
+        <a:solidFill>
+          <a:srgbClr val="0A1B3D"/>
+        </a:solidFill>
+        <a:effectLst/>
+      </p:bgPr>
+    </p:bg>
     <p:spTree>
       <p:nvGrpSpPr>
         <p:cNvPr id="1" name=""/>
@@ -7039,58 +7132,14 @@
       <p:grpSpPr/>
       <p:sp>
         <p:nvSpPr>
-          <p:cNvPr id="2" name="Rectangle 1"/>
-          <p:cNvSpPr/>
-          <p:nvPr/>
-        </p:nvSpPr>
-        <p:spPr>
-          <a:xfrm>
-            <a:off x="0" y="0"/>
-            <a:ext cx="12191695" cy="6858000"/>
-          </a:xfrm>
-          <a:prstGeom prst="rect">
-            <a:avLst/>
-          </a:prstGeom>
-          <a:solidFill>
-            <a:srgbClr val="FAF9F5"/>
-          </a:solidFill>
-          <a:ln>
-            <a:noFill/>
-          </a:ln>
-          <a:effectLst/>
-        </p:spPr>
-        <p:style>
-          <a:lnRef idx="1">
-            <a:schemeClr val="accent1"/>
-          </a:lnRef>
-          <a:fillRef idx="3">
-            <a:schemeClr val="accent1"/>
-          </a:fillRef>
-          <a:effectRef idx="2">
-            <a:schemeClr val="accent1"/>
-          </a:effectRef>
-          <a:fontRef idx="minor">
-            <a:schemeClr val="lt1"/>
-          </a:fontRef>
-        </p:style>
-        <p:txBody>
-          <a:bodyPr rtlCol="0" anchor="ctr"/>
-          <a:lstStyle/>
-          <a:p>
-            <a:pPr algn="ctr"/>
-          </a:p>
-        </p:txBody>
-      </p:sp>
-      <p:sp>
-        <p:nvSpPr>
-          <p:cNvPr id="3" name="TextBox 2"/>
+          <p:cNvPr id="2" name="TextBox 1"/>
           <p:cNvSpPr txBox="1"/>
           <p:nvPr/>
         </p:nvSpPr>
         <p:spPr>
           <a:xfrm>
-            <a:off x="731520" y="502920"/>
-            <a:ext cx="10698480" cy="320040"/>
+            <a:off x="457200" y="146304"/>
+            <a:ext cx="8229600" cy="256032"/>
           </a:xfrm>
           <a:prstGeom prst="rect">
             <a:avLst/>
@@ -7104,29 +7153,29 @@
           <a:lstStyle/>
           <a:p>
             <a:pPr>
-              <a:defRPr sz="1050" b="1">
-                <a:solidFill>
-                  <a:srgbClr val="B85C3E"/>
-                </a:solidFill>
-                <a:latin typeface="Avenir Next"/>
-              </a:defRPr>
-            </a:pPr>
-            <a:r>
-              <a:t>ZKD CONCIERGE  ·  AMERICAN EXPRESS  /  CODESTREET 2026</a:t>
-            </a:r>
-          </a:p>
-        </p:txBody>
-      </p:sp>
-      <p:sp>
-        <p:nvSpPr>
-          <p:cNvPr id="4" name="TextBox 3"/>
+              <a:defRPr sz="1150" b="1">
+                <a:solidFill>
+                  <a:srgbClr val="3D9CFF"/>
+                </a:solidFill>
+                <a:latin typeface="Calibri"/>
+              </a:defRPr>
+            </a:pPr>
+            <a:r>
+              <a:t>07 · EXPERIENCE KPIS</a:t>
+            </a:r>
+          </a:p>
+        </p:txBody>
+      </p:sp>
+      <p:sp>
+        <p:nvSpPr>
+          <p:cNvPr id="3" name="TextBox 2"/>
           <p:cNvSpPr txBox="1"/>
           <p:nvPr/>
         </p:nvSpPr>
         <p:spPr>
           <a:xfrm>
-            <a:off x="731520" y="804672"/>
-            <a:ext cx="10058400" cy="777240"/>
+            <a:off x="11155680" y="146304"/>
+            <a:ext cx="548640" cy="256032"/>
           </a:xfrm>
           <a:prstGeom prst="rect">
             <a:avLst/>
@@ -7134,79 +7183,35 @@
           <a:noFill/>
         </p:spPr>
         <p:txBody>
-          <a:bodyPr wrap="square">
+          <a:bodyPr wrap="none">
             <a:spAutoFit/>
           </a:bodyPr>
           <a:lstStyle/>
           <a:p>
-            <a:pPr>
-              <a:defRPr sz="2700" b="0">
-                <a:solidFill>
-                  <a:srgbClr val="1F1E1C"/>
-                </a:solidFill>
-                <a:latin typeface="Georgia"/>
-              </a:defRPr>
-            </a:pPr>
-            <a:r>
-              <a:t>Customer experience KPIs — strictly no revenue proxies</a:t>
-            </a:r>
-          </a:p>
-        </p:txBody>
-      </p:sp>
-      <p:sp>
-        <p:nvSpPr>
-          <p:cNvPr id="5" name="Rectangle 4"/>
-          <p:cNvSpPr/>
-          <p:nvPr/>
-        </p:nvSpPr>
-        <p:spPr>
-          <a:xfrm>
-            <a:off x="731520" y="1481328"/>
-            <a:ext cx="502920" cy="44450"/>
-          </a:xfrm>
-          <a:prstGeom prst="rect">
-            <a:avLst/>
-          </a:prstGeom>
-          <a:solidFill>
-            <a:srgbClr val="D97757"/>
-          </a:solidFill>
-          <a:ln>
-            <a:noFill/>
-          </a:ln>
-          <a:effectLst/>
-        </p:spPr>
-        <p:style>
-          <a:lnRef idx="1">
-            <a:schemeClr val="accent1"/>
-          </a:lnRef>
-          <a:fillRef idx="3">
-            <a:schemeClr val="accent1"/>
-          </a:fillRef>
-          <a:effectRef idx="2">
-            <a:schemeClr val="accent1"/>
-          </a:effectRef>
-          <a:fontRef idx="minor">
-            <a:schemeClr val="lt1"/>
-          </a:fontRef>
-        </p:style>
-        <p:txBody>
-          <a:bodyPr rtlCol="0" anchor="ctr"/>
-          <a:lstStyle/>
-          <a:p>
-            <a:pPr algn="ctr"/>
-          </a:p>
-        </p:txBody>
-      </p:sp>
-      <p:sp>
-        <p:nvSpPr>
-          <p:cNvPr id="6" name="TextBox 5"/>
+            <a:pPr algn="r">
+              <a:defRPr sz="1150">
+                <a:solidFill>
+                  <a:srgbClr val="7B94BA"/>
+                </a:solidFill>
+                <a:latin typeface="Calibri"/>
+              </a:defRPr>
+            </a:pPr>
+            <a:r>
+              <a:t>8</a:t>
+            </a:r>
+          </a:p>
+        </p:txBody>
+      </p:sp>
+      <p:sp>
+        <p:nvSpPr>
+          <p:cNvPr id="4" name="TextBox 3"/>
           <p:cNvSpPr txBox="1"/>
           <p:nvPr/>
         </p:nvSpPr>
         <p:spPr>
           <a:xfrm>
-            <a:off x="11430000" y="6446520"/>
-            <a:ext cx="548640" cy="320040"/>
+            <a:off x="457200" y="365760"/>
+            <a:ext cx="10881360" cy="640080"/>
           </a:xfrm>
           <a:prstGeom prst="rect">
             <a:avLst/>
@@ -7214,36 +7219,72 @@
           <a:noFill/>
         </p:spPr>
         <p:txBody>
-          <a:bodyPr wrap="none">
+          <a:bodyPr wrap="square">
             <a:spAutoFit/>
           </a:bodyPr>
           <a:lstStyle/>
           <a:p>
-            <a:pPr algn="r">
-              <a:defRPr sz="1000">
-                <a:solidFill>
-                  <a:srgbClr val="5E5A52"/>
-                </a:solidFill>
-                <a:latin typeface="Avenir Next"/>
-              </a:defRPr>
-            </a:pPr>
-            <a:r>
-              <a:t>08</a:t>
+            <a:pPr>
+              <a:defRPr sz="2500" b="1">
+                <a:solidFill>
+                  <a:srgbClr val="FFFFFF"/>
+                </a:solidFill>
+                <a:latin typeface="Cambria"/>
+              </a:defRPr>
+            </a:pPr>
+            <a:r>
+              <a:t>Customer experience KPIs</a:t>
+            </a:r>
+          </a:p>
+        </p:txBody>
+      </p:sp>
+      <p:sp>
+        <p:nvSpPr>
+          <p:cNvPr id="5" name="TextBox 4"/>
+          <p:cNvSpPr txBox="1"/>
+          <p:nvPr/>
+        </p:nvSpPr>
+        <p:spPr>
+          <a:xfrm>
+            <a:off x="457200" y="932688"/>
+            <a:ext cx="10881360" cy="365760"/>
+          </a:xfrm>
+          <a:prstGeom prst="rect">
+            <a:avLst/>
+          </a:prstGeom>
+          <a:noFill/>
+        </p:spPr>
+        <p:txBody>
+          <a:bodyPr wrap="square">
+            <a:spAutoFit/>
+          </a:bodyPr>
+          <a:lstStyle/>
+          <a:p>
+            <a:pPr>
+              <a:defRPr sz="1300">
+                <a:solidFill>
+                  <a:srgbClr val="A9BEDC"/>
+                </a:solidFill>
+                <a:latin typeface="Calibri"/>
+              </a:defRPr>
+            </a:pPr>
+            <a:r>
+              <a:t>Strictly no revenue proxies — every metric ties to a measured system evidence source.</a:t>
             </a:r>
           </a:p>
         </p:txBody>
       </p:sp>
       <p:graphicFrame>
         <p:nvGraphicFramePr>
-          <p:cNvPr id="7" name="Table 6"/>
+          <p:cNvPr id="6" name="Table 5"/>
           <p:cNvGraphicFramePr>
             <a:graphicFrameLocks noGrp="1"/>
           </p:cNvGraphicFramePr>
           <p:nvPr/>
         </p:nvGraphicFramePr>
         <p:xfrm>
-          <a:off x="731520" y="1783080"/>
-          <a:ext cx="10725912" cy="4206240"/>
+          <a:off x="457200" y="1508760"/>
+          <a:ext cx="11274552" cy="4480560"/>
         </p:xfrm>
         <a:graphic>
           <a:graphicData uri="http://schemas.openxmlformats.org/drawingml/2006/table">
@@ -7253,22 +7294,22 @@
               </a:tblPr>
               <a:tblGrid>
                 <a:gridCol w="2011680"/>
-                <a:gridCol w="2953512"/>
+                <a:gridCol w="3044952"/>
                 <a:gridCol w="1737360"/>
-                <a:gridCol w="4023360"/>
+                <a:gridCol w="4480560"/>
               </a:tblGrid>
-              <a:tr h="841248">
+              <a:tr h="896112">
                 <a:tc>
                   <a:txBody>
                     <a:bodyPr/>
                     <a:lstStyle/>
                     <a:p>
                       <a:pPr>
-                        <a:defRPr b="1" sz="1150">
+                        <a:defRPr b="1" sz="1200">
                           <a:solidFill>
-                            <a:srgbClr val="F7F5F0"/>
+                            <a:srgbClr val="3D9CFF"/>
                           </a:solidFill>
-                          <a:latin typeface="Avenir Next"/>
+                          <a:latin typeface="Calibri"/>
                         </a:defRPr>
                       </a:pPr>
                       <a:r>
@@ -7278,7 +7319,7 @@
                   </a:txBody>
                   <a:tcPr marL="128016" marT="73152" anchor="ctr">
                     <a:solidFill>
-                      <a:srgbClr val="1F1E1C"/>
+                      <a:srgbClr val="0D2246"/>
                     </a:solidFill>
                   </a:tcPr>
                 </a:tc>
@@ -7288,11 +7329,11 @@
                     <a:lstStyle/>
                     <a:p>
                       <a:pPr>
-                        <a:defRPr b="1" sz="1150">
+                        <a:defRPr b="1" sz="1200">
                           <a:solidFill>
-                            <a:srgbClr val="F7F5F0"/>
+                            <a:srgbClr val="3D9CFF"/>
                           </a:solidFill>
-                          <a:latin typeface="Avenir Next"/>
+                          <a:latin typeface="Calibri"/>
                         </a:defRPr>
                       </a:pPr>
                       <a:r>
@@ -7302,7 +7343,7 @@
                   </a:txBody>
                   <a:tcPr marL="128016" marT="73152" anchor="ctr">
                     <a:solidFill>
-                      <a:srgbClr val="1F1E1C"/>
+                      <a:srgbClr val="0D2246"/>
                     </a:solidFill>
                   </a:tcPr>
                 </a:tc>
@@ -7312,11 +7353,11 @@
                     <a:lstStyle/>
                     <a:p>
                       <a:pPr>
-                        <a:defRPr b="1" sz="1150">
+                        <a:defRPr b="1" sz="1200">
                           <a:solidFill>
-                            <a:srgbClr val="F7F5F0"/>
+                            <a:srgbClr val="3D9CFF"/>
                           </a:solidFill>
-                          <a:latin typeface="Avenir Next"/>
+                          <a:latin typeface="Calibri"/>
                         </a:defRPr>
                       </a:pPr>
                       <a:r>
@@ -7326,7 +7367,7 @@
                   </a:txBody>
                   <a:tcPr marL="128016" marT="73152" anchor="ctr">
                     <a:solidFill>
-                      <a:srgbClr val="1F1E1C"/>
+                      <a:srgbClr val="0D2246"/>
                     </a:solidFill>
                   </a:tcPr>
                 </a:tc>
@@ -7336,11 +7377,11 @@
                     <a:lstStyle/>
                     <a:p>
                       <a:pPr>
-                        <a:defRPr b="1" sz="1150">
+                        <a:defRPr b="1" sz="1200">
                           <a:solidFill>
-                            <a:srgbClr val="F7F5F0"/>
+                            <a:srgbClr val="3D9CFF"/>
                           </a:solidFill>
-                          <a:latin typeface="Avenir Next"/>
+                          <a:latin typeface="Calibri"/>
                         </a:defRPr>
                       </a:pPr>
                       <a:r>
@@ -7350,12 +7391,12 @@
                   </a:txBody>
                   <a:tcPr marL="128016" marT="73152" anchor="ctr">
                     <a:solidFill>
-                      <a:srgbClr val="1F1E1C"/>
+                      <a:srgbClr val="0D2246"/>
                     </a:solidFill>
                   </a:tcPr>
                 </a:tc>
               </a:tr>
-              <a:tr h="841248">
+              <a:tr h="896112">
                 <a:tc>
                   <a:txBody>
                     <a:bodyPr/>
@@ -7364,9 +7405,9 @@
                       <a:pPr>
                         <a:defRPr sz="1100">
                           <a:solidFill>
-                            <a:srgbClr val="1F1E1C"/>
+                            <a:srgbClr val="FFFFFF"/>
                           </a:solidFill>
-                          <a:latin typeface="Avenir Next"/>
+                          <a:latin typeface="Calibri"/>
                         </a:defRPr>
                       </a:pPr>
                       <a:r>
@@ -7376,7 +7417,7 @@
                   </a:txBody>
                   <a:tcPr marL="128016" anchor="ctr">
                     <a:solidFill>
-                      <a:srgbClr val="FFFFFF"/>
+                      <a:srgbClr val="132C52"/>
                     </a:solidFill>
                   </a:tcPr>
                 </a:tc>
@@ -7388,9 +7429,9 @@
                       <a:pPr>
                         <a:defRPr sz="1100">
                           <a:solidFill>
-                            <a:srgbClr val="5E5A52"/>
+                            <a:srgbClr val="A9BEDC"/>
                           </a:solidFill>
-                          <a:latin typeface="Avenir Next"/>
+                          <a:latin typeface="Calibri"/>
                         </a:defRPr>
                       </a:pPr>
                       <a:r>
@@ -7400,7 +7441,7 @@
                   </a:txBody>
                   <a:tcPr marL="128016" anchor="ctr">
                     <a:solidFill>
-                      <a:srgbClr val="FFFFFF"/>
+                      <a:srgbClr val="132C52"/>
                     </a:solidFill>
                   </a:tcPr>
                 </a:tc>
@@ -7412,9 +7453,9 @@
                       <a:pPr>
                         <a:defRPr sz="1100" b="1">
                           <a:solidFill>
-                            <a:srgbClr val="B85C3E"/>
+                            <a:srgbClr val="2ECC9A"/>
                           </a:solidFill>
-                          <a:latin typeface="Avenir Next"/>
+                          <a:latin typeface="Calibri"/>
                         </a:defRPr>
                       </a:pPr>
                       <a:r>
@@ -7424,7 +7465,7 @@
                   </a:txBody>
                   <a:tcPr marL="128016" anchor="ctr">
                     <a:solidFill>
-                      <a:srgbClr val="FFFFFF"/>
+                      <a:srgbClr val="132C52"/>
                     </a:solidFill>
                   </a:tcPr>
                 </a:tc>
@@ -7436,9 +7477,9 @@
                       <a:pPr>
                         <a:defRPr sz="1100">
                           <a:solidFill>
-                            <a:srgbClr val="5E5A52"/>
+                            <a:srgbClr val="A9BEDC"/>
                           </a:solidFill>
-                          <a:latin typeface="Avenir Next"/>
+                          <a:latin typeface="Calibri"/>
                         </a:defRPr>
                       </a:pPr>
                       <a:r>
@@ -7448,12 +7489,12 @@
                   </a:txBody>
                   <a:tcPr marL="128016" anchor="ctr">
                     <a:solidFill>
-                      <a:srgbClr val="FFFFFF"/>
+                      <a:srgbClr val="132C52"/>
                     </a:solidFill>
                   </a:tcPr>
                 </a:tc>
               </a:tr>
-              <a:tr h="841248">
+              <a:tr h="896112">
                 <a:tc>
                   <a:txBody>
                     <a:bodyPr/>
@@ -7462,9 +7503,9 @@
                       <a:pPr>
                         <a:defRPr sz="1100">
                           <a:solidFill>
-                            <a:srgbClr val="1F1E1C"/>
+                            <a:srgbClr val="FFFFFF"/>
                           </a:solidFill>
-                          <a:latin typeface="Avenir Next"/>
+                          <a:latin typeface="Calibri"/>
                         </a:defRPr>
                       </a:pPr>
                       <a:r>
@@ -7474,7 +7515,7 @@
                   </a:txBody>
                   <a:tcPr marL="128016" anchor="ctr">
                     <a:solidFill>
-                      <a:srgbClr val="F0EEE6"/>
+                      <a:srgbClr val="10275A"/>
                     </a:solidFill>
                   </a:tcPr>
                 </a:tc>
@@ -7486,9 +7527,9 @@
                       <a:pPr>
                         <a:defRPr sz="1100">
                           <a:solidFill>
-                            <a:srgbClr val="5E5A52"/>
+                            <a:srgbClr val="A9BEDC"/>
                           </a:solidFill>
-                          <a:latin typeface="Avenir Next"/>
+                          <a:latin typeface="Calibri"/>
                         </a:defRPr>
                       </a:pPr>
                       <a:r>
@@ -7498,7 +7539,7 @@
                   </a:txBody>
                   <a:tcPr marL="128016" anchor="ctr">
                     <a:solidFill>
-                      <a:srgbClr val="F0EEE6"/>
+                      <a:srgbClr val="10275A"/>
                     </a:solidFill>
                   </a:tcPr>
                 </a:tc>
@@ -7510,9 +7551,9 @@
                       <a:pPr>
                         <a:defRPr sz="1100" b="1">
                           <a:solidFill>
-                            <a:srgbClr val="B85C3E"/>
+                            <a:srgbClr val="2ECC9A"/>
                           </a:solidFill>
-                          <a:latin typeface="Avenir Next"/>
+                          <a:latin typeface="Calibri"/>
                         </a:defRPr>
                       </a:pPr>
                       <a:r>
@@ -7522,7 +7563,7 @@
                   </a:txBody>
                   <a:tcPr marL="128016" anchor="ctr">
                     <a:solidFill>
-                      <a:srgbClr val="F0EEE6"/>
+                      <a:srgbClr val="10275A"/>
                     </a:solidFill>
                   </a:tcPr>
                 </a:tc>
@@ -7534,9 +7575,9 @@
                       <a:pPr>
                         <a:defRPr sz="1100">
                           <a:solidFill>
-                            <a:srgbClr val="5E5A52"/>
+                            <a:srgbClr val="A9BEDC"/>
                           </a:solidFill>
-                          <a:latin typeface="Avenir Next"/>
+                          <a:latin typeface="Calibri"/>
                         </a:defRPr>
                       </a:pPr>
                       <a:r>
@@ -7546,12 +7587,12 @@
                   </a:txBody>
                   <a:tcPr marL="128016" anchor="ctr">
                     <a:solidFill>
-                      <a:srgbClr val="F0EEE6"/>
+                      <a:srgbClr val="10275A"/>
                     </a:solidFill>
                   </a:tcPr>
                 </a:tc>
               </a:tr>
-              <a:tr h="841248">
+              <a:tr h="896112">
                 <a:tc>
                   <a:txBody>
                     <a:bodyPr/>
@@ -7560,9 +7601,9 @@
                       <a:pPr>
                         <a:defRPr sz="1100">
                           <a:solidFill>
-                            <a:srgbClr val="1F1E1C"/>
+                            <a:srgbClr val="FFFFFF"/>
                           </a:solidFill>
-                          <a:latin typeface="Avenir Next"/>
+                          <a:latin typeface="Calibri"/>
                         </a:defRPr>
                       </a:pPr>
                       <a:r>
@@ -7572,7 +7613,7 @@
                   </a:txBody>
                   <a:tcPr marL="128016" anchor="ctr">
                     <a:solidFill>
-                      <a:srgbClr val="FFFFFF"/>
+                      <a:srgbClr val="132C52"/>
                     </a:solidFill>
                   </a:tcPr>
                 </a:tc>
@@ -7584,9 +7625,9 @@
                       <a:pPr>
                         <a:defRPr sz="1100">
                           <a:solidFill>
-                            <a:srgbClr val="5E5A52"/>
+                            <a:srgbClr val="A9BEDC"/>
                           </a:solidFill>
-                          <a:latin typeface="Avenir Next"/>
+                          <a:latin typeface="Calibri"/>
                         </a:defRPr>
                       </a:pPr>
                       <a:r>
@@ -7596,7 +7637,7 @@
                   </a:txBody>
                   <a:tcPr marL="128016" anchor="ctr">
                     <a:solidFill>
-                      <a:srgbClr val="FFFFFF"/>
+                      <a:srgbClr val="132C52"/>
                     </a:solidFill>
                   </a:tcPr>
                 </a:tc>
@@ -7608,9 +7649,9 @@
                       <a:pPr>
                         <a:defRPr sz="1100" b="1">
                           <a:solidFill>
-                            <a:srgbClr val="B85C3E"/>
+                            <a:srgbClr val="2ECC9A"/>
                           </a:solidFill>
-                          <a:latin typeface="Avenir Next"/>
+                          <a:latin typeface="Calibri"/>
                         </a:defRPr>
                       </a:pPr>
                       <a:r>
@@ -7620,7 +7661,7 @@
                   </a:txBody>
                   <a:tcPr marL="128016" anchor="ctr">
                     <a:solidFill>
-                      <a:srgbClr val="FFFFFF"/>
+                      <a:srgbClr val="132C52"/>
                     </a:solidFill>
                   </a:tcPr>
                 </a:tc>
@@ -7632,9 +7673,9 @@
                       <a:pPr>
                         <a:defRPr sz="1100">
                           <a:solidFill>
-                            <a:srgbClr val="5E5A52"/>
+                            <a:srgbClr val="A9BEDC"/>
                           </a:solidFill>
-                          <a:latin typeface="Avenir Next"/>
+                          <a:latin typeface="Calibri"/>
                         </a:defRPr>
                       </a:pPr>
                       <a:r>
@@ -7644,12 +7685,12 @@
                   </a:txBody>
                   <a:tcPr marL="128016" anchor="ctr">
                     <a:solidFill>
-                      <a:srgbClr val="FFFFFF"/>
+                      <a:srgbClr val="132C52"/>
                     </a:solidFill>
                   </a:tcPr>
                 </a:tc>
               </a:tr>
-              <a:tr h="841248">
+              <a:tr h="896112">
                 <a:tc>
                   <a:txBody>
                     <a:bodyPr/>
@@ -7658,9 +7699,9 @@
                       <a:pPr>
                         <a:defRPr sz="1100">
                           <a:solidFill>
-                            <a:srgbClr val="1F1E1C"/>
+                            <a:srgbClr val="FFFFFF"/>
                           </a:solidFill>
-                          <a:latin typeface="Avenir Next"/>
+                          <a:latin typeface="Calibri"/>
                         </a:defRPr>
                       </a:pPr>
                       <a:r>
@@ -7670,7 +7711,7 @@
                   </a:txBody>
                   <a:tcPr marL="128016" anchor="ctr">
                     <a:solidFill>
-                      <a:srgbClr val="F0EEE6"/>
+                      <a:srgbClr val="10275A"/>
                     </a:solidFill>
                   </a:tcPr>
                 </a:tc>
@@ -7682,9 +7723,9 @@
                       <a:pPr>
                         <a:defRPr sz="1100">
                           <a:solidFill>
-                            <a:srgbClr val="5E5A52"/>
+                            <a:srgbClr val="A9BEDC"/>
                           </a:solidFill>
-                          <a:latin typeface="Avenir Next"/>
+                          <a:latin typeface="Calibri"/>
                         </a:defRPr>
                       </a:pPr>
                       <a:r>
@@ -7694,7 +7735,7 @@
                   </a:txBody>
                   <a:tcPr marL="128016" anchor="ctr">
                     <a:solidFill>
-                      <a:srgbClr val="F0EEE6"/>
+                      <a:srgbClr val="10275A"/>
                     </a:solidFill>
                   </a:tcPr>
                 </a:tc>
@@ -7706,9 +7747,9 @@
                       <a:pPr>
                         <a:defRPr sz="1100" b="1">
                           <a:solidFill>
-                            <a:srgbClr val="B85C3E"/>
+                            <a:srgbClr val="2ECC9A"/>
                           </a:solidFill>
-                          <a:latin typeface="Avenir Next"/>
+                          <a:latin typeface="Calibri"/>
                         </a:defRPr>
                       </a:pPr>
                       <a:r>
@@ -7718,7 +7759,7 @@
                   </a:txBody>
                   <a:tcPr marL="128016" anchor="ctr">
                     <a:solidFill>
-                      <a:srgbClr val="F0EEE6"/>
+                      <a:srgbClr val="10275A"/>
                     </a:solidFill>
                   </a:tcPr>
                 </a:tc>
@@ -7730,9 +7771,9 @@
                       <a:pPr>
                         <a:defRPr sz="1100">
                           <a:solidFill>
-                            <a:srgbClr val="5E5A52"/>
+                            <a:srgbClr val="A9BEDC"/>
                           </a:solidFill>
-                          <a:latin typeface="Avenir Next"/>
+                          <a:latin typeface="Calibri"/>
                         </a:defRPr>
                       </a:pPr>
                       <a:r>
@@ -7742,7 +7783,7 @@
                   </a:txBody>
                   <a:tcPr marL="128016" anchor="ctr">
                     <a:solidFill>
-                      <a:srgbClr val="F0EEE6"/>
+                      <a:srgbClr val="10275A"/>
                     </a:solidFill>
                   </a:tcPr>
                 </a:tc>
@@ -7762,6 +7803,14 @@
 <file path=ppt/slides/slide9.xml><?xml version="1.0" encoding="utf-8"?>
 <p:sld xmlns:a="http://schemas.openxmlformats.org/drawingml/2006/main" xmlns:p="http://schemas.openxmlformats.org/presentationml/2006/main" xmlns:r="http://schemas.openxmlformats.org/officeDocument/2006/relationships">
   <p:cSld>
+    <p:bg>
+      <p:bgPr>
+        <a:solidFill>
+          <a:srgbClr val="0A1B3D"/>
+        </a:solidFill>
+        <a:effectLst/>
+      </p:bgPr>
+    </p:bg>
     <p:spTree>
       <p:nvGrpSpPr>
         <p:cNvPr id="1" name=""/>
@@ -7771,20 +7820,166 @@
       <p:grpSpPr/>
       <p:sp>
         <p:nvSpPr>
-          <p:cNvPr id="2" name="Rectangle 1"/>
-          <p:cNvSpPr/>
+          <p:cNvPr id="2" name="TextBox 1"/>
+          <p:cNvSpPr txBox="1"/>
           <p:nvPr/>
         </p:nvSpPr>
         <p:spPr>
           <a:xfrm>
-            <a:off x="0" y="0"/>
-            <a:ext cx="12191695" cy="6858000"/>
+            <a:off x="457200" y="146304"/>
+            <a:ext cx="8229600" cy="256032"/>
           </a:xfrm>
           <a:prstGeom prst="rect">
             <a:avLst/>
           </a:prstGeom>
+          <a:noFill/>
+        </p:spPr>
+        <p:txBody>
+          <a:bodyPr wrap="square">
+            <a:spAutoFit/>
+          </a:bodyPr>
+          <a:lstStyle/>
+          <a:p>
+            <a:pPr>
+              <a:defRPr sz="1150" b="1">
+                <a:solidFill>
+                  <a:srgbClr val="3D9CFF"/>
+                </a:solidFill>
+                <a:latin typeface="Calibri"/>
+              </a:defRPr>
+            </a:pPr>
+            <a:r>
+              <a:t>08 · ENGINEERING DEEP DIVE</a:t>
+            </a:r>
+          </a:p>
+        </p:txBody>
+      </p:sp>
+      <p:sp>
+        <p:nvSpPr>
+          <p:cNvPr id="3" name="TextBox 2"/>
+          <p:cNvSpPr txBox="1"/>
+          <p:nvPr/>
+        </p:nvSpPr>
+        <p:spPr>
+          <a:xfrm>
+            <a:off x="11155680" y="146304"/>
+            <a:ext cx="548640" cy="256032"/>
+          </a:xfrm>
+          <a:prstGeom prst="rect">
+            <a:avLst/>
+          </a:prstGeom>
+          <a:noFill/>
+        </p:spPr>
+        <p:txBody>
+          <a:bodyPr wrap="none">
+            <a:spAutoFit/>
+          </a:bodyPr>
+          <a:lstStyle/>
+          <a:p>
+            <a:pPr algn="r">
+              <a:defRPr sz="1150">
+                <a:solidFill>
+                  <a:srgbClr val="7B94BA"/>
+                </a:solidFill>
+                <a:latin typeface="Calibri"/>
+              </a:defRPr>
+            </a:pPr>
+            <a:r>
+              <a:t>9</a:t>
+            </a:r>
+          </a:p>
+        </p:txBody>
+      </p:sp>
+      <p:sp>
+        <p:nvSpPr>
+          <p:cNvPr id="4" name="TextBox 3"/>
+          <p:cNvSpPr txBox="1"/>
+          <p:nvPr/>
+        </p:nvSpPr>
+        <p:spPr>
+          <a:xfrm>
+            <a:off x="457200" y="365760"/>
+            <a:ext cx="10881360" cy="640080"/>
+          </a:xfrm>
+          <a:prstGeom prst="rect">
+            <a:avLst/>
+          </a:prstGeom>
+          <a:noFill/>
+        </p:spPr>
+        <p:txBody>
+          <a:bodyPr wrap="square">
+            <a:spAutoFit/>
+          </a:bodyPr>
+          <a:lstStyle/>
+          <a:p>
+            <a:pPr>
+              <a:defRPr sz="2500" b="1">
+                <a:solidFill>
+                  <a:srgbClr val="FFFFFF"/>
+                </a:solidFill>
+                <a:latin typeface="Cambria"/>
+              </a:defRPr>
+            </a:pPr>
+            <a:r>
+              <a:t>The 11-second recovery</a:t>
+            </a:r>
+          </a:p>
+        </p:txBody>
+      </p:sp>
+      <p:sp>
+        <p:nvSpPr>
+          <p:cNvPr id="5" name="TextBox 4"/>
+          <p:cNvSpPr txBox="1"/>
+          <p:nvPr/>
+        </p:nvSpPr>
+        <p:spPr>
+          <a:xfrm>
+            <a:off x="457200" y="932688"/>
+            <a:ext cx="10881360" cy="365760"/>
+          </a:xfrm>
+          <a:prstGeom prst="rect">
+            <a:avLst/>
+          </a:prstGeom>
+          <a:noFill/>
+        </p:spPr>
+        <p:txBody>
+          <a:bodyPr wrap="square">
+            <a:spAutoFit/>
+          </a:bodyPr>
+          <a:lstStyle/>
+          <a:p>
+            <a:pPr>
+              <a:defRPr sz="1300">
+                <a:solidFill>
+                  <a:srgbClr val="A9BEDC"/>
+                </a:solidFill>
+                <a:latin typeface="Calibri"/>
+              </a:defRPr>
+            </a:pPr>
+            <a:r>
+              <a:t>Where the time actually goes, and why prediction — not raw speed — is the real unlock.</a:t>
+            </a:r>
+          </a:p>
+        </p:txBody>
+      </p:sp>
+      <p:sp>
+        <p:nvSpPr>
+          <p:cNvPr id="6" name="Rounded Rectangle 5"/>
+          <p:cNvSpPr/>
+          <p:nvPr/>
+        </p:nvSpPr>
+        <p:spPr>
+          <a:xfrm>
+            <a:off x="457200" y="1417320"/>
+            <a:ext cx="5394960" cy="4709160"/>
+          </a:xfrm>
+          <a:prstGeom prst="roundRect">
+            <a:avLst>
+              <a:gd name="adj" fmla="val 6000"/>
+            </a:avLst>
+          </a:prstGeom>
           <a:solidFill>
-            <a:srgbClr val="FAF9F5"/>
+            <a:srgbClr val="132C52"/>
           </a:solidFill>
           <a:ln>
             <a:noFill/>
@@ -7806,101 +8001,117 @@
           </a:fontRef>
         </p:style>
         <p:txBody>
-          <a:bodyPr rtlCol="0" anchor="ctr"/>
-          <a:lstStyle/>
-          <a:p>
-            <a:pPr algn="ctr"/>
-          </a:p>
-        </p:txBody>
-      </p:sp>
-      <p:sp>
-        <p:nvSpPr>
-          <p:cNvPr id="3" name="TextBox 2"/>
-          <p:cNvSpPr txBox="1"/>
-          <p:nvPr/>
-        </p:nvSpPr>
-        <p:spPr>
-          <a:xfrm>
-            <a:off x="731520" y="502920"/>
-            <a:ext cx="10698480" cy="320040"/>
-          </a:xfrm>
-          <a:prstGeom prst="rect">
-            <a:avLst/>
-          </a:prstGeom>
-          <a:noFill/>
-        </p:spPr>
-        <p:txBody>
-          <a:bodyPr wrap="square">
-            <a:spAutoFit/>
-          </a:bodyPr>
-          <a:lstStyle/>
-          <a:p>
-            <a:pPr>
-              <a:defRPr sz="1050" b="1">
-                <a:solidFill>
-                  <a:srgbClr val="B85C3E"/>
-                </a:solidFill>
-                <a:latin typeface="Avenir Next"/>
-              </a:defRPr>
-            </a:pPr>
-            <a:r>
-              <a:t>ZKD CONCIERGE  ·  AMERICAN EXPRESS  /  CODESTREET 2026</a:t>
-            </a:r>
-          </a:p>
-        </p:txBody>
-      </p:sp>
-      <p:sp>
-        <p:nvSpPr>
-          <p:cNvPr id="4" name="TextBox 3"/>
-          <p:cNvSpPr txBox="1"/>
-          <p:nvPr/>
-        </p:nvSpPr>
-        <p:spPr>
-          <a:xfrm>
-            <a:off x="731520" y="804672"/>
-            <a:ext cx="10058400" cy="777240"/>
-          </a:xfrm>
-          <a:prstGeom prst="rect">
-            <a:avLst/>
-          </a:prstGeom>
-          <a:noFill/>
-        </p:spPr>
-        <p:txBody>
-          <a:bodyPr wrap="square">
-            <a:spAutoFit/>
-          </a:bodyPr>
-          <a:lstStyle/>
-          <a:p>
-            <a:pPr>
-              <a:defRPr sz="2700" b="0">
-                <a:solidFill>
-                  <a:srgbClr val="1F1E1C"/>
-                </a:solidFill>
-                <a:latin typeface="Georgia"/>
-              </a:defRPr>
-            </a:pPr>
-            <a:r>
-              <a:t>Engineering deep dive: the 11-second recovery</a:t>
-            </a:r>
-          </a:p>
-        </p:txBody>
-      </p:sp>
-      <p:sp>
-        <p:nvSpPr>
-          <p:cNvPr id="5" name="Rectangle 4"/>
+          <a:bodyPr rtlCol="0" anchor="ctr" lIns="256032" rIns="256032" tIns="256032" bIns="256032" wrap="square"/>
+          <a:lstStyle/>
+          <a:p>
+            <a:pPr algn="ctr">
+              <a:spcAft>
+                <a:spcPts val="400"/>
+              </a:spcAft>
+              <a:defRPr sz="1100" b="1">
+                <a:solidFill>
+                  <a:srgbClr val="3D9CFF"/>
+                </a:solidFill>
+                <a:latin typeface="Calibri"/>
+              </a:defRPr>
+            </a:pPr>
+            <a:r>
+              <a:t>BREAKDOWN</a:t>
+            </a:r>
+          </a:p>
+          <a:p>
+            <a:pPr>
+              <a:spcAft>
+                <a:spcPts val="1000"/>
+              </a:spcAft>
+              <a:defRPr sz="1650" b="1">
+                <a:solidFill>
+                  <a:srgbClr val="FFFFFF"/>
+                </a:solidFill>
+                <a:latin typeface="Cambria"/>
+              </a:defRPr>
+            </a:pPr>
+            <a:r>
+              <a:t>Where does the ~11s go?</a:t>
+            </a:r>
+          </a:p>
+          <a:p>
+            <a:pPr>
+              <a:lnSpc>
+                <a:spcPct val="120000"/>
+              </a:lnSpc>
+              <a:spcAft>
+                <a:spcPts val="800"/>
+              </a:spcAft>
+              <a:defRPr sz="1300">
+                <a:solidFill>
+                  <a:srgbClr val="A9BEDC"/>
+                </a:solidFill>
+                <a:latin typeface="Calibri"/>
+              </a:defRPr>
+            </a:pPr>
+            <a:r>
+              <a:t>—  95% of wall-clock time (~10.4s) is pure network I/O waiting on external supplier APIs (Duffel flight booking, LiteAPI hotel reservation).</a:t>
+            </a:r>
+          </a:p>
+          <a:p>
+            <a:pPr>
+              <a:lnSpc>
+                <a:spcPct val="120000"/>
+              </a:lnSpc>
+              <a:spcAft>
+                <a:spcPts val="800"/>
+              </a:spcAft>
+              <a:defRPr sz="1300">
+                <a:solidFill>
+                  <a:srgbClr val="A9BEDC"/>
+                </a:solidFill>
+                <a:latin typeface="Calibri"/>
+              </a:defRPr>
+            </a:pPr>
+            <a:r>
+              <a:t>—  Under 0.6s is computational overhead: preference scoring, allocation, 3 negotiation rounds, and OPA policy checks.</a:t>
+            </a:r>
+          </a:p>
+          <a:p>
+            <a:pPr>
+              <a:lnSpc>
+                <a:spcPct val="120000"/>
+              </a:lnSpc>
+              <a:spcAft>
+                <a:spcPts val="800"/>
+              </a:spcAft>
+              <a:defRPr sz="1300">
+                <a:solidFill>
+                  <a:srgbClr val="A9BEDC"/>
+                </a:solidFill>
+                <a:latin typeface="Calibri"/>
+              </a:defRPr>
+            </a:pPr>
+            <a:r>
+              <a:t>—  Zero GPU on the critical path — rule-based preference matching and heuristic ranking run instantly in-memory.</a:t>
+            </a:r>
+          </a:p>
+        </p:txBody>
+      </p:sp>
+      <p:sp>
+        <p:nvSpPr>
+          <p:cNvPr id="7" name="Rounded Rectangle 6"/>
           <p:cNvSpPr/>
           <p:nvPr/>
         </p:nvSpPr>
         <p:spPr>
           <a:xfrm>
-            <a:off x="731520" y="1481328"/>
-            <a:ext cx="502920" cy="44450"/>
-          </a:xfrm>
-          <a:prstGeom prst="rect">
-            <a:avLst/>
+            <a:off x="6080760" y="1417320"/>
+            <a:ext cx="5650992" cy="4709160"/>
+          </a:xfrm>
+          <a:prstGeom prst="roundRect">
+            <a:avLst>
+              <a:gd name="adj" fmla="val 6000"/>
+            </a:avLst>
           </a:prstGeom>
           <a:solidFill>
-            <a:srgbClr val="D97757"/>
+            <a:srgbClr val="132C52"/>
           </a:solidFill>
           <a:ln>
             <a:noFill/>
@@ -7922,277 +8133,91 @@
           </a:fontRef>
         </p:style>
         <p:txBody>
-          <a:bodyPr rtlCol="0" anchor="ctr"/>
-          <a:lstStyle/>
-          <a:p>
-            <a:pPr algn="ctr"/>
-          </a:p>
-        </p:txBody>
-      </p:sp>
-      <p:sp>
-        <p:nvSpPr>
-          <p:cNvPr id="6" name="TextBox 5"/>
-          <p:cNvSpPr txBox="1"/>
-          <p:nvPr/>
-        </p:nvSpPr>
-        <p:spPr>
-          <a:xfrm>
-            <a:off x="11430000" y="6446520"/>
-            <a:ext cx="548640" cy="320040"/>
-          </a:xfrm>
-          <a:prstGeom prst="rect">
-            <a:avLst/>
-          </a:prstGeom>
-          <a:noFill/>
-        </p:spPr>
-        <p:txBody>
-          <a:bodyPr wrap="none">
-            <a:spAutoFit/>
-          </a:bodyPr>
-          <a:lstStyle/>
-          <a:p>
-            <a:pPr algn="r">
-              <a:defRPr sz="1000">
-                <a:solidFill>
-                  <a:srgbClr val="5E5A52"/>
-                </a:solidFill>
-                <a:latin typeface="Avenir Next"/>
-              </a:defRPr>
-            </a:pPr>
-            <a:r>
-              <a:t>09</a:t>
-            </a:r>
-          </a:p>
-        </p:txBody>
-      </p:sp>
-      <p:sp>
-        <p:nvSpPr>
-          <p:cNvPr id="7" name="Rounded Rectangle 6"/>
-          <p:cNvSpPr/>
-          <p:nvPr/>
-        </p:nvSpPr>
-        <p:spPr>
-          <a:xfrm>
-            <a:off x="731520" y="1783080"/>
-            <a:ext cx="5120640" cy="4251960"/>
-          </a:xfrm>
-          <a:prstGeom prst="roundRect">
-            <a:avLst>
-              <a:gd name="adj" fmla="val 6000"/>
-            </a:avLst>
-          </a:prstGeom>
-          <a:solidFill>
-            <a:srgbClr val="FFFFFF"/>
-          </a:solidFill>
-          <a:ln w="9525">
-            <a:solidFill>
-              <a:srgbClr val="E4E0D6"/>
-            </a:solidFill>
-          </a:ln>
-          <a:effectLst/>
-        </p:spPr>
-        <p:style>
-          <a:lnRef idx="1">
-            <a:schemeClr val="accent1"/>
-          </a:lnRef>
-          <a:fillRef idx="3">
-            <a:schemeClr val="accent1"/>
-          </a:fillRef>
-          <a:effectRef idx="2">
-            <a:schemeClr val="accent1"/>
-          </a:effectRef>
-          <a:fontRef idx="minor">
-            <a:schemeClr val="lt1"/>
-          </a:fontRef>
-        </p:style>
-        <p:txBody>
           <a:bodyPr rtlCol="0" anchor="ctr" lIns="256032" rIns="256032" tIns="256032" bIns="256032" wrap="square"/>
           <a:lstStyle/>
           <a:p>
             <a:pPr algn="ctr">
               <a:spcAft>
-                <a:spcPts val="1200"/>
-              </a:spcAft>
-              <a:defRPr sz="1600" b="1">
-                <a:solidFill>
-                  <a:srgbClr val="1F1E1C"/>
-                </a:solidFill>
-                <a:latin typeface="Georgia"/>
-              </a:defRPr>
-            </a:pPr>
-            <a:r>
-              <a:t>Where does the ~11s go?</a:t>
+                <a:spcPts val="400"/>
+              </a:spcAft>
+              <a:defRPr sz="1100" b="1">
+                <a:solidFill>
+                  <a:srgbClr val="FFB020"/>
+                </a:solidFill>
+                <a:latin typeface="Calibri"/>
+              </a:defRPr>
+            </a:pPr>
+            <a:r>
+              <a:t>WHY IT MATTERS</a:t>
+            </a:r>
+          </a:p>
+          <a:p>
+            <a:pPr>
+              <a:spcAft>
+                <a:spcPts val="1000"/>
+              </a:spcAft>
+              <a:defRPr sz="1650" b="1">
+                <a:solidFill>
+                  <a:srgbClr val="FFFFFF"/>
+                </a:solidFill>
+                <a:latin typeface="Cambria"/>
+              </a:defRPr>
+            </a:pPr>
+            <a:r>
+              <a:t>Why prediction is the enabler</a:t>
             </a:r>
           </a:p>
           <a:p>
             <a:pPr>
               <a:lnSpc>
-                <a:spcPct val="118000"/>
+                <a:spcPct val="120000"/>
               </a:lnSpc>
               <a:spcAft>
                 <a:spcPts val="800"/>
               </a:spcAft>
               <a:defRPr sz="1300">
                 <a:solidFill>
-                  <a:srgbClr val="5E5A52"/>
-                </a:solidFill>
-                <a:latin typeface="Avenir Next"/>
-              </a:defRPr>
-            </a:pPr>
-            <a:r>
-              <a:t>—  95% of wall-clock time (~10.4s) is pure network I/O waiting on external supplier APIs (Duffel flight booking, LiteAPI hotel reservation).</a:t>
+                  <a:srgbClr val="A9BEDC"/>
+                </a:solidFill>
+                <a:latin typeface="Calibri"/>
+              </a:defRPr>
+            </a:pPr>
+            <a:r>
+              <a:t>—  Prediction buys speed, not safety. A false positive costs one API call; a false negative costs 42 seconds.</a:t>
             </a:r>
           </a:p>
           <a:p>
             <a:pPr>
               <a:lnSpc>
-                <a:spcPct val="118000"/>
+                <a:spcPct val="120000"/>
               </a:lnSpc>
               <a:spcAft>
                 <a:spcPts val="800"/>
               </a:spcAft>
               <a:defRPr sz="1300">
                 <a:solidFill>
-                  <a:srgbClr val="5E5A52"/>
-                </a:solidFill>
-                <a:latin typeface="Avenir Next"/>
-              </a:defRPr>
-            </a:pPr>
-            <a:r>
-              <a:t>—  Under 0.6s is computational overhead: preference scoring, allocation, 3 negotiation rounds, and OPA policy checks.</a:t>
+                  <a:srgbClr val="A9BEDC"/>
+                </a:solidFill>
+                <a:latin typeface="Calibri"/>
+              </a:defRPr>
+            </a:pPr>
+            <a:r>
+              <a:t>—  Pre-caching alternative itineraries before cancellation means the choice set is already in memory when consent arrives.</a:t>
             </a:r>
           </a:p>
           <a:p>
             <a:pPr>
               <a:lnSpc>
-                <a:spcPct val="118000"/>
+                <a:spcPct val="120000"/>
               </a:lnSpc>
               <a:spcAft>
                 <a:spcPts val="800"/>
               </a:spcAft>
               <a:defRPr sz="1300">
                 <a:solidFill>
-                  <a:srgbClr val="5E5A52"/>
-                </a:solidFill>
-                <a:latin typeface="Avenir Next"/>
-              </a:defRPr>
-            </a:pPr>
-            <a:r>
-              <a:t>—  Zero GPU on the critical path — rule-based preference matching and heuristic ranking run instantly in-memory.</a:t>
-            </a:r>
-          </a:p>
-        </p:txBody>
-      </p:sp>
-      <p:sp>
-        <p:nvSpPr>
-          <p:cNvPr id="8" name="Rounded Rectangle 7"/>
-          <p:cNvSpPr/>
-          <p:nvPr/>
-        </p:nvSpPr>
-        <p:spPr>
-          <a:xfrm>
-            <a:off x="6263640" y="1783080"/>
-            <a:ext cx="5166360" cy="4251960"/>
-          </a:xfrm>
-          <a:prstGeom prst="roundRect">
-            <a:avLst>
-              <a:gd name="adj" fmla="val 6000"/>
-            </a:avLst>
-          </a:prstGeom>
-          <a:solidFill>
-            <a:srgbClr val="F3E3DB"/>
-          </a:solidFill>
-          <a:ln w="9525">
-            <a:solidFill>
-              <a:srgbClr val="E4E0D6"/>
-            </a:solidFill>
-          </a:ln>
-          <a:effectLst/>
-        </p:spPr>
-        <p:style>
-          <a:lnRef idx="1">
-            <a:schemeClr val="accent1"/>
-          </a:lnRef>
-          <a:fillRef idx="3">
-            <a:schemeClr val="accent1"/>
-          </a:fillRef>
-          <a:effectRef idx="2">
-            <a:schemeClr val="accent1"/>
-          </a:effectRef>
-          <a:fontRef idx="minor">
-            <a:schemeClr val="lt1"/>
-          </a:fontRef>
-        </p:style>
-        <p:txBody>
-          <a:bodyPr rtlCol="0" anchor="ctr" lIns="256032" rIns="256032" tIns="256032" bIns="256032" wrap="square"/>
-          <a:lstStyle/>
-          <a:p>
-            <a:pPr algn="ctr">
-              <a:spcAft>
-                <a:spcPts val="1200"/>
-              </a:spcAft>
-              <a:defRPr sz="1600" b="1">
-                <a:solidFill>
-                  <a:srgbClr val="B85C3E"/>
-                </a:solidFill>
-                <a:latin typeface="Georgia"/>
-              </a:defRPr>
-            </a:pPr>
-            <a:r>
-              <a:t>Why prediction is the enabler</a:t>
-            </a:r>
-          </a:p>
-          <a:p>
-            <a:pPr>
-              <a:lnSpc>
-                <a:spcPct val="118000"/>
-              </a:lnSpc>
-              <a:spcAft>
-                <a:spcPts val="800"/>
-              </a:spcAft>
-              <a:defRPr sz="1300">
-                <a:solidFill>
-                  <a:srgbClr val="5E5A52"/>
-                </a:solidFill>
-                <a:latin typeface="Avenir Next"/>
-              </a:defRPr>
-            </a:pPr>
-            <a:r>
-              <a:t>—  Prediction buys speed, not safety. A false positive costs one API call; a false negative costs 42 seconds.</a:t>
-            </a:r>
-          </a:p>
-          <a:p>
-            <a:pPr>
-              <a:lnSpc>
-                <a:spcPct val="118000"/>
-              </a:lnSpc>
-              <a:spcAft>
-                <a:spcPts val="800"/>
-              </a:spcAft>
-              <a:defRPr sz="1300">
-                <a:solidFill>
-                  <a:srgbClr val="5E5A52"/>
-                </a:solidFill>
-                <a:latin typeface="Avenir Next"/>
-              </a:defRPr>
-            </a:pPr>
-            <a:r>
-              <a:t>—  Pre-caching alternative itineraries before cancellation means the choice set is already in memory when consent arrives.</a:t>
-            </a:r>
-          </a:p>
-          <a:p>
-            <a:pPr>
-              <a:lnSpc>
-                <a:spcPct val="118000"/>
-              </a:lnSpc>
-              <a:spcAft>
-                <a:spcPts val="800"/>
-              </a:spcAft>
-              <a:defRPr sz="1300">
-                <a:solidFill>
-                  <a:srgbClr val="5E5A52"/>
-                </a:solidFill>
-                <a:latin typeface="Avenir Next"/>
+                  <a:srgbClr val="A9BEDC"/>
+                </a:solidFill>
+                <a:latin typeface="Calibri"/>
               </a:defRPr>
             </a:pPr>
             <a:r>
